--- a/Livrables/benchHarness/Bench_Coding-Agentique.pptx
+++ b/Livrables/benchHarness/Bench_Coding-Agentique.pptx
@@ -574,7 +574,7 @@
           <a:lstStyle/>
           <a:p>
             <a:r>
-              <a:t>La problematique de deploiement : les prestataires externes peuvent rester sur leur abonnement Claude (forfait mensuel, consommation incluse, cout previsible). Les agents internes, eux, demarreront a environ 20 euros par siege et par mois (sieges Claude Enterprise via Bedrock), auxquels s'ajoute chaque token consomme, facture au prix du modele. Le cout interne suit donc l'usage, et l'usage agentique est intensif en tokens. Consequence : optimiser le cout au token (choix du modele, du harness, caching) devient le parametre cle pour les internes et pour la CI/CD - c'est ce que le bench compare, et ce que le bench elargi en conditions reelles validera (scenario Albert/DeepSeek via OpenCode face a Claude avec et sans abonnement).</a:t>
+              <a:t>Gradation de souverainete : Albert (Etat FR, SecNumCloud) &gt; Opus 4.8 via Bedrock (partielle, sensible au CLOUD Act) &gt; Opus 4.8 via Anthropic et GLM/DeepSeek via OpenRouter (non souveraines, a reserver eventuellement aux externes). Albert s'utilise avec OpenCode : guide officiel DINUM guides.ia.numerique.gouv.fr/albert-api/guides/ide#agentic-coding-opencode. La problematique de deploiement : les prestataires externes peuvent rester sur leur abonnement Claude (forfait mensuel, consommation incluse, cout previsible). Les agents internes, eux, demarreront a environ 20 euros par siege et par mois (sieges Claude Enterprise via Bedrock), auxquels s'ajoute chaque token consomme, facture au prix du modele. Le cout interne suit donc l'usage, et l'usage agentique est intensif en tokens. Consequence : optimiser le cout au token (choix du modele, du harness, caching) devient le parametre cle pour les internes et pour la CI/CD - c'est ce que le bench compare, et ce que le bench elargi en conditions reelles validera (scenario Albert/DeepSeek via OpenCode face a Claude avec et sans abonnement).</a:t>
             </a:r>
           </a:p>
         </p:txBody>
@@ -7800,7 +7800,7 @@
                 </a:solidFill>
                 <a:latin typeface="Marianne"/>
               </a:rPr>
-              <a:t>Sièges Claude Enterprise via Bedrock : la consommation s'ajoute au siège</a:t>
+              <a:t>Sièges Claude Enterprise via Bedrock</a:t>
             </a:r>
           </a:p>
           <a:p>
@@ -7831,7 +7831,38 @@
                 </a:solidFill>
                 <a:latin typeface="Marianne"/>
               </a:rPr>
-              <a:t>Le coût suit l'usage, et l'agentique consomme beaucoup de tokens</a:t>
+              <a:t>Coût à l'usage : l'agentique consomme beaucoup</a:t>
+            </a:r>
+          </a:p>
+          <a:p>
+            <a:pPr algn="l" marL="201168" indent="-201168">
+              <a:lnSpc>
+                <a:spcPct val="108000"/>
+              </a:lnSpc>
+              <a:spcBef>
+                <a:spcPts val="0"/>
+              </a:spcBef>
+              <a:spcAft>
+                <a:spcPts val="600"/>
+              </a:spcAft>
+            </a:pPr>
+            <a:r>
+              <a:rPr sz="1200" b="0" i="0">
+                <a:solidFill>
+                  <a:srgbClr val="6A6AF4"/>
+                </a:solidFill>
+                <a:latin typeface="Marianne"/>
+              </a:rPr>
+              <a:t>▪  </a:t>
+            </a:r>
+            <a:r>
+              <a:rPr sz="1300" b="0" i="0">
+                <a:solidFill>
+                  <a:srgbClr val="3A3A3A"/>
+                </a:solidFill>
+                <a:latin typeface="Marianne"/>
+              </a:rPr>
+              <a:t>Souveraineté partielle : sensible au CLOUD Act</a:t>
             </a:r>
           </a:p>
         </p:txBody>
@@ -9562,7 +9593,7 @@
                 </a:solidFill>
                 <a:latin typeface="Marianne"/>
               </a:rPr>
-              <a:t>À valider : </a:t>
+              <a:t>À noter : </a:t>
             </a:r>
             <a:r>
               <a:rPr sz="1000" b="0" i="1">
@@ -9571,7 +9602,7 @@
                 </a:solidFill>
                 <a:latin typeface="Marianne"/>
               </a:rPr>
-              <a:t>catalogue Albert à confirmer via /v1/models · DeepSeek V4 = tarif preview · tarifs OpenRouter = catalogue (caching −60/80 %) · tokenizer Opus 4.8 ≈ +30 % de tokens.</a:t>
+              <a:t>OpenCode + Albert est documenté officiellement par la DINUM (guides.ia.numerique.gouv.fr) · catalogue Albert à confirmer via /v1/models · DeepSeek V4 = tarif preview · tarifs OpenRouter = catalogue (caching −60/80 %) · tokenizer Opus 4.8 ≈ +30 % de tokens.</a:t>
             </a:r>
           </a:p>
         </p:txBody>

--- a/Livrables/benchHarness/Bench_Coding-Agentique.pptx
+++ b/Livrables/benchHarness/Bench_Coding-Agentique.pptx
@@ -504,7 +504,7 @@
           <a:lstStyle/>
           <a:p>
             <a:r>
-              <a:t>Matrice comparative des 4 stacks de coding agentique. Chiffres verifies (sources primaires, 10/07/2026). PRIX/1M tokens : Opus 4.8 = 5$ input / 25$ output (platform.claude.com/docs/.../pricing), en sus des sieges Claude Code (Pro 17$, Team 20-25$, Premium 100-125$/mois - claude.com/pricing). DeepSeek V4 Pro = 0,435$/0,87$ (openrouter.ai/deepseek/deepseek-v4-pro + api-docs.deepseek.com) MAIS tarif preview, doublement 'peak' annonce mi-juillet 2026 (technode.com 30/06/2026). GLM 5.2 = tarif liste Z.ai 1,40$/4,40$ (docs.z.ai), OpenRouter varie 0,93-3,00$ input selon fournisseur route (le 0,77$ lu en tete etait un artefact d'extraction, non confirme). Albert = GRATUIT pour agents de l'Etat, pas de facturation token, acces regule par quotas RPM/RPD/TPM (ia.numerique.gouv.fr). PERF SWE-bench Verified : Opus 4.8 88,6% (vellum.ai) ; DeepSeek V4 Pro 80,6% (morphllm) ; DeepSeek V4 Flash 79% ; Mistral Medium 3.5 77,6% (mistral.ai) ; GLM 5.2 ~78% estime (SWE-bench Pro 62,1%, Terminal-Bench 81-83% - huggingface zai-org). SCENARIO ALBERT retenu pour le bench elargi : OpenCode branche sur Albert servant DeepSeek V4 Flash (~79%) - catalogue Albert a confirmer via /v1/models. SOUVERAINETE : Anthropic = editeur US (CLOUD Act) ; Z.ai (GLM) et DeepSeek = editeurs chinois, et via OpenRouter le routage passe par un intermediaire US ; Albert = Etat francais, heberge sur Outscale SecNumCloud. Nuance : les poids GLM et DeepSeek sont ouverts (licence MIT), donc auto-hebergeables sur infra souveraine - c'est ce que fait Albert. FAISABILITE : Claude Code et OpenCode tournent tous deux sur Mac/Linux/Windows (WSL conseille sous Windows) ; le frein sur postes Windows internes est surtout la politique (Copilot only) et le proxy, pas la technique.</a:t>
+              <a:t>Matrice comparative des 7 stacks de coding agentique. Chiffres verifies (sources primaires, 10/07 et 23/07/2026). AJOUTS DU 23/07/2026 : (a) Claude Code / Fable 5 via Bedrock : 95,0% SWE-bench Verified (llm-stats.com), 10$/50$ par 1M (2x Opus 4.8), disponible sur Bedrock (profil global.anthropic.claude-fable-5, docs.aws.amazon.com) - contraintes : activation d'un parametre de data sharing + retention 30 jours obligatoire. (b) Vibe / Mistral Medium 3.5 : Vibe = agent de codage CLI + VS Code de Mistral (mai 2026) ; Medium 3.5 = 77,6% SWE-bench Verified, 1,50$/7,50$ par 1M, poids ouverts licence MIT modifiee (mistral.ai/news/vibe-remote-agents-mistral-medium-3-5) ; plans Le Chat Pro 14,99$/Team 24,99$/mois ; deploiement SecNumCloud possible via Outscale (offre enterprise). (c) OpenCode / Kimi K3 via OpenRouter : 3$/15$ par 1M (openrouter.ai/moonshotai/kimi-k3), 93,4% SWE-bench Verified ANNONCE par Moonshot - des evaluations independantes citent des scores bien plus bas selon le harness ; capacite amont limitee (erreurs 429 frequentes). CORRECTION SOUVERAINETE : Bedrock n'est PAS souverain au sens de la CNIL - AWS reste soumis au CLOUD Act quelle que soit la region ; pastille rouge (avant : orange 'partielle'). Seuls Albert (SecNumCloud, Etat FR) et Mistral (editeur FR, SecNumCloud en option via Outscale) tiennent la souverainete. NOUVEL AXE CONFORMITE (RGPD/donnees) - distinct de la souverainete : bons = Mistral (editeur FR, RGPD), Albert (cadre Etat) et modeles Anthropic via Bedrock (region UE ex. Paris, DPA AWS) ; Anthropic direct = partielle (transfert hors UE) ; OpenRouter = insuffisante (routage via intermediaire US, sans garanties UE). RAPPEL DONNEES INITIALES (10/07/2026) : PRIX/1M tokens : Opus 4.8 = 5$ input / 25$ output (platform.claude.com/docs/.../pricing), en sus des sieges Claude Code (Pro 17$, Team 20-25$, Premium 100-125$/mois - claude.com/pricing). DeepSeek V4 Pro = 0,435$/0,87$ (openrouter.ai/deepseek/deepseek-v4-pro + api-docs.deepseek.com) MAIS tarif preview, doublement 'peak' annonce mi-juillet 2026 (technode.com 30/06/2026). GLM 5.2 = tarif liste Z.ai 1,40$/4,40$ (docs.z.ai), OpenRouter varie 0,93-3,00$ input selon fournisseur route (le 0,77$ lu en tete etait un artefact d'extraction, non confirme). Albert = GRATUIT pour agents de l'Etat, pas de facturation token, acces regule par quotas RPM/RPD/TPM (ia.numerique.gouv.fr). PERF SWE-bench Verified : Opus 4.8 88,6% (vellum.ai) ; DeepSeek V4 Pro 80,6% (morphllm) ; DeepSeek V4 Flash 79% ; Mistral Medium 3.5 77,6% (mistral.ai) ; GLM 5.2 ~78% estime (SWE-bench Pro 62,1%, Terminal-Bench 81-83% - huggingface zai-org). SCENARIO ALBERT retenu pour le bench elargi : OpenCode branche sur Albert servant DeepSeek V4 Flash (~79%) - catalogue Albert a confirmer via /v1/models. SOUVERAINETE : Anthropic = editeur US (CLOUD Act) ; Z.ai (GLM) et DeepSeek = editeurs chinois, et via OpenRouter le routage passe par un intermediaire US ; Albert = Etat francais, heberge sur Outscale SecNumCloud. Nuance : les poids GLM et DeepSeek sont ouverts (licence MIT), donc auto-hebergeables sur infra souveraine - c'est ce que fait Albert. FAISABILITE : Claude Code et OpenCode tournent tous deux sur Mac/Linux/Windows (WSL conseille sous Windows) ; le frein sur postes Windows internes est surtout la politique (Copilot only) et le proxy, pas la technique.</a:t>
             </a:r>
           </a:p>
         </p:txBody>
@@ -574,7 +574,7 @@
           <a:lstStyle/>
           <a:p>
             <a:r>
-              <a:t>Gradation de souverainete : Albert (Etat FR, SecNumCloud) &gt; Opus 4.8 via Bedrock (partielle, sensible au CLOUD Act) &gt; Opus 4.8 via Anthropic et GLM/DeepSeek via OpenRouter (non souveraines, a reserver eventuellement aux externes). Albert s'utilise avec OpenCode : guide officiel DINUM guides.ia.numerique.gouv.fr/albert-api/guides/ide#agentic-coding-opencode. La problematique de deploiement : les prestataires externes peuvent rester sur leur abonnement Claude (forfait mensuel, consommation incluse, cout previsible). Les agents internes, eux, demarreront a environ 20 euros par siege et par mois (sieges Claude Enterprise via Bedrock), auxquels s'ajoute chaque token consomme, facture au prix du modele. Le cout interne suit donc l'usage, et l'usage agentique est intensif en tokens. Consequence : optimiser le cout au token (choix du modele, du harness, caching) devient le parametre cle pour les internes et pour la CI/CD - c'est ce que le bench compare, et ce que le bench elargi en conditions reelles validera (scenario Albert/DeepSeek via OpenCode face a Claude avec et sans abonnement).</a:t>
+              <a:t>Souverainete (corrigee le 23/07/2026) : au sens de la CNIL, seules Albert (Etat FR, SecNumCloud) et Mistral (editeur FR, SecNumCloud en option) sont souveraines. Bedrock N'EST PAS souverain : AWS est soumis au CLOUD Act quelle que soit la region d'hebergement. En revanche, sur l'axe CONFORMITE (RGPD), Bedrock en region UE (Paris) avec DPA AWS reste une voie conforme pour les modeles Anthropic ; Anthropic direct = transfert hors UE ; OpenRouter = sans garanties UE. Albert s'utilise avec OpenCode : guide officiel DINUM guides.ia.numerique.gouv.fr/albert-api/guides/ide#agentic-coding-opencode. La problematique de deploiement : les prestataires externes peuvent rester sur leur abonnement Claude (forfait mensuel, consommation incluse, cout previsible). Les agents internes, eux, demarreront a environ 20 euros par siege et par mois (sieges Claude Enterprise via Bedrock), auxquels s'ajoute chaque token consomme, facture au prix du modele. Le cout interne suit donc l'usage, et l'usage agentique est intensif en tokens. Consequence : optimiser le cout au token (choix du modele, du harness, caching) devient le parametre cle pour les internes et pour la CI/CD - c'est ce que le bench compare, et ce que le bench elargi en conditions reelles validera (scenario Albert/DeepSeek via OpenCode face a Claude avec et sans abonnement).</a:t>
             </a:r>
           </a:p>
         </p:txBody>
@@ -644,7 +644,7 @@
           <a:lstStyle/>
           <a:p>
             <a:r>
-              <a:t>Deux cas d'usage a distinguer. (1) CODE AGENTIQUE SUR POSTE : Claude Code se consomme via un SIEGE d'abonnement (Pro 17-20$, Team 20-25$, Premium 100-125$/dev/mois) ; les stacks OpenCode se consomment via une cle - OpenRouter (paiement au token) ou Albert (gratuit, cle reservee aux agents de l'Etat). (2) BOTS CI/CD : pas de siege, tout le monde paie au token via une cle API programmatique. Claude API Opus 4.8 = 5$/25$ par 1M (headless via ANTHROPIC_API_KEY ; un token OAuth d'abonnement CLAUDE_CODE_OAUTH_TOKEN est aussi possible mais Anthropic recommande la cle API pour l'automation partagee). DeepSeek V4 Pro 0,44$/0,87$, GLM 5.2 ~1,40$/4,40$ via OpenRouter. Albert est gratuit mais ses quotas (10-50 requetes/min en experimentation) peuvent brider un usage CI/CD intensif - a augmenter sur demande. RECOMMANDATION selon priorite : perf/maturite -&gt; Claude/Opus 4.8 ; souverainete/cout -&gt; Albert ; rapport perf-prix brut -&gt; DeepSeek V4 Pro via OpenRouter. RESERVES : 'Open Claw' n'a pas ete confirme comme outil de coding (le seul depot de ce nom est un assistant de messagerie) - candidats reels : OpenCode, Crush (Charmbracelet), Claude Code Router. Le catalogue Albert observe sur les docs publiques ne liste pas DeepSeek V4 Flash ni Mistral Medium 3.5 (mais Mistral-Small, Ministral-3-8B, gpt-oss-120b, Qwen3-Coder) - a confirmer via un appel authentifie /v1/models sur ta cle. Tarifs OpenRouter = prix catalogue variables selon le fournisseur route ; le prompt caching peut baisser le cout reel de 60 a 80%. Le nouveau tokenizer d'Opus 4.8 produit ~30% de tokens en plus pour un meme texte, ce qui renforce le cout effectif par requete.</a:t>
+              <a:t>Deux cas d'usage a distinguer. (1) CODE AGENTIQUE SUR POSTE : Claude Code se consomme via un SIEGE d'abonnement (Pro 17-20$, Team 20-25$, Premium 100-125$/dev/mois) ; les stacks OpenCode se consomment via une cle - OpenRouter (paiement au token) ou Albert (gratuit, cle reservee aux agents de l'Etat). (2) BOTS CI/CD : pas de siege, tout le monde paie au token via une cle API programmatique. Claude API Opus 4.8 = 5$/25$ par 1M (headless via ANTHROPIC_API_KEY ; un token OAuth d'abonnement CLAUDE_CODE_OAUTH_TOKEN est aussi possible mais Anthropic recommande la cle API pour l'automation partagee). DeepSeek V4 Pro 0,44$/0,87$, GLM 5.2 ~1,40$/4,40$ via OpenRouter. Albert est gratuit mais ses quotas (10-50 requetes/min en experimentation) peuvent brider un usage CI/CD intensif - a augmenter sur demande. RECOMMANDATION selon priorite (MAJ 23/07/2026) : performance -&gt; Claude Code/Fable 5 via Bedrock (95,0% SWE-bench, 10$/50$ par 1M, conforme RGPD en region UE mais non souverain - CLOUD Act) ; souverainete/cout -&gt; Albert ; conformite UE avec editeur prive -&gt; Vibe/Mistral Medium 3.5 (77,6%, 1,50$/7,50$, plans Le Chat des 14,99$/mois) ; rapport perf-prix brut -&gt; DeepSeek V4 Pro via OpenRouter. Kimi K3 via OpenRouter (3$/15$) annonce 93,4% SWE-bench Verified mais le score n'est pas verifie independamment et la capacite OpenRouter est limitee (429). RESERVES : 'Open Claw' n'a pas ete confirme comme outil de coding (le seul depot de ce nom est un assistant de messagerie) - candidats reels : OpenCode, Crush (Charmbracelet), Claude Code Router. Le catalogue Albert observe sur les docs publiques ne liste pas DeepSeek V4 Flash ni Mistral Medium 3.5 (mais Mistral-Small, Ministral-3-8B, gpt-oss-120b, Qwen3-Coder) - a confirmer via un appel authentifie /v1/models sur ta cle. Tarifs OpenRouter = prix catalogue variables selon le fournisseur route ; le prompt caching peut baisser le cout reel de 60 a 80%. Le nouveau tokenizer d'Opus 4.8 produit ~30% de tokens en plus pour un meme texte, ce qui renforce le cout effectif par requete.</a:t>
             </a:r>
           </a:p>
         </p:txBody>
@@ -3860,7 +3860,7 @@
                 </a:solidFill>
                 <a:latin typeface="Marianne"/>
               </a:rPr>
-              <a:t>Ministères Sociaux – Benchmark coding agentique – 17/07/2026</a:t>
+              <a:t>Ministères Sociaux – Benchmark coding agentique – 23/07/2026</a:t>
             </a:r>
           </a:p>
         </p:txBody>
@@ -3950,7 +3950,7 @@
                 </a:solidFill>
                 <a:latin typeface="Marianne"/>
               </a:rPr>
-              <a:t>Coding agentique : comparer 4 stacks</a:t>
+              <a:t>Coding agentique : comparer 7 stacks</a:t>
             </a:r>
           </a:p>
         </p:txBody>
@@ -3995,7 +3995,7 @@
                 </a:solidFill>
                 <a:latin typeface="Marianne"/>
               </a:rPr>
-              <a:t>Prix, performance, souveraineté, faisabilité. Tarifs vérifiés sur sources primaires (10/07/2026).</a:t>
+              <a:t>Prix, performance, souveraineté, conformité, faisabilité. Tarifs vérifiés sur sources primaires (23/07/2026).</a:t>
             </a:r>
           </a:p>
         </p:txBody>
@@ -4008,8 +4008,8 @@
         </p:nvSpPr>
         <p:spPr>
           <a:xfrm>
-            <a:off x="2852928" y="2176272"/>
-            <a:ext cx="2030653" cy="640080"/>
+            <a:off x="2560320" y="2121408"/>
+            <a:ext cx="1186499" cy="768096"/>
           </a:xfrm>
           <a:prstGeom prst="roundRect">
             <a:avLst>
@@ -4054,8 +4054,8 @@
         </p:nvSpPr>
         <p:spPr>
           <a:xfrm>
-            <a:off x="2926080" y="2176272"/>
-            <a:ext cx="1884349" cy="640080"/>
+            <a:off x="2615184" y="2121408"/>
+            <a:ext cx="1076771" cy="768096"/>
           </a:xfrm>
           <a:prstGeom prst="rect">
             <a:avLst/>
@@ -4080,7 +4080,7 @@
               </a:spcAft>
             </a:pPr>
             <a:r>
-              <a:rPr sz="1350" b="1" i="0">
+              <a:rPr sz="1150" b="1" i="0">
                 <a:solidFill>
                   <a:srgbClr val="FFFFFF"/>
                 </a:solidFill>
@@ -4095,6 +4095,28 @@
                 <a:spcPct val="100000"/>
               </a:lnSpc>
               <a:spcBef>
+                <a:spcPts val="100"/>
+              </a:spcBef>
+              <a:spcAft>
+                <a:spcPts val="0"/>
+              </a:spcAft>
+            </a:pPr>
+            <a:r>
+              <a:rPr sz="1000" b="1" i="0">
+                <a:solidFill>
+                  <a:srgbClr val="FFFFFF"/>
+                </a:solidFill>
+                <a:latin typeface="Marianne"/>
+              </a:rPr>
+              <a:t>Opus 4.8</a:t>
+            </a:r>
+          </a:p>
+          <a:p>
+            <a:pPr algn="ctr">
+              <a:lnSpc>
+                <a:spcPct val="100000"/>
+              </a:lnSpc>
+              <a:spcBef>
                 <a:spcPts val="200"/>
               </a:spcBef>
               <a:spcAft>
@@ -4102,13 +4124,13 @@
               </a:spcAft>
             </a:pPr>
             <a:r>
-              <a:rPr sz="1000" b="0" i="0">
-                <a:solidFill>
-                  <a:srgbClr val="E3E3FD"/>
-                </a:solidFill>
-                <a:latin typeface="Marianne"/>
-              </a:rPr>
-              <a:t>Opus 4.8</a:t>
+              <a:rPr sz="850" b="0" i="0">
+                <a:solidFill>
+                  <a:srgbClr val="C9C9F2"/>
+                </a:solidFill>
+                <a:latin typeface="Marianne"/>
+              </a:rPr>
+              <a:t>Anthropic</a:t>
             </a:r>
           </a:p>
         </p:txBody>
@@ -4121,8 +4143,8 @@
         </p:nvSpPr>
         <p:spPr>
           <a:xfrm>
-            <a:off x="5029885" y="2176272"/>
-            <a:ext cx="2030653" cy="640080"/>
+            <a:off x="3838259" y="2121408"/>
+            <a:ext cx="1186499" cy="768096"/>
           </a:xfrm>
           <a:prstGeom prst="roundRect">
             <a:avLst>
@@ -4130,7 +4152,7 @@
             </a:avLst>
           </a:prstGeom>
           <a:solidFill>
-            <a:srgbClr val="6A6AF4"/>
+            <a:srgbClr val="000091"/>
           </a:solidFill>
           <a:ln>
             <a:noFill/>
@@ -4167,8 +4189,8 @@
         </p:nvSpPr>
         <p:spPr>
           <a:xfrm>
-            <a:off x="5103037" y="2176272"/>
-            <a:ext cx="1884349" cy="640080"/>
+            <a:off x="3893123" y="2121408"/>
+            <a:ext cx="1076771" cy="768096"/>
           </a:xfrm>
           <a:prstGeom prst="rect">
             <a:avLst/>
@@ -4193,13 +4215,13 @@
               </a:spcAft>
             </a:pPr>
             <a:r>
-              <a:rPr sz="1350" b="1" i="0">
+              <a:rPr sz="1150" b="1" i="0">
                 <a:solidFill>
                   <a:srgbClr val="FFFFFF"/>
                 </a:solidFill>
                 <a:latin typeface="Marianne"/>
               </a:rPr>
-              <a:t>OpenCode</a:t>
+              <a:t>Claude Code</a:t>
             </a:r>
           </a:p>
           <a:p>
@@ -4208,6 +4230,28 @@
                 <a:spcPct val="100000"/>
               </a:lnSpc>
               <a:spcBef>
+                <a:spcPts val="100"/>
+              </a:spcBef>
+              <a:spcAft>
+                <a:spcPts val="0"/>
+              </a:spcAft>
+            </a:pPr>
+            <a:r>
+              <a:rPr sz="1000" b="1" i="0">
+                <a:solidFill>
+                  <a:srgbClr val="FFFFFF"/>
+                </a:solidFill>
+                <a:latin typeface="Marianne"/>
+              </a:rPr>
+              <a:t>Fable 5</a:t>
+            </a:r>
+          </a:p>
+          <a:p>
+            <a:pPr algn="ctr">
+              <a:lnSpc>
+                <a:spcPct val="100000"/>
+              </a:lnSpc>
+              <a:spcBef>
                 <a:spcPts val="200"/>
               </a:spcBef>
               <a:spcAft>
@@ -4215,13 +4259,13 @@
               </a:spcAft>
             </a:pPr>
             <a:r>
-              <a:rPr sz="1000" b="0" i="0">
-                <a:solidFill>
-                  <a:srgbClr val="E3E3FD"/>
-                </a:solidFill>
-                <a:latin typeface="Marianne"/>
-              </a:rPr>
-              <a:t>Albert · DeepSeek V4 Flash</a:t>
+              <a:rPr sz="850" b="0" i="0">
+                <a:solidFill>
+                  <a:srgbClr val="C9C9F2"/>
+                </a:solidFill>
+                <a:latin typeface="Marianne"/>
+              </a:rPr>
+              <a:t>AWS Bedrock</a:t>
             </a:r>
           </a:p>
         </p:txBody>
@@ -4234,8 +4278,8 @@
         </p:nvSpPr>
         <p:spPr>
           <a:xfrm>
-            <a:off x="7206843" y="2176272"/>
-            <a:ext cx="2030653" cy="640080"/>
+            <a:off x="5116198" y="2121408"/>
+            <a:ext cx="1186499" cy="768096"/>
           </a:xfrm>
           <a:prstGeom prst="roundRect">
             <a:avLst>
@@ -4280,8 +4324,8 @@
         </p:nvSpPr>
         <p:spPr>
           <a:xfrm>
-            <a:off x="7279995" y="2176272"/>
-            <a:ext cx="1884349" cy="640080"/>
+            <a:off x="5171062" y="2121408"/>
+            <a:ext cx="1076771" cy="768096"/>
           </a:xfrm>
           <a:prstGeom prst="rect">
             <a:avLst/>
@@ -4306,13 +4350,13 @@
               </a:spcAft>
             </a:pPr>
             <a:r>
-              <a:rPr sz="1350" b="1" i="0">
+              <a:rPr sz="1150" b="1" i="0">
                 <a:solidFill>
                   <a:srgbClr val="FFFFFF"/>
                 </a:solidFill>
                 <a:latin typeface="Marianne"/>
               </a:rPr>
-              <a:t>OpenCode</a:t>
+              <a:t>Vibe</a:t>
             </a:r>
           </a:p>
           <a:p>
@@ -4321,6 +4365,28 @@
                 <a:spcPct val="100000"/>
               </a:lnSpc>
               <a:spcBef>
+                <a:spcPts val="100"/>
+              </a:spcBef>
+              <a:spcAft>
+                <a:spcPts val="0"/>
+              </a:spcAft>
+            </a:pPr>
+            <a:r>
+              <a:rPr sz="1000" b="1" i="0">
+                <a:solidFill>
+                  <a:srgbClr val="FFFFFF"/>
+                </a:solidFill>
+                <a:latin typeface="Marianne"/>
+              </a:rPr>
+              <a:t>Medium 3.5</a:t>
+            </a:r>
+          </a:p>
+          <a:p>
+            <a:pPr algn="ctr">
+              <a:lnSpc>
+                <a:spcPct val="100000"/>
+              </a:lnSpc>
+              <a:spcBef>
                 <a:spcPts val="200"/>
               </a:spcBef>
               <a:spcAft>
@@ -4328,13 +4394,13 @@
               </a:spcAft>
             </a:pPr>
             <a:r>
-              <a:rPr sz="1000" b="0" i="0">
-                <a:solidFill>
-                  <a:srgbClr val="E3E3FD"/>
-                </a:solidFill>
-                <a:latin typeface="Marianne"/>
-              </a:rPr>
-              <a:t>GLM 5.2 · OpenRouter</a:t>
+              <a:rPr sz="850" b="0" i="0">
+                <a:solidFill>
+                  <a:srgbClr val="C9C9F2"/>
+                </a:solidFill>
+                <a:latin typeface="Marianne"/>
+              </a:rPr>
+              <a:t>Mistral</a:t>
             </a:r>
           </a:p>
         </p:txBody>
@@ -4347,8 +4413,8 @@
         </p:nvSpPr>
         <p:spPr>
           <a:xfrm>
-            <a:off x="9383801" y="2176272"/>
-            <a:ext cx="2030653" cy="640080"/>
+            <a:off x="6394137" y="2121408"/>
+            <a:ext cx="1186499" cy="768096"/>
           </a:xfrm>
           <a:prstGeom prst="roundRect">
             <a:avLst>
@@ -4393,8 +4459,8 @@
         </p:nvSpPr>
         <p:spPr>
           <a:xfrm>
-            <a:off x="9456953" y="2176272"/>
-            <a:ext cx="1884349" cy="640080"/>
+            <a:off x="6449001" y="2121408"/>
+            <a:ext cx="1076771" cy="768096"/>
           </a:xfrm>
           <a:prstGeom prst="rect">
             <a:avLst/>
@@ -4419,7 +4485,7 @@
               </a:spcAft>
             </a:pPr>
             <a:r>
-              <a:rPr sz="1350" b="1" i="0">
+              <a:rPr sz="1150" b="1" i="0">
                 <a:solidFill>
                   <a:srgbClr val="FFFFFF"/>
                 </a:solidFill>
@@ -4434,6 +4500,28 @@
                 <a:spcPct val="100000"/>
               </a:lnSpc>
               <a:spcBef>
+                <a:spcPts val="100"/>
+              </a:spcBef>
+              <a:spcAft>
+                <a:spcPts val="0"/>
+              </a:spcAft>
+            </a:pPr>
+            <a:r>
+              <a:rPr sz="1000" b="1" i="0">
+                <a:solidFill>
+                  <a:srgbClr val="FFFFFF"/>
+                </a:solidFill>
+                <a:latin typeface="Marianne"/>
+              </a:rPr>
+              <a:t>DeepSeek V4 Flash</a:t>
+            </a:r>
+          </a:p>
+          <a:p>
+            <a:pPr algn="ctr">
+              <a:lnSpc>
+                <a:spcPct val="100000"/>
+              </a:lnSpc>
+              <a:spcBef>
                 <a:spcPts val="200"/>
               </a:spcBef>
               <a:spcAft>
@@ -4441,13 +4529,13 @@
               </a:spcAft>
             </a:pPr>
             <a:r>
-              <a:rPr sz="1000" b="0" i="0">
-                <a:solidFill>
-                  <a:srgbClr val="E3E3FD"/>
-                </a:solidFill>
-                <a:latin typeface="Marianne"/>
-              </a:rPr>
-              <a:t>DeepSeek V4 Pro · OR</a:t>
+              <a:rPr sz="850" b="0" i="0">
+                <a:solidFill>
+                  <a:srgbClr val="C9C9F2"/>
+                </a:solidFill>
+                <a:latin typeface="Marianne"/>
+              </a:rPr>
+              <a:t>Albert (DINUM)</a:t>
             </a:r>
           </a:p>
         </p:txBody>
@@ -4460,16 +4548,16 @@
         </p:nvSpPr>
         <p:spPr>
           <a:xfrm>
-            <a:off x="777240" y="2926080"/>
-            <a:ext cx="10637215" cy="713232"/>
+            <a:off x="7672077" y="2121408"/>
+            <a:ext cx="1186499" cy="768096"/>
           </a:xfrm>
           <a:prstGeom prst="roundRect">
             <a:avLst>
-              <a:gd name="adj" fmla="val 5000"/>
+              <a:gd name="adj" fmla="val 8000"/>
             </a:avLst>
           </a:prstGeom>
           <a:solidFill>
-            <a:srgbClr val="F5F5FE"/>
+            <a:srgbClr val="6A6AF4"/>
           </a:solidFill>
           <a:ln>
             <a:noFill/>
@@ -4498,40 +4586,16 @@
           </a:p>
         </p:txBody>
       </p:sp>
-      <p:pic>
-        <p:nvPicPr>
-          <p:cNvPr id="19" name="Picture 18" descr="bank.png"/>
-          <p:cNvPicPr>
-            <a:picLocks noChangeAspect="1"/>
-          </p:cNvPicPr>
-          <p:nvPr/>
-        </p:nvPicPr>
-        <p:blipFill>
-          <a:blip r:embed="rId3"/>
-          <a:stretch>
-            <a:fillRect/>
-          </a:stretch>
-        </p:blipFill>
-        <p:spPr>
-          <a:xfrm>
-            <a:off x="923544" y="3099816"/>
-            <a:ext cx="365760" cy="365760"/>
-          </a:xfrm>
-          <a:prstGeom prst="rect">
-            <a:avLst/>
-          </a:prstGeom>
-        </p:spPr>
-      </p:pic>
-      <p:sp>
-        <p:nvSpPr>
-          <p:cNvPr id="20" name="TextBox 19"/>
+      <p:sp>
+        <p:nvSpPr>
+          <p:cNvPr id="19" name="TextBox 18"/>
           <p:cNvSpPr txBox="1"/>
           <p:nvPr/>
         </p:nvSpPr>
         <p:spPr>
           <a:xfrm>
-            <a:off x="1417319" y="2926080"/>
-            <a:ext cx="1307592" cy="713232"/>
+            <a:off x="7726941" y="2121408"/>
+            <a:ext cx="1076771" cy="768096"/>
           </a:xfrm>
           <a:prstGeom prst="rect">
             <a:avLst/>
@@ -4544,7 +4608,7 @@
           </a:bodyPr>
           <a:lstStyle/>
           <a:p>
-            <a:pPr algn="l">
+            <a:pPr algn="ctr">
               <a:lnSpc>
                 <a:spcPct val="100000"/>
               </a:lnSpc>
@@ -4556,21 +4620,43 @@
               </a:spcAft>
             </a:pPr>
             <a:r>
-              <a:rPr sz="1450" b="1" i="0">
-                <a:solidFill>
-                  <a:srgbClr val="161616"/>
-                </a:solidFill>
-                <a:latin typeface="Marianne"/>
-              </a:rPr>
-              <a:t>Prix</a:t>
-            </a:r>
-          </a:p>
-          <a:p>
-            <a:pPr algn="l">
+              <a:rPr sz="1150" b="1" i="0">
+                <a:solidFill>
+                  <a:srgbClr val="FFFFFF"/>
+                </a:solidFill>
+                <a:latin typeface="Marianne"/>
+              </a:rPr>
+              <a:t>OpenCode</a:t>
+            </a:r>
+          </a:p>
+          <a:p>
+            <a:pPr algn="ctr">
               <a:lnSpc>
                 <a:spcPct val="100000"/>
               </a:lnSpc>
               <a:spcBef>
+                <a:spcPts val="100"/>
+              </a:spcBef>
+              <a:spcAft>
+                <a:spcPts val="0"/>
+              </a:spcAft>
+            </a:pPr>
+            <a:r>
+              <a:rPr sz="1000" b="1" i="0">
+                <a:solidFill>
+                  <a:srgbClr val="FFFFFF"/>
+                </a:solidFill>
+                <a:latin typeface="Marianne"/>
+              </a:rPr>
+              <a:t>DeepSeek V4 Pro</a:t>
+            </a:r>
+          </a:p>
+          <a:p>
+            <a:pPr algn="ctr">
+              <a:lnSpc>
+                <a:spcPct val="100000"/>
+              </a:lnSpc>
+              <a:spcBef>
                 <a:spcPts val="200"/>
               </a:spcBef>
               <a:spcAft>
@@ -4578,497 +4664,35 @@
               </a:spcAft>
             </a:pPr>
             <a:r>
-              <a:rPr sz="950" b="0" i="0">
-                <a:solidFill>
-                  <a:srgbClr val="6A6A6A"/>
-                </a:solidFill>
-                <a:latin typeface="Marianne"/>
-              </a:rPr>
-              <a:t>/ 1M tokens</a:t>
-            </a:r>
-          </a:p>
-        </p:txBody>
-      </p:sp>
-      <p:sp>
-        <p:nvSpPr>
-          <p:cNvPr id="21" name="TextBox 20"/>
-          <p:cNvSpPr txBox="1"/>
-          <p:nvPr/>
-        </p:nvSpPr>
-        <p:spPr>
-          <a:xfrm>
-            <a:off x="2962656" y="3017520"/>
-            <a:ext cx="1847773" cy="274320"/>
-          </a:xfrm>
-          <a:prstGeom prst="rect">
-            <a:avLst/>
-          </a:prstGeom>
-          <a:noFill/>
-        </p:spPr>
-        <p:txBody>
-          <a:bodyPr wrap="square" lIns="0" rIns="0" tIns="0" bIns="0" anchor="ctr">
-            <a:spAutoFit/>
-          </a:bodyPr>
-          <a:lstStyle/>
-          <a:p>
-            <a:pPr algn="l">
-              <a:lnSpc>
-                <a:spcPct val="106000"/>
-              </a:lnSpc>
-              <a:spcBef>
-                <a:spcPts val="0"/>
-              </a:spcBef>
-              <a:spcAft>
-                <a:spcPts val="0"/>
-              </a:spcAft>
-            </a:pPr>
-            <a:r>
-              <a:rPr sz="1150" b="0" i="0">
-                <a:solidFill>
-                  <a:srgbClr val="E1000F"/>
-                </a:solidFill>
-                <a:latin typeface="Marianne"/>
-              </a:rPr>
-              <a:t>● ● </a:t>
-            </a:r>
-            <a:r>
-              <a:rPr sz="1150" b="0" i="0">
-                <a:solidFill>
-                  <a:srgbClr val="D2D2E8"/>
-                </a:solidFill>
-                <a:latin typeface="Marianne"/>
-              </a:rPr>
-              <a:t>● ● ● </a:t>
-            </a:r>
-          </a:p>
-        </p:txBody>
-      </p:sp>
-      <p:sp>
-        <p:nvSpPr>
-          <p:cNvPr id="22" name="TextBox 21"/>
-          <p:cNvSpPr txBox="1"/>
-          <p:nvPr/>
-        </p:nvSpPr>
-        <p:spPr>
-          <a:xfrm>
-            <a:off x="2962656" y="3273552"/>
-            <a:ext cx="1847773" cy="329184"/>
-          </a:xfrm>
-          <a:prstGeom prst="rect">
-            <a:avLst/>
-          </a:prstGeom>
-          <a:noFill/>
-        </p:spPr>
-        <p:txBody>
-          <a:bodyPr wrap="square" lIns="0" rIns="0" tIns="0" bIns="0" anchor="t">
-            <a:spAutoFit/>
-          </a:bodyPr>
-          <a:lstStyle/>
-          <a:p>
-            <a:pPr algn="l">
-              <a:lnSpc>
-                <a:spcPct val="100000"/>
-              </a:lnSpc>
-              <a:spcBef>
-                <a:spcPts val="0"/>
-              </a:spcBef>
-              <a:spcAft>
-                <a:spcPts val="0"/>
-              </a:spcAft>
-            </a:pPr>
-            <a:r>
-              <a:rPr sz="1150" b="1" i="0">
-                <a:solidFill>
-                  <a:srgbClr val="161616"/>
-                </a:solidFill>
-                <a:latin typeface="Marianne"/>
-              </a:rPr>
-              <a:t>5 $ / 25 $</a:t>
-            </a:r>
-          </a:p>
-          <a:p>
-            <a:pPr algn="l">
-              <a:lnSpc>
-                <a:spcPct val="100000"/>
-              </a:lnSpc>
-              <a:spcBef>
-                <a:spcPts val="100"/>
-              </a:spcBef>
-              <a:spcAft>
-                <a:spcPts val="0"/>
-              </a:spcAft>
-            </a:pPr>
-            <a:r>
-              <a:rPr sz="950" b="0" i="0">
-                <a:solidFill>
-                  <a:srgbClr val="6A6A6A"/>
-                </a:solidFill>
-                <a:latin typeface="Marianne"/>
-              </a:rPr>
-              <a:t>+ siège 20–125 $/m</a:t>
-            </a:r>
-          </a:p>
-        </p:txBody>
-      </p:sp>
-      <p:sp>
-        <p:nvSpPr>
-          <p:cNvPr id="23" name="TextBox 22"/>
-          <p:cNvSpPr txBox="1"/>
-          <p:nvPr/>
-        </p:nvSpPr>
-        <p:spPr>
-          <a:xfrm>
-            <a:off x="5139613" y="3017520"/>
-            <a:ext cx="1847773" cy="274320"/>
-          </a:xfrm>
-          <a:prstGeom prst="rect">
-            <a:avLst/>
-          </a:prstGeom>
-          <a:noFill/>
-        </p:spPr>
-        <p:txBody>
-          <a:bodyPr wrap="square" lIns="0" rIns="0" tIns="0" bIns="0" anchor="ctr">
-            <a:spAutoFit/>
-          </a:bodyPr>
-          <a:lstStyle/>
-          <a:p>
-            <a:pPr algn="l">
-              <a:lnSpc>
-                <a:spcPct val="106000"/>
-              </a:lnSpc>
-              <a:spcBef>
-                <a:spcPts val="0"/>
-              </a:spcBef>
-              <a:spcAft>
-                <a:spcPts val="0"/>
-              </a:spcAft>
-            </a:pPr>
-            <a:r>
-              <a:rPr sz="1150" b="0" i="0">
-                <a:solidFill>
-                  <a:srgbClr val="18753C"/>
-                </a:solidFill>
-                <a:latin typeface="Marianne"/>
-              </a:rPr>
-              <a:t>● ● ● ● ● </a:t>
-            </a:r>
-            <a:r>
-              <a:rPr sz="1150" b="0" i="0">
-                <a:solidFill>
-                  <a:srgbClr val="D2D2E8"/>
-                </a:solidFill>
-                <a:latin typeface="Marianne"/>
-              </a:rPr>
-              <a:t/>
-            </a:r>
-          </a:p>
-        </p:txBody>
-      </p:sp>
-      <p:sp>
-        <p:nvSpPr>
-          <p:cNvPr id="24" name="TextBox 23"/>
-          <p:cNvSpPr txBox="1"/>
-          <p:nvPr/>
-        </p:nvSpPr>
-        <p:spPr>
-          <a:xfrm>
-            <a:off x="5139613" y="3273552"/>
-            <a:ext cx="1847773" cy="329184"/>
-          </a:xfrm>
-          <a:prstGeom prst="rect">
-            <a:avLst/>
-          </a:prstGeom>
-          <a:noFill/>
-        </p:spPr>
-        <p:txBody>
-          <a:bodyPr wrap="square" lIns="0" rIns="0" tIns="0" bIns="0" anchor="t">
-            <a:spAutoFit/>
-          </a:bodyPr>
-          <a:lstStyle/>
-          <a:p>
-            <a:pPr algn="l">
-              <a:lnSpc>
-                <a:spcPct val="100000"/>
-              </a:lnSpc>
-              <a:spcBef>
-                <a:spcPts val="0"/>
-              </a:spcBef>
-              <a:spcAft>
-                <a:spcPts val="0"/>
-              </a:spcAft>
-            </a:pPr>
-            <a:r>
-              <a:rPr sz="1150" b="1" i="0">
-                <a:solidFill>
-                  <a:srgbClr val="161616"/>
-                </a:solidFill>
-                <a:latin typeface="Marianne"/>
-              </a:rPr>
-              <a:t>Gratuit</a:t>
-            </a:r>
-          </a:p>
-          <a:p>
-            <a:pPr algn="l">
-              <a:lnSpc>
-                <a:spcPct val="100000"/>
-              </a:lnSpc>
-              <a:spcBef>
-                <a:spcPts val="100"/>
-              </a:spcBef>
-              <a:spcAft>
-                <a:spcPts val="0"/>
-              </a:spcAft>
-            </a:pPr>
-            <a:r>
-              <a:rPr sz="950" b="0" i="0">
-                <a:solidFill>
-                  <a:srgbClr val="6A6A6A"/>
-                </a:solidFill>
-                <a:latin typeface="Marianne"/>
-              </a:rPr>
-              <a:t>quotas, agents État</a:t>
-            </a:r>
-          </a:p>
-        </p:txBody>
-      </p:sp>
-      <p:sp>
-        <p:nvSpPr>
-          <p:cNvPr id="25" name="TextBox 24"/>
-          <p:cNvSpPr txBox="1"/>
-          <p:nvPr/>
-        </p:nvSpPr>
-        <p:spPr>
-          <a:xfrm>
-            <a:off x="7316571" y="3017520"/>
-            <a:ext cx="1847773" cy="274320"/>
-          </a:xfrm>
-          <a:prstGeom prst="rect">
-            <a:avLst/>
-          </a:prstGeom>
-          <a:noFill/>
-        </p:spPr>
-        <p:txBody>
-          <a:bodyPr wrap="square" lIns="0" rIns="0" tIns="0" bIns="0" anchor="ctr">
-            <a:spAutoFit/>
-          </a:bodyPr>
-          <a:lstStyle/>
-          <a:p>
-            <a:pPr algn="l">
-              <a:lnSpc>
-                <a:spcPct val="106000"/>
-              </a:lnSpc>
-              <a:spcBef>
-                <a:spcPts val="0"/>
-              </a:spcBef>
-              <a:spcAft>
-                <a:spcPts val="0"/>
-              </a:spcAft>
-            </a:pPr>
-            <a:r>
-              <a:rPr sz="1150" b="0" i="0">
-                <a:solidFill>
-                  <a:srgbClr val="18753C"/>
-                </a:solidFill>
-                <a:latin typeface="Marianne"/>
-              </a:rPr>
-              <a:t>● ● ● ● </a:t>
-            </a:r>
-            <a:r>
-              <a:rPr sz="1150" b="0" i="0">
-                <a:solidFill>
-                  <a:srgbClr val="D2D2E8"/>
-                </a:solidFill>
-                <a:latin typeface="Marianne"/>
-              </a:rPr>
-              <a:t>● </a:t>
-            </a:r>
-          </a:p>
-        </p:txBody>
-      </p:sp>
-      <p:sp>
-        <p:nvSpPr>
-          <p:cNvPr id="26" name="TextBox 25"/>
-          <p:cNvSpPr txBox="1"/>
-          <p:nvPr/>
-        </p:nvSpPr>
-        <p:spPr>
-          <a:xfrm>
-            <a:off x="7316571" y="3273552"/>
-            <a:ext cx="1847773" cy="329184"/>
-          </a:xfrm>
-          <a:prstGeom prst="rect">
-            <a:avLst/>
-          </a:prstGeom>
-          <a:noFill/>
-        </p:spPr>
-        <p:txBody>
-          <a:bodyPr wrap="square" lIns="0" rIns="0" tIns="0" bIns="0" anchor="t">
-            <a:spAutoFit/>
-          </a:bodyPr>
-          <a:lstStyle/>
-          <a:p>
-            <a:pPr algn="l">
-              <a:lnSpc>
-                <a:spcPct val="100000"/>
-              </a:lnSpc>
-              <a:spcBef>
-                <a:spcPts val="0"/>
-              </a:spcBef>
-              <a:spcAft>
-                <a:spcPts val="0"/>
-              </a:spcAft>
-            </a:pPr>
-            <a:r>
-              <a:rPr sz="1150" b="1" i="0">
-                <a:solidFill>
-                  <a:srgbClr val="161616"/>
-                </a:solidFill>
-                <a:latin typeface="Marianne"/>
-              </a:rPr>
-              <a:t>≈1,40 $ / 4,40 $</a:t>
-            </a:r>
-          </a:p>
-        </p:txBody>
-      </p:sp>
-      <p:sp>
-        <p:nvSpPr>
-          <p:cNvPr id="27" name="TextBox 26"/>
-          <p:cNvSpPr txBox="1"/>
-          <p:nvPr/>
-        </p:nvSpPr>
-        <p:spPr>
-          <a:xfrm>
-            <a:off x="9493529" y="3017520"/>
-            <a:ext cx="1847773" cy="274320"/>
-          </a:xfrm>
-          <a:prstGeom prst="rect">
-            <a:avLst/>
-          </a:prstGeom>
-          <a:noFill/>
-        </p:spPr>
-        <p:txBody>
-          <a:bodyPr wrap="square" lIns="0" rIns="0" tIns="0" bIns="0" anchor="ctr">
-            <a:spAutoFit/>
-          </a:bodyPr>
-          <a:lstStyle/>
-          <a:p>
-            <a:pPr algn="l">
-              <a:lnSpc>
-                <a:spcPct val="106000"/>
-              </a:lnSpc>
-              <a:spcBef>
-                <a:spcPts val="0"/>
-              </a:spcBef>
-              <a:spcAft>
-                <a:spcPts val="0"/>
-              </a:spcAft>
-            </a:pPr>
-            <a:r>
-              <a:rPr sz="1150" b="0" i="0">
-                <a:solidFill>
-                  <a:srgbClr val="18753C"/>
-                </a:solidFill>
-                <a:latin typeface="Marianne"/>
-              </a:rPr>
-              <a:t>● ● ● ● ● </a:t>
-            </a:r>
-            <a:r>
-              <a:rPr sz="1150" b="0" i="0">
-                <a:solidFill>
-                  <a:srgbClr val="D2D2E8"/>
-                </a:solidFill>
-                <a:latin typeface="Marianne"/>
-              </a:rPr>
-              <a:t/>
-            </a:r>
-          </a:p>
-        </p:txBody>
-      </p:sp>
-      <p:sp>
-        <p:nvSpPr>
-          <p:cNvPr id="28" name="TextBox 27"/>
-          <p:cNvSpPr txBox="1"/>
-          <p:nvPr/>
-        </p:nvSpPr>
-        <p:spPr>
-          <a:xfrm>
-            <a:off x="9493529" y="3273552"/>
-            <a:ext cx="1847773" cy="329184"/>
-          </a:xfrm>
-          <a:prstGeom prst="rect">
-            <a:avLst/>
-          </a:prstGeom>
-          <a:noFill/>
-        </p:spPr>
-        <p:txBody>
-          <a:bodyPr wrap="square" lIns="0" rIns="0" tIns="0" bIns="0" anchor="t">
-            <a:spAutoFit/>
-          </a:bodyPr>
-          <a:lstStyle/>
-          <a:p>
-            <a:pPr algn="l">
-              <a:lnSpc>
-                <a:spcPct val="100000"/>
-              </a:lnSpc>
-              <a:spcBef>
-                <a:spcPts val="0"/>
-              </a:spcBef>
-              <a:spcAft>
-                <a:spcPts val="0"/>
-              </a:spcAft>
-            </a:pPr>
-            <a:r>
-              <a:rPr sz="1150" b="1" i="0">
-                <a:solidFill>
-                  <a:srgbClr val="161616"/>
-                </a:solidFill>
-                <a:latin typeface="Marianne"/>
-              </a:rPr>
-              <a:t>0,44 $ / 0,87 $</a:t>
-            </a:r>
-          </a:p>
-          <a:p>
-            <a:pPr algn="l">
-              <a:lnSpc>
-                <a:spcPct val="100000"/>
-              </a:lnSpc>
-              <a:spcBef>
-                <a:spcPts val="100"/>
-              </a:spcBef>
-              <a:spcAft>
-                <a:spcPts val="0"/>
-              </a:spcAft>
-            </a:pPr>
-            <a:r>
-              <a:rPr sz="950" b="0" i="0">
-                <a:solidFill>
-                  <a:srgbClr val="6A6A6A"/>
-                </a:solidFill>
-                <a:latin typeface="Marianne"/>
-              </a:rPr>
-              <a:t>tarif preview *</a:t>
-            </a:r>
-          </a:p>
-        </p:txBody>
-      </p:sp>
-      <p:sp>
-        <p:nvSpPr>
-          <p:cNvPr id="29" name="Rounded Rectangle 28"/>
+              <a:rPr sz="850" b="0" i="0">
+                <a:solidFill>
+                  <a:srgbClr val="C9C9F2"/>
+                </a:solidFill>
+                <a:latin typeface="Marianne"/>
+              </a:rPr>
+              <a:t>OpenRouter</a:t>
+            </a:r>
+          </a:p>
+        </p:txBody>
+      </p:sp>
+      <p:sp>
+        <p:nvSpPr>
+          <p:cNvPr id="20" name="Rounded Rectangle 19"/>
           <p:cNvSpPr/>
           <p:nvPr/>
         </p:nvSpPr>
         <p:spPr>
           <a:xfrm>
-            <a:off x="777240" y="3730752"/>
-            <a:ext cx="10637215" cy="713232"/>
+            <a:off x="8950016" y="2121408"/>
+            <a:ext cx="1186499" cy="768096"/>
           </a:xfrm>
           <a:prstGeom prst="roundRect">
             <a:avLst>
-              <a:gd name="adj" fmla="val 5000"/>
+              <a:gd name="adj" fmla="val 8000"/>
             </a:avLst>
           </a:prstGeom>
           <a:solidFill>
-            <a:srgbClr val="F5F5FE"/>
+            <a:srgbClr val="6A6AF4"/>
           </a:solidFill>
           <a:ln>
             <a:noFill/>
@@ -5097,40 +4721,16 @@
           </a:p>
         </p:txBody>
       </p:sp>
-      <p:pic>
-        <p:nvPicPr>
-          <p:cNvPr id="30" name="Picture 29" descr="code-s-slash.png"/>
-          <p:cNvPicPr>
-            <a:picLocks noChangeAspect="1"/>
-          </p:cNvPicPr>
-          <p:nvPr/>
-        </p:nvPicPr>
-        <p:blipFill>
-          <a:blip r:embed="rId4"/>
-          <a:stretch>
-            <a:fillRect/>
-          </a:stretch>
-        </p:blipFill>
-        <p:spPr>
-          <a:xfrm>
-            <a:off x="923544" y="3904488"/>
-            <a:ext cx="365760" cy="365760"/>
-          </a:xfrm>
-          <a:prstGeom prst="rect">
-            <a:avLst/>
-          </a:prstGeom>
-        </p:spPr>
-      </p:pic>
-      <p:sp>
-        <p:nvSpPr>
-          <p:cNvPr id="31" name="TextBox 30"/>
+      <p:sp>
+        <p:nvSpPr>
+          <p:cNvPr id="21" name="TextBox 20"/>
           <p:cNvSpPr txBox="1"/>
           <p:nvPr/>
         </p:nvSpPr>
         <p:spPr>
           <a:xfrm>
-            <a:off x="1417319" y="3730752"/>
-            <a:ext cx="1307592" cy="713232"/>
+            <a:off x="9004880" y="2121408"/>
+            <a:ext cx="1076771" cy="768096"/>
           </a:xfrm>
           <a:prstGeom prst="rect">
             <a:avLst/>
@@ -5143,7 +4743,7 @@
           </a:bodyPr>
           <a:lstStyle/>
           <a:p>
-            <a:pPr algn="l">
+            <a:pPr algn="ctr">
               <a:lnSpc>
                 <a:spcPct val="100000"/>
               </a:lnSpc>
@@ -5155,21 +4755,43 @@
               </a:spcAft>
             </a:pPr>
             <a:r>
-              <a:rPr sz="1450" b="1" i="0">
-                <a:solidFill>
-                  <a:srgbClr val="161616"/>
-                </a:solidFill>
-                <a:latin typeface="Marianne"/>
-              </a:rPr>
-              <a:t>Performance</a:t>
-            </a:r>
-          </a:p>
-          <a:p>
-            <a:pPr algn="l">
+              <a:rPr sz="1150" b="1" i="0">
+                <a:solidFill>
+                  <a:srgbClr val="FFFFFF"/>
+                </a:solidFill>
+                <a:latin typeface="Marianne"/>
+              </a:rPr>
+              <a:t>OpenCode</a:t>
+            </a:r>
+          </a:p>
+          <a:p>
+            <a:pPr algn="ctr">
               <a:lnSpc>
                 <a:spcPct val="100000"/>
               </a:lnSpc>
               <a:spcBef>
+                <a:spcPts val="100"/>
+              </a:spcBef>
+              <a:spcAft>
+                <a:spcPts val="0"/>
+              </a:spcAft>
+            </a:pPr>
+            <a:r>
+              <a:rPr sz="1000" b="1" i="0">
+                <a:solidFill>
+                  <a:srgbClr val="FFFFFF"/>
+                </a:solidFill>
+                <a:latin typeface="Marianne"/>
+              </a:rPr>
+              <a:t>GLM 5.2</a:t>
+            </a:r>
+          </a:p>
+          <a:p>
+            <a:pPr algn="ctr">
+              <a:lnSpc>
+                <a:spcPct val="100000"/>
+              </a:lnSpc>
+              <a:spcBef>
                 <a:spcPts val="200"/>
               </a:spcBef>
               <a:spcAft>
@@ -5177,475 +4799,35 @@
               </a:spcAft>
             </a:pPr>
             <a:r>
-              <a:rPr sz="950" b="0" i="0">
-                <a:solidFill>
-                  <a:srgbClr val="6A6A6A"/>
-                </a:solidFill>
-                <a:latin typeface="Marianne"/>
-              </a:rPr>
-              <a:t>SWE-bench Verified</a:t>
-            </a:r>
-          </a:p>
-        </p:txBody>
-      </p:sp>
-      <p:sp>
-        <p:nvSpPr>
-          <p:cNvPr id="32" name="TextBox 31"/>
-          <p:cNvSpPr txBox="1"/>
-          <p:nvPr/>
-        </p:nvSpPr>
-        <p:spPr>
-          <a:xfrm>
-            <a:off x="2962656" y="3822191"/>
-            <a:ext cx="1847773" cy="274320"/>
-          </a:xfrm>
-          <a:prstGeom prst="rect">
-            <a:avLst/>
-          </a:prstGeom>
-          <a:noFill/>
-        </p:spPr>
-        <p:txBody>
-          <a:bodyPr wrap="square" lIns="0" rIns="0" tIns="0" bIns="0" anchor="ctr">
-            <a:spAutoFit/>
-          </a:bodyPr>
-          <a:lstStyle/>
-          <a:p>
-            <a:pPr algn="l">
-              <a:lnSpc>
-                <a:spcPct val="106000"/>
-              </a:lnSpc>
-              <a:spcBef>
-                <a:spcPts val="0"/>
-              </a:spcBef>
-              <a:spcAft>
-                <a:spcPts val="0"/>
-              </a:spcAft>
-            </a:pPr>
-            <a:r>
-              <a:rPr sz="1150" b="0" i="0">
-                <a:solidFill>
-                  <a:srgbClr val="18753C"/>
-                </a:solidFill>
-                <a:latin typeface="Marianne"/>
-              </a:rPr>
-              <a:t>● ● ● ● ● </a:t>
-            </a:r>
-            <a:r>
-              <a:rPr sz="1150" b="0" i="0">
-                <a:solidFill>
-                  <a:srgbClr val="D2D2E8"/>
-                </a:solidFill>
-                <a:latin typeface="Marianne"/>
-              </a:rPr>
-              <a:t/>
-            </a:r>
-          </a:p>
-        </p:txBody>
-      </p:sp>
-      <p:sp>
-        <p:nvSpPr>
-          <p:cNvPr id="33" name="TextBox 32"/>
-          <p:cNvSpPr txBox="1"/>
-          <p:nvPr/>
-        </p:nvSpPr>
-        <p:spPr>
-          <a:xfrm>
-            <a:off x="2962656" y="4078224"/>
-            <a:ext cx="1847773" cy="329184"/>
-          </a:xfrm>
-          <a:prstGeom prst="rect">
-            <a:avLst/>
-          </a:prstGeom>
-          <a:noFill/>
-        </p:spPr>
-        <p:txBody>
-          <a:bodyPr wrap="square" lIns="0" rIns="0" tIns="0" bIns="0" anchor="t">
-            <a:spAutoFit/>
-          </a:bodyPr>
-          <a:lstStyle/>
-          <a:p>
-            <a:pPr algn="l">
-              <a:lnSpc>
-                <a:spcPct val="100000"/>
-              </a:lnSpc>
-              <a:spcBef>
-                <a:spcPts val="0"/>
-              </a:spcBef>
-              <a:spcAft>
-                <a:spcPts val="0"/>
-              </a:spcAft>
-            </a:pPr>
-            <a:r>
-              <a:rPr sz="1150" b="1" i="0">
-                <a:solidFill>
-                  <a:srgbClr val="161616"/>
-                </a:solidFill>
-                <a:latin typeface="Marianne"/>
-              </a:rPr>
-              <a:t>88,6 %</a:t>
-            </a:r>
-          </a:p>
-        </p:txBody>
-      </p:sp>
-      <p:sp>
-        <p:nvSpPr>
-          <p:cNvPr id="34" name="TextBox 33"/>
-          <p:cNvSpPr txBox="1"/>
-          <p:nvPr/>
-        </p:nvSpPr>
-        <p:spPr>
-          <a:xfrm>
-            <a:off x="5139613" y="3822191"/>
-            <a:ext cx="1847773" cy="274320"/>
-          </a:xfrm>
-          <a:prstGeom prst="rect">
-            <a:avLst/>
-          </a:prstGeom>
-          <a:noFill/>
-        </p:spPr>
-        <p:txBody>
-          <a:bodyPr wrap="square" lIns="0" rIns="0" tIns="0" bIns="0" anchor="ctr">
-            <a:spAutoFit/>
-          </a:bodyPr>
-          <a:lstStyle/>
-          <a:p>
-            <a:pPr algn="l">
-              <a:lnSpc>
-                <a:spcPct val="106000"/>
-              </a:lnSpc>
-              <a:spcBef>
-                <a:spcPts val="0"/>
-              </a:spcBef>
-              <a:spcAft>
-                <a:spcPts val="0"/>
-              </a:spcAft>
-            </a:pPr>
-            <a:r>
-              <a:rPr sz="1150" b="0" i="0">
-                <a:solidFill>
-                  <a:srgbClr val="18753C"/>
-                </a:solidFill>
-                <a:latin typeface="Marianne"/>
-              </a:rPr>
-              <a:t>● ● ● ● </a:t>
-            </a:r>
-            <a:r>
-              <a:rPr sz="1150" b="0" i="0">
-                <a:solidFill>
-                  <a:srgbClr val="D2D2E8"/>
-                </a:solidFill>
-                <a:latin typeface="Marianne"/>
-              </a:rPr>
-              <a:t>● </a:t>
-            </a:r>
-          </a:p>
-        </p:txBody>
-      </p:sp>
-      <p:sp>
-        <p:nvSpPr>
-          <p:cNvPr id="35" name="TextBox 34"/>
-          <p:cNvSpPr txBox="1"/>
-          <p:nvPr/>
-        </p:nvSpPr>
-        <p:spPr>
-          <a:xfrm>
-            <a:off x="5139613" y="4078224"/>
-            <a:ext cx="1847773" cy="329184"/>
-          </a:xfrm>
-          <a:prstGeom prst="rect">
-            <a:avLst/>
-          </a:prstGeom>
-          <a:noFill/>
-        </p:spPr>
-        <p:txBody>
-          <a:bodyPr wrap="square" lIns="0" rIns="0" tIns="0" bIns="0" anchor="t">
-            <a:spAutoFit/>
-          </a:bodyPr>
-          <a:lstStyle/>
-          <a:p>
-            <a:pPr algn="l">
-              <a:lnSpc>
-                <a:spcPct val="100000"/>
-              </a:lnSpc>
-              <a:spcBef>
-                <a:spcPts val="0"/>
-              </a:spcBef>
-              <a:spcAft>
-                <a:spcPts val="0"/>
-              </a:spcAft>
-            </a:pPr>
-            <a:r>
-              <a:rPr sz="1150" b="1" i="0">
-                <a:solidFill>
-                  <a:srgbClr val="161616"/>
-                </a:solidFill>
-                <a:latin typeface="Marianne"/>
-              </a:rPr>
-              <a:t>≈79 % *</a:t>
-            </a:r>
-          </a:p>
-          <a:p>
-            <a:pPr algn="l">
-              <a:lnSpc>
-                <a:spcPct val="100000"/>
-              </a:lnSpc>
-              <a:spcBef>
-                <a:spcPts val="100"/>
-              </a:spcBef>
-              <a:spcAft>
-                <a:spcPts val="0"/>
-              </a:spcAft>
-            </a:pPr>
-            <a:r>
-              <a:rPr sz="950" b="0" i="0">
-                <a:solidFill>
-                  <a:srgbClr val="6A6A6A"/>
-                </a:solidFill>
-                <a:latin typeface="Marianne"/>
-              </a:rPr>
-              <a:t>via DeepSeek V4 Flash</a:t>
-            </a:r>
-          </a:p>
-        </p:txBody>
-      </p:sp>
-      <p:sp>
-        <p:nvSpPr>
-          <p:cNvPr id="36" name="TextBox 35"/>
-          <p:cNvSpPr txBox="1"/>
-          <p:nvPr/>
-        </p:nvSpPr>
-        <p:spPr>
-          <a:xfrm>
-            <a:off x="7316571" y="3822191"/>
-            <a:ext cx="1847773" cy="274320"/>
-          </a:xfrm>
-          <a:prstGeom prst="rect">
-            <a:avLst/>
-          </a:prstGeom>
-          <a:noFill/>
-        </p:spPr>
-        <p:txBody>
-          <a:bodyPr wrap="square" lIns="0" rIns="0" tIns="0" bIns="0" anchor="ctr">
-            <a:spAutoFit/>
-          </a:bodyPr>
-          <a:lstStyle/>
-          <a:p>
-            <a:pPr algn="l">
-              <a:lnSpc>
-                <a:spcPct val="106000"/>
-              </a:lnSpc>
-              <a:spcBef>
-                <a:spcPts val="0"/>
-              </a:spcBef>
-              <a:spcAft>
-                <a:spcPts val="0"/>
-              </a:spcAft>
-            </a:pPr>
-            <a:r>
-              <a:rPr sz="1150" b="0" i="0">
-                <a:solidFill>
-                  <a:srgbClr val="18753C"/>
-                </a:solidFill>
-                <a:latin typeface="Marianne"/>
-              </a:rPr>
-              <a:t>● ● ● ● </a:t>
-            </a:r>
-            <a:r>
-              <a:rPr sz="1150" b="0" i="0">
-                <a:solidFill>
-                  <a:srgbClr val="D2D2E8"/>
-                </a:solidFill>
-                <a:latin typeface="Marianne"/>
-              </a:rPr>
-              <a:t>● </a:t>
-            </a:r>
-          </a:p>
-        </p:txBody>
-      </p:sp>
-      <p:sp>
-        <p:nvSpPr>
-          <p:cNvPr id="37" name="TextBox 36"/>
-          <p:cNvSpPr txBox="1"/>
-          <p:nvPr/>
-        </p:nvSpPr>
-        <p:spPr>
-          <a:xfrm>
-            <a:off x="7316571" y="4078224"/>
-            <a:ext cx="1847773" cy="329184"/>
-          </a:xfrm>
-          <a:prstGeom prst="rect">
-            <a:avLst/>
-          </a:prstGeom>
-          <a:noFill/>
-        </p:spPr>
-        <p:txBody>
-          <a:bodyPr wrap="square" lIns="0" rIns="0" tIns="0" bIns="0" anchor="t">
-            <a:spAutoFit/>
-          </a:bodyPr>
-          <a:lstStyle/>
-          <a:p>
-            <a:pPr algn="l">
-              <a:lnSpc>
-                <a:spcPct val="100000"/>
-              </a:lnSpc>
-              <a:spcBef>
-                <a:spcPts val="0"/>
-              </a:spcBef>
-              <a:spcAft>
-                <a:spcPts val="0"/>
-              </a:spcAft>
-            </a:pPr>
-            <a:r>
-              <a:rPr sz="1150" b="1" i="0">
-                <a:solidFill>
-                  <a:srgbClr val="161616"/>
-                </a:solidFill>
-                <a:latin typeface="Marianne"/>
-              </a:rPr>
-              <a:t>≈78 % *</a:t>
-            </a:r>
-          </a:p>
-          <a:p>
-            <a:pPr algn="l">
-              <a:lnSpc>
-                <a:spcPct val="100000"/>
-              </a:lnSpc>
-              <a:spcBef>
-                <a:spcPts val="100"/>
-              </a:spcBef>
-              <a:spcAft>
-                <a:spcPts val="0"/>
-              </a:spcAft>
-            </a:pPr>
-            <a:r>
-              <a:rPr sz="950" b="0" i="0">
-                <a:solidFill>
-                  <a:srgbClr val="6A6A6A"/>
-                </a:solidFill>
-                <a:latin typeface="Marianne"/>
-              </a:rPr>
-              <a:t>Term-Bench 81–83 %</a:t>
-            </a:r>
-          </a:p>
-        </p:txBody>
-      </p:sp>
-      <p:sp>
-        <p:nvSpPr>
-          <p:cNvPr id="38" name="TextBox 37"/>
-          <p:cNvSpPr txBox="1"/>
-          <p:nvPr/>
-        </p:nvSpPr>
-        <p:spPr>
-          <a:xfrm>
-            <a:off x="9493529" y="3822191"/>
-            <a:ext cx="1847773" cy="274320"/>
-          </a:xfrm>
-          <a:prstGeom prst="rect">
-            <a:avLst/>
-          </a:prstGeom>
-          <a:noFill/>
-        </p:spPr>
-        <p:txBody>
-          <a:bodyPr wrap="square" lIns="0" rIns="0" tIns="0" bIns="0" anchor="ctr">
-            <a:spAutoFit/>
-          </a:bodyPr>
-          <a:lstStyle/>
-          <a:p>
-            <a:pPr algn="l">
-              <a:lnSpc>
-                <a:spcPct val="106000"/>
-              </a:lnSpc>
-              <a:spcBef>
-                <a:spcPts val="0"/>
-              </a:spcBef>
-              <a:spcAft>
-                <a:spcPts val="0"/>
-              </a:spcAft>
-            </a:pPr>
-            <a:r>
-              <a:rPr sz="1150" b="0" i="0">
-                <a:solidFill>
-                  <a:srgbClr val="18753C"/>
-                </a:solidFill>
-                <a:latin typeface="Marianne"/>
-              </a:rPr>
-              <a:t>● ● ● ● </a:t>
-            </a:r>
-            <a:r>
-              <a:rPr sz="1150" b="0" i="0">
-                <a:solidFill>
-                  <a:srgbClr val="D2D2E8"/>
-                </a:solidFill>
-                <a:latin typeface="Marianne"/>
-              </a:rPr>
-              <a:t>● </a:t>
-            </a:r>
-          </a:p>
-        </p:txBody>
-      </p:sp>
-      <p:sp>
-        <p:nvSpPr>
-          <p:cNvPr id="39" name="TextBox 38"/>
-          <p:cNvSpPr txBox="1"/>
-          <p:nvPr/>
-        </p:nvSpPr>
-        <p:spPr>
-          <a:xfrm>
-            <a:off x="9493529" y="4078224"/>
-            <a:ext cx="1847773" cy="329184"/>
-          </a:xfrm>
-          <a:prstGeom prst="rect">
-            <a:avLst/>
-          </a:prstGeom>
-          <a:noFill/>
-        </p:spPr>
-        <p:txBody>
-          <a:bodyPr wrap="square" lIns="0" rIns="0" tIns="0" bIns="0" anchor="t">
-            <a:spAutoFit/>
-          </a:bodyPr>
-          <a:lstStyle/>
-          <a:p>
-            <a:pPr algn="l">
-              <a:lnSpc>
-                <a:spcPct val="100000"/>
-              </a:lnSpc>
-              <a:spcBef>
-                <a:spcPts val="0"/>
-              </a:spcBef>
-              <a:spcAft>
-                <a:spcPts val="0"/>
-              </a:spcAft>
-            </a:pPr>
-            <a:r>
-              <a:rPr sz="1150" b="1" i="0">
-                <a:solidFill>
-                  <a:srgbClr val="161616"/>
-                </a:solidFill>
-                <a:latin typeface="Marianne"/>
-              </a:rPr>
-              <a:t>80,6 %</a:t>
-            </a:r>
-          </a:p>
-        </p:txBody>
-      </p:sp>
-      <p:sp>
-        <p:nvSpPr>
-          <p:cNvPr id="40" name="Rounded Rectangle 39"/>
+              <a:rPr sz="850" b="0" i="0">
+                <a:solidFill>
+                  <a:srgbClr val="C9C9F2"/>
+                </a:solidFill>
+                <a:latin typeface="Marianne"/>
+              </a:rPr>
+              <a:t>OpenRouter</a:t>
+            </a:r>
+          </a:p>
+        </p:txBody>
+      </p:sp>
+      <p:sp>
+        <p:nvSpPr>
+          <p:cNvPr id="22" name="Rounded Rectangle 21"/>
           <p:cNvSpPr/>
           <p:nvPr/>
         </p:nvSpPr>
         <p:spPr>
           <a:xfrm>
-            <a:off x="777240" y="4535424"/>
-            <a:ext cx="10637215" cy="713232"/>
+            <a:off x="10227955" y="2121408"/>
+            <a:ext cx="1186499" cy="768096"/>
           </a:xfrm>
           <a:prstGeom prst="roundRect">
             <a:avLst>
-              <a:gd name="adj" fmla="val 5000"/>
+              <a:gd name="adj" fmla="val 8000"/>
             </a:avLst>
           </a:prstGeom>
           <a:solidFill>
-            <a:srgbClr val="F5F5FE"/>
+            <a:srgbClr val="6A6AF4"/>
           </a:solidFill>
           <a:ln>
             <a:noFill/>
@@ -5674,40 +4856,16 @@
           </a:p>
         </p:txBody>
       </p:sp>
-      <p:pic>
-        <p:nvPicPr>
-          <p:cNvPr id="41" name="Picture 40" descr="shield-check.png"/>
-          <p:cNvPicPr>
-            <a:picLocks noChangeAspect="1"/>
-          </p:cNvPicPr>
-          <p:nvPr/>
-        </p:nvPicPr>
-        <p:blipFill>
-          <a:blip r:embed="rId5"/>
-          <a:stretch>
-            <a:fillRect/>
-          </a:stretch>
-        </p:blipFill>
-        <p:spPr>
-          <a:xfrm>
-            <a:off x="923544" y="4709160"/>
-            <a:ext cx="365760" cy="365760"/>
-          </a:xfrm>
-          <a:prstGeom prst="rect">
-            <a:avLst/>
-          </a:prstGeom>
-        </p:spPr>
-      </p:pic>
-      <p:sp>
-        <p:nvSpPr>
-          <p:cNvPr id="42" name="TextBox 41"/>
+      <p:sp>
+        <p:nvSpPr>
+          <p:cNvPr id="23" name="TextBox 22"/>
           <p:cNvSpPr txBox="1"/>
           <p:nvPr/>
         </p:nvSpPr>
         <p:spPr>
           <a:xfrm>
-            <a:off x="1417319" y="4535424"/>
-            <a:ext cx="1307592" cy="713232"/>
+            <a:off x="10282819" y="2121408"/>
+            <a:ext cx="1076771" cy="768096"/>
           </a:xfrm>
           <a:prstGeom prst="rect">
             <a:avLst/>
@@ -5720,7 +4878,7 @@
           </a:bodyPr>
           <a:lstStyle/>
           <a:p>
-            <a:pPr algn="l">
+            <a:pPr algn="ctr">
               <a:lnSpc>
                 <a:spcPct val="100000"/>
               </a:lnSpc>
@@ -5732,21 +4890,43 @@
               </a:spcAft>
             </a:pPr>
             <a:r>
-              <a:rPr sz="1450" b="1" i="0">
-                <a:solidFill>
-                  <a:srgbClr val="161616"/>
-                </a:solidFill>
-                <a:latin typeface="Marianne"/>
-              </a:rPr>
-              <a:t>Souveraineté</a:t>
-            </a:r>
-          </a:p>
-          <a:p>
-            <a:pPr algn="l">
+              <a:rPr sz="1150" b="1" i="0">
+                <a:solidFill>
+                  <a:srgbClr val="FFFFFF"/>
+                </a:solidFill>
+                <a:latin typeface="Marianne"/>
+              </a:rPr>
+              <a:t>OpenCode</a:t>
+            </a:r>
+          </a:p>
+          <a:p>
+            <a:pPr algn="ctr">
               <a:lnSpc>
                 <a:spcPct val="100000"/>
               </a:lnSpc>
               <a:spcBef>
+                <a:spcPts val="100"/>
+              </a:spcBef>
+              <a:spcAft>
+                <a:spcPts val="0"/>
+              </a:spcAft>
+            </a:pPr>
+            <a:r>
+              <a:rPr sz="1000" b="1" i="0">
+                <a:solidFill>
+                  <a:srgbClr val="FFFFFF"/>
+                </a:solidFill>
+                <a:latin typeface="Marianne"/>
+              </a:rPr>
+              <a:t>Kimi K3</a:t>
+            </a:r>
+          </a:p>
+          <a:p>
+            <a:pPr algn="ctr">
+              <a:lnSpc>
+                <a:spcPct val="100000"/>
+              </a:lnSpc>
+              <a:spcBef>
                 <a:spcPts val="200"/>
               </a:spcBef>
               <a:spcAft>
@@ -5754,511 +4934,27 @@
               </a:spcAft>
             </a:pPr>
             <a:r>
-              <a:rPr sz="950" b="0" i="0">
-                <a:solidFill>
-                  <a:srgbClr val="6A6A6A"/>
-                </a:solidFill>
-                <a:latin typeface="Marianne"/>
-              </a:rPr>
-              <a:t>éditeur / hébergement</a:t>
-            </a:r>
-          </a:p>
-        </p:txBody>
-      </p:sp>
-      <p:sp>
-        <p:nvSpPr>
-          <p:cNvPr id="43" name="TextBox 42"/>
-          <p:cNvSpPr txBox="1"/>
-          <p:nvPr/>
-        </p:nvSpPr>
-        <p:spPr>
-          <a:xfrm>
-            <a:off x="2962656" y="4626864"/>
-            <a:ext cx="1847773" cy="274320"/>
-          </a:xfrm>
-          <a:prstGeom prst="rect">
-            <a:avLst/>
-          </a:prstGeom>
-          <a:noFill/>
-        </p:spPr>
-        <p:txBody>
-          <a:bodyPr wrap="square" lIns="0" rIns="0" tIns="0" bIns="0" anchor="ctr">
-            <a:spAutoFit/>
-          </a:bodyPr>
-          <a:lstStyle/>
-          <a:p>
-            <a:pPr algn="l">
-              <a:lnSpc>
-                <a:spcPct val="106000"/>
-              </a:lnSpc>
-              <a:spcBef>
-                <a:spcPts val="0"/>
-              </a:spcBef>
-              <a:spcAft>
-                <a:spcPts val="0"/>
-              </a:spcAft>
-            </a:pPr>
-            <a:r>
-              <a:rPr sz="1150" b="0" i="0">
-                <a:solidFill>
-                  <a:srgbClr val="E1000F"/>
-                </a:solidFill>
-                <a:latin typeface="Marianne"/>
-              </a:rPr>
-              <a:t>● ● </a:t>
-            </a:r>
-            <a:r>
-              <a:rPr sz="1150" b="0" i="0">
-                <a:solidFill>
-                  <a:srgbClr val="D2D2E8"/>
-                </a:solidFill>
-                <a:latin typeface="Marianne"/>
-              </a:rPr>
-              <a:t>● ● ● </a:t>
-            </a:r>
-          </a:p>
-        </p:txBody>
-      </p:sp>
-      <p:sp>
-        <p:nvSpPr>
-          <p:cNvPr id="44" name="TextBox 43"/>
-          <p:cNvSpPr txBox="1"/>
-          <p:nvPr/>
-        </p:nvSpPr>
-        <p:spPr>
-          <a:xfrm>
-            <a:off x="2962656" y="4882896"/>
-            <a:ext cx="1847773" cy="329184"/>
-          </a:xfrm>
-          <a:prstGeom prst="rect">
-            <a:avLst/>
-          </a:prstGeom>
-          <a:noFill/>
-        </p:spPr>
-        <p:txBody>
-          <a:bodyPr wrap="square" lIns="0" rIns="0" tIns="0" bIns="0" anchor="t">
-            <a:spAutoFit/>
-          </a:bodyPr>
-          <a:lstStyle/>
-          <a:p>
-            <a:pPr algn="l">
-              <a:lnSpc>
-                <a:spcPct val="100000"/>
-              </a:lnSpc>
-              <a:spcBef>
-                <a:spcPts val="0"/>
-              </a:spcBef>
-              <a:spcAft>
-                <a:spcPts val="0"/>
-              </a:spcAft>
-            </a:pPr>
-            <a:r>
-              <a:rPr sz="1150" b="1" i="0">
-                <a:solidFill>
-                  <a:srgbClr val="161616"/>
-                </a:solidFill>
-                <a:latin typeface="Marianne"/>
-              </a:rPr>
-              <a:t>Éditeur US</a:t>
-            </a:r>
-          </a:p>
-          <a:p>
-            <a:pPr algn="l">
-              <a:lnSpc>
-                <a:spcPct val="100000"/>
-              </a:lnSpc>
-              <a:spcBef>
-                <a:spcPts val="100"/>
-              </a:spcBef>
-              <a:spcAft>
-                <a:spcPts val="0"/>
-              </a:spcAft>
-            </a:pPr>
-            <a:r>
-              <a:rPr sz="950" b="0" i="0">
-                <a:solidFill>
-                  <a:srgbClr val="6A6A6A"/>
-                </a:solidFill>
-                <a:latin typeface="Marianne"/>
-              </a:rPr>
-              <a:t>CLOUD Act</a:t>
-            </a:r>
-          </a:p>
-        </p:txBody>
-      </p:sp>
-      <p:sp>
-        <p:nvSpPr>
-          <p:cNvPr id="45" name="TextBox 44"/>
-          <p:cNvSpPr txBox="1"/>
-          <p:nvPr/>
-        </p:nvSpPr>
-        <p:spPr>
-          <a:xfrm>
-            <a:off x="5139613" y="4626864"/>
-            <a:ext cx="1847773" cy="274320"/>
-          </a:xfrm>
-          <a:prstGeom prst="rect">
-            <a:avLst/>
-          </a:prstGeom>
-          <a:noFill/>
-        </p:spPr>
-        <p:txBody>
-          <a:bodyPr wrap="square" lIns="0" rIns="0" tIns="0" bIns="0" anchor="ctr">
-            <a:spAutoFit/>
-          </a:bodyPr>
-          <a:lstStyle/>
-          <a:p>
-            <a:pPr algn="l">
-              <a:lnSpc>
-                <a:spcPct val="106000"/>
-              </a:lnSpc>
-              <a:spcBef>
-                <a:spcPts val="0"/>
-              </a:spcBef>
-              <a:spcAft>
-                <a:spcPts val="0"/>
-              </a:spcAft>
-            </a:pPr>
-            <a:r>
-              <a:rPr sz="1150" b="0" i="0">
-                <a:solidFill>
-                  <a:srgbClr val="18753C"/>
-                </a:solidFill>
-                <a:latin typeface="Marianne"/>
-              </a:rPr>
-              <a:t>● ● ● ● ● </a:t>
-            </a:r>
-            <a:r>
-              <a:rPr sz="1150" b="0" i="0">
-                <a:solidFill>
-                  <a:srgbClr val="D2D2E8"/>
-                </a:solidFill>
-                <a:latin typeface="Marianne"/>
-              </a:rPr>
-              <a:t/>
-            </a:r>
-          </a:p>
-        </p:txBody>
-      </p:sp>
-      <p:sp>
-        <p:nvSpPr>
-          <p:cNvPr id="46" name="TextBox 45"/>
-          <p:cNvSpPr txBox="1"/>
-          <p:nvPr/>
-        </p:nvSpPr>
-        <p:spPr>
-          <a:xfrm>
-            <a:off x="5139613" y="4882896"/>
-            <a:ext cx="1847773" cy="329184"/>
-          </a:xfrm>
-          <a:prstGeom prst="rect">
-            <a:avLst/>
-          </a:prstGeom>
-          <a:noFill/>
-        </p:spPr>
-        <p:txBody>
-          <a:bodyPr wrap="square" lIns="0" rIns="0" tIns="0" bIns="0" anchor="t">
-            <a:spAutoFit/>
-          </a:bodyPr>
-          <a:lstStyle/>
-          <a:p>
-            <a:pPr algn="l">
-              <a:lnSpc>
-                <a:spcPct val="100000"/>
-              </a:lnSpc>
-              <a:spcBef>
-                <a:spcPts val="0"/>
-              </a:spcBef>
-              <a:spcAft>
-                <a:spcPts val="0"/>
-              </a:spcAft>
-            </a:pPr>
-            <a:r>
-              <a:rPr sz="1150" b="1" i="0">
-                <a:solidFill>
-                  <a:srgbClr val="161616"/>
-                </a:solidFill>
-                <a:latin typeface="Marianne"/>
-              </a:rPr>
-              <a:t>État FR</a:t>
-            </a:r>
-          </a:p>
-          <a:p>
-            <a:pPr algn="l">
-              <a:lnSpc>
-                <a:spcPct val="100000"/>
-              </a:lnSpc>
-              <a:spcBef>
-                <a:spcPts val="100"/>
-              </a:spcBef>
-              <a:spcAft>
-                <a:spcPts val="0"/>
-              </a:spcAft>
-            </a:pPr>
-            <a:r>
-              <a:rPr sz="950" b="0" i="0">
-                <a:solidFill>
-                  <a:srgbClr val="6A6A6A"/>
-                </a:solidFill>
-                <a:latin typeface="Marianne"/>
-              </a:rPr>
-              <a:t>SecNumCloud</a:t>
-            </a:r>
-          </a:p>
-        </p:txBody>
-      </p:sp>
-      <p:sp>
-        <p:nvSpPr>
-          <p:cNvPr id="47" name="TextBox 46"/>
-          <p:cNvSpPr txBox="1"/>
-          <p:nvPr/>
-        </p:nvSpPr>
-        <p:spPr>
-          <a:xfrm>
-            <a:off x="7316571" y="4626864"/>
-            <a:ext cx="1847773" cy="274320"/>
-          </a:xfrm>
-          <a:prstGeom prst="rect">
-            <a:avLst/>
-          </a:prstGeom>
-          <a:noFill/>
-        </p:spPr>
-        <p:txBody>
-          <a:bodyPr wrap="square" lIns="0" rIns="0" tIns="0" bIns="0" anchor="ctr">
-            <a:spAutoFit/>
-          </a:bodyPr>
-          <a:lstStyle/>
-          <a:p>
-            <a:pPr algn="l">
-              <a:lnSpc>
-                <a:spcPct val="106000"/>
-              </a:lnSpc>
-              <a:spcBef>
-                <a:spcPts val="0"/>
-              </a:spcBef>
-              <a:spcAft>
-                <a:spcPts val="0"/>
-              </a:spcAft>
-            </a:pPr>
-            <a:r>
-              <a:rPr sz="1150" b="0" i="0">
-                <a:solidFill>
-                  <a:srgbClr val="E1000F"/>
-                </a:solidFill>
-                <a:latin typeface="Marianne"/>
-              </a:rPr>
-              <a:t>● </a:t>
-            </a:r>
-            <a:r>
-              <a:rPr sz="1150" b="0" i="0">
-                <a:solidFill>
-                  <a:srgbClr val="D2D2E8"/>
-                </a:solidFill>
-                <a:latin typeface="Marianne"/>
-              </a:rPr>
-              <a:t>● ● ● ● </a:t>
-            </a:r>
-          </a:p>
-        </p:txBody>
-      </p:sp>
-      <p:sp>
-        <p:nvSpPr>
-          <p:cNvPr id="48" name="TextBox 47"/>
-          <p:cNvSpPr txBox="1"/>
-          <p:nvPr/>
-        </p:nvSpPr>
-        <p:spPr>
-          <a:xfrm>
-            <a:off x="7316571" y="4882896"/>
-            <a:ext cx="1847773" cy="329184"/>
-          </a:xfrm>
-          <a:prstGeom prst="rect">
-            <a:avLst/>
-          </a:prstGeom>
-          <a:noFill/>
-        </p:spPr>
-        <p:txBody>
-          <a:bodyPr wrap="square" lIns="0" rIns="0" tIns="0" bIns="0" anchor="t">
-            <a:spAutoFit/>
-          </a:bodyPr>
-          <a:lstStyle/>
-          <a:p>
-            <a:pPr algn="l">
-              <a:lnSpc>
-                <a:spcPct val="100000"/>
-              </a:lnSpc>
-              <a:spcBef>
-                <a:spcPts val="0"/>
-              </a:spcBef>
-              <a:spcAft>
-                <a:spcPts val="0"/>
-              </a:spcAft>
-            </a:pPr>
-            <a:r>
-              <a:rPr sz="1150" b="1" i="0">
-                <a:solidFill>
-                  <a:srgbClr val="161616"/>
-                </a:solidFill>
-                <a:latin typeface="Marianne"/>
-              </a:rPr>
-              <a:t>Éditeur CN</a:t>
-            </a:r>
-          </a:p>
-          <a:p>
-            <a:pPr algn="l">
-              <a:lnSpc>
-                <a:spcPct val="100000"/>
-              </a:lnSpc>
-              <a:spcBef>
-                <a:spcPts val="100"/>
-              </a:spcBef>
-              <a:spcAft>
-                <a:spcPts val="0"/>
-              </a:spcAft>
-            </a:pPr>
-            <a:r>
-              <a:rPr sz="950" b="0" i="0">
-                <a:solidFill>
-                  <a:srgbClr val="6A6A6A"/>
-                </a:solidFill>
-                <a:latin typeface="Marianne"/>
-              </a:rPr>
-              <a:t>+ routeur US</a:t>
-            </a:r>
-          </a:p>
-        </p:txBody>
-      </p:sp>
-      <p:sp>
-        <p:nvSpPr>
-          <p:cNvPr id="49" name="TextBox 48"/>
-          <p:cNvSpPr txBox="1"/>
-          <p:nvPr/>
-        </p:nvSpPr>
-        <p:spPr>
-          <a:xfrm>
-            <a:off x="9493529" y="4626864"/>
-            <a:ext cx="1847773" cy="274320"/>
-          </a:xfrm>
-          <a:prstGeom prst="rect">
-            <a:avLst/>
-          </a:prstGeom>
-          <a:noFill/>
-        </p:spPr>
-        <p:txBody>
-          <a:bodyPr wrap="square" lIns="0" rIns="0" tIns="0" bIns="0" anchor="ctr">
-            <a:spAutoFit/>
-          </a:bodyPr>
-          <a:lstStyle/>
-          <a:p>
-            <a:pPr algn="l">
-              <a:lnSpc>
-                <a:spcPct val="106000"/>
-              </a:lnSpc>
-              <a:spcBef>
-                <a:spcPts val="0"/>
-              </a:spcBef>
-              <a:spcAft>
-                <a:spcPts val="0"/>
-              </a:spcAft>
-            </a:pPr>
-            <a:r>
-              <a:rPr sz="1150" b="0" i="0">
-                <a:solidFill>
-                  <a:srgbClr val="E1000F"/>
-                </a:solidFill>
-                <a:latin typeface="Marianne"/>
-              </a:rPr>
-              <a:t>● </a:t>
-            </a:r>
-            <a:r>
-              <a:rPr sz="1150" b="0" i="0">
-                <a:solidFill>
-                  <a:srgbClr val="D2D2E8"/>
-                </a:solidFill>
-                <a:latin typeface="Marianne"/>
-              </a:rPr>
-              <a:t>● ● ● ● </a:t>
-            </a:r>
-          </a:p>
-        </p:txBody>
-      </p:sp>
-      <p:sp>
-        <p:nvSpPr>
-          <p:cNvPr id="50" name="TextBox 49"/>
-          <p:cNvSpPr txBox="1"/>
-          <p:nvPr/>
-        </p:nvSpPr>
-        <p:spPr>
-          <a:xfrm>
-            <a:off x="9493529" y="4882896"/>
-            <a:ext cx="1847773" cy="329184"/>
-          </a:xfrm>
-          <a:prstGeom prst="rect">
-            <a:avLst/>
-          </a:prstGeom>
-          <a:noFill/>
-        </p:spPr>
-        <p:txBody>
-          <a:bodyPr wrap="square" lIns="0" rIns="0" tIns="0" bIns="0" anchor="t">
-            <a:spAutoFit/>
-          </a:bodyPr>
-          <a:lstStyle/>
-          <a:p>
-            <a:pPr algn="l">
-              <a:lnSpc>
-                <a:spcPct val="100000"/>
-              </a:lnSpc>
-              <a:spcBef>
-                <a:spcPts val="0"/>
-              </a:spcBef>
-              <a:spcAft>
-                <a:spcPts val="0"/>
-              </a:spcAft>
-            </a:pPr>
-            <a:r>
-              <a:rPr sz="1150" b="1" i="0">
-                <a:solidFill>
-                  <a:srgbClr val="161616"/>
-                </a:solidFill>
-                <a:latin typeface="Marianne"/>
-              </a:rPr>
-              <a:t>Éditeur CN</a:t>
-            </a:r>
-          </a:p>
-          <a:p>
-            <a:pPr algn="l">
-              <a:lnSpc>
-                <a:spcPct val="100000"/>
-              </a:lnSpc>
-              <a:spcBef>
-                <a:spcPts val="100"/>
-              </a:spcBef>
-              <a:spcAft>
-                <a:spcPts val="0"/>
-              </a:spcAft>
-            </a:pPr>
-            <a:r>
-              <a:rPr sz="950" b="0" i="0">
-                <a:solidFill>
-                  <a:srgbClr val="6A6A6A"/>
-                </a:solidFill>
-                <a:latin typeface="Marianne"/>
-              </a:rPr>
-              <a:t>+ routeur US</a:t>
-            </a:r>
-          </a:p>
-        </p:txBody>
-      </p:sp>
-      <p:sp>
-        <p:nvSpPr>
-          <p:cNvPr id="51" name="Rounded Rectangle 50"/>
+              <a:rPr sz="850" b="0" i="0">
+                <a:solidFill>
+                  <a:srgbClr val="C9C9F2"/>
+                </a:solidFill>
+                <a:latin typeface="Marianne"/>
+              </a:rPr>
+              <a:t>OpenRouter</a:t>
+            </a:r>
+          </a:p>
+        </p:txBody>
+      </p:sp>
+      <p:sp>
+        <p:nvSpPr>
+          <p:cNvPr id="24" name="Rounded Rectangle 23"/>
           <p:cNvSpPr/>
           <p:nvPr/>
         </p:nvSpPr>
         <p:spPr>
           <a:xfrm>
-            <a:off x="777240" y="5340096"/>
-            <a:ext cx="10637215" cy="713232"/>
+            <a:off x="777240" y="2980944"/>
+            <a:ext cx="10637215" cy="603504"/>
           </a:xfrm>
           <a:prstGeom prst="roundRect">
             <a:avLst>
@@ -6297,7 +4993,3855 @@
       </p:sp>
       <p:pic>
         <p:nvPicPr>
-          <p:cNvPr id="52" name="Picture 51" descr="settings-3.png"/>
+          <p:cNvPr id="25" name="Picture 24" descr="bank.png"/>
+          <p:cNvPicPr>
+            <a:picLocks noChangeAspect="1"/>
+          </p:cNvPicPr>
+          <p:nvPr/>
+        </p:nvPicPr>
+        <p:blipFill>
+          <a:blip r:embed="rId3"/>
+          <a:stretch>
+            <a:fillRect/>
+          </a:stretch>
+        </p:blipFill>
+        <p:spPr>
+          <a:xfrm>
+            <a:off x="905256" y="3118103"/>
+            <a:ext cx="329184" cy="329184"/>
+          </a:xfrm>
+          <a:prstGeom prst="rect">
+            <a:avLst/>
+          </a:prstGeom>
+        </p:spPr>
+      </p:pic>
+      <p:sp>
+        <p:nvSpPr>
+          <p:cNvPr id="26" name="TextBox 25"/>
+          <p:cNvSpPr txBox="1"/>
+          <p:nvPr/>
+        </p:nvSpPr>
+        <p:spPr>
+          <a:xfrm>
+            <a:off x="1344168" y="2980944"/>
+            <a:ext cx="1106424" cy="603504"/>
+          </a:xfrm>
+          <a:prstGeom prst="rect">
+            <a:avLst/>
+          </a:prstGeom>
+          <a:noFill/>
+        </p:spPr>
+        <p:txBody>
+          <a:bodyPr wrap="square" lIns="0" rIns="0" tIns="0" bIns="0" anchor="ctr">
+            <a:spAutoFit/>
+          </a:bodyPr>
+          <a:lstStyle/>
+          <a:p>
+            <a:pPr algn="l">
+              <a:lnSpc>
+                <a:spcPct val="100000"/>
+              </a:lnSpc>
+              <a:spcBef>
+                <a:spcPts val="0"/>
+              </a:spcBef>
+              <a:spcAft>
+                <a:spcPts val="0"/>
+              </a:spcAft>
+            </a:pPr>
+            <a:r>
+              <a:rPr sz="1300" b="1" i="0">
+                <a:solidFill>
+                  <a:srgbClr val="161616"/>
+                </a:solidFill>
+                <a:latin typeface="Marianne"/>
+              </a:rPr>
+              <a:t>Prix</a:t>
+            </a:r>
+          </a:p>
+          <a:p>
+            <a:pPr algn="l">
+              <a:lnSpc>
+                <a:spcPct val="100000"/>
+              </a:lnSpc>
+              <a:spcBef>
+                <a:spcPts val="200"/>
+              </a:spcBef>
+              <a:spcAft>
+                <a:spcPts val="0"/>
+              </a:spcAft>
+            </a:pPr>
+            <a:r>
+              <a:rPr sz="900" b="0" i="0">
+                <a:solidFill>
+                  <a:srgbClr val="6A6A6A"/>
+                </a:solidFill>
+                <a:latin typeface="Marianne"/>
+              </a:rPr>
+              <a:t>/ 1M tokens</a:t>
+            </a:r>
+          </a:p>
+        </p:txBody>
+      </p:sp>
+      <p:sp>
+        <p:nvSpPr>
+          <p:cNvPr id="27" name="TextBox 26"/>
+          <p:cNvSpPr txBox="1"/>
+          <p:nvPr/>
+        </p:nvSpPr>
+        <p:spPr>
+          <a:xfrm>
+            <a:off x="2633472" y="3026663"/>
+            <a:ext cx="1058483" cy="274320"/>
+          </a:xfrm>
+          <a:prstGeom prst="rect">
+            <a:avLst/>
+          </a:prstGeom>
+          <a:noFill/>
+        </p:spPr>
+        <p:txBody>
+          <a:bodyPr wrap="square" lIns="0" rIns="0" tIns="0" bIns="0" anchor="ctr">
+            <a:spAutoFit/>
+          </a:bodyPr>
+          <a:lstStyle/>
+          <a:p>
+            <a:pPr algn="l">
+              <a:lnSpc>
+                <a:spcPct val="106000"/>
+              </a:lnSpc>
+              <a:spcBef>
+                <a:spcPts val="0"/>
+              </a:spcBef>
+              <a:spcAft>
+                <a:spcPts val="0"/>
+              </a:spcAft>
+            </a:pPr>
+            <a:r>
+              <a:rPr sz="1150" b="0" i="0">
+                <a:solidFill>
+                  <a:srgbClr val="E1000F"/>
+                </a:solidFill>
+                <a:latin typeface="Marianne"/>
+              </a:rPr>
+              <a:t>● ● </a:t>
+            </a:r>
+            <a:r>
+              <a:rPr sz="1150" b="0" i="0">
+                <a:solidFill>
+                  <a:srgbClr val="D2D2E8"/>
+                </a:solidFill>
+                <a:latin typeface="Marianne"/>
+              </a:rPr>
+              <a:t>● ● ● </a:t>
+            </a:r>
+          </a:p>
+        </p:txBody>
+      </p:sp>
+      <p:sp>
+        <p:nvSpPr>
+          <p:cNvPr id="28" name="TextBox 27"/>
+          <p:cNvSpPr txBox="1"/>
+          <p:nvPr/>
+        </p:nvSpPr>
+        <p:spPr>
+          <a:xfrm>
+            <a:off x="2633472" y="3255263"/>
+            <a:ext cx="1058483" cy="310896"/>
+          </a:xfrm>
+          <a:prstGeom prst="rect">
+            <a:avLst/>
+          </a:prstGeom>
+          <a:noFill/>
+        </p:spPr>
+        <p:txBody>
+          <a:bodyPr wrap="square" lIns="0" rIns="0" tIns="0" bIns="0" anchor="t">
+            <a:spAutoFit/>
+          </a:bodyPr>
+          <a:lstStyle/>
+          <a:p>
+            <a:pPr algn="l">
+              <a:lnSpc>
+                <a:spcPct val="100000"/>
+              </a:lnSpc>
+              <a:spcBef>
+                <a:spcPts val="0"/>
+              </a:spcBef>
+              <a:spcAft>
+                <a:spcPts val="0"/>
+              </a:spcAft>
+            </a:pPr>
+            <a:r>
+              <a:rPr sz="1000" b="1" i="0">
+                <a:solidFill>
+                  <a:srgbClr val="161616"/>
+                </a:solidFill>
+                <a:latin typeface="Marianne"/>
+              </a:rPr>
+              <a:t>5 $ / 25 $</a:t>
+            </a:r>
+          </a:p>
+          <a:p>
+            <a:pPr algn="l">
+              <a:lnSpc>
+                <a:spcPct val="100000"/>
+              </a:lnSpc>
+              <a:spcBef>
+                <a:spcPts val="100"/>
+              </a:spcBef>
+              <a:spcAft>
+                <a:spcPts val="0"/>
+              </a:spcAft>
+            </a:pPr>
+            <a:r>
+              <a:rPr sz="800" b="0" i="0">
+                <a:solidFill>
+                  <a:srgbClr val="6A6A6A"/>
+                </a:solidFill>
+                <a:latin typeface="Marianne"/>
+              </a:rPr>
+              <a:t>+ siège 20–125 $/m</a:t>
+            </a:r>
+          </a:p>
+        </p:txBody>
+      </p:sp>
+      <p:sp>
+        <p:nvSpPr>
+          <p:cNvPr id="29" name="TextBox 28"/>
+          <p:cNvSpPr txBox="1"/>
+          <p:nvPr/>
+        </p:nvSpPr>
+        <p:spPr>
+          <a:xfrm>
+            <a:off x="3911411" y="3026663"/>
+            <a:ext cx="1058483" cy="274320"/>
+          </a:xfrm>
+          <a:prstGeom prst="rect">
+            <a:avLst/>
+          </a:prstGeom>
+          <a:noFill/>
+        </p:spPr>
+        <p:txBody>
+          <a:bodyPr wrap="square" lIns="0" rIns="0" tIns="0" bIns="0" anchor="ctr">
+            <a:spAutoFit/>
+          </a:bodyPr>
+          <a:lstStyle/>
+          <a:p>
+            <a:pPr algn="l">
+              <a:lnSpc>
+                <a:spcPct val="106000"/>
+              </a:lnSpc>
+              <a:spcBef>
+                <a:spcPts val="0"/>
+              </a:spcBef>
+              <a:spcAft>
+                <a:spcPts val="0"/>
+              </a:spcAft>
+            </a:pPr>
+            <a:r>
+              <a:rPr sz="1150" b="0" i="0">
+                <a:solidFill>
+                  <a:srgbClr val="E1000F"/>
+                </a:solidFill>
+                <a:latin typeface="Marianne"/>
+              </a:rPr>
+              <a:t>● </a:t>
+            </a:r>
+            <a:r>
+              <a:rPr sz="1150" b="0" i="0">
+                <a:solidFill>
+                  <a:srgbClr val="D2D2E8"/>
+                </a:solidFill>
+                <a:latin typeface="Marianne"/>
+              </a:rPr>
+              <a:t>● ● ● ● </a:t>
+            </a:r>
+          </a:p>
+        </p:txBody>
+      </p:sp>
+      <p:sp>
+        <p:nvSpPr>
+          <p:cNvPr id="30" name="TextBox 29"/>
+          <p:cNvSpPr txBox="1"/>
+          <p:nvPr/>
+        </p:nvSpPr>
+        <p:spPr>
+          <a:xfrm>
+            <a:off x="3911411" y="3255263"/>
+            <a:ext cx="1058483" cy="310896"/>
+          </a:xfrm>
+          <a:prstGeom prst="rect">
+            <a:avLst/>
+          </a:prstGeom>
+          <a:noFill/>
+        </p:spPr>
+        <p:txBody>
+          <a:bodyPr wrap="square" lIns="0" rIns="0" tIns="0" bIns="0" anchor="t">
+            <a:spAutoFit/>
+          </a:bodyPr>
+          <a:lstStyle/>
+          <a:p>
+            <a:pPr algn="l">
+              <a:lnSpc>
+                <a:spcPct val="100000"/>
+              </a:lnSpc>
+              <a:spcBef>
+                <a:spcPts val="0"/>
+              </a:spcBef>
+              <a:spcAft>
+                <a:spcPts val="0"/>
+              </a:spcAft>
+            </a:pPr>
+            <a:r>
+              <a:rPr sz="1000" b="1" i="0">
+                <a:solidFill>
+                  <a:srgbClr val="161616"/>
+                </a:solidFill>
+                <a:latin typeface="Marianne"/>
+              </a:rPr>
+              <a:t>10 $ / 50 $</a:t>
+            </a:r>
+          </a:p>
+          <a:p>
+            <a:pPr algn="l">
+              <a:lnSpc>
+                <a:spcPct val="100000"/>
+              </a:lnSpc>
+              <a:spcBef>
+                <a:spcPts val="100"/>
+              </a:spcBef>
+              <a:spcAft>
+                <a:spcPts val="0"/>
+              </a:spcAft>
+            </a:pPr>
+            <a:r>
+              <a:rPr sz="800" b="0" i="0">
+                <a:solidFill>
+                  <a:srgbClr val="6A6A6A"/>
+                </a:solidFill>
+                <a:latin typeface="Marianne"/>
+              </a:rPr>
+              <a:t>+ siège ≈20 €/m</a:t>
+            </a:r>
+          </a:p>
+        </p:txBody>
+      </p:sp>
+      <p:sp>
+        <p:nvSpPr>
+          <p:cNvPr id="31" name="TextBox 30"/>
+          <p:cNvSpPr txBox="1"/>
+          <p:nvPr/>
+        </p:nvSpPr>
+        <p:spPr>
+          <a:xfrm>
+            <a:off x="5189350" y="3026663"/>
+            <a:ext cx="1058483" cy="274320"/>
+          </a:xfrm>
+          <a:prstGeom prst="rect">
+            <a:avLst/>
+          </a:prstGeom>
+          <a:noFill/>
+        </p:spPr>
+        <p:txBody>
+          <a:bodyPr wrap="square" lIns="0" rIns="0" tIns="0" bIns="0" anchor="ctr">
+            <a:spAutoFit/>
+          </a:bodyPr>
+          <a:lstStyle/>
+          <a:p>
+            <a:pPr algn="l">
+              <a:lnSpc>
+                <a:spcPct val="106000"/>
+              </a:lnSpc>
+              <a:spcBef>
+                <a:spcPts val="0"/>
+              </a:spcBef>
+              <a:spcAft>
+                <a:spcPts val="0"/>
+              </a:spcAft>
+            </a:pPr>
+            <a:r>
+              <a:rPr sz="1150" b="0" i="0">
+                <a:solidFill>
+                  <a:srgbClr val="18753C"/>
+                </a:solidFill>
+                <a:latin typeface="Marianne"/>
+              </a:rPr>
+              <a:t>● ● ● ● </a:t>
+            </a:r>
+            <a:r>
+              <a:rPr sz="1150" b="0" i="0">
+                <a:solidFill>
+                  <a:srgbClr val="D2D2E8"/>
+                </a:solidFill>
+                <a:latin typeface="Marianne"/>
+              </a:rPr>
+              <a:t>● </a:t>
+            </a:r>
+          </a:p>
+        </p:txBody>
+      </p:sp>
+      <p:sp>
+        <p:nvSpPr>
+          <p:cNvPr id="32" name="TextBox 31"/>
+          <p:cNvSpPr txBox="1"/>
+          <p:nvPr/>
+        </p:nvSpPr>
+        <p:spPr>
+          <a:xfrm>
+            <a:off x="5189350" y="3255263"/>
+            <a:ext cx="1058483" cy="310896"/>
+          </a:xfrm>
+          <a:prstGeom prst="rect">
+            <a:avLst/>
+          </a:prstGeom>
+          <a:noFill/>
+        </p:spPr>
+        <p:txBody>
+          <a:bodyPr wrap="square" lIns="0" rIns="0" tIns="0" bIns="0" anchor="t">
+            <a:spAutoFit/>
+          </a:bodyPr>
+          <a:lstStyle/>
+          <a:p>
+            <a:pPr algn="l">
+              <a:lnSpc>
+                <a:spcPct val="100000"/>
+              </a:lnSpc>
+              <a:spcBef>
+                <a:spcPts val="0"/>
+              </a:spcBef>
+              <a:spcAft>
+                <a:spcPts val="0"/>
+              </a:spcAft>
+            </a:pPr>
+            <a:r>
+              <a:rPr sz="1000" b="1" i="0">
+                <a:solidFill>
+                  <a:srgbClr val="161616"/>
+                </a:solidFill>
+                <a:latin typeface="Marianne"/>
+              </a:rPr>
+              <a:t>1,50 $ / 7,50 $</a:t>
+            </a:r>
+          </a:p>
+          <a:p>
+            <a:pPr algn="l">
+              <a:lnSpc>
+                <a:spcPct val="100000"/>
+              </a:lnSpc>
+              <a:spcBef>
+                <a:spcPts val="100"/>
+              </a:spcBef>
+              <a:spcAft>
+                <a:spcPts val="0"/>
+              </a:spcAft>
+            </a:pPr>
+            <a:r>
+              <a:rPr sz="800" b="0" i="0">
+                <a:solidFill>
+                  <a:srgbClr val="6A6A6A"/>
+                </a:solidFill>
+                <a:latin typeface="Marianne"/>
+              </a:rPr>
+              <a:t>plans dès 14,99 $/m</a:t>
+            </a:r>
+          </a:p>
+        </p:txBody>
+      </p:sp>
+      <p:sp>
+        <p:nvSpPr>
+          <p:cNvPr id="33" name="TextBox 32"/>
+          <p:cNvSpPr txBox="1"/>
+          <p:nvPr/>
+        </p:nvSpPr>
+        <p:spPr>
+          <a:xfrm>
+            <a:off x="6467289" y="3026663"/>
+            <a:ext cx="1058483" cy="274320"/>
+          </a:xfrm>
+          <a:prstGeom prst="rect">
+            <a:avLst/>
+          </a:prstGeom>
+          <a:noFill/>
+        </p:spPr>
+        <p:txBody>
+          <a:bodyPr wrap="square" lIns="0" rIns="0" tIns="0" bIns="0" anchor="ctr">
+            <a:spAutoFit/>
+          </a:bodyPr>
+          <a:lstStyle/>
+          <a:p>
+            <a:pPr algn="l">
+              <a:lnSpc>
+                <a:spcPct val="106000"/>
+              </a:lnSpc>
+              <a:spcBef>
+                <a:spcPts val="0"/>
+              </a:spcBef>
+              <a:spcAft>
+                <a:spcPts val="0"/>
+              </a:spcAft>
+            </a:pPr>
+            <a:r>
+              <a:rPr sz="1150" b="0" i="0">
+                <a:solidFill>
+                  <a:srgbClr val="18753C"/>
+                </a:solidFill>
+                <a:latin typeface="Marianne"/>
+              </a:rPr>
+              <a:t>● ● ● ● ● </a:t>
+            </a:r>
+            <a:r>
+              <a:rPr sz="1150" b="0" i="0">
+                <a:solidFill>
+                  <a:srgbClr val="D2D2E8"/>
+                </a:solidFill>
+                <a:latin typeface="Marianne"/>
+              </a:rPr>
+              <a:t/>
+            </a:r>
+          </a:p>
+        </p:txBody>
+      </p:sp>
+      <p:sp>
+        <p:nvSpPr>
+          <p:cNvPr id="34" name="TextBox 33"/>
+          <p:cNvSpPr txBox="1"/>
+          <p:nvPr/>
+        </p:nvSpPr>
+        <p:spPr>
+          <a:xfrm>
+            <a:off x="6467289" y="3255263"/>
+            <a:ext cx="1058483" cy="310896"/>
+          </a:xfrm>
+          <a:prstGeom prst="rect">
+            <a:avLst/>
+          </a:prstGeom>
+          <a:noFill/>
+        </p:spPr>
+        <p:txBody>
+          <a:bodyPr wrap="square" lIns="0" rIns="0" tIns="0" bIns="0" anchor="t">
+            <a:spAutoFit/>
+          </a:bodyPr>
+          <a:lstStyle/>
+          <a:p>
+            <a:pPr algn="l">
+              <a:lnSpc>
+                <a:spcPct val="100000"/>
+              </a:lnSpc>
+              <a:spcBef>
+                <a:spcPts val="0"/>
+              </a:spcBef>
+              <a:spcAft>
+                <a:spcPts val="0"/>
+              </a:spcAft>
+            </a:pPr>
+            <a:r>
+              <a:rPr sz="1000" b="1" i="0">
+                <a:solidFill>
+                  <a:srgbClr val="161616"/>
+                </a:solidFill>
+                <a:latin typeface="Marianne"/>
+              </a:rPr>
+              <a:t>Gratuit</a:t>
+            </a:r>
+          </a:p>
+          <a:p>
+            <a:pPr algn="l">
+              <a:lnSpc>
+                <a:spcPct val="100000"/>
+              </a:lnSpc>
+              <a:spcBef>
+                <a:spcPts val="100"/>
+              </a:spcBef>
+              <a:spcAft>
+                <a:spcPts val="0"/>
+              </a:spcAft>
+            </a:pPr>
+            <a:r>
+              <a:rPr sz="800" b="0" i="0">
+                <a:solidFill>
+                  <a:srgbClr val="6A6A6A"/>
+                </a:solidFill>
+                <a:latin typeface="Marianne"/>
+              </a:rPr>
+              <a:t>quotas, agents État</a:t>
+            </a:r>
+          </a:p>
+        </p:txBody>
+      </p:sp>
+      <p:sp>
+        <p:nvSpPr>
+          <p:cNvPr id="35" name="TextBox 34"/>
+          <p:cNvSpPr txBox="1"/>
+          <p:nvPr/>
+        </p:nvSpPr>
+        <p:spPr>
+          <a:xfrm>
+            <a:off x="7745229" y="3026663"/>
+            <a:ext cx="1058483" cy="274320"/>
+          </a:xfrm>
+          <a:prstGeom prst="rect">
+            <a:avLst/>
+          </a:prstGeom>
+          <a:noFill/>
+        </p:spPr>
+        <p:txBody>
+          <a:bodyPr wrap="square" lIns="0" rIns="0" tIns="0" bIns="0" anchor="ctr">
+            <a:spAutoFit/>
+          </a:bodyPr>
+          <a:lstStyle/>
+          <a:p>
+            <a:pPr algn="l">
+              <a:lnSpc>
+                <a:spcPct val="106000"/>
+              </a:lnSpc>
+              <a:spcBef>
+                <a:spcPts val="0"/>
+              </a:spcBef>
+              <a:spcAft>
+                <a:spcPts val="0"/>
+              </a:spcAft>
+            </a:pPr>
+            <a:r>
+              <a:rPr sz="1150" b="0" i="0">
+                <a:solidFill>
+                  <a:srgbClr val="18753C"/>
+                </a:solidFill>
+                <a:latin typeface="Marianne"/>
+              </a:rPr>
+              <a:t>● ● ● ● ● </a:t>
+            </a:r>
+            <a:r>
+              <a:rPr sz="1150" b="0" i="0">
+                <a:solidFill>
+                  <a:srgbClr val="D2D2E8"/>
+                </a:solidFill>
+                <a:latin typeface="Marianne"/>
+              </a:rPr>
+              <a:t/>
+            </a:r>
+          </a:p>
+        </p:txBody>
+      </p:sp>
+      <p:sp>
+        <p:nvSpPr>
+          <p:cNvPr id="36" name="TextBox 35"/>
+          <p:cNvSpPr txBox="1"/>
+          <p:nvPr/>
+        </p:nvSpPr>
+        <p:spPr>
+          <a:xfrm>
+            <a:off x="7745229" y="3255263"/>
+            <a:ext cx="1058483" cy="310896"/>
+          </a:xfrm>
+          <a:prstGeom prst="rect">
+            <a:avLst/>
+          </a:prstGeom>
+          <a:noFill/>
+        </p:spPr>
+        <p:txBody>
+          <a:bodyPr wrap="square" lIns="0" rIns="0" tIns="0" bIns="0" anchor="t">
+            <a:spAutoFit/>
+          </a:bodyPr>
+          <a:lstStyle/>
+          <a:p>
+            <a:pPr algn="l">
+              <a:lnSpc>
+                <a:spcPct val="100000"/>
+              </a:lnSpc>
+              <a:spcBef>
+                <a:spcPts val="0"/>
+              </a:spcBef>
+              <a:spcAft>
+                <a:spcPts val="0"/>
+              </a:spcAft>
+            </a:pPr>
+            <a:r>
+              <a:rPr sz="1000" b="1" i="0">
+                <a:solidFill>
+                  <a:srgbClr val="161616"/>
+                </a:solidFill>
+                <a:latin typeface="Marianne"/>
+              </a:rPr>
+              <a:t>0,44 $ / 0,87 $</a:t>
+            </a:r>
+          </a:p>
+          <a:p>
+            <a:pPr algn="l">
+              <a:lnSpc>
+                <a:spcPct val="100000"/>
+              </a:lnSpc>
+              <a:spcBef>
+                <a:spcPts val="100"/>
+              </a:spcBef>
+              <a:spcAft>
+                <a:spcPts val="0"/>
+              </a:spcAft>
+            </a:pPr>
+            <a:r>
+              <a:rPr sz="800" b="0" i="0">
+                <a:solidFill>
+                  <a:srgbClr val="6A6A6A"/>
+                </a:solidFill>
+                <a:latin typeface="Marianne"/>
+              </a:rPr>
+              <a:t>tarif preview *</a:t>
+            </a:r>
+          </a:p>
+        </p:txBody>
+      </p:sp>
+      <p:sp>
+        <p:nvSpPr>
+          <p:cNvPr id="37" name="TextBox 36"/>
+          <p:cNvSpPr txBox="1"/>
+          <p:nvPr/>
+        </p:nvSpPr>
+        <p:spPr>
+          <a:xfrm>
+            <a:off x="9023168" y="3026663"/>
+            <a:ext cx="1058483" cy="274320"/>
+          </a:xfrm>
+          <a:prstGeom prst="rect">
+            <a:avLst/>
+          </a:prstGeom>
+          <a:noFill/>
+        </p:spPr>
+        <p:txBody>
+          <a:bodyPr wrap="square" lIns="0" rIns="0" tIns="0" bIns="0" anchor="ctr">
+            <a:spAutoFit/>
+          </a:bodyPr>
+          <a:lstStyle/>
+          <a:p>
+            <a:pPr algn="l">
+              <a:lnSpc>
+                <a:spcPct val="106000"/>
+              </a:lnSpc>
+              <a:spcBef>
+                <a:spcPts val="0"/>
+              </a:spcBef>
+              <a:spcAft>
+                <a:spcPts val="0"/>
+              </a:spcAft>
+            </a:pPr>
+            <a:r>
+              <a:rPr sz="1150" b="0" i="0">
+                <a:solidFill>
+                  <a:srgbClr val="18753C"/>
+                </a:solidFill>
+                <a:latin typeface="Marianne"/>
+              </a:rPr>
+              <a:t>● ● ● ● </a:t>
+            </a:r>
+            <a:r>
+              <a:rPr sz="1150" b="0" i="0">
+                <a:solidFill>
+                  <a:srgbClr val="D2D2E8"/>
+                </a:solidFill>
+                <a:latin typeface="Marianne"/>
+              </a:rPr>
+              <a:t>● </a:t>
+            </a:r>
+          </a:p>
+        </p:txBody>
+      </p:sp>
+      <p:sp>
+        <p:nvSpPr>
+          <p:cNvPr id="38" name="TextBox 37"/>
+          <p:cNvSpPr txBox="1"/>
+          <p:nvPr/>
+        </p:nvSpPr>
+        <p:spPr>
+          <a:xfrm>
+            <a:off x="9023168" y="3255263"/>
+            <a:ext cx="1058483" cy="310896"/>
+          </a:xfrm>
+          <a:prstGeom prst="rect">
+            <a:avLst/>
+          </a:prstGeom>
+          <a:noFill/>
+        </p:spPr>
+        <p:txBody>
+          <a:bodyPr wrap="square" lIns="0" rIns="0" tIns="0" bIns="0" anchor="t">
+            <a:spAutoFit/>
+          </a:bodyPr>
+          <a:lstStyle/>
+          <a:p>
+            <a:pPr algn="l">
+              <a:lnSpc>
+                <a:spcPct val="100000"/>
+              </a:lnSpc>
+              <a:spcBef>
+                <a:spcPts val="0"/>
+              </a:spcBef>
+              <a:spcAft>
+                <a:spcPts val="0"/>
+              </a:spcAft>
+            </a:pPr>
+            <a:r>
+              <a:rPr sz="1000" b="1" i="0">
+                <a:solidFill>
+                  <a:srgbClr val="161616"/>
+                </a:solidFill>
+                <a:latin typeface="Marianne"/>
+              </a:rPr>
+              <a:t>1,40 $ / 4,40 $</a:t>
+            </a:r>
+          </a:p>
+        </p:txBody>
+      </p:sp>
+      <p:sp>
+        <p:nvSpPr>
+          <p:cNvPr id="39" name="TextBox 38"/>
+          <p:cNvSpPr txBox="1"/>
+          <p:nvPr/>
+        </p:nvSpPr>
+        <p:spPr>
+          <a:xfrm>
+            <a:off x="10301107" y="3026663"/>
+            <a:ext cx="1058483" cy="274320"/>
+          </a:xfrm>
+          <a:prstGeom prst="rect">
+            <a:avLst/>
+          </a:prstGeom>
+          <a:noFill/>
+        </p:spPr>
+        <p:txBody>
+          <a:bodyPr wrap="square" lIns="0" rIns="0" tIns="0" bIns="0" anchor="ctr">
+            <a:spAutoFit/>
+          </a:bodyPr>
+          <a:lstStyle/>
+          <a:p>
+            <a:pPr algn="l">
+              <a:lnSpc>
+                <a:spcPct val="106000"/>
+              </a:lnSpc>
+              <a:spcBef>
+                <a:spcPts val="0"/>
+              </a:spcBef>
+              <a:spcAft>
+                <a:spcPts val="0"/>
+              </a:spcAft>
+            </a:pPr>
+            <a:r>
+              <a:rPr sz="1150" b="0" i="0">
+                <a:solidFill>
+                  <a:srgbClr val="B85C00"/>
+                </a:solidFill>
+                <a:latin typeface="Marianne"/>
+              </a:rPr>
+              <a:t>● ● ● </a:t>
+            </a:r>
+            <a:r>
+              <a:rPr sz="1150" b="0" i="0">
+                <a:solidFill>
+                  <a:srgbClr val="D2D2E8"/>
+                </a:solidFill>
+                <a:latin typeface="Marianne"/>
+              </a:rPr>
+              <a:t>● ● </a:t>
+            </a:r>
+          </a:p>
+        </p:txBody>
+      </p:sp>
+      <p:sp>
+        <p:nvSpPr>
+          <p:cNvPr id="40" name="TextBox 39"/>
+          <p:cNvSpPr txBox="1"/>
+          <p:nvPr/>
+        </p:nvSpPr>
+        <p:spPr>
+          <a:xfrm>
+            <a:off x="10301107" y="3255263"/>
+            <a:ext cx="1058483" cy="310896"/>
+          </a:xfrm>
+          <a:prstGeom prst="rect">
+            <a:avLst/>
+          </a:prstGeom>
+          <a:noFill/>
+        </p:spPr>
+        <p:txBody>
+          <a:bodyPr wrap="square" lIns="0" rIns="0" tIns="0" bIns="0" anchor="t">
+            <a:spAutoFit/>
+          </a:bodyPr>
+          <a:lstStyle/>
+          <a:p>
+            <a:pPr algn="l">
+              <a:lnSpc>
+                <a:spcPct val="100000"/>
+              </a:lnSpc>
+              <a:spcBef>
+                <a:spcPts val="0"/>
+              </a:spcBef>
+              <a:spcAft>
+                <a:spcPts val="0"/>
+              </a:spcAft>
+            </a:pPr>
+            <a:r>
+              <a:rPr sz="1000" b="1" i="0">
+                <a:solidFill>
+                  <a:srgbClr val="161616"/>
+                </a:solidFill>
+                <a:latin typeface="Marianne"/>
+              </a:rPr>
+              <a:t>3 $ / 15 $</a:t>
+            </a:r>
+          </a:p>
+          <a:p>
+            <a:pPr algn="l">
+              <a:lnSpc>
+                <a:spcPct val="100000"/>
+              </a:lnSpc>
+              <a:spcBef>
+                <a:spcPts val="100"/>
+              </a:spcBef>
+              <a:spcAft>
+                <a:spcPts val="0"/>
+              </a:spcAft>
+            </a:pPr>
+            <a:r>
+              <a:rPr sz="800" b="0" i="0">
+                <a:solidFill>
+                  <a:srgbClr val="6A6A6A"/>
+                </a:solidFill>
+                <a:latin typeface="Marianne"/>
+              </a:rPr>
+              <a:t>cache −60/80 %</a:t>
+            </a:r>
+          </a:p>
+        </p:txBody>
+      </p:sp>
+      <p:sp>
+        <p:nvSpPr>
+          <p:cNvPr id="41" name="Rounded Rectangle 40"/>
+          <p:cNvSpPr/>
+          <p:nvPr/>
+        </p:nvSpPr>
+        <p:spPr>
+          <a:xfrm>
+            <a:off x="777240" y="3639311"/>
+            <a:ext cx="10637215" cy="603504"/>
+          </a:xfrm>
+          <a:prstGeom prst="roundRect">
+            <a:avLst>
+              <a:gd name="adj" fmla="val 5000"/>
+            </a:avLst>
+          </a:prstGeom>
+          <a:solidFill>
+            <a:srgbClr val="F5F5FE"/>
+          </a:solidFill>
+          <a:ln>
+            <a:noFill/>
+          </a:ln>
+          <a:effectLst/>
+        </p:spPr>
+        <p:style>
+          <a:lnRef idx="1">
+            <a:schemeClr val="accent1"/>
+          </a:lnRef>
+          <a:fillRef idx="3">
+            <a:schemeClr val="accent1"/>
+          </a:fillRef>
+          <a:effectRef idx="2">
+            <a:schemeClr val="accent1"/>
+          </a:effectRef>
+          <a:fontRef idx="minor">
+            <a:schemeClr val="lt1"/>
+          </a:fontRef>
+        </p:style>
+        <p:txBody>
+          <a:bodyPr rtlCol="0" anchor="ctr"/>
+          <a:lstStyle/>
+          <a:p>
+            <a:pPr algn="ctr"/>
+          </a:p>
+        </p:txBody>
+      </p:sp>
+      <p:pic>
+        <p:nvPicPr>
+          <p:cNvPr id="42" name="Picture 41" descr="code-s-slash.png"/>
+          <p:cNvPicPr>
+            <a:picLocks noChangeAspect="1"/>
+          </p:cNvPicPr>
+          <p:nvPr/>
+        </p:nvPicPr>
+        <p:blipFill>
+          <a:blip r:embed="rId4"/>
+          <a:stretch>
+            <a:fillRect/>
+          </a:stretch>
+        </p:blipFill>
+        <p:spPr>
+          <a:xfrm>
+            <a:off x="905256" y="3776472"/>
+            <a:ext cx="329184" cy="329184"/>
+          </a:xfrm>
+          <a:prstGeom prst="rect">
+            <a:avLst/>
+          </a:prstGeom>
+        </p:spPr>
+      </p:pic>
+      <p:sp>
+        <p:nvSpPr>
+          <p:cNvPr id="43" name="TextBox 42"/>
+          <p:cNvSpPr txBox="1"/>
+          <p:nvPr/>
+        </p:nvSpPr>
+        <p:spPr>
+          <a:xfrm>
+            <a:off x="1344168" y="3639311"/>
+            <a:ext cx="1106424" cy="603504"/>
+          </a:xfrm>
+          <a:prstGeom prst="rect">
+            <a:avLst/>
+          </a:prstGeom>
+          <a:noFill/>
+        </p:spPr>
+        <p:txBody>
+          <a:bodyPr wrap="square" lIns="0" rIns="0" tIns="0" bIns="0" anchor="ctr">
+            <a:spAutoFit/>
+          </a:bodyPr>
+          <a:lstStyle/>
+          <a:p>
+            <a:pPr algn="l">
+              <a:lnSpc>
+                <a:spcPct val="100000"/>
+              </a:lnSpc>
+              <a:spcBef>
+                <a:spcPts val="0"/>
+              </a:spcBef>
+              <a:spcAft>
+                <a:spcPts val="0"/>
+              </a:spcAft>
+            </a:pPr>
+            <a:r>
+              <a:rPr sz="1300" b="1" i="0">
+                <a:solidFill>
+                  <a:srgbClr val="161616"/>
+                </a:solidFill>
+                <a:latin typeface="Marianne"/>
+              </a:rPr>
+              <a:t>Performance</a:t>
+            </a:r>
+          </a:p>
+          <a:p>
+            <a:pPr algn="l">
+              <a:lnSpc>
+                <a:spcPct val="100000"/>
+              </a:lnSpc>
+              <a:spcBef>
+                <a:spcPts val="200"/>
+              </a:spcBef>
+              <a:spcAft>
+                <a:spcPts val="0"/>
+              </a:spcAft>
+            </a:pPr>
+            <a:r>
+              <a:rPr sz="900" b="0" i="0">
+                <a:solidFill>
+                  <a:srgbClr val="6A6A6A"/>
+                </a:solidFill>
+                <a:latin typeface="Marianne"/>
+              </a:rPr>
+              <a:t>SWE-bench Verified</a:t>
+            </a:r>
+          </a:p>
+        </p:txBody>
+      </p:sp>
+      <p:sp>
+        <p:nvSpPr>
+          <p:cNvPr id="44" name="TextBox 43"/>
+          <p:cNvSpPr txBox="1"/>
+          <p:nvPr/>
+        </p:nvSpPr>
+        <p:spPr>
+          <a:xfrm>
+            <a:off x="2633472" y="3685031"/>
+            <a:ext cx="1058483" cy="274320"/>
+          </a:xfrm>
+          <a:prstGeom prst="rect">
+            <a:avLst/>
+          </a:prstGeom>
+          <a:noFill/>
+        </p:spPr>
+        <p:txBody>
+          <a:bodyPr wrap="square" lIns="0" rIns="0" tIns="0" bIns="0" anchor="ctr">
+            <a:spAutoFit/>
+          </a:bodyPr>
+          <a:lstStyle/>
+          <a:p>
+            <a:pPr algn="l">
+              <a:lnSpc>
+                <a:spcPct val="106000"/>
+              </a:lnSpc>
+              <a:spcBef>
+                <a:spcPts val="0"/>
+              </a:spcBef>
+              <a:spcAft>
+                <a:spcPts val="0"/>
+              </a:spcAft>
+            </a:pPr>
+            <a:r>
+              <a:rPr sz="1150" b="0" i="0">
+                <a:solidFill>
+                  <a:srgbClr val="18753C"/>
+                </a:solidFill>
+                <a:latin typeface="Marianne"/>
+              </a:rPr>
+              <a:t>● ● ● ● ● </a:t>
+            </a:r>
+            <a:r>
+              <a:rPr sz="1150" b="0" i="0">
+                <a:solidFill>
+                  <a:srgbClr val="D2D2E8"/>
+                </a:solidFill>
+                <a:latin typeface="Marianne"/>
+              </a:rPr>
+              <a:t/>
+            </a:r>
+          </a:p>
+        </p:txBody>
+      </p:sp>
+      <p:sp>
+        <p:nvSpPr>
+          <p:cNvPr id="45" name="TextBox 44"/>
+          <p:cNvSpPr txBox="1"/>
+          <p:nvPr/>
+        </p:nvSpPr>
+        <p:spPr>
+          <a:xfrm>
+            <a:off x="2633472" y="3913631"/>
+            <a:ext cx="1058483" cy="310896"/>
+          </a:xfrm>
+          <a:prstGeom prst="rect">
+            <a:avLst/>
+          </a:prstGeom>
+          <a:noFill/>
+        </p:spPr>
+        <p:txBody>
+          <a:bodyPr wrap="square" lIns="0" rIns="0" tIns="0" bIns="0" anchor="t">
+            <a:spAutoFit/>
+          </a:bodyPr>
+          <a:lstStyle/>
+          <a:p>
+            <a:pPr algn="l">
+              <a:lnSpc>
+                <a:spcPct val="100000"/>
+              </a:lnSpc>
+              <a:spcBef>
+                <a:spcPts val="0"/>
+              </a:spcBef>
+              <a:spcAft>
+                <a:spcPts val="0"/>
+              </a:spcAft>
+            </a:pPr>
+            <a:r>
+              <a:rPr sz="1000" b="1" i="0">
+                <a:solidFill>
+                  <a:srgbClr val="161616"/>
+                </a:solidFill>
+                <a:latin typeface="Marianne"/>
+              </a:rPr>
+              <a:t>88,6 %</a:t>
+            </a:r>
+          </a:p>
+        </p:txBody>
+      </p:sp>
+      <p:sp>
+        <p:nvSpPr>
+          <p:cNvPr id="46" name="TextBox 45"/>
+          <p:cNvSpPr txBox="1"/>
+          <p:nvPr/>
+        </p:nvSpPr>
+        <p:spPr>
+          <a:xfrm>
+            <a:off x="3911411" y="3685031"/>
+            <a:ext cx="1058483" cy="274320"/>
+          </a:xfrm>
+          <a:prstGeom prst="rect">
+            <a:avLst/>
+          </a:prstGeom>
+          <a:noFill/>
+        </p:spPr>
+        <p:txBody>
+          <a:bodyPr wrap="square" lIns="0" rIns="0" tIns="0" bIns="0" anchor="ctr">
+            <a:spAutoFit/>
+          </a:bodyPr>
+          <a:lstStyle/>
+          <a:p>
+            <a:pPr algn="l">
+              <a:lnSpc>
+                <a:spcPct val="106000"/>
+              </a:lnSpc>
+              <a:spcBef>
+                <a:spcPts val="0"/>
+              </a:spcBef>
+              <a:spcAft>
+                <a:spcPts val="0"/>
+              </a:spcAft>
+            </a:pPr>
+            <a:r>
+              <a:rPr sz="1150" b="0" i="0">
+                <a:solidFill>
+                  <a:srgbClr val="18753C"/>
+                </a:solidFill>
+                <a:latin typeface="Marianne"/>
+              </a:rPr>
+              <a:t>● ● ● ● ● </a:t>
+            </a:r>
+            <a:r>
+              <a:rPr sz="1150" b="0" i="0">
+                <a:solidFill>
+                  <a:srgbClr val="D2D2E8"/>
+                </a:solidFill>
+                <a:latin typeface="Marianne"/>
+              </a:rPr>
+              <a:t/>
+            </a:r>
+          </a:p>
+        </p:txBody>
+      </p:sp>
+      <p:sp>
+        <p:nvSpPr>
+          <p:cNvPr id="47" name="TextBox 46"/>
+          <p:cNvSpPr txBox="1"/>
+          <p:nvPr/>
+        </p:nvSpPr>
+        <p:spPr>
+          <a:xfrm>
+            <a:off x="3911411" y="3913631"/>
+            <a:ext cx="1058483" cy="310896"/>
+          </a:xfrm>
+          <a:prstGeom prst="rect">
+            <a:avLst/>
+          </a:prstGeom>
+          <a:noFill/>
+        </p:spPr>
+        <p:txBody>
+          <a:bodyPr wrap="square" lIns="0" rIns="0" tIns="0" bIns="0" anchor="t">
+            <a:spAutoFit/>
+          </a:bodyPr>
+          <a:lstStyle/>
+          <a:p>
+            <a:pPr algn="l">
+              <a:lnSpc>
+                <a:spcPct val="100000"/>
+              </a:lnSpc>
+              <a:spcBef>
+                <a:spcPts val="0"/>
+              </a:spcBef>
+              <a:spcAft>
+                <a:spcPts val="0"/>
+              </a:spcAft>
+            </a:pPr>
+            <a:r>
+              <a:rPr sz="1000" b="1" i="0">
+                <a:solidFill>
+                  <a:srgbClr val="161616"/>
+                </a:solidFill>
+                <a:latin typeface="Marianne"/>
+              </a:rPr>
+              <a:t>95,0 %</a:t>
+            </a:r>
+          </a:p>
+          <a:p>
+            <a:pPr algn="l">
+              <a:lnSpc>
+                <a:spcPct val="100000"/>
+              </a:lnSpc>
+              <a:spcBef>
+                <a:spcPts val="100"/>
+              </a:spcBef>
+              <a:spcAft>
+                <a:spcPts val="0"/>
+              </a:spcAft>
+            </a:pPr>
+            <a:r>
+              <a:rPr sz="800" b="0" i="0">
+                <a:solidFill>
+                  <a:srgbClr val="6A6A6A"/>
+                </a:solidFill>
+                <a:latin typeface="Marianne"/>
+              </a:rPr>
+              <a:t>tête du bench</a:t>
+            </a:r>
+          </a:p>
+        </p:txBody>
+      </p:sp>
+      <p:sp>
+        <p:nvSpPr>
+          <p:cNvPr id="48" name="TextBox 47"/>
+          <p:cNvSpPr txBox="1"/>
+          <p:nvPr/>
+        </p:nvSpPr>
+        <p:spPr>
+          <a:xfrm>
+            <a:off x="5189350" y="3685031"/>
+            <a:ext cx="1058483" cy="274320"/>
+          </a:xfrm>
+          <a:prstGeom prst="rect">
+            <a:avLst/>
+          </a:prstGeom>
+          <a:noFill/>
+        </p:spPr>
+        <p:txBody>
+          <a:bodyPr wrap="square" lIns="0" rIns="0" tIns="0" bIns="0" anchor="ctr">
+            <a:spAutoFit/>
+          </a:bodyPr>
+          <a:lstStyle/>
+          <a:p>
+            <a:pPr algn="l">
+              <a:lnSpc>
+                <a:spcPct val="106000"/>
+              </a:lnSpc>
+              <a:spcBef>
+                <a:spcPts val="0"/>
+              </a:spcBef>
+              <a:spcAft>
+                <a:spcPts val="0"/>
+              </a:spcAft>
+            </a:pPr>
+            <a:r>
+              <a:rPr sz="1150" b="0" i="0">
+                <a:solidFill>
+                  <a:srgbClr val="18753C"/>
+                </a:solidFill>
+                <a:latin typeface="Marianne"/>
+              </a:rPr>
+              <a:t>● ● ● ● </a:t>
+            </a:r>
+            <a:r>
+              <a:rPr sz="1150" b="0" i="0">
+                <a:solidFill>
+                  <a:srgbClr val="D2D2E8"/>
+                </a:solidFill>
+                <a:latin typeface="Marianne"/>
+              </a:rPr>
+              <a:t>● </a:t>
+            </a:r>
+          </a:p>
+        </p:txBody>
+      </p:sp>
+      <p:sp>
+        <p:nvSpPr>
+          <p:cNvPr id="49" name="TextBox 48"/>
+          <p:cNvSpPr txBox="1"/>
+          <p:nvPr/>
+        </p:nvSpPr>
+        <p:spPr>
+          <a:xfrm>
+            <a:off x="5189350" y="3913631"/>
+            <a:ext cx="1058483" cy="310896"/>
+          </a:xfrm>
+          <a:prstGeom prst="rect">
+            <a:avLst/>
+          </a:prstGeom>
+          <a:noFill/>
+        </p:spPr>
+        <p:txBody>
+          <a:bodyPr wrap="square" lIns="0" rIns="0" tIns="0" bIns="0" anchor="t">
+            <a:spAutoFit/>
+          </a:bodyPr>
+          <a:lstStyle/>
+          <a:p>
+            <a:pPr algn="l">
+              <a:lnSpc>
+                <a:spcPct val="100000"/>
+              </a:lnSpc>
+              <a:spcBef>
+                <a:spcPts val="0"/>
+              </a:spcBef>
+              <a:spcAft>
+                <a:spcPts val="0"/>
+              </a:spcAft>
+            </a:pPr>
+            <a:r>
+              <a:rPr sz="1000" b="1" i="0">
+                <a:solidFill>
+                  <a:srgbClr val="161616"/>
+                </a:solidFill>
+                <a:latin typeface="Marianne"/>
+              </a:rPr>
+              <a:t>77,6 %</a:t>
+            </a:r>
+          </a:p>
+        </p:txBody>
+      </p:sp>
+      <p:sp>
+        <p:nvSpPr>
+          <p:cNvPr id="50" name="TextBox 49"/>
+          <p:cNvSpPr txBox="1"/>
+          <p:nvPr/>
+        </p:nvSpPr>
+        <p:spPr>
+          <a:xfrm>
+            <a:off x="6467289" y="3685031"/>
+            <a:ext cx="1058483" cy="274320"/>
+          </a:xfrm>
+          <a:prstGeom prst="rect">
+            <a:avLst/>
+          </a:prstGeom>
+          <a:noFill/>
+        </p:spPr>
+        <p:txBody>
+          <a:bodyPr wrap="square" lIns="0" rIns="0" tIns="0" bIns="0" anchor="ctr">
+            <a:spAutoFit/>
+          </a:bodyPr>
+          <a:lstStyle/>
+          <a:p>
+            <a:pPr algn="l">
+              <a:lnSpc>
+                <a:spcPct val="106000"/>
+              </a:lnSpc>
+              <a:spcBef>
+                <a:spcPts val="0"/>
+              </a:spcBef>
+              <a:spcAft>
+                <a:spcPts val="0"/>
+              </a:spcAft>
+            </a:pPr>
+            <a:r>
+              <a:rPr sz="1150" b="0" i="0">
+                <a:solidFill>
+                  <a:srgbClr val="18753C"/>
+                </a:solidFill>
+                <a:latin typeface="Marianne"/>
+              </a:rPr>
+              <a:t>● ● ● ● </a:t>
+            </a:r>
+            <a:r>
+              <a:rPr sz="1150" b="0" i="0">
+                <a:solidFill>
+                  <a:srgbClr val="D2D2E8"/>
+                </a:solidFill>
+                <a:latin typeface="Marianne"/>
+              </a:rPr>
+              <a:t>● </a:t>
+            </a:r>
+          </a:p>
+        </p:txBody>
+      </p:sp>
+      <p:sp>
+        <p:nvSpPr>
+          <p:cNvPr id="51" name="TextBox 50"/>
+          <p:cNvSpPr txBox="1"/>
+          <p:nvPr/>
+        </p:nvSpPr>
+        <p:spPr>
+          <a:xfrm>
+            <a:off x="6467289" y="3913631"/>
+            <a:ext cx="1058483" cy="310896"/>
+          </a:xfrm>
+          <a:prstGeom prst="rect">
+            <a:avLst/>
+          </a:prstGeom>
+          <a:noFill/>
+        </p:spPr>
+        <p:txBody>
+          <a:bodyPr wrap="square" lIns="0" rIns="0" tIns="0" bIns="0" anchor="t">
+            <a:spAutoFit/>
+          </a:bodyPr>
+          <a:lstStyle/>
+          <a:p>
+            <a:pPr algn="l">
+              <a:lnSpc>
+                <a:spcPct val="100000"/>
+              </a:lnSpc>
+              <a:spcBef>
+                <a:spcPts val="0"/>
+              </a:spcBef>
+              <a:spcAft>
+                <a:spcPts val="0"/>
+              </a:spcAft>
+            </a:pPr>
+            <a:r>
+              <a:rPr sz="1000" b="1" i="0">
+                <a:solidFill>
+                  <a:srgbClr val="161616"/>
+                </a:solidFill>
+                <a:latin typeface="Marianne"/>
+              </a:rPr>
+              <a:t>≈79 % *</a:t>
+            </a:r>
+          </a:p>
+          <a:p>
+            <a:pPr algn="l">
+              <a:lnSpc>
+                <a:spcPct val="100000"/>
+              </a:lnSpc>
+              <a:spcBef>
+                <a:spcPts val="100"/>
+              </a:spcBef>
+              <a:spcAft>
+                <a:spcPts val="0"/>
+              </a:spcAft>
+            </a:pPr>
+            <a:r>
+              <a:rPr sz="800" b="0" i="0">
+                <a:solidFill>
+                  <a:srgbClr val="6A6A6A"/>
+                </a:solidFill>
+                <a:latin typeface="Marianne"/>
+              </a:rPr>
+              <a:t>estimée</a:t>
+            </a:r>
+          </a:p>
+        </p:txBody>
+      </p:sp>
+      <p:sp>
+        <p:nvSpPr>
+          <p:cNvPr id="52" name="TextBox 51"/>
+          <p:cNvSpPr txBox="1"/>
+          <p:nvPr/>
+        </p:nvSpPr>
+        <p:spPr>
+          <a:xfrm>
+            <a:off x="7745229" y="3685031"/>
+            <a:ext cx="1058483" cy="274320"/>
+          </a:xfrm>
+          <a:prstGeom prst="rect">
+            <a:avLst/>
+          </a:prstGeom>
+          <a:noFill/>
+        </p:spPr>
+        <p:txBody>
+          <a:bodyPr wrap="square" lIns="0" rIns="0" tIns="0" bIns="0" anchor="ctr">
+            <a:spAutoFit/>
+          </a:bodyPr>
+          <a:lstStyle/>
+          <a:p>
+            <a:pPr algn="l">
+              <a:lnSpc>
+                <a:spcPct val="106000"/>
+              </a:lnSpc>
+              <a:spcBef>
+                <a:spcPts val="0"/>
+              </a:spcBef>
+              <a:spcAft>
+                <a:spcPts val="0"/>
+              </a:spcAft>
+            </a:pPr>
+            <a:r>
+              <a:rPr sz="1150" b="0" i="0">
+                <a:solidFill>
+                  <a:srgbClr val="18753C"/>
+                </a:solidFill>
+                <a:latin typeface="Marianne"/>
+              </a:rPr>
+              <a:t>● ● ● ● </a:t>
+            </a:r>
+            <a:r>
+              <a:rPr sz="1150" b="0" i="0">
+                <a:solidFill>
+                  <a:srgbClr val="D2D2E8"/>
+                </a:solidFill>
+                <a:latin typeface="Marianne"/>
+              </a:rPr>
+              <a:t>● </a:t>
+            </a:r>
+          </a:p>
+        </p:txBody>
+      </p:sp>
+      <p:sp>
+        <p:nvSpPr>
+          <p:cNvPr id="53" name="TextBox 52"/>
+          <p:cNvSpPr txBox="1"/>
+          <p:nvPr/>
+        </p:nvSpPr>
+        <p:spPr>
+          <a:xfrm>
+            <a:off x="7745229" y="3913631"/>
+            <a:ext cx="1058483" cy="310896"/>
+          </a:xfrm>
+          <a:prstGeom prst="rect">
+            <a:avLst/>
+          </a:prstGeom>
+          <a:noFill/>
+        </p:spPr>
+        <p:txBody>
+          <a:bodyPr wrap="square" lIns="0" rIns="0" tIns="0" bIns="0" anchor="t">
+            <a:spAutoFit/>
+          </a:bodyPr>
+          <a:lstStyle/>
+          <a:p>
+            <a:pPr algn="l">
+              <a:lnSpc>
+                <a:spcPct val="100000"/>
+              </a:lnSpc>
+              <a:spcBef>
+                <a:spcPts val="0"/>
+              </a:spcBef>
+              <a:spcAft>
+                <a:spcPts val="0"/>
+              </a:spcAft>
+            </a:pPr>
+            <a:r>
+              <a:rPr sz="1000" b="1" i="0">
+                <a:solidFill>
+                  <a:srgbClr val="161616"/>
+                </a:solidFill>
+                <a:latin typeface="Marianne"/>
+              </a:rPr>
+              <a:t>80,6 %</a:t>
+            </a:r>
+          </a:p>
+        </p:txBody>
+      </p:sp>
+      <p:sp>
+        <p:nvSpPr>
+          <p:cNvPr id="54" name="TextBox 53"/>
+          <p:cNvSpPr txBox="1"/>
+          <p:nvPr/>
+        </p:nvSpPr>
+        <p:spPr>
+          <a:xfrm>
+            <a:off x="9023168" y="3685031"/>
+            <a:ext cx="1058483" cy="274320"/>
+          </a:xfrm>
+          <a:prstGeom prst="rect">
+            <a:avLst/>
+          </a:prstGeom>
+          <a:noFill/>
+        </p:spPr>
+        <p:txBody>
+          <a:bodyPr wrap="square" lIns="0" rIns="0" tIns="0" bIns="0" anchor="ctr">
+            <a:spAutoFit/>
+          </a:bodyPr>
+          <a:lstStyle/>
+          <a:p>
+            <a:pPr algn="l">
+              <a:lnSpc>
+                <a:spcPct val="106000"/>
+              </a:lnSpc>
+              <a:spcBef>
+                <a:spcPts val="0"/>
+              </a:spcBef>
+              <a:spcAft>
+                <a:spcPts val="0"/>
+              </a:spcAft>
+            </a:pPr>
+            <a:r>
+              <a:rPr sz="1150" b="0" i="0">
+                <a:solidFill>
+                  <a:srgbClr val="18753C"/>
+                </a:solidFill>
+                <a:latin typeface="Marianne"/>
+              </a:rPr>
+              <a:t>● ● ● ● </a:t>
+            </a:r>
+            <a:r>
+              <a:rPr sz="1150" b="0" i="0">
+                <a:solidFill>
+                  <a:srgbClr val="D2D2E8"/>
+                </a:solidFill>
+                <a:latin typeface="Marianne"/>
+              </a:rPr>
+              <a:t>● </a:t>
+            </a:r>
+          </a:p>
+        </p:txBody>
+      </p:sp>
+      <p:sp>
+        <p:nvSpPr>
+          <p:cNvPr id="55" name="TextBox 54"/>
+          <p:cNvSpPr txBox="1"/>
+          <p:nvPr/>
+        </p:nvSpPr>
+        <p:spPr>
+          <a:xfrm>
+            <a:off x="9023168" y="3913631"/>
+            <a:ext cx="1058483" cy="310896"/>
+          </a:xfrm>
+          <a:prstGeom prst="rect">
+            <a:avLst/>
+          </a:prstGeom>
+          <a:noFill/>
+        </p:spPr>
+        <p:txBody>
+          <a:bodyPr wrap="square" lIns="0" rIns="0" tIns="0" bIns="0" anchor="t">
+            <a:spAutoFit/>
+          </a:bodyPr>
+          <a:lstStyle/>
+          <a:p>
+            <a:pPr algn="l">
+              <a:lnSpc>
+                <a:spcPct val="100000"/>
+              </a:lnSpc>
+              <a:spcBef>
+                <a:spcPts val="0"/>
+              </a:spcBef>
+              <a:spcAft>
+                <a:spcPts val="0"/>
+              </a:spcAft>
+            </a:pPr>
+            <a:r>
+              <a:rPr sz="1000" b="1" i="0">
+                <a:solidFill>
+                  <a:srgbClr val="161616"/>
+                </a:solidFill>
+                <a:latin typeface="Marianne"/>
+              </a:rPr>
+              <a:t>≈78 % *</a:t>
+            </a:r>
+          </a:p>
+          <a:p>
+            <a:pPr algn="l">
+              <a:lnSpc>
+                <a:spcPct val="100000"/>
+              </a:lnSpc>
+              <a:spcBef>
+                <a:spcPts val="100"/>
+              </a:spcBef>
+              <a:spcAft>
+                <a:spcPts val="0"/>
+              </a:spcAft>
+            </a:pPr>
+            <a:r>
+              <a:rPr sz="800" b="0" i="0">
+                <a:solidFill>
+                  <a:srgbClr val="6A6A6A"/>
+                </a:solidFill>
+                <a:latin typeface="Marianne"/>
+              </a:rPr>
+              <a:t>estimée</a:t>
+            </a:r>
+          </a:p>
+        </p:txBody>
+      </p:sp>
+      <p:sp>
+        <p:nvSpPr>
+          <p:cNvPr id="56" name="TextBox 55"/>
+          <p:cNvSpPr txBox="1"/>
+          <p:nvPr/>
+        </p:nvSpPr>
+        <p:spPr>
+          <a:xfrm>
+            <a:off x="10301107" y="3685031"/>
+            <a:ext cx="1058483" cy="274320"/>
+          </a:xfrm>
+          <a:prstGeom prst="rect">
+            <a:avLst/>
+          </a:prstGeom>
+          <a:noFill/>
+        </p:spPr>
+        <p:txBody>
+          <a:bodyPr wrap="square" lIns="0" rIns="0" tIns="0" bIns="0" anchor="ctr">
+            <a:spAutoFit/>
+          </a:bodyPr>
+          <a:lstStyle/>
+          <a:p>
+            <a:pPr algn="l">
+              <a:lnSpc>
+                <a:spcPct val="106000"/>
+              </a:lnSpc>
+              <a:spcBef>
+                <a:spcPts val="0"/>
+              </a:spcBef>
+              <a:spcAft>
+                <a:spcPts val="0"/>
+              </a:spcAft>
+            </a:pPr>
+            <a:r>
+              <a:rPr sz="1150" b="0" i="0">
+                <a:solidFill>
+                  <a:srgbClr val="18753C"/>
+                </a:solidFill>
+                <a:latin typeface="Marianne"/>
+              </a:rPr>
+              <a:t>● ● ● ● ● </a:t>
+            </a:r>
+            <a:r>
+              <a:rPr sz="1150" b="0" i="0">
+                <a:solidFill>
+                  <a:srgbClr val="D2D2E8"/>
+                </a:solidFill>
+                <a:latin typeface="Marianne"/>
+              </a:rPr>
+              <a:t/>
+            </a:r>
+          </a:p>
+        </p:txBody>
+      </p:sp>
+      <p:sp>
+        <p:nvSpPr>
+          <p:cNvPr id="57" name="TextBox 56"/>
+          <p:cNvSpPr txBox="1"/>
+          <p:nvPr/>
+        </p:nvSpPr>
+        <p:spPr>
+          <a:xfrm>
+            <a:off x="10301107" y="3913631"/>
+            <a:ext cx="1058483" cy="310896"/>
+          </a:xfrm>
+          <a:prstGeom prst="rect">
+            <a:avLst/>
+          </a:prstGeom>
+          <a:noFill/>
+        </p:spPr>
+        <p:txBody>
+          <a:bodyPr wrap="square" lIns="0" rIns="0" tIns="0" bIns="0" anchor="t">
+            <a:spAutoFit/>
+          </a:bodyPr>
+          <a:lstStyle/>
+          <a:p>
+            <a:pPr algn="l">
+              <a:lnSpc>
+                <a:spcPct val="100000"/>
+              </a:lnSpc>
+              <a:spcBef>
+                <a:spcPts val="0"/>
+              </a:spcBef>
+              <a:spcAft>
+                <a:spcPts val="0"/>
+              </a:spcAft>
+            </a:pPr>
+            <a:r>
+              <a:rPr sz="1000" b="1" i="0">
+                <a:solidFill>
+                  <a:srgbClr val="161616"/>
+                </a:solidFill>
+                <a:latin typeface="Marianne"/>
+              </a:rPr>
+              <a:t>93,4 % *</a:t>
+            </a:r>
+          </a:p>
+          <a:p>
+            <a:pPr algn="l">
+              <a:lnSpc>
+                <a:spcPct val="100000"/>
+              </a:lnSpc>
+              <a:spcBef>
+                <a:spcPts val="100"/>
+              </a:spcBef>
+              <a:spcAft>
+                <a:spcPts val="0"/>
+              </a:spcAft>
+            </a:pPr>
+            <a:r>
+              <a:rPr sz="800" b="0" i="0">
+                <a:solidFill>
+                  <a:srgbClr val="6A6A6A"/>
+                </a:solidFill>
+                <a:latin typeface="Marianne"/>
+              </a:rPr>
+              <a:t>annoncé éditeur</a:t>
+            </a:r>
+          </a:p>
+        </p:txBody>
+      </p:sp>
+      <p:sp>
+        <p:nvSpPr>
+          <p:cNvPr id="58" name="Rounded Rectangle 57"/>
+          <p:cNvSpPr/>
+          <p:nvPr/>
+        </p:nvSpPr>
+        <p:spPr>
+          <a:xfrm>
+            <a:off x="777240" y="4297679"/>
+            <a:ext cx="10637215" cy="603504"/>
+          </a:xfrm>
+          <a:prstGeom prst="roundRect">
+            <a:avLst>
+              <a:gd name="adj" fmla="val 5000"/>
+            </a:avLst>
+          </a:prstGeom>
+          <a:solidFill>
+            <a:srgbClr val="F5F5FE"/>
+          </a:solidFill>
+          <a:ln>
+            <a:noFill/>
+          </a:ln>
+          <a:effectLst/>
+        </p:spPr>
+        <p:style>
+          <a:lnRef idx="1">
+            <a:schemeClr val="accent1"/>
+          </a:lnRef>
+          <a:fillRef idx="3">
+            <a:schemeClr val="accent1"/>
+          </a:fillRef>
+          <a:effectRef idx="2">
+            <a:schemeClr val="accent1"/>
+          </a:effectRef>
+          <a:fontRef idx="minor">
+            <a:schemeClr val="lt1"/>
+          </a:fontRef>
+        </p:style>
+        <p:txBody>
+          <a:bodyPr rtlCol="0" anchor="ctr"/>
+          <a:lstStyle/>
+          <a:p>
+            <a:pPr algn="ctr"/>
+          </a:p>
+        </p:txBody>
+      </p:sp>
+      <p:pic>
+        <p:nvPicPr>
+          <p:cNvPr id="59" name="Picture 58" descr="shield-check.png"/>
+          <p:cNvPicPr>
+            <a:picLocks noChangeAspect="1"/>
+          </p:cNvPicPr>
+          <p:nvPr/>
+        </p:nvPicPr>
+        <p:blipFill>
+          <a:blip r:embed="rId5"/>
+          <a:stretch>
+            <a:fillRect/>
+          </a:stretch>
+        </p:blipFill>
+        <p:spPr>
+          <a:xfrm>
+            <a:off x="905256" y="4434840"/>
+            <a:ext cx="329184" cy="329184"/>
+          </a:xfrm>
+          <a:prstGeom prst="rect">
+            <a:avLst/>
+          </a:prstGeom>
+        </p:spPr>
+      </p:pic>
+      <p:sp>
+        <p:nvSpPr>
+          <p:cNvPr id="60" name="TextBox 59"/>
+          <p:cNvSpPr txBox="1"/>
+          <p:nvPr/>
+        </p:nvSpPr>
+        <p:spPr>
+          <a:xfrm>
+            <a:off x="1344168" y="4297679"/>
+            <a:ext cx="1106424" cy="603504"/>
+          </a:xfrm>
+          <a:prstGeom prst="rect">
+            <a:avLst/>
+          </a:prstGeom>
+          <a:noFill/>
+        </p:spPr>
+        <p:txBody>
+          <a:bodyPr wrap="square" lIns="0" rIns="0" tIns="0" bIns="0" anchor="ctr">
+            <a:spAutoFit/>
+          </a:bodyPr>
+          <a:lstStyle/>
+          <a:p>
+            <a:pPr algn="l">
+              <a:lnSpc>
+                <a:spcPct val="100000"/>
+              </a:lnSpc>
+              <a:spcBef>
+                <a:spcPts val="0"/>
+              </a:spcBef>
+              <a:spcAft>
+                <a:spcPts val="0"/>
+              </a:spcAft>
+            </a:pPr>
+            <a:r>
+              <a:rPr sz="1300" b="1" i="0">
+                <a:solidFill>
+                  <a:srgbClr val="161616"/>
+                </a:solidFill>
+                <a:latin typeface="Marianne"/>
+              </a:rPr>
+              <a:t>Souveraineté</a:t>
+            </a:r>
+          </a:p>
+          <a:p>
+            <a:pPr algn="l">
+              <a:lnSpc>
+                <a:spcPct val="100000"/>
+              </a:lnSpc>
+              <a:spcBef>
+                <a:spcPts val="200"/>
+              </a:spcBef>
+              <a:spcAft>
+                <a:spcPts val="0"/>
+              </a:spcAft>
+            </a:pPr>
+            <a:r>
+              <a:rPr sz="900" b="0" i="0">
+                <a:solidFill>
+                  <a:srgbClr val="6A6A6A"/>
+                </a:solidFill>
+                <a:latin typeface="Marianne"/>
+              </a:rPr>
+              <a:t>au sens CNIL</a:t>
+            </a:r>
+          </a:p>
+        </p:txBody>
+      </p:sp>
+      <p:sp>
+        <p:nvSpPr>
+          <p:cNvPr id="61" name="TextBox 60"/>
+          <p:cNvSpPr txBox="1"/>
+          <p:nvPr/>
+        </p:nvSpPr>
+        <p:spPr>
+          <a:xfrm>
+            <a:off x="2633472" y="4343399"/>
+            <a:ext cx="1058483" cy="274320"/>
+          </a:xfrm>
+          <a:prstGeom prst="rect">
+            <a:avLst/>
+          </a:prstGeom>
+          <a:noFill/>
+        </p:spPr>
+        <p:txBody>
+          <a:bodyPr wrap="square" lIns="0" rIns="0" tIns="0" bIns="0" anchor="ctr">
+            <a:spAutoFit/>
+          </a:bodyPr>
+          <a:lstStyle/>
+          <a:p>
+            <a:pPr algn="l">
+              <a:lnSpc>
+                <a:spcPct val="106000"/>
+              </a:lnSpc>
+              <a:spcBef>
+                <a:spcPts val="0"/>
+              </a:spcBef>
+              <a:spcAft>
+                <a:spcPts val="0"/>
+              </a:spcAft>
+            </a:pPr>
+            <a:r>
+              <a:rPr sz="1150" b="0" i="0">
+                <a:solidFill>
+                  <a:srgbClr val="E1000F"/>
+                </a:solidFill>
+                <a:latin typeface="Marianne"/>
+              </a:rPr>
+              <a:t>● </a:t>
+            </a:r>
+            <a:r>
+              <a:rPr sz="1150" b="0" i="0">
+                <a:solidFill>
+                  <a:srgbClr val="D2D2E8"/>
+                </a:solidFill>
+                <a:latin typeface="Marianne"/>
+              </a:rPr>
+              <a:t>● ● ● ● </a:t>
+            </a:r>
+          </a:p>
+        </p:txBody>
+      </p:sp>
+      <p:sp>
+        <p:nvSpPr>
+          <p:cNvPr id="62" name="TextBox 61"/>
+          <p:cNvSpPr txBox="1"/>
+          <p:nvPr/>
+        </p:nvSpPr>
+        <p:spPr>
+          <a:xfrm>
+            <a:off x="2633472" y="4571999"/>
+            <a:ext cx="1058483" cy="310896"/>
+          </a:xfrm>
+          <a:prstGeom prst="rect">
+            <a:avLst/>
+          </a:prstGeom>
+          <a:noFill/>
+        </p:spPr>
+        <p:txBody>
+          <a:bodyPr wrap="square" lIns="0" rIns="0" tIns="0" bIns="0" anchor="t">
+            <a:spAutoFit/>
+          </a:bodyPr>
+          <a:lstStyle/>
+          <a:p>
+            <a:pPr algn="l">
+              <a:lnSpc>
+                <a:spcPct val="100000"/>
+              </a:lnSpc>
+              <a:spcBef>
+                <a:spcPts val="0"/>
+              </a:spcBef>
+              <a:spcAft>
+                <a:spcPts val="0"/>
+              </a:spcAft>
+            </a:pPr>
+            <a:r>
+              <a:rPr sz="1000" b="1" i="0">
+                <a:solidFill>
+                  <a:srgbClr val="161616"/>
+                </a:solidFill>
+                <a:latin typeface="Marianne"/>
+              </a:rPr>
+              <a:t>Éditeur US</a:t>
+            </a:r>
+          </a:p>
+          <a:p>
+            <a:pPr algn="l">
+              <a:lnSpc>
+                <a:spcPct val="100000"/>
+              </a:lnSpc>
+              <a:spcBef>
+                <a:spcPts val="100"/>
+              </a:spcBef>
+              <a:spcAft>
+                <a:spcPts val="0"/>
+              </a:spcAft>
+            </a:pPr>
+            <a:r>
+              <a:rPr sz="800" b="0" i="0">
+                <a:solidFill>
+                  <a:srgbClr val="6A6A6A"/>
+                </a:solidFill>
+                <a:latin typeface="Marianne"/>
+              </a:rPr>
+              <a:t>CLOUD Act</a:t>
+            </a:r>
+          </a:p>
+        </p:txBody>
+      </p:sp>
+      <p:sp>
+        <p:nvSpPr>
+          <p:cNvPr id="63" name="TextBox 62"/>
+          <p:cNvSpPr txBox="1"/>
+          <p:nvPr/>
+        </p:nvSpPr>
+        <p:spPr>
+          <a:xfrm>
+            <a:off x="3911411" y="4343399"/>
+            <a:ext cx="1058483" cy="274320"/>
+          </a:xfrm>
+          <a:prstGeom prst="rect">
+            <a:avLst/>
+          </a:prstGeom>
+          <a:noFill/>
+        </p:spPr>
+        <p:txBody>
+          <a:bodyPr wrap="square" lIns="0" rIns="0" tIns="0" bIns="0" anchor="ctr">
+            <a:spAutoFit/>
+          </a:bodyPr>
+          <a:lstStyle/>
+          <a:p>
+            <a:pPr algn="l">
+              <a:lnSpc>
+                <a:spcPct val="106000"/>
+              </a:lnSpc>
+              <a:spcBef>
+                <a:spcPts val="0"/>
+              </a:spcBef>
+              <a:spcAft>
+                <a:spcPts val="0"/>
+              </a:spcAft>
+            </a:pPr>
+            <a:r>
+              <a:rPr sz="1150" b="0" i="0">
+                <a:solidFill>
+                  <a:srgbClr val="E1000F"/>
+                </a:solidFill>
+                <a:latin typeface="Marianne"/>
+              </a:rPr>
+              <a:t>● </a:t>
+            </a:r>
+            <a:r>
+              <a:rPr sz="1150" b="0" i="0">
+                <a:solidFill>
+                  <a:srgbClr val="D2D2E8"/>
+                </a:solidFill>
+                <a:latin typeface="Marianne"/>
+              </a:rPr>
+              <a:t>● ● ● ● </a:t>
+            </a:r>
+          </a:p>
+        </p:txBody>
+      </p:sp>
+      <p:sp>
+        <p:nvSpPr>
+          <p:cNvPr id="64" name="TextBox 63"/>
+          <p:cNvSpPr txBox="1"/>
+          <p:nvPr/>
+        </p:nvSpPr>
+        <p:spPr>
+          <a:xfrm>
+            <a:off x="3911411" y="4571999"/>
+            <a:ext cx="1058483" cy="310896"/>
+          </a:xfrm>
+          <a:prstGeom prst="rect">
+            <a:avLst/>
+          </a:prstGeom>
+          <a:noFill/>
+        </p:spPr>
+        <p:txBody>
+          <a:bodyPr wrap="square" lIns="0" rIns="0" tIns="0" bIns="0" anchor="t">
+            <a:spAutoFit/>
+          </a:bodyPr>
+          <a:lstStyle/>
+          <a:p>
+            <a:pPr algn="l">
+              <a:lnSpc>
+                <a:spcPct val="100000"/>
+              </a:lnSpc>
+              <a:spcBef>
+                <a:spcPts val="0"/>
+              </a:spcBef>
+              <a:spcAft>
+                <a:spcPts val="0"/>
+              </a:spcAft>
+            </a:pPr>
+            <a:r>
+              <a:rPr sz="1000" b="1" i="0">
+                <a:solidFill>
+                  <a:srgbClr val="161616"/>
+                </a:solidFill>
+                <a:latin typeface="Marianne"/>
+              </a:rPr>
+              <a:t>Cloud US</a:t>
+            </a:r>
+          </a:p>
+          <a:p>
+            <a:pPr algn="l">
+              <a:lnSpc>
+                <a:spcPct val="100000"/>
+              </a:lnSpc>
+              <a:spcBef>
+                <a:spcPts val="100"/>
+              </a:spcBef>
+              <a:spcAft>
+                <a:spcPts val="0"/>
+              </a:spcAft>
+            </a:pPr>
+            <a:r>
+              <a:rPr sz="800" b="0" i="0">
+                <a:solidFill>
+                  <a:srgbClr val="6A6A6A"/>
+                </a:solidFill>
+                <a:latin typeface="Marianne"/>
+              </a:rPr>
+              <a:t>CLOUD Act (CNIL)</a:t>
+            </a:r>
+          </a:p>
+        </p:txBody>
+      </p:sp>
+      <p:sp>
+        <p:nvSpPr>
+          <p:cNvPr id="65" name="TextBox 64"/>
+          <p:cNvSpPr txBox="1"/>
+          <p:nvPr/>
+        </p:nvSpPr>
+        <p:spPr>
+          <a:xfrm>
+            <a:off x="5189350" y="4343399"/>
+            <a:ext cx="1058483" cy="274320"/>
+          </a:xfrm>
+          <a:prstGeom prst="rect">
+            <a:avLst/>
+          </a:prstGeom>
+          <a:noFill/>
+        </p:spPr>
+        <p:txBody>
+          <a:bodyPr wrap="square" lIns="0" rIns="0" tIns="0" bIns="0" anchor="ctr">
+            <a:spAutoFit/>
+          </a:bodyPr>
+          <a:lstStyle/>
+          <a:p>
+            <a:pPr algn="l">
+              <a:lnSpc>
+                <a:spcPct val="106000"/>
+              </a:lnSpc>
+              <a:spcBef>
+                <a:spcPts val="0"/>
+              </a:spcBef>
+              <a:spcAft>
+                <a:spcPts val="0"/>
+              </a:spcAft>
+            </a:pPr>
+            <a:r>
+              <a:rPr sz="1150" b="0" i="0">
+                <a:solidFill>
+                  <a:srgbClr val="18753C"/>
+                </a:solidFill>
+                <a:latin typeface="Marianne"/>
+              </a:rPr>
+              <a:t>● ● ● ● </a:t>
+            </a:r>
+            <a:r>
+              <a:rPr sz="1150" b="0" i="0">
+                <a:solidFill>
+                  <a:srgbClr val="D2D2E8"/>
+                </a:solidFill>
+                <a:latin typeface="Marianne"/>
+              </a:rPr>
+              <a:t>● </a:t>
+            </a:r>
+          </a:p>
+        </p:txBody>
+      </p:sp>
+      <p:sp>
+        <p:nvSpPr>
+          <p:cNvPr id="66" name="TextBox 65"/>
+          <p:cNvSpPr txBox="1"/>
+          <p:nvPr/>
+        </p:nvSpPr>
+        <p:spPr>
+          <a:xfrm>
+            <a:off x="5189350" y="4571999"/>
+            <a:ext cx="1058483" cy="310896"/>
+          </a:xfrm>
+          <a:prstGeom prst="rect">
+            <a:avLst/>
+          </a:prstGeom>
+          <a:noFill/>
+        </p:spPr>
+        <p:txBody>
+          <a:bodyPr wrap="square" lIns="0" rIns="0" tIns="0" bIns="0" anchor="t">
+            <a:spAutoFit/>
+          </a:bodyPr>
+          <a:lstStyle/>
+          <a:p>
+            <a:pPr algn="l">
+              <a:lnSpc>
+                <a:spcPct val="100000"/>
+              </a:lnSpc>
+              <a:spcBef>
+                <a:spcPts val="0"/>
+              </a:spcBef>
+              <a:spcAft>
+                <a:spcPts val="0"/>
+              </a:spcAft>
+            </a:pPr>
+            <a:r>
+              <a:rPr sz="1000" b="1" i="0">
+                <a:solidFill>
+                  <a:srgbClr val="161616"/>
+                </a:solidFill>
+                <a:latin typeface="Marianne"/>
+              </a:rPr>
+              <a:t>Éditeur FR</a:t>
+            </a:r>
+          </a:p>
+          <a:p>
+            <a:pPr algn="l">
+              <a:lnSpc>
+                <a:spcPct val="100000"/>
+              </a:lnSpc>
+              <a:spcBef>
+                <a:spcPts val="100"/>
+              </a:spcBef>
+              <a:spcAft>
+                <a:spcPts val="0"/>
+              </a:spcAft>
+            </a:pPr>
+            <a:r>
+              <a:rPr sz="800" b="0" i="0">
+                <a:solidFill>
+                  <a:srgbClr val="6A6A6A"/>
+                </a:solidFill>
+                <a:latin typeface="Marianne"/>
+              </a:rPr>
+              <a:t>SecNumCloud en opt.</a:t>
+            </a:r>
+          </a:p>
+        </p:txBody>
+      </p:sp>
+      <p:sp>
+        <p:nvSpPr>
+          <p:cNvPr id="67" name="TextBox 66"/>
+          <p:cNvSpPr txBox="1"/>
+          <p:nvPr/>
+        </p:nvSpPr>
+        <p:spPr>
+          <a:xfrm>
+            <a:off x="6467289" y="4343399"/>
+            <a:ext cx="1058483" cy="274320"/>
+          </a:xfrm>
+          <a:prstGeom prst="rect">
+            <a:avLst/>
+          </a:prstGeom>
+          <a:noFill/>
+        </p:spPr>
+        <p:txBody>
+          <a:bodyPr wrap="square" lIns="0" rIns="0" tIns="0" bIns="0" anchor="ctr">
+            <a:spAutoFit/>
+          </a:bodyPr>
+          <a:lstStyle/>
+          <a:p>
+            <a:pPr algn="l">
+              <a:lnSpc>
+                <a:spcPct val="106000"/>
+              </a:lnSpc>
+              <a:spcBef>
+                <a:spcPts val="0"/>
+              </a:spcBef>
+              <a:spcAft>
+                <a:spcPts val="0"/>
+              </a:spcAft>
+            </a:pPr>
+            <a:r>
+              <a:rPr sz="1150" b="0" i="0">
+                <a:solidFill>
+                  <a:srgbClr val="18753C"/>
+                </a:solidFill>
+                <a:latin typeface="Marianne"/>
+              </a:rPr>
+              <a:t>● ● ● ● ● </a:t>
+            </a:r>
+            <a:r>
+              <a:rPr sz="1150" b="0" i="0">
+                <a:solidFill>
+                  <a:srgbClr val="D2D2E8"/>
+                </a:solidFill>
+                <a:latin typeface="Marianne"/>
+              </a:rPr>
+              <a:t/>
+            </a:r>
+          </a:p>
+        </p:txBody>
+      </p:sp>
+      <p:sp>
+        <p:nvSpPr>
+          <p:cNvPr id="68" name="TextBox 67"/>
+          <p:cNvSpPr txBox="1"/>
+          <p:nvPr/>
+        </p:nvSpPr>
+        <p:spPr>
+          <a:xfrm>
+            <a:off x="6467289" y="4571999"/>
+            <a:ext cx="1058483" cy="310896"/>
+          </a:xfrm>
+          <a:prstGeom prst="rect">
+            <a:avLst/>
+          </a:prstGeom>
+          <a:noFill/>
+        </p:spPr>
+        <p:txBody>
+          <a:bodyPr wrap="square" lIns="0" rIns="0" tIns="0" bIns="0" anchor="t">
+            <a:spAutoFit/>
+          </a:bodyPr>
+          <a:lstStyle/>
+          <a:p>
+            <a:pPr algn="l">
+              <a:lnSpc>
+                <a:spcPct val="100000"/>
+              </a:lnSpc>
+              <a:spcBef>
+                <a:spcPts val="0"/>
+              </a:spcBef>
+              <a:spcAft>
+                <a:spcPts val="0"/>
+              </a:spcAft>
+            </a:pPr>
+            <a:r>
+              <a:rPr sz="1000" b="1" i="0">
+                <a:solidFill>
+                  <a:srgbClr val="161616"/>
+                </a:solidFill>
+                <a:latin typeface="Marianne"/>
+              </a:rPr>
+              <a:t>État FR</a:t>
+            </a:r>
+          </a:p>
+          <a:p>
+            <a:pPr algn="l">
+              <a:lnSpc>
+                <a:spcPct val="100000"/>
+              </a:lnSpc>
+              <a:spcBef>
+                <a:spcPts val="100"/>
+              </a:spcBef>
+              <a:spcAft>
+                <a:spcPts val="0"/>
+              </a:spcAft>
+            </a:pPr>
+            <a:r>
+              <a:rPr sz="800" b="0" i="0">
+                <a:solidFill>
+                  <a:srgbClr val="6A6A6A"/>
+                </a:solidFill>
+                <a:latin typeface="Marianne"/>
+              </a:rPr>
+              <a:t>SecNumCloud</a:t>
+            </a:r>
+          </a:p>
+        </p:txBody>
+      </p:sp>
+      <p:sp>
+        <p:nvSpPr>
+          <p:cNvPr id="69" name="TextBox 68"/>
+          <p:cNvSpPr txBox="1"/>
+          <p:nvPr/>
+        </p:nvSpPr>
+        <p:spPr>
+          <a:xfrm>
+            <a:off x="7745229" y="4343399"/>
+            <a:ext cx="1058483" cy="274320"/>
+          </a:xfrm>
+          <a:prstGeom prst="rect">
+            <a:avLst/>
+          </a:prstGeom>
+          <a:noFill/>
+        </p:spPr>
+        <p:txBody>
+          <a:bodyPr wrap="square" lIns="0" rIns="0" tIns="0" bIns="0" anchor="ctr">
+            <a:spAutoFit/>
+          </a:bodyPr>
+          <a:lstStyle/>
+          <a:p>
+            <a:pPr algn="l">
+              <a:lnSpc>
+                <a:spcPct val="106000"/>
+              </a:lnSpc>
+              <a:spcBef>
+                <a:spcPts val="0"/>
+              </a:spcBef>
+              <a:spcAft>
+                <a:spcPts val="0"/>
+              </a:spcAft>
+            </a:pPr>
+            <a:r>
+              <a:rPr sz="1150" b="0" i="0">
+                <a:solidFill>
+                  <a:srgbClr val="E1000F"/>
+                </a:solidFill>
+                <a:latin typeface="Marianne"/>
+              </a:rPr>
+              <a:t>● </a:t>
+            </a:r>
+            <a:r>
+              <a:rPr sz="1150" b="0" i="0">
+                <a:solidFill>
+                  <a:srgbClr val="D2D2E8"/>
+                </a:solidFill>
+                <a:latin typeface="Marianne"/>
+              </a:rPr>
+              <a:t>● ● ● ● </a:t>
+            </a:r>
+          </a:p>
+        </p:txBody>
+      </p:sp>
+      <p:sp>
+        <p:nvSpPr>
+          <p:cNvPr id="70" name="TextBox 69"/>
+          <p:cNvSpPr txBox="1"/>
+          <p:nvPr/>
+        </p:nvSpPr>
+        <p:spPr>
+          <a:xfrm>
+            <a:off x="7745229" y="4571999"/>
+            <a:ext cx="1058483" cy="310896"/>
+          </a:xfrm>
+          <a:prstGeom prst="rect">
+            <a:avLst/>
+          </a:prstGeom>
+          <a:noFill/>
+        </p:spPr>
+        <p:txBody>
+          <a:bodyPr wrap="square" lIns="0" rIns="0" tIns="0" bIns="0" anchor="t">
+            <a:spAutoFit/>
+          </a:bodyPr>
+          <a:lstStyle/>
+          <a:p>
+            <a:pPr algn="l">
+              <a:lnSpc>
+                <a:spcPct val="100000"/>
+              </a:lnSpc>
+              <a:spcBef>
+                <a:spcPts val="0"/>
+              </a:spcBef>
+              <a:spcAft>
+                <a:spcPts val="0"/>
+              </a:spcAft>
+            </a:pPr>
+            <a:r>
+              <a:rPr sz="1000" b="1" i="0">
+                <a:solidFill>
+                  <a:srgbClr val="161616"/>
+                </a:solidFill>
+                <a:latin typeface="Marianne"/>
+              </a:rPr>
+              <a:t>Éditeur CN</a:t>
+            </a:r>
+          </a:p>
+          <a:p>
+            <a:pPr algn="l">
+              <a:lnSpc>
+                <a:spcPct val="100000"/>
+              </a:lnSpc>
+              <a:spcBef>
+                <a:spcPts val="100"/>
+              </a:spcBef>
+              <a:spcAft>
+                <a:spcPts val="0"/>
+              </a:spcAft>
+            </a:pPr>
+            <a:r>
+              <a:rPr sz="800" b="0" i="0">
+                <a:solidFill>
+                  <a:srgbClr val="6A6A6A"/>
+                </a:solidFill>
+                <a:latin typeface="Marianne"/>
+              </a:rPr>
+              <a:t>+ routeur US</a:t>
+            </a:r>
+          </a:p>
+        </p:txBody>
+      </p:sp>
+      <p:sp>
+        <p:nvSpPr>
+          <p:cNvPr id="71" name="TextBox 70"/>
+          <p:cNvSpPr txBox="1"/>
+          <p:nvPr/>
+        </p:nvSpPr>
+        <p:spPr>
+          <a:xfrm>
+            <a:off x="9023168" y="4343399"/>
+            <a:ext cx="1058483" cy="274320"/>
+          </a:xfrm>
+          <a:prstGeom prst="rect">
+            <a:avLst/>
+          </a:prstGeom>
+          <a:noFill/>
+        </p:spPr>
+        <p:txBody>
+          <a:bodyPr wrap="square" lIns="0" rIns="0" tIns="0" bIns="0" anchor="ctr">
+            <a:spAutoFit/>
+          </a:bodyPr>
+          <a:lstStyle/>
+          <a:p>
+            <a:pPr algn="l">
+              <a:lnSpc>
+                <a:spcPct val="106000"/>
+              </a:lnSpc>
+              <a:spcBef>
+                <a:spcPts val="0"/>
+              </a:spcBef>
+              <a:spcAft>
+                <a:spcPts val="0"/>
+              </a:spcAft>
+            </a:pPr>
+            <a:r>
+              <a:rPr sz="1150" b="0" i="0">
+                <a:solidFill>
+                  <a:srgbClr val="E1000F"/>
+                </a:solidFill>
+                <a:latin typeface="Marianne"/>
+              </a:rPr>
+              <a:t>● </a:t>
+            </a:r>
+            <a:r>
+              <a:rPr sz="1150" b="0" i="0">
+                <a:solidFill>
+                  <a:srgbClr val="D2D2E8"/>
+                </a:solidFill>
+                <a:latin typeface="Marianne"/>
+              </a:rPr>
+              <a:t>● ● ● ● </a:t>
+            </a:r>
+          </a:p>
+        </p:txBody>
+      </p:sp>
+      <p:sp>
+        <p:nvSpPr>
+          <p:cNvPr id="72" name="TextBox 71"/>
+          <p:cNvSpPr txBox="1"/>
+          <p:nvPr/>
+        </p:nvSpPr>
+        <p:spPr>
+          <a:xfrm>
+            <a:off x="9023168" y="4571999"/>
+            <a:ext cx="1058483" cy="310896"/>
+          </a:xfrm>
+          <a:prstGeom prst="rect">
+            <a:avLst/>
+          </a:prstGeom>
+          <a:noFill/>
+        </p:spPr>
+        <p:txBody>
+          <a:bodyPr wrap="square" lIns="0" rIns="0" tIns="0" bIns="0" anchor="t">
+            <a:spAutoFit/>
+          </a:bodyPr>
+          <a:lstStyle/>
+          <a:p>
+            <a:pPr algn="l">
+              <a:lnSpc>
+                <a:spcPct val="100000"/>
+              </a:lnSpc>
+              <a:spcBef>
+                <a:spcPts val="0"/>
+              </a:spcBef>
+              <a:spcAft>
+                <a:spcPts val="0"/>
+              </a:spcAft>
+            </a:pPr>
+            <a:r>
+              <a:rPr sz="1000" b="1" i="0">
+                <a:solidFill>
+                  <a:srgbClr val="161616"/>
+                </a:solidFill>
+                <a:latin typeface="Marianne"/>
+              </a:rPr>
+              <a:t>Éditeur CN</a:t>
+            </a:r>
+          </a:p>
+          <a:p>
+            <a:pPr algn="l">
+              <a:lnSpc>
+                <a:spcPct val="100000"/>
+              </a:lnSpc>
+              <a:spcBef>
+                <a:spcPts val="100"/>
+              </a:spcBef>
+              <a:spcAft>
+                <a:spcPts val="0"/>
+              </a:spcAft>
+            </a:pPr>
+            <a:r>
+              <a:rPr sz="800" b="0" i="0">
+                <a:solidFill>
+                  <a:srgbClr val="6A6A6A"/>
+                </a:solidFill>
+                <a:latin typeface="Marianne"/>
+              </a:rPr>
+              <a:t>+ routeur US</a:t>
+            </a:r>
+          </a:p>
+        </p:txBody>
+      </p:sp>
+      <p:sp>
+        <p:nvSpPr>
+          <p:cNvPr id="73" name="TextBox 72"/>
+          <p:cNvSpPr txBox="1"/>
+          <p:nvPr/>
+        </p:nvSpPr>
+        <p:spPr>
+          <a:xfrm>
+            <a:off x="10301107" y="4343399"/>
+            <a:ext cx="1058483" cy="274320"/>
+          </a:xfrm>
+          <a:prstGeom prst="rect">
+            <a:avLst/>
+          </a:prstGeom>
+          <a:noFill/>
+        </p:spPr>
+        <p:txBody>
+          <a:bodyPr wrap="square" lIns="0" rIns="0" tIns="0" bIns="0" anchor="ctr">
+            <a:spAutoFit/>
+          </a:bodyPr>
+          <a:lstStyle/>
+          <a:p>
+            <a:pPr algn="l">
+              <a:lnSpc>
+                <a:spcPct val="106000"/>
+              </a:lnSpc>
+              <a:spcBef>
+                <a:spcPts val="0"/>
+              </a:spcBef>
+              <a:spcAft>
+                <a:spcPts val="0"/>
+              </a:spcAft>
+            </a:pPr>
+            <a:r>
+              <a:rPr sz="1150" b="0" i="0">
+                <a:solidFill>
+                  <a:srgbClr val="E1000F"/>
+                </a:solidFill>
+                <a:latin typeface="Marianne"/>
+              </a:rPr>
+              <a:t>● </a:t>
+            </a:r>
+            <a:r>
+              <a:rPr sz="1150" b="0" i="0">
+                <a:solidFill>
+                  <a:srgbClr val="D2D2E8"/>
+                </a:solidFill>
+                <a:latin typeface="Marianne"/>
+              </a:rPr>
+              <a:t>● ● ● ● </a:t>
+            </a:r>
+          </a:p>
+        </p:txBody>
+      </p:sp>
+      <p:sp>
+        <p:nvSpPr>
+          <p:cNvPr id="74" name="TextBox 73"/>
+          <p:cNvSpPr txBox="1"/>
+          <p:nvPr/>
+        </p:nvSpPr>
+        <p:spPr>
+          <a:xfrm>
+            <a:off x="10301107" y="4571999"/>
+            <a:ext cx="1058483" cy="310896"/>
+          </a:xfrm>
+          <a:prstGeom prst="rect">
+            <a:avLst/>
+          </a:prstGeom>
+          <a:noFill/>
+        </p:spPr>
+        <p:txBody>
+          <a:bodyPr wrap="square" lIns="0" rIns="0" tIns="0" bIns="0" anchor="t">
+            <a:spAutoFit/>
+          </a:bodyPr>
+          <a:lstStyle/>
+          <a:p>
+            <a:pPr algn="l">
+              <a:lnSpc>
+                <a:spcPct val="100000"/>
+              </a:lnSpc>
+              <a:spcBef>
+                <a:spcPts val="0"/>
+              </a:spcBef>
+              <a:spcAft>
+                <a:spcPts val="0"/>
+              </a:spcAft>
+            </a:pPr>
+            <a:r>
+              <a:rPr sz="1000" b="1" i="0">
+                <a:solidFill>
+                  <a:srgbClr val="161616"/>
+                </a:solidFill>
+                <a:latin typeface="Marianne"/>
+              </a:rPr>
+              <a:t>Éditeur CN</a:t>
+            </a:r>
+          </a:p>
+          <a:p>
+            <a:pPr algn="l">
+              <a:lnSpc>
+                <a:spcPct val="100000"/>
+              </a:lnSpc>
+              <a:spcBef>
+                <a:spcPts val="100"/>
+              </a:spcBef>
+              <a:spcAft>
+                <a:spcPts val="0"/>
+              </a:spcAft>
+            </a:pPr>
+            <a:r>
+              <a:rPr sz="800" b="0" i="0">
+                <a:solidFill>
+                  <a:srgbClr val="6A6A6A"/>
+                </a:solidFill>
+                <a:latin typeface="Marianne"/>
+              </a:rPr>
+              <a:t>+ routeur US</a:t>
+            </a:r>
+          </a:p>
+        </p:txBody>
+      </p:sp>
+      <p:sp>
+        <p:nvSpPr>
+          <p:cNvPr id="75" name="Rounded Rectangle 74"/>
+          <p:cNvSpPr/>
+          <p:nvPr/>
+        </p:nvSpPr>
+        <p:spPr>
+          <a:xfrm>
+            <a:off x="777240" y="4956048"/>
+            <a:ext cx="10637215" cy="603504"/>
+          </a:xfrm>
+          <a:prstGeom prst="roundRect">
+            <a:avLst>
+              <a:gd name="adj" fmla="val 5000"/>
+            </a:avLst>
+          </a:prstGeom>
+          <a:solidFill>
+            <a:srgbClr val="F5F5FE"/>
+          </a:solidFill>
+          <a:ln>
+            <a:noFill/>
+          </a:ln>
+          <a:effectLst/>
+        </p:spPr>
+        <p:style>
+          <a:lnRef idx="1">
+            <a:schemeClr val="accent1"/>
+          </a:lnRef>
+          <a:fillRef idx="3">
+            <a:schemeClr val="accent1"/>
+          </a:fillRef>
+          <a:effectRef idx="2">
+            <a:schemeClr val="accent1"/>
+          </a:effectRef>
+          <a:fontRef idx="minor">
+            <a:schemeClr val="lt1"/>
+          </a:fontRef>
+        </p:style>
+        <p:txBody>
+          <a:bodyPr rtlCol="0" anchor="ctr"/>
+          <a:lstStyle/>
+          <a:p>
+            <a:pPr algn="ctr"/>
+          </a:p>
+        </p:txBody>
+      </p:sp>
+      <p:pic>
+        <p:nvPicPr>
+          <p:cNvPr id="76" name="Picture 75" descr="shield-check.png"/>
+          <p:cNvPicPr>
+            <a:picLocks noChangeAspect="1"/>
+          </p:cNvPicPr>
+          <p:nvPr/>
+        </p:nvPicPr>
+        <p:blipFill>
+          <a:blip r:embed="rId5"/>
+          <a:stretch>
+            <a:fillRect/>
+          </a:stretch>
+        </p:blipFill>
+        <p:spPr>
+          <a:xfrm>
+            <a:off x="905256" y="5093208"/>
+            <a:ext cx="329184" cy="329184"/>
+          </a:xfrm>
+          <a:prstGeom prst="rect">
+            <a:avLst/>
+          </a:prstGeom>
+        </p:spPr>
+      </p:pic>
+      <p:sp>
+        <p:nvSpPr>
+          <p:cNvPr id="77" name="TextBox 76"/>
+          <p:cNvSpPr txBox="1"/>
+          <p:nvPr/>
+        </p:nvSpPr>
+        <p:spPr>
+          <a:xfrm>
+            <a:off x="1344168" y="4956048"/>
+            <a:ext cx="1106424" cy="603504"/>
+          </a:xfrm>
+          <a:prstGeom prst="rect">
+            <a:avLst/>
+          </a:prstGeom>
+          <a:noFill/>
+        </p:spPr>
+        <p:txBody>
+          <a:bodyPr wrap="square" lIns="0" rIns="0" tIns="0" bIns="0" anchor="ctr">
+            <a:spAutoFit/>
+          </a:bodyPr>
+          <a:lstStyle/>
+          <a:p>
+            <a:pPr algn="l">
+              <a:lnSpc>
+                <a:spcPct val="100000"/>
+              </a:lnSpc>
+              <a:spcBef>
+                <a:spcPts val="0"/>
+              </a:spcBef>
+              <a:spcAft>
+                <a:spcPts val="0"/>
+              </a:spcAft>
+            </a:pPr>
+            <a:r>
+              <a:rPr sz="1300" b="1" i="0">
+                <a:solidFill>
+                  <a:srgbClr val="161616"/>
+                </a:solidFill>
+                <a:latin typeface="Marianne"/>
+              </a:rPr>
+              <a:t>Conformité</a:t>
+            </a:r>
+          </a:p>
+          <a:p>
+            <a:pPr algn="l">
+              <a:lnSpc>
+                <a:spcPct val="100000"/>
+              </a:lnSpc>
+              <a:spcBef>
+                <a:spcPts val="200"/>
+              </a:spcBef>
+              <a:spcAft>
+                <a:spcPts val="0"/>
+              </a:spcAft>
+            </a:pPr>
+            <a:r>
+              <a:rPr sz="900" b="0" i="0">
+                <a:solidFill>
+                  <a:srgbClr val="6A6A6A"/>
+                </a:solidFill>
+                <a:latin typeface="Marianne"/>
+              </a:rPr>
+              <a:t>RGPD / données</a:t>
+            </a:r>
+          </a:p>
+        </p:txBody>
+      </p:sp>
+      <p:sp>
+        <p:nvSpPr>
+          <p:cNvPr id="78" name="TextBox 77"/>
+          <p:cNvSpPr txBox="1"/>
+          <p:nvPr/>
+        </p:nvSpPr>
+        <p:spPr>
+          <a:xfrm>
+            <a:off x="2633472" y="5001768"/>
+            <a:ext cx="1058483" cy="274320"/>
+          </a:xfrm>
+          <a:prstGeom prst="rect">
+            <a:avLst/>
+          </a:prstGeom>
+          <a:noFill/>
+        </p:spPr>
+        <p:txBody>
+          <a:bodyPr wrap="square" lIns="0" rIns="0" tIns="0" bIns="0" anchor="ctr">
+            <a:spAutoFit/>
+          </a:bodyPr>
+          <a:lstStyle/>
+          <a:p>
+            <a:pPr algn="l">
+              <a:lnSpc>
+                <a:spcPct val="106000"/>
+              </a:lnSpc>
+              <a:spcBef>
+                <a:spcPts val="0"/>
+              </a:spcBef>
+              <a:spcAft>
+                <a:spcPts val="0"/>
+              </a:spcAft>
+            </a:pPr>
+            <a:r>
+              <a:rPr sz="1150" b="0" i="0">
+                <a:solidFill>
+                  <a:srgbClr val="B85C00"/>
+                </a:solidFill>
+                <a:latin typeface="Marianne"/>
+              </a:rPr>
+              <a:t>● ● ● </a:t>
+            </a:r>
+            <a:r>
+              <a:rPr sz="1150" b="0" i="0">
+                <a:solidFill>
+                  <a:srgbClr val="D2D2E8"/>
+                </a:solidFill>
+                <a:latin typeface="Marianne"/>
+              </a:rPr>
+              <a:t>● ● </a:t>
+            </a:r>
+          </a:p>
+        </p:txBody>
+      </p:sp>
+      <p:sp>
+        <p:nvSpPr>
+          <p:cNvPr id="79" name="TextBox 78"/>
+          <p:cNvSpPr txBox="1"/>
+          <p:nvPr/>
+        </p:nvSpPr>
+        <p:spPr>
+          <a:xfrm>
+            <a:off x="2633472" y="5230368"/>
+            <a:ext cx="1058483" cy="310896"/>
+          </a:xfrm>
+          <a:prstGeom prst="rect">
+            <a:avLst/>
+          </a:prstGeom>
+          <a:noFill/>
+        </p:spPr>
+        <p:txBody>
+          <a:bodyPr wrap="square" lIns="0" rIns="0" tIns="0" bIns="0" anchor="t">
+            <a:spAutoFit/>
+          </a:bodyPr>
+          <a:lstStyle/>
+          <a:p>
+            <a:pPr algn="l">
+              <a:lnSpc>
+                <a:spcPct val="100000"/>
+              </a:lnSpc>
+              <a:spcBef>
+                <a:spcPts val="0"/>
+              </a:spcBef>
+              <a:spcAft>
+                <a:spcPts val="0"/>
+              </a:spcAft>
+            </a:pPr>
+            <a:r>
+              <a:rPr sz="1000" b="1" i="0">
+                <a:solidFill>
+                  <a:srgbClr val="161616"/>
+                </a:solidFill>
+                <a:latin typeface="Marianne"/>
+              </a:rPr>
+              <a:t>Partielle</a:t>
+            </a:r>
+          </a:p>
+          <a:p>
+            <a:pPr algn="l">
+              <a:lnSpc>
+                <a:spcPct val="100000"/>
+              </a:lnSpc>
+              <a:spcBef>
+                <a:spcPts val="100"/>
+              </a:spcBef>
+              <a:spcAft>
+                <a:spcPts val="0"/>
+              </a:spcAft>
+            </a:pPr>
+            <a:r>
+              <a:rPr sz="800" b="0" i="0">
+                <a:solidFill>
+                  <a:srgbClr val="6A6A6A"/>
+                </a:solidFill>
+                <a:latin typeface="Marianne"/>
+              </a:rPr>
+              <a:t>transfert hors UE</a:t>
+            </a:r>
+          </a:p>
+        </p:txBody>
+      </p:sp>
+      <p:sp>
+        <p:nvSpPr>
+          <p:cNvPr id="80" name="TextBox 79"/>
+          <p:cNvSpPr txBox="1"/>
+          <p:nvPr/>
+        </p:nvSpPr>
+        <p:spPr>
+          <a:xfrm>
+            <a:off x="3911411" y="5001768"/>
+            <a:ext cx="1058483" cy="274320"/>
+          </a:xfrm>
+          <a:prstGeom prst="rect">
+            <a:avLst/>
+          </a:prstGeom>
+          <a:noFill/>
+        </p:spPr>
+        <p:txBody>
+          <a:bodyPr wrap="square" lIns="0" rIns="0" tIns="0" bIns="0" anchor="ctr">
+            <a:spAutoFit/>
+          </a:bodyPr>
+          <a:lstStyle/>
+          <a:p>
+            <a:pPr algn="l">
+              <a:lnSpc>
+                <a:spcPct val="106000"/>
+              </a:lnSpc>
+              <a:spcBef>
+                <a:spcPts val="0"/>
+              </a:spcBef>
+              <a:spcAft>
+                <a:spcPts val="0"/>
+              </a:spcAft>
+            </a:pPr>
+            <a:r>
+              <a:rPr sz="1150" b="0" i="0">
+                <a:solidFill>
+                  <a:srgbClr val="18753C"/>
+                </a:solidFill>
+                <a:latin typeface="Marianne"/>
+              </a:rPr>
+              <a:t>● ● ● ● </a:t>
+            </a:r>
+            <a:r>
+              <a:rPr sz="1150" b="0" i="0">
+                <a:solidFill>
+                  <a:srgbClr val="D2D2E8"/>
+                </a:solidFill>
+                <a:latin typeface="Marianne"/>
+              </a:rPr>
+              <a:t>● </a:t>
+            </a:r>
+          </a:p>
+        </p:txBody>
+      </p:sp>
+      <p:sp>
+        <p:nvSpPr>
+          <p:cNvPr id="81" name="TextBox 80"/>
+          <p:cNvSpPr txBox="1"/>
+          <p:nvPr/>
+        </p:nvSpPr>
+        <p:spPr>
+          <a:xfrm>
+            <a:off x="3911411" y="5230368"/>
+            <a:ext cx="1058483" cy="310896"/>
+          </a:xfrm>
+          <a:prstGeom prst="rect">
+            <a:avLst/>
+          </a:prstGeom>
+          <a:noFill/>
+        </p:spPr>
+        <p:txBody>
+          <a:bodyPr wrap="square" lIns="0" rIns="0" tIns="0" bIns="0" anchor="t">
+            <a:spAutoFit/>
+          </a:bodyPr>
+          <a:lstStyle/>
+          <a:p>
+            <a:pPr algn="l">
+              <a:lnSpc>
+                <a:spcPct val="100000"/>
+              </a:lnSpc>
+              <a:spcBef>
+                <a:spcPts val="0"/>
+              </a:spcBef>
+              <a:spcAft>
+                <a:spcPts val="0"/>
+              </a:spcAft>
+            </a:pPr>
+            <a:r>
+              <a:rPr sz="1000" b="1" i="0">
+                <a:solidFill>
+                  <a:srgbClr val="161616"/>
+                </a:solidFill>
+                <a:latin typeface="Marianne"/>
+              </a:rPr>
+              <a:t>Bonne</a:t>
+            </a:r>
+          </a:p>
+          <a:p>
+            <a:pPr algn="l">
+              <a:lnSpc>
+                <a:spcPct val="100000"/>
+              </a:lnSpc>
+              <a:spcBef>
+                <a:spcPts val="100"/>
+              </a:spcBef>
+              <a:spcAft>
+                <a:spcPts val="0"/>
+              </a:spcAft>
+            </a:pPr>
+            <a:r>
+              <a:rPr sz="800" b="0" i="0">
+                <a:solidFill>
+                  <a:srgbClr val="6A6A6A"/>
+                </a:solidFill>
+                <a:latin typeface="Marianne"/>
+              </a:rPr>
+              <a:t>région UE · DPA AWS</a:t>
+            </a:r>
+          </a:p>
+        </p:txBody>
+      </p:sp>
+      <p:sp>
+        <p:nvSpPr>
+          <p:cNvPr id="82" name="TextBox 81"/>
+          <p:cNvSpPr txBox="1"/>
+          <p:nvPr/>
+        </p:nvSpPr>
+        <p:spPr>
+          <a:xfrm>
+            <a:off x="5189350" y="5001768"/>
+            <a:ext cx="1058483" cy="274320"/>
+          </a:xfrm>
+          <a:prstGeom prst="rect">
+            <a:avLst/>
+          </a:prstGeom>
+          <a:noFill/>
+        </p:spPr>
+        <p:txBody>
+          <a:bodyPr wrap="square" lIns="0" rIns="0" tIns="0" bIns="0" anchor="ctr">
+            <a:spAutoFit/>
+          </a:bodyPr>
+          <a:lstStyle/>
+          <a:p>
+            <a:pPr algn="l">
+              <a:lnSpc>
+                <a:spcPct val="106000"/>
+              </a:lnSpc>
+              <a:spcBef>
+                <a:spcPts val="0"/>
+              </a:spcBef>
+              <a:spcAft>
+                <a:spcPts val="0"/>
+              </a:spcAft>
+            </a:pPr>
+            <a:r>
+              <a:rPr sz="1150" b="0" i="0">
+                <a:solidFill>
+                  <a:srgbClr val="18753C"/>
+                </a:solidFill>
+                <a:latin typeface="Marianne"/>
+              </a:rPr>
+              <a:t>● ● ● ● ● </a:t>
+            </a:r>
+            <a:r>
+              <a:rPr sz="1150" b="0" i="0">
+                <a:solidFill>
+                  <a:srgbClr val="D2D2E8"/>
+                </a:solidFill>
+                <a:latin typeface="Marianne"/>
+              </a:rPr>
+              <a:t/>
+            </a:r>
+          </a:p>
+        </p:txBody>
+      </p:sp>
+      <p:sp>
+        <p:nvSpPr>
+          <p:cNvPr id="83" name="TextBox 82"/>
+          <p:cNvSpPr txBox="1"/>
+          <p:nvPr/>
+        </p:nvSpPr>
+        <p:spPr>
+          <a:xfrm>
+            <a:off x="5189350" y="5230368"/>
+            <a:ext cx="1058483" cy="310896"/>
+          </a:xfrm>
+          <a:prstGeom prst="rect">
+            <a:avLst/>
+          </a:prstGeom>
+          <a:noFill/>
+        </p:spPr>
+        <p:txBody>
+          <a:bodyPr wrap="square" lIns="0" rIns="0" tIns="0" bIns="0" anchor="t">
+            <a:spAutoFit/>
+          </a:bodyPr>
+          <a:lstStyle/>
+          <a:p>
+            <a:pPr algn="l">
+              <a:lnSpc>
+                <a:spcPct val="100000"/>
+              </a:lnSpc>
+              <a:spcBef>
+                <a:spcPts val="0"/>
+              </a:spcBef>
+              <a:spcAft>
+                <a:spcPts val="0"/>
+              </a:spcAft>
+            </a:pPr>
+            <a:r>
+              <a:rPr sz="1000" b="1" i="0">
+                <a:solidFill>
+                  <a:srgbClr val="161616"/>
+                </a:solidFill>
+                <a:latin typeface="Marianne"/>
+              </a:rPr>
+              <a:t>Bonne</a:t>
+            </a:r>
+          </a:p>
+          <a:p>
+            <a:pPr algn="l">
+              <a:lnSpc>
+                <a:spcPct val="100000"/>
+              </a:lnSpc>
+              <a:spcBef>
+                <a:spcPts val="100"/>
+              </a:spcBef>
+              <a:spcAft>
+                <a:spcPts val="0"/>
+              </a:spcAft>
+            </a:pPr>
+            <a:r>
+              <a:rPr sz="800" b="0" i="0">
+                <a:solidFill>
+                  <a:srgbClr val="6A6A6A"/>
+                </a:solidFill>
+                <a:latin typeface="Marianne"/>
+              </a:rPr>
+              <a:t>RGPD · éditeur FR</a:t>
+            </a:r>
+          </a:p>
+        </p:txBody>
+      </p:sp>
+      <p:sp>
+        <p:nvSpPr>
+          <p:cNvPr id="84" name="TextBox 83"/>
+          <p:cNvSpPr txBox="1"/>
+          <p:nvPr/>
+        </p:nvSpPr>
+        <p:spPr>
+          <a:xfrm>
+            <a:off x="6467289" y="5001768"/>
+            <a:ext cx="1058483" cy="274320"/>
+          </a:xfrm>
+          <a:prstGeom prst="rect">
+            <a:avLst/>
+          </a:prstGeom>
+          <a:noFill/>
+        </p:spPr>
+        <p:txBody>
+          <a:bodyPr wrap="square" lIns="0" rIns="0" tIns="0" bIns="0" anchor="ctr">
+            <a:spAutoFit/>
+          </a:bodyPr>
+          <a:lstStyle/>
+          <a:p>
+            <a:pPr algn="l">
+              <a:lnSpc>
+                <a:spcPct val="106000"/>
+              </a:lnSpc>
+              <a:spcBef>
+                <a:spcPts val="0"/>
+              </a:spcBef>
+              <a:spcAft>
+                <a:spcPts val="0"/>
+              </a:spcAft>
+            </a:pPr>
+            <a:r>
+              <a:rPr sz="1150" b="0" i="0">
+                <a:solidFill>
+                  <a:srgbClr val="18753C"/>
+                </a:solidFill>
+                <a:latin typeface="Marianne"/>
+              </a:rPr>
+              <a:t>● ● ● ● ● </a:t>
+            </a:r>
+            <a:r>
+              <a:rPr sz="1150" b="0" i="0">
+                <a:solidFill>
+                  <a:srgbClr val="D2D2E8"/>
+                </a:solidFill>
+                <a:latin typeface="Marianne"/>
+              </a:rPr>
+              <a:t/>
+            </a:r>
+          </a:p>
+        </p:txBody>
+      </p:sp>
+      <p:sp>
+        <p:nvSpPr>
+          <p:cNvPr id="85" name="TextBox 84"/>
+          <p:cNvSpPr txBox="1"/>
+          <p:nvPr/>
+        </p:nvSpPr>
+        <p:spPr>
+          <a:xfrm>
+            <a:off x="6467289" y="5230368"/>
+            <a:ext cx="1058483" cy="310896"/>
+          </a:xfrm>
+          <a:prstGeom prst="rect">
+            <a:avLst/>
+          </a:prstGeom>
+          <a:noFill/>
+        </p:spPr>
+        <p:txBody>
+          <a:bodyPr wrap="square" lIns="0" rIns="0" tIns="0" bIns="0" anchor="t">
+            <a:spAutoFit/>
+          </a:bodyPr>
+          <a:lstStyle/>
+          <a:p>
+            <a:pPr algn="l">
+              <a:lnSpc>
+                <a:spcPct val="100000"/>
+              </a:lnSpc>
+              <a:spcBef>
+                <a:spcPts val="0"/>
+              </a:spcBef>
+              <a:spcAft>
+                <a:spcPts val="0"/>
+              </a:spcAft>
+            </a:pPr>
+            <a:r>
+              <a:rPr sz="1000" b="1" i="0">
+                <a:solidFill>
+                  <a:srgbClr val="161616"/>
+                </a:solidFill>
+                <a:latin typeface="Marianne"/>
+              </a:rPr>
+              <a:t>Bonne</a:t>
+            </a:r>
+          </a:p>
+          <a:p>
+            <a:pPr algn="l">
+              <a:lnSpc>
+                <a:spcPct val="100000"/>
+              </a:lnSpc>
+              <a:spcBef>
+                <a:spcPts val="100"/>
+              </a:spcBef>
+              <a:spcAft>
+                <a:spcPts val="0"/>
+              </a:spcAft>
+            </a:pPr>
+            <a:r>
+              <a:rPr sz="800" b="0" i="0">
+                <a:solidFill>
+                  <a:srgbClr val="6A6A6A"/>
+                </a:solidFill>
+                <a:latin typeface="Marianne"/>
+              </a:rPr>
+              <a:t>cadre État (DINUM)</a:t>
+            </a:r>
+          </a:p>
+        </p:txBody>
+      </p:sp>
+      <p:sp>
+        <p:nvSpPr>
+          <p:cNvPr id="86" name="TextBox 85"/>
+          <p:cNvSpPr txBox="1"/>
+          <p:nvPr/>
+        </p:nvSpPr>
+        <p:spPr>
+          <a:xfrm>
+            <a:off x="7745229" y="5001768"/>
+            <a:ext cx="1058483" cy="274320"/>
+          </a:xfrm>
+          <a:prstGeom prst="rect">
+            <a:avLst/>
+          </a:prstGeom>
+          <a:noFill/>
+        </p:spPr>
+        <p:txBody>
+          <a:bodyPr wrap="square" lIns="0" rIns="0" tIns="0" bIns="0" anchor="ctr">
+            <a:spAutoFit/>
+          </a:bodyPr>
+          <a:lstStyle/>
+          <a:p>
+            <a:pPr algn="l">
+              <a:lnSpc>
+                <a:spcPct val="106000"/>
+              </a:lnSpc>
+              <a:spcBef>
+                <a:spcPts val="0"/>
+              </a:spcBef>
+              <a:spcAft>
+                <a:spcPts val="0"/>
+              </a:spcAft>
+            </a:pPr>
+            <a:r>
+              <a:rPr sz="1150" b="0" i="0">
+                <a:solidFill>
+                  <a:srgbClr val="E1000F"/>
+                </a:solidFill>
+                <a:latin typeface="Marianne"/>
+              </a:rPr>
+              <a:t>● </a:t>
+            </a:r>
+            <a:r>
+              <a:rPr sz="1150" b="0" i="0">
+                <a:solidFill>
+                  <a:srgbClr val="D2D2E8"/>
+                </a:solidFill>
+                <a:latin typeface="Marianne"/>
+              </a:rPr>
+              <a:t>● ● ● ● </a:t>
+            </a:r>
+          </a:p>
+        </p:txBody>
+      </p:sp>
+      <p:sp>
+        <p:nvSpPr>
+          <p:cNvPr id="87" name="TextBox 86"/>
+          <p:cNvSpPr txBox="1"/>
+          <p:nvPr/>
+        </p:nvSpPr>
+        <p:spPr>
+          <a:xfrm>
+            <a:off x="7745229" y="5230368"/>
+            <a:ext cx="1058483" cy="310896"/>
+          </a:xfrm>
+          <a:prstGeom prst="rect">
+            <a:avLst/>
+          </a:prstGeom>
+          <a:noFill/>
+        </p:spPr>
+        <p:txBody>
+          <a:bodyPr wrap="square" lIns="0" rIns="0" tIns="0" bIns="0" anchor="t">
+            <a:spAutoFit/>
+          </a:bodyPr>
+          <a:lstStyle/>
+          <a:p>
+            <a:pPr algn="l">
+              <a:lnSpc>
+                <a:spcPct val="100000"/>
+              </a:lnSpc>
+              <a:spcBef>
+                <a:spcPts val="0"/>
+              </a:spcBef>
+              <a:spcAft>
+                <a:spcPts val="0"/>
+              </a:spcAft>
+            </a:pPr>
+            <a:r>
+              <a:rPr sz="1000" b="1" i="0">
+                <a:solidFill>
+                  <a:srgbClr val="161616"/>
+                </a:solidFill>
+                <a:latin typeface="Marianne"/>
+              </a:rPr>
+              <a:t>Insuffisante</a:t>
+            </a:r>
+          </a:p>
+          <a:p>
+            <a:pPr algn="l">
+              <a:lnSpc>
+                <a:spcPct val="100000"/>
+              </a:lnSpc>
+              <a:spcBef>
+                <a:spcPts val="100"/>
+              </a:spcBef>
+              <a:spcAft>
+                <a:spcPts val="0"/>
+              </a:spcAft>
+            </a:pPr>
+            <a:r>
+              <a:rPr sz="800" b="0" i="0">
+                <a:solidFill>
+                  <a:srgbClr val="6A6A6A"/>
+                </a:solidFill>
+                <a:latin typeface="Marianne"/>
+              </a:rPr>
+              <a:t>sans garanties UE</a:t>
+            </a:r>
+          </a:p>
+        </p:txBody>
+      </p:sp>
+      <p:sp>
+        <p:nvSpPr>
+          <p:cNvPr id="88" name="TextBox 87"/>
+          <p:cNvSpPr txBox="1"/>
+          <p:nvPr/>
+        </p:nvSpPr>
+        <p:spPr>
+          <a:xfrm>
+            <a:off x="9023168" y="5001768"/>
+            <a:ext cx="1058483" cy="274320"/>
+          </a:xfrm>
+          <a:prstGeom prst="rect">
+            <a:avLst/>
+          </a:prstGeom>
+          <a:noFill/>
+        </p:spPr>
+        <p:txBody>
+          <a:bodyPr wrap="square" lIns="0" rIns="0" tIns="0" bIns="0" anchor="ctr">
+            <a:spAutoFit/>
+          </a:bodyPr>
+          <a:lstStyle/>
+          <a:p>
+            <a:pPr algn="l">
+              <a:lnSpc>
+                <a:spcPct val="106000"/>
+              </a:lnSpc>
+              <a:spcBef>
+                <a:spcPts val="0"/>
+              </a:spcBef>
+              <a:spcAft>
+                <a:spcPts val="0"/>
+              </a:spcAft>
+            </a:pPr>
+            <a:r>
+              <a:rPr sz="1150" b="0" i="0">
+                <a:solidFill>
+                  <a:srgbClr val="E1000F"/>
+                </a:solidFill>
+                <a:latin typeface="Marianne"/>
+              </a:rPr>
+              <a:t>● </a:t>
+            </a:r>
+            <a:r>
+              <a:rPr sz="1150" b="0" i="0">
+                <a:solidFill>
+                  <a:srgbClr val="D2D2E8"/>
+                </a:solidFill>
+                <a:latin typeface="Marianne"/>
+              </a:rPr>
+              <a:t>● ● ● ● </a:t>
+            </a:r>
+          </a:p>
+        </p:txBody>
+      </p:sp>
+      <p:sp>
+        <p:nvSpPr>
+          <p:cNvPr id="89" name="TextBox 88"/>
+          <p:cNvSpPr txBox="1"/>
+          <p:nvPr/>
+        </p:nvSpPr>
+        <p:spPr>
+          <a:xfrm>
+            <a:off x="9023168" y="5230368"/>
+            <a:ext cx="1058483" cy="310896"/>
+          </a:xfrm>
+          <a:prstGeom prst="rect">
+            <a:avLst/>
+          </a:prstGeom>
+          <a:noFill/>
+        </p:spPr>
+        <p:txBody>
+          <a:bodyPr wrap="square" lIns="0" rIns="0" tIns="0" bIns="0" anchor="t">
+            <a:spAutoFit/>
+          </a:bodyPr>
+          <a:lstStyle/>
+          <a:p>
+            <a:pPr algn="l">
+              <a:lnSpc>
+                <a:spcPct val="100000"/>
+              </a:lnSpc>
+              <a:spcBef>
+                <a:spcPts val="0"/>
+              </a:spcBef>
+              <a:spcAft>
+                <a:spcPts val="0"/>
+              </a:spcAft>
+            </a:pPr>
+            <a:r>
+              <a:rPr sz="1000" b="1" i="0">
+                <a:solidFill>
+                  <a:srgbClr val="161616"/>
+                </a:solidFill>
+                <a:latin typeface="Marianne"/>
+              </a:rPr>
+              <a:t>Insuffisante</a:t>
+            </a:r>
+          </a:p>
+          <a:p>
+            <a:pPr algn="l">
+              <a:lnSpc>
+                <a:spcPct val="100000"/>
+              </a:lnSpc>
+              <a:spcBef>
+                <a:spcPts val="100"/>
+              </a:spcBef>
+              <a:spcAft>
+                <a:spcPts val="0"/>
+              </a:spcAft>
+            </a:pPr>
+            <a:r>
+              <a:rPr sz="800" b="0" i="0">
+                <a:solidFill>
+                  <a:srgbClr val="6A6A6A"/>
+                </a:solidFill>
+                <a:latin typeface="Marianne"/>
+              </a:rPr>
+              <a:t>sans garanties UE</a:t>
+            </a:r>
+          </a:p>
+        </p:txBody>
+      </p:sp>
+      <p:sp>
+        <p:nvSpPr>
+          <p:cNvPr id="90" name="TextBox 89"/>
+          <p:cNvSpPr txBox="1"/>
+          <p:nvPr/>
+        </p:nvSpPr>
+        <p:spPr>
+          <a:xfrm>
+            <a:off x="10301107" y="5001768"/>
+            <a:ext cx="1058483" cy="274320"/>
+          </a:xfrm>
+          <a:prstGeom prst="rect">
+            <a:avLst/>
+          </a:prstGeom>
+          <a:noFill/>
+        </p:spPr>
+        <p:txBody>
+          <a:bodyPr wrap="square" lIns="0" rIns="0" tIns="0" bIns="0" anchor="ctr">
+            <a:spAutoFit/>
+          </a:bodyPr>
+          <a:lstStyle/>
+          <a:p>
+            <a:pPr algn="l">
+              <a:lnSpc>
+                <a:spcPct val="106000"/>
+              </a:lnSpc>
+              <a:spcBef>
+                <a:spcPts val="0"/>
+              </a:spcBef>
+              <a:spcAft>
+                <a:spcPts val="0"/>
+              </a:spcAft>
+            </a:pPr>
+            <a:r>
+              <a:rPr sz="1150" b="0" i="0">
+                <a:solidFill>
+                  <a:srgbClr val="E1000F"/>
+                </a:solidFill>
+                <a:latin typeface="Marianne"/>
+              </a:rPr>
+              <a:t>● </a:t>
+            </a:r>
+            <a:r>
+              <a:rPr sz="1150" b="0" i="0">
+                <a:solidFill>
+                  <a:srgbClr val="D2D2E8"/>
+                </a:solidFill>
+                <a:latin typeface="Marianne"/>
+              </a:rPr>
+              <a:t>● ● ● ● </a:t>
+            </a:r>
+          </a:p>
+        </p:txBody>
+      </p:sp>
+      <p:sp>
+        <p:nvSpPr>
+          <p:cNvPr id="91" name="TextBox 90"/>
+          <p:cNvSpPr txBox="1"/>
+          <p:nvPr/>
+        </p:nvSpPr>
+        <p:spPr>
+          <a:xfrm>
+            <a:off x="10301107" y="5230368"/>
+            <a:ext cx="1058483" cy="310896"/>
+          </a:xfrm>
+          <a:prstGeom prst="rect">
+            <a:avLst/>
+          </a:prstGeom>
+          <a:noFill/>
+        </p:spPr>
+        <p:txBody>
+          <a:bodyPr wrap="square" lIns="0" rIns="0" tIns="0" bIns="0" anchor="t">
+            <a:spAutoFit/>
+          </a:bodyPr>
+          <a:lstStyle/>
+          <a:p>
+            <a:pPr algn="l">
+              <a:lnSpc>
+                <a:spcPct val="100000"/>
+              </a:lnSpc>
+              <a:spcBef>
+                <a:spcPts val="0"/>
+              </a:spcBef>
+              <a:spcAft>
+                <a:spcPts val="0"/>
+              </a:spcAft>
+            </a:pPr>
+            <a:r>
+              <a:rPr sz="1000" b="1" i="0">
+                <a:solidFill>
+                  <a:srgbClr val="161616"/>
+                </a:solidFill>
+                <a:latin typeface="Marianne"/>
+              </a:rPr>
+              <a:t>Insuffisante</a:t>
+            </a:r>
+          </a:p>
+          <a:p>
+            <a:pPr algn="l">
+              <a:lnSpc>
+                <a:spcPct val="100000"/>
+              </a:lnSpc>
+              <a:spcBef>
+                <a:spcPts val="100"/>
+              </a:spcBef>
+              <a:spcAft>
+                <a:spcPts val="0"/>
+              </a:spcAft>
+            </a:pPr>
+            <a:r>
+              <a:rPr sz="800" b="0" i="0">
+                <a:solidFill>
+                  <a:srgbClr val="6A6A6A"/>
+                </a:solidFill>
+                <a:latin typeface="Marianne"/>
+              </a:rPr>
+              <a:t>sans garanties UE</a:t>
+            </a:r>
+          </a:p>
+        </p:txBody>
+      </p:sp>
+      <p:sp>
+        <p:nvSpPr>
+          <p:cNvPr id="92" name="Rounded Rectangle 91"/>
+          <p:cNvSpPr/>
+          <p:nvPr/>
+        </p:nvSpPr>
+        <p:spPr>
+          <a:xfrm>
+            <a:off x="777240" y="5614416"/>
+            <a:ext cx="10637215" cy="603504"/>
+          </a:xfrm>
+          <a:prstGeom prst="roundRect">
+            <a:avLst>
+              <a:gd name="adj" fmla="val 5000"/>
+            </a:avLst>
+          </a:prstGeom>
+          <a:solidFill>
+            <a:srgbClr val="F5F5FE"/>
+          </a:solidFill>
+          <a:ln>
+            <a:noFill/>
+          </a:ln>
+          <a:effectLst/>
+        </p:spPr>
+        <p:style>
+          <a:lnRef idx="1">
+            <a:schemeClr val="accent1"/>
+          </a:lnRef>
+          <a:fillRef idx="3">
+            <a:schemeClr val="accent1"/>
+          </a:fillRef>
+          <a:effectRef idx="2">
+            <a:schemeClr val="accent1"/>
+          </a:effectRef>
+          <a:fontRef idx="minor">
+            <a:schemeClr val="lt1"/>
+          </a:fontRef>
+        </p:style>
+        <p:txBody>
+          <a:bodyPr rtlCol="0" anchor="ctr"/>
+          <a:lstStyle/>
+          <a:p>
+            <a:pPr algn="ctr"/>
+          </a:p>
+        </p:txBody>
+      </p:sp>
+      <p:pic>
+        <p:nvPicPr>
+          <p:cNvPr id="93" name="Picture 92" descr="settings-3.png"/>
           <p:cNvPicPr>
             <a:picLocks noChangeAspect="1"/>
           </p:cNvPicPr>
@@ -6311,8 +8855,8 @@
         </p:blipFill>
         <p:spPr>
           <a:xfrm>
-            <a:off x="923544" y="5513832"/>
-            <a:ext cx="365760" cy="365760"/>
+            <a:off x="905256" y="5751576"/>
+            <a:ext cx="329184" cy="329184"/>
           </a:xfrm>
           <a:prstGeom prst="rect">
             <a:avLst/>
@@ -6321,14 +8865,14 @@
       </p:pic>
       <p:sp>
         <p:nvSpPr>
-          <p:cNvPr id="53" name="TextBox 52"/>
+          <p:cNvPr id="94" name="TextBox 93"/>
           <p:cNvSpPr txBox="1"/>
           <p:nvPr/>
         </p:nvSpPr>
         <p:spPr>
           <a:xfrm>
-            <a:off x="1417319" y="5340096"/>
-            <a:ext cx="1307592" cy="713232"/>
+            <a:off x="1344168" y="5614416"/>
+            <a:ext cx="1106424" cy="603504"/>
           </a:xfrm>
           <a:prstGeom prst="rect">
             <a:avLst/>
@@ -6353,7 +8897,7 @@
               </a:spcAft>
             </a:pPr>
             <a:r>
-              <a:rPr sz="1450" b="1" i="0">
+              <a:rPr sz="1300" b="1" i="0">
                 <a:solidFill>
                   <a:srgbClr val="161616"/>
                 </a:solidFill>
@@ -6375,7 +8919,7 @@
               </a:spcAft>
             </a:pPr>
             <a:r>
-              <a:rPr sz="950" b="0" i="0">
+              <a:rPr sz="900" b="0" i="0">
                 <a:solidFill>
                   <a:srgbClr val="6A6A6A"/>
                 </a:solidFill>
@@ -6388,14 +8932,14 @@
       </p:sp>
       <p:sp>
         <p:nvSpPr>
-          <p:cNvPr id="54" name="TextBox 53"/>
+          <p:cNvPr id="95" name="TextBox 94"/>
           <p:cNvSpPr txBox="1"/>
           <p:nvPr/>
         </p:nvSpPr>
         <p:spPr>
           <a:xfrm>
-            <a:off x="2962656" y="5431536"/>
-            <a:ext cx="1847773" cy="274320"/>
+            <a:off x="2633472" y="5660136"/>
+            <a:ext cx="1058483" cy="274320"/>
           </a:xfrm>
           <a:prstGeom prst="rect">
             <a:avLst/>
@@ -6442,14 +8986,14 @@
       </p:sp>
       <p:sp>
         <p:nvSpPr>
-          <p:cNvPr id="55" name="TextBox 54"/>
+          <p:cNvPr id="96" name="TextBox 95"/>
           <p:cNvSpPr txBox="1"/>
           <p:nvPr/>
         </p:nvSpPr>
         <p:spPr>
           <a:xfrm>
-            <a:off x="2962656" y="5687568"/>
-            <a:ext cx="1847773" cy="329184"/>
+            <a:off x="2633472" y="5888736"/>
+            <a:ext cx="1058483" cy="310896"/>
           </a:xfrm>
           <a:prstGeom prst="rect">
             <a:avLst/>
@@ -6474,13 +9018,13 @@
               </a:spcAft>
             </a:pPr>
             <a:r>
-              <a:rPr sz="1150" b="1" i="0">
+              <a:rPr sz="1000" b="1" i="0">
                 <a:solidFill>
                   <a:srgbClr val="161616"/>
                 </a:solidFill>
                 <a:latin typeface="Marianne"/>
               </a:rPr>
-              <a:t>Mac/Linux/Win natif</a:t>
+              <a:t>Multi-OS natif</a:t>
             </a:r>
           </a:p>
           <a:p>
@@ -6496,27 +9040,27 @@
               </a:spcAft>
             </a:pPr>
             <a:r>
-              <a:rPr sz="950" b="0" i="0">
+              <a:rPr sz="800" b="0" i="0">
                 <a:solidFill>
                   <a:srgbClr val="6A6A6A"/>
                 </a:solidFill>
                 <a:latin typeface="Marianne"/>
               </a:rPr>
-              <a:t>outil mûr, admin. ent.</a:t>
-            </a:r>
-          </a:p>
-        </p:txBody>
-      </p:sp>
-      <p:sp>
-        <p:nvSpPr>
-          <p:cNvPr id="56" name="TextBox 55"/>
+              <a:t>outil mûr, admin ent.</a:t>
+            </a:r>
+          </a:p>
+        </p:txBody>
+      </p:sp>
+      <p:sp>
+        <p:nvSpPr>
+          <p:cNvPr id="97" name="TextBox 96"/>
           <p:cNvSpPr txBox="1"/>
           <p:nvPr/>
         </p:nvSpPr>
         <p:spPr>
           <a:xfrm>
-            <a:off x="5139613" y="5431536"/>
-            <a:ext cx="1847773" cy="274320"/>
+            <a:off x="3911411" y="5660136"/>
+            <a:ext cx="1058483" cy="274320"/>
           </a:xfrm>
           <a:prstGeom prst="rect">
             <a:avLst/>
@@ -6563,14 +9107,14 @@
       </p:sp>
       <p:sp>
         <p:nvSpPr>
-          <p:cNvPr id="57" name="TextBox 56"/>
+          <p:cNvPr id="98" name="TextBox 97"/>
           <p:cNvSpPr txBox="1"/>
           <p:nvPr/>
         </p:nvSpPr>
         <p:spPr>
           <a:xfrm>
-            <a:off x="5139613" y="5687568"/>
-            <a:ext cx="1847773" cy="329184"/>
+            <a:off x="3911411" y="5888736"/>
+            <a:ext cx="1058483" cy="310896"/>
           </a:xfrm>
           <a:prstGeom prst="rect">
             <a:avLst/>
@@ -6595,13 +9139,13 @@
               </a:spcAft>
             </a:pPr>
             <a:r>
-              <a:rPr sz="1150" b="1" i="0">
+              <a:rPr sz="1000" b="1" i="0">
                 <a:solidFill>
                   <a:srgbClr val="161616"/>
                 </a:solidFill>
                 <a:latin typeface="Marianne"/>
               </a:rPr>
-              <a:t>OpenAI-compat.</a:t>
+              <a:t>Bedrock (IAM)</a:t>
             </a:r>
           </a:p>
           <a:p>
@@ -6617,27 +9161,27 @@
               </a:spcAft>
             </a:pPr>
             <a:r>
-              <a:rPr sz="950" b="0" i="0">
+              <a:rPr sz="800" b="0" i="0">
                 <a:solidFill>
                   <a:srgbClr val="6A6A6A"/>
                 </a:solidFill>
                 <a:latin typeface="Marianne"/>
               </a:rPr>
-              <a:t>agents État · quotas CI</a:t>
-            </a:r>
-          </a:p>
-        </p:txBody>
-      </p:sp>
-      <p:sp>
-        <p:nvSpPr>
-          <p:cNvPr id="58" name="TextBox 57"/>
+              <a:t>data sharing requis</a:t>
+            </a:r>
+          </a:p>
+        </p:txBody>
+      </p:sp>
+      <p:sp>
+        <p:nvSpPr>
+          <p:cNvPr id="99" name="TextBox 98"/>
           <p:cNvSpPr txBox="1"/>
           <p:nvPr/>
         </p:nvSpPr>
         <p:spPr>
           <a:xfrm>
-            <a:off x="7316571" y="5431536"/>
-            <a:ext cx="1847773" cy="274320"/>
+            <a:off x="5189350" y="5660136"/>
+            <a:ext cx="1058483" cy="274320"/>
           </a:xfrm>
           <a:prstGeom prst="rect">
             <a:avLst/>
@@ -6684,14 +9228,14 @@
       </p:sp>
       <p:sp>
         <p:nvSpPr>
-          <p:cNvPr id="59" name="TextBox 58"/>
+          <p:cNvPr id="100" name="TextBox 99"/>
           <p:cNvSpPr txBox="1"/>
           <p:nvPr/>
         </p:nvSpPr>
         <p:spPr>
           <a:xfrm>
-            <a:off x="7316571" y="5687568"/>
-            <a:ext cx="1847773" cy="329184"/>
+            <a:off x="5189350" y="5888736"/>
+            <a:ext cx="1058483" cy="310896"/>
           </a:xfrm>
           <a:prstGeom prst="rect">
             <a:avLst/>
@@ -6716,13 +9260,13 @@
               </a:spcAft>
             </a:pPr>
             <a:r>
-              <a:rPr sz="1150" b="1" i="0">
+              <a:rPr sz="1000" b="1" i="0">
                 <a:solidFill>
                   <a:srgbClr val="161616"/>
                 </a:solidFill>
                 <a:latin typeface="Marianne"/>
               </a:rPr>
-              <a:t>clé OpenRouter</a:t>
+              <a:t>CLI + VS Code</a:t>
             </a:r>
           </a:p>
           <a:p>
@@ -6738,27 +9282,27 @@
               </a:spcAft>
             </a:pPr>
             <a:r>
-              <a:rPr sz="950" b="0" i="0">
+              <a:rPr sz="800" b="0" i="0">
                 <a:solidFill>
                   <a:srgbClr val="6A6A6A"/>
                 </a:solidFill>
                 <a:latin typeface="Marianne"/>
               </a:rPr>
-              <a:t>Mac/Linux/Win (WSL)</a:t>
-            </a:r>
-          </a:p>
-        </p:txBody>
-      </p:sp>
-      <p:sp>
-        <p:nvSpPr>
-          <p:cNvPr id="60" name="TextBox 59"/>
+              <a:t>clé Mistral ou plan</a:t>
+            </a:r>
+          </a:p>
+        </p:txBody>
+      </p:sp>
+      <p:sp>
+        <p:nvSpPr>
+          <p:cNvPr id="101" name="TextBox 100"/>
           <p:cNvSpPr txBox="1"/>
           <p:nvPr/>
         </p:nvSpPr>
         <p:spPr>
           <a:xfrm>
-            <a:off x="9493529" y="5431536"/>
-            <a:ext cx="1847773" cy="274320"/>
+            <a:off x="6467289" y="5660136"/>
+            <a:ext cx="1058483" cy="274320"/>
           </a:xfrm>
           <a:prstGeom prst="rect">
             <a:avLst/>
@@ -6805,14 +9349,14 @@
       </p:sp>
       <p:sp>
         <p:nvSpPr>
-          <p:cNvPr id="61" name="TextBox 60"/>
+          <p:cNvPr id="102" name="TextBox 101"/>
           <p:cNvSpPr txBox="1"/>
           <p:nvPr/>
         </p:nvSpPr>
         <p:spPr>
           <a:xfrm>
-            <a:off x="9493529" y="5687568"/>
-            <a:ext cx="1847773" cy="329184"/>
+            <a:off x="6467289" y="5888736"/>
+            <a:ext cx="1058483" cy="310896"/>
           </a:xfrm>
           <a:prstGeom prst="rect">
             <a:avLst/>
@@ -6837,13 +9381,13 @@
               </a:spcAft>
             </a:pPr>
             <a:r>
-              <a:rPr sz="1150" b="1" i="0">
+              <a:rPr sz="1000" b="1" i="0">
                 <a:solidFill>
                   <a:srgbClr val="161616"/>
                 </a:solidFill>
                 <a:latin typeface="Marianne"/>
               </a:rPr>
-              <a:t>clé OpenRouter</a:t>
+              <a:t>OpenAI-compat.</a:t>
             </a:r>
           </a:p>
           <a:p>
@@ -6859,27 +9403,81 @@
               </a:spcAft>
             </a:pPr>
             <a:r>
-              <a:rPr sz="950" b="0" i="0">
+              <a:rPr sz="800" b="0" i="0">
                 <a:solidFill>
                   <a:srgbClr val="6A6A6A"/>
                 </a:solidFill>
                 <a:latin typeface="Marianne"/>
               </a:rPr>
-              <a:t>Mac/Linux/Win (WSL)</a:t>
-            </a:r>
-          </a:p>
-        </p:txBody>
-      </p:sp>
-      <p:sp>
-        <p:nvSpPr>
-          <p:cNvPr id="62" name="TextBox 61"/>
+              <a:t>agents État · quotas</a:t>
+            </a:r>
+          </a:p>
+        </p:txBody>
+      </p:sp>
+      <p:sp>
+        <p:nvSpPr>
+          <p:cNvPr id="103" name="TextBox 102"/>
           <p:cNvSpPr txBox="1"/>
           <p:nvPr/>
         </p:nvSpPr>
         <p:spPr>
           <a:xfrm>
-            <a:off x="777240" y="6163056"/>
-            <a:ext cx="10637215" cy="274320"/>
+            <a:off x="7745229" y="5660136"/>
+            <a:ext cx="1058483" cy="274320"/>
+          </a:xfrm>
+          <a:prstGeom prst="rect">
+            <a:avLst/>
+          </a:prstGeom>
+          <a:noFill/>
+        </p:spPr>
+        <p:txBody>
+          <a:bodyPr wrap="square" lIns="0" rIns="0" tIns="0" bIns="0" anchor="ctr">
+            <a:spAutoFit/>
+          </a:bodyPr>
+          <a:lstStyle/>
+          <a:p>
+            <a:pPr algn="l">
+              <a:lnSpc>
+                <a:spcPct val="106000"/>
+              </a:lnSpc>
+              <a:spcBef>
+                <a:spcPts val="0"/>
+              </a:spcBef>
+              <a:spcAft>
+                <a:spcPts val="0"/>
+              </a:spcAft>
+            </a:pPr>
+            <a:r>
+              <a:rPr sz="1150" b="0" i="0">
+                <a:solidFill>
+                  <a:srgbClr val="B85C00"/>
+                </a:solidFill>
+                <a:latin typeface="Marianne"/>
+              </a:rPr>
+              <a:t>● ● ● </a:t>
+            </a:r>
+            <a:r>
+              <a:rPr sz="1150" b="0" i="0">
+                <a:solidFill>
+                  <a:srgbClr val="D2D2E8"/>
+                </a:solidFill>
+                <a:latin typeface="Marianne"/>
+              </a:rPr>
+              <a:t>● ● </a:t>
+            </a:r>
+          </a:p>
+        </p:txBody>
+      </p:sp>
+      <p:sp>
+        <p:nvSpPr>
+          <p:cNvPr id="104" name="TextBox 103"/>
+          <p:cNvSpPr txBox="1"/>
+          <p:nvPr/>
+        </p:nvSpPr>
+        <p:spPr>
+          <a:xfrm>
+            <a:off x="7745229" y="5888736"/>
+            <a:ext cx="1058483" cy="310896"/>
           </a:xfrm>
           <a:prstGeom prst="rect">
             <a:avLst/>
@@ -6894,6 +9492,73 @@
           <a:p>
             <a:pPr algn="l">
               <a:lnSpc>
+                <a:spcPct val="100000"/>
+              </a:lnSpc>
+              <a:spcBef>
+                <a:spcPts val="0"/>
+              </a:spcBef>
+              <a:spcAft>
+                <a:spcPts val="0"/>
+              </a:spcAft>
+            </a:pPr>
+            <a:r>
+              <a:rPr sz="1000" b="1" i="0">
+                <a:solidFill>
+                  <a:srgbClr val="161616"/>
+                </a:solidFill>
+                <a:latin typeface="Marianne"/>
+              </a:rPr>
+              <a:t>clé OpenRouter</a:t>
+            </a:r>
+          </a:p>
+          <a:p>
+            <a:pPr algn="l">
+              <a:lnSpc>
+                <a:spcPct val="100000"/>
+              </a:lnSpc>
+              <a:spcBef>
+                <a:spcPts val="100"/>
+              </a:spcBef>
+              <a:spcAft>
+                <a:spcPts val="0"/>
+              </a:spcAft>
+            </a:pPr>
+            <a:r>
+              <a:rPr sz="800" b="0" i="0">
+                <a:solidFill>
+                  <a:srgbClr val="6A6A6A"/>
+                </a:solidFill>
+                <a:latin typeface="Marianne"/>
+              </a:rPr>
+              <a:t>Mac/Linux/Win (WSL)</a:t>
+            </a:r>
+          </a:p>
+        </p:txBody>
+      </p:sp>
+      <p:sp>
+        <p:nvSpPr>
+          <p:cNvPr id="105" name="TextBox 104"/>
+          <p:cNvSpPr txBox="1"/>
+          <p:nvPr/>
+        </p:nvSpPr>
+        <p:spPr>
+          <a:xfrm>
+            <a:off x="9023168" y="5660136"/>
+            <a:ext cx="1058483" cy="274320"/>
+          </a:xfrm>
+          <a:prstGeom prst="rect">
+            <a:avLst/>
+          </a:prstGeom>
+          <a:noFill/>
+        </p:spPr>
+        <p:txBody>
+          <a:bodyPr wrap="square" lIns="0" rIns="0" tIns="0" bIns="0" anchor="ctr">
+            <a:spAutoFit/>
+          </a:bodyPr>
+          <a:lstStyle/>
+          <a:p>
+            <a:pPr algn="l">
+              <a:lnSpc>
                 <a:spcPct val="106000"/>
               </a:lnSpc>
               <a:spcBef>
@@ -6904,6 +9569,248 @@
               </a:spcAft>
             </a:pPr>
             <a:r>
+              <a:rPr sz="1150" b="0" i="0">
+                <a:solidFill>
+                  <a:srgbClr val="B85C00"/>
+                </a:solidFill>
+                <a:latin typeface="Marianne"/>
+              </a:rPr>
+              <a:t>● ● ● </a:t>
+            </a:r>
+            <a:r>
+              <a:rPr sz="1150" b="0" i="0">
+                <a:solidFill>
+                  <a:srgbClr val="D2D2E8"/>
+                </a:solidFill>
+                <a:latin typeface="Marianne"/>
+              </a:rPr>
+              <a:t>● ● </a:t>
+            </a:r>
+          </a:p>
+        </p:txBody>
+      </p:sp>
+      <p:sp>
+        <p:nvSpPr>
+          <p:cNvPr id="106" name="TextBox 105"/>
+          <p:cNvSpPr txBox="1"/>
+          <p:nvPr/>
+        </p:nvSpPr>
+        <p:spPr>
+          <a:xfrm>
+            <a:off x="9023168" y="5888736"/>
+            <a:ext cx="1058483" cy="310896"/>
+          </a:xfrm>
+          <a:prstGeom prst="rect">
+            <a:avLst/>
+          </a:prstGeom>
+          <a:noFill/>
+        </p:spPr>
+        <p:txBody>
+          <a:bodyPr wrap="square" lIns="0" rIns="0" tIns="0" bIns="0" anchor="t">
+            <a:spAutoFit/>
+          </a:bodyPr>
+          <a:lstStyle/>
+          <a:p>
+            <a:pPr algn="l">
+              <a:lnSpc>
+                <a:spcPct val="100000"/>
+              </a:lnSpc>
+              <a:spcBef>
+                <a:spcPts val="0"/>
+              </a:spcBef>
+              <a:spcAft>
+                <a:spcPts val="0"/>
+              </a:spcAft>
+            </a:pPr>
+            <a:r>
+              <a:rPr sz="1000" b="1" i="0">
+                <a:solidFill>
+                  <a:srgbClr val="161616"/>
+                </a:solidFill>
+                <a:latin typeface="Marianne"/>
+              </a:rPr>
+              <a:t>clé OpenRouter</a:t>
+            </a:r>
+          </a:p>
+          <a:p>
+            <a:pPr algn="l">
+              <a:lnSpc>
+                <a:spcPct val="100000"/>
+              </a:lnSpc>
+              <a:spcBef>
+                <a:spcPts val="100"/>
+              </a:spcBef>
+              <a:spcAft>
+                <a:spcPts val="0"/>
+              </a:spcAft>
+            </a:pPr>
+            <a:r>
+              <a:rPr sz="800" b="0" i="0">
+                <a:solidFill>
+                  <a:srgbClr val="6A6A6A"/>
+                </a:solidFill>
+                <a:latin typeface="Marianne"/>
+              </a:rPr>
+              <a:t>Mac/Linux/Win (WSL)</a:t>
+            </a:r>
+          </a:p>
+        </p:txBody>
+      </p:sp>
+      <p:sp>
+        <p:nvSpPr>
+          <p:cNvPr id="107" name="TextBox 106"/>
+          <p:cNvSpPr txBox="1"/>
+          <p:nvPr/>
+        </p:nvSpPr>
+        <p:spPr>
+          <a:xfrm>
+            <a:off x="10301107" y="5660136"/>
+            <a:ext cx="1058483" cy="274320"/>
+          </a:xfrm>
+          <a:prstGeom prst="rect">
+            <a:avLst/>
+          </a:prstGeom>
+          <a:noFill/>
+        </p:spPr>
+        <p:txBody>
+          <a:bodyPr wrap="square" lIns="0" rIns="0" tIns="0" bIns="0" anchor="ctr">
+            <a:spAutoFit/>
+          </a:bodyPr>
+          <a:lstStyle/>
+          <a:p>
+            <a:pPr algn="l">
+              <a:lnSpc>
+                <a:spcPct val="106000"/>
+              </a:lnSpc>
+              <a:spcBef>
+                <a:spcPts val="0"/>
+              </a:spcBef>
+              <a:spcAft>
+                <a:spcPts val="0"/>
+              </a:spcAft>
+            </a:pPr>
+            <a:r>
+              <a:rPr sz="1150" b="0" i="0">
+                <a:solidFill>
+                  <a:srgbClr val="B85C00"/>
+                </a:solidFill>
+                <a:latin typeface="Marianne"/>
+              </a:rPr>
+              <a:t>● ● ● </a:t>
+            </a:r>
+            <a:r>
+              <a:rPr sz="1150" b="0" i="0">
+                <a:solidFill>
+                  <a:srgbClr val="D2D2E8"/>
+                </a:solidFill>
+                <a:latin typeface="Marianne"/>
+              </a:rPr>
+              <a:t>● ● </a:t>
+            </a:r>
+          </a:p>
+        </p:txBody>
+      </p:sp>
+      <p:sp>
+        <p:nvSpPr>
+          <p:cNvPr id="108" name="TextBox 107"/>
+          <p:cNvSpPr txBox="1"/>
+          <p:nvPr/>
+        </p:nvSpPr>
+        <p:spPr>
+          <a:xfrm>
+            <a:off x="10301107" y="5888736"/>
+            <a:ext cx="1058483" cy="310896"/>
+          </a:xfrm>
+          <a:prstGeom prst="rect">
+            <a:avLst/>
+          </a:prstGeom>
+          <a:noFill/>
+        </p:spPr>
+        <p:txBody>
+          <a:bodyPr wrap="square" lIns="0" rIns="0" tIns="0" bIns="0" anchor="t">
+            <a:spAutoFit/>
+          </a:bodyPr>
+          <a:lstStyle/>
+          <a:p>
+            <a:pPr algn="l">
+              <a:lnSpc>
+                <a:spcPct val="100000"/>
+              </a:lnSpc>
+              <a:spcBef>
+                <a:spcPts val="0"/>
+              </a:spcBef>
+              <a:spcAft>
+                <a:spcPts val="0"/>
+              </a:spcAft>
+            </a:pPr>
+            <a:r>
+              <a:rPr sz="1000" b="1" i="0">
+                <a:solidFill>
+                  <a:srgbClr val="161616"/>
+                </a:solidFill>
+                <a:latin typeface="Marianne"/>
+              </a:rPr>
+              <a:t>clé OpenRouter</a:t>
+            </a:r>
+          </a:p>
+          <a:p>
+            <a:pPr algn="l">
+              <a:lnSpc>
+                <a:spcPct val="100000"/>
+              </a:lnSpc>
+              <a:spcBef>
+                <a:spcPts val="100"/>
+              </a:spcBef>
+              <a:spcAft>
+                <a:spcPts val="0"/>
+              </a:spcAft>
+            </a:pPr>
+            <a:r>
+              <a:rPr sz="800" b="0" i="0">
+                <a:solidFill>
+                  <a:srgbClr val="6A6A6A"/>
+                </a:solidFill>
+                <a:latin typeface="Marianne"/>
+              </a:rPr>
+              <a:t>capacité limitée</a:t>
+            </a:r>
+          </a:p>
+        </p:txBody>
+      </p:sp>
+      <p:sp>
+        <p:nvSpPr>
+          <p:cNvPr id="109" name="TextBox 108"/>
+          <p:cNvSpPr txBox="1"/>
+          <p:nvPr/>
+        </p:nvSpPr>
+        <p:spPr>
+          <a:xfrm>
+            <a:off x="777240" y="6291071"/>
+            <a:ext cx="10637215" cy="274320"/>
+          </a:xfrm>
+          <a:prstGeom prst="rect">
+            <a:avLst/>
+          </a:prstGeom>
+          <a:noFill/>
+        </p:spPr>
+        <p:txBody>
+          <a:bodyPr wrap="square" lIns="0" rIns="0" tIns="0" bIns="0" anchor="t">
+            <a:spAutoFit/>
+          </a:bodyPr>
+          <a:lstStyle/>
+          <a:p>
+            <a:pPr algn="l">
+              <a:lnSpc>
+                <a:spcPct val="106000"/>
+              </a:lnSpc>
+              <a:spcBef>
+                <a:spcPts val="0"/>
+              </a:spcBef>
+              <a:spcAft>
+                <a:spcPts val="0"/>
+              </a:spcAft>
+            </a:pPr>
+            <a:r>
               <a:rPr sz="1050" b="0" i="0">
                 <a:solidFill>
                   <a:srgbClr val="18753C"/>
@@ -6964,7 +9871,7 @@
                 </a:solidFill>
                 <a:latin typeface="Marianne"/>
               </a:rPr>
-              <a:t>        * DeepSeek V4 : tarif preview (doublement « peak » mi-07/2026) ; GLM et Albert : perf estimée, catalogue Albert à confirmer.</a:t>
+              <a:t>        * DeepSeek V4 : tarif preview ; GLM et Albert : perf estimée ; Kimi K3 : score annoncé par l'éditeur.</a:t>
             </a:r>
           </a:p>
         </p:txBody>
@@ -7197,7 +10104,7 @@
                 </a:solidFill>
                 <a:latin typeface="Marianne"/>
               </a:rPr>
-              <a:t>Ministères Sociaux – Benchmark coding agentique – 17/07/2026</a:t>
+              <a:t>Ministères Sociaux – Benchmark coding agentique – 23/07/2026</a:t>
             </a:r>
           </a:p>
         </p:txBody>
@@ -7862,7 +10769,7 @@
                 </a:solidFill>
                 <a:latin typeface="Marianne"/>
               </a:rPr>
-              <a:t>Souveraineté partielle : sensible au CLOUD Act</a:t>
+              <a:t>Non souverain au sens CNIL (CLOUD Act) · RGPD ok</a:t>
             </a:r>
           </a:p>
         </p:txBody>
@@ -8040,7 +10947,7 @@
                 </a:solidFill>
                 <a:latin typeface="Marianne"/>
               </a:rPr>
-              <a:t>Opus 4.8 : 5 $ / 25 $ · GLM 5.2 : 1,40 $ / 4,40 $ · DeepSeek V4 Pro : 0,44 $ / 0,87 $ · Albert (DeepSeek V4 Flash) : gratuit, quotas.</a:t>
+              <a:t>Fable 5 : 10 $ / 50 $ · Opus 4.8 : 5 $ / 25 $ · Kimi K3 : 3 $ / 15 $ · Mistral Medium 3.5 : 1,50 $ / 7,50 $ · GLM 5.2 : 1,40 $ / 4,40 $ · DeepSeek V4 Pro : 0,44 $ / 0,87 $ · Albert : gratuit, quotas.</a:t>
             </a:r>
           </a:p>
         </p:txBody>
@@ -8273,7 +11180,7 @@
                 </a:solidFill>
                 <a:latin typeface="Marianne"/>
               </a:rPr>
-              <a:t>Ministères Sociaux – Benchmark coding agentique – 17/07/2026</a:t>
+              <a:t>Ministères Sociaux – Benchmark coding agentique – 23/07/2026</a:t>
             </a:r>
           </a:p>
         </p:txBody>
@@ -8552,13 +11459,13 @@
           <a:p>
             <a:pPr algn="l" marL="201168" indent="-201168">
               <a:lnSpc>
-                <a:spcPct val="106000"/>
-              </a:lnSpc>
-              <a:spcBef>
-                <a:spcPts val="0"/>
-              </a:spcBef>
-              <a:spcAft>
-                <a:spcPts val="600"/>
+                <a:spcPct val="105000"/>
+              </a:lnSpc>
+              <a:spcBef>
+                <a:spcPts val="0"/>
+              </a:spcBef>
+              <a:spcAft>
+                <a:spcPts val="400"/>
               </a:spcAft>
             </a:pPr>
             <a:r>
@@ -8571,7 +11478,7 @@
               <a:t>▪  </a:t>
             </a:r>
             <a:r>
-              <a:rPr sz="1350" b="1" i="0">
+              <a:rPr sz="1300" b="1" i="0">
                 <a:solidFill>
                   <a:srgbClr val="161616"/>
                 </a:solidFill>
@@ -8580,7 +11487,7 @@
               <a:t>Claude Code : </a:t>
             </a:r>
             <a:r>
-              <a:rPr sz="1300" b="0" i="0">
+              <a:rPr sz="1250" b="0" i="0">
                 <a:solidFill>
                   <a:srgbClr val="3A3A3A"/>
                 </a:solidFill>
@@ -8592,13 +11499,13 @@
           <a:p>
             <a:pPr algn="l" marL="201168" indent="-201168">
               <a:lnSpc>
-                <a:spcPct val="106000"/>
-              </a:lnSpc>
-              <a:spcBef>
-                <a:spcPts val="0"/>
-              </a:spcBef>
-              <a:spcAft>
-                <a:spcPts val="600"/>
+                <a:spcPct val="105000"/>
+              </a:lnSpc>
+              <a:spcBef>
+                <a:spcPts val="0"/>
+              </a:spcBef>
+              <a:spcAft>
+                <a:spcPts val="400"/>
               </a:spcAft>
             </a:pPr>
             <a:r>
@@ -8611,16 +11518,56 @@
               <a:t>▪  </a:t>
             </a:r>
             <a:r>
-              <a:rPr sz="1350" b="1" i="0">
+              <a:rPr sz="1300" b="1" i="0">
                 <a:solidFill>
                   <a:srgbClr val="161616"/>
                 </a:solidFill>
                 <a:latin typeface="Marianne"/>
               </a:rPr>
+              <a:t>Vibe (Mistral) : </a:t>
+            </a:r>
+            <a:r>
+              <a:rPr sz="1250" b="0" i="0">
+                <a:solidFill>
+                  <a:srgbClr val="3A3A3A"/>
+                </a:solidFill>
+                <a:latin typeface="Marianne"/>
+              </a:rPr>
+              <a:t>plan 14,99–24,99 $/m ou clé API</a:t>
+            </a:r>
+          </a:p>
+          <a:p>
+            <a:pPr algn="l" marL="201168" indent="-201168">
+              <a:lnSpc>
+                <a:spcPct val="105000"/>
+              </a:lnSpc>
+              <a:spcBef>
+                <a:spcPts val="0"/>
+              </a:spcBef>
+              <a:spcAft>
+                <a:spcPts val="400"/>
+              </a:spcAft>
+            </a:pPr>
+            <a:r>
+              <a:rPr sz="1200" b="0" i="0">
+                <a:solidFill>
+                  <a:srgbClr val="6A6AF4"/>
+                </a:solidFill>
+                <a:latin typeface="Marianne"/>
+              </a:rPr>
+              <a:t>▪  </a:t>
+            </a:r>
+            <a:r>
+              <a:rPr sz="1300" b="1" i="0">
+                <a:solidFill>
+                  <a:srgbClr val="161616"/>
+                </a:solidFill>
+                <a:latin typeface="Marianne"/>
+              </a:rPr>
               <a:t>OpenCode + OpenRouter : </a:t>
             </a:r>
             <a:r>
-              <a:rPr sz="1300" b="0" i="0">
+              <a:rPr sz="1250" b="0" i="0">
                 <a:solidFill>
                   <a:srgbClr val="3A3A3A"/>
                 </a:solidFill>
@@ -8632,13 +11579,13 @@
           <a:p>
             <a:pPr algn="l" marL="201168" indent="-201168">
               <a:lnSpc>
-                <a:spcPct val="106000"/>
-              </a:lnSpc>
-              <a:spcBef>
-                <a:spcPts val="0"/>
-              </a:spcBef>
-              <a:spcAft>
-                <a:spcPts val="600"/>
+                <a:spcPct val="105000"/>
+              </a:lnSpc>
+              <a:spcBef>
+                <a:spcPts val="0"/>
+              </a:spcBef>
+              <a:spcAft>
+                <a:spcPts val="400"/>
               </a:spcAft>
             </a:pPr>
             <a:r>
@@ -8651,7 +11598,7 @@
               <a:t>▪  </a:t>
             </a:r>
             <a:r>
-              <a:rPr sz="1350" b="1" i="0">
+              <a:rPr sz="1300" b="1" i="0">
                 <a:solidFill>
                   <a:srgbClr val="161616"/>
                 </a:solidFill>
@@ -8660,13 +11607,13 @@
               <a:t>OpenCode + Albert : </a:t>
             </a:r>
             <a:r>
-              <a:rPr sz="1300" b="0" i="0">
+              <a:rPr sz="1250" b="0" i="0">
                 <a:solidFill>
                   <a:srgbClr val="3A3A3A"/>
                 </a:solidFill>
                 <a:latin typeface="Marianne"/>
               </a:rPr>
-              <a:t>DeepSeek V4 Flash · clé agent État, gratuit</a:t>
+              <a:t>clé agent État, gratuit</a:t>
             </a:r>
           </a:p>
         </p:txBody>
@@ -8810,13 +11757,13 @@
           <a:p>
             <a:pPr algn="l" marL="201168" indent="-201168">
               <a:lnSpc>
-                <a:spcPct val="106000"/>
-              </a:lnSpc>
-              <a:spcBef>
-                <a:spcPts val="0"/>
-              </a:spcBef>
-              <a:spcAft>
-                <a:spcPts val="600"/>
+                <a:spcPct val="105000"/>
+              </a:lnSpc>
+              <a:spcBef>
+                <a:spcPts val="0"/>
+              </a:spcBef>
+              <a:spcAft>
+                <a:spcPts val="400"/>
               </a:spcAft>
             </a:pPr>
             <a:r>
@@ -8829,7 +11776,7 @@
               <a:t>▪  </a:t>
             </a:r>
             <a:r>
-              <a:rPr sz="1350" b="1" i="0">
+              <a:rPr sz="1300" b="1" i="0">
                 <a:solidFill>
                   <a:srgbClr val="161616"/>
                 </a:solidFill>
@@ -8838,7 +11785,7 @@
               <a:t>Au token pour tous : </a:t>
             </a:r>
             <a:r>
-              <a:rPr sz="1300" b="0" i="0">
+              <a:rPr sz="1250" b="0" i="0">
                 <a:solidFill>
                   <a:srgbClr val="3A3A3A"/>
                 </a:solidFill>
@@ -8850,13 +11797,13 @@
           <a:p>
             <a:pPr algn="l" marL="201168" indent="-201168">
               <a:lnSpc>
-                <a:spcPct val="106000"/>
-              </a:lnSpc>
-              <a:spcBef>
-                <a:spcPts val="0"/>
-              </a:spcBef>
-              <a:spcAft>
-                <a:spcPts val="600"/>
+                <a:spcPct val="105000"/>
+              </a:lnSpc>
+              <a:spcBef>
+                <a:spcPts val="0"/>
+              </a:spcBef>
+              <a:spcAft>
+                <a:spcPts val="400"/>
               </a:spcAft>
             </a:pPr>
             <a:r>
@@ -8869,34 +11816,34 @@
               <a:t>▪  </a:t>
             </a:r>
             <a:r>
-              <a:rPr sz="1350" b="1" i="0">
+              <a:rPr sz="1300" b="1" i="0">
                 <a:solidFill>
                   <a:srgbClr val="161616"/>
                 </a:solidFill>
                 <a:latin typeface="Marianne"/>
               </a:rPr>
-              <a:t>Tarifs / 1M : </a:t>
-            </a:r>
-            <a:r>
-              <a:rPr sz="1300" b="0" i="0">
+              <a:t>Tarifs / 1M en sortie : </a:t>
+            </a:r>
+            <a:r>
+              <a:rPr sz="1250" b="0" i="0">
                 <a:solidFill>
                   <a:srgbClr val="3A3A3A"/>
                 </a:solidFill>
                 <a:latin typeface="Marianne"/>
               </a:rPr>
-              <a:t>Claude 5/25 · DeepSeek 0,44/0,87 · GLM 1,40/4,40</a:t>
+              <a:t>de 0,87 $ (DeepSeek) à 50 $ (Fable 5)</a:t>
             </a:r>
           </a:p>
           <a:p>
             <a:pPr algn="l" marL="201168" indent="-201168">
               <a:lnSpc>
-                <a:spcPct val="106000"/>
-              </a:lnSpc>
-              <a:spcBef>
-                <a:spcPts val="0"/>
-              </a:spcBef>
-              <a:spcAft>
-                <a:spcPts val="600"/>
+                <a:spcPct val="105000"/>
+              </a:lnSpc>
+              <a:spcBef>
+                <a:spcPts val="0"/>
+              </a:spcBef>
+              <a:spcAft>
+                <a:spcPts val="400"/>
               </a:spcAft>
             </a:pPr>
             <a:r>
@@ -8909,7 +11856,7 @@
               <a:t>▪  </a:t>
             </a:r>
             <a:r>
-              <a:rPr sz="1350" b="1" i="0">
+              <a:rPr sz="1300" b="1" i="0">
                 <a:solidFill>
                   <a:srgbClr val="161616"/>
                 </a:solidFill>
@@ -8918,7 +11865,7 @@
               <a:t>Albert : </a:t>
             </a:r>
             <a:r>
-              <a:rPr sz="1300" b="0" i="0">
+              <a:rPr sz="1250" b="0" i="0">
                 <a:solidFill>
                   <a:srgbClr val="3A3A3A"/>
                 </a:solidFill>
@@ -8983,7 +11930,7 @@
         <p:spPr>
           <a:xfrm>
             <a:off x="777240" y="4681728"/>
-            <a:ext cx="3301898" cy="1298448"/>
+            <a:ext cx="2453563" cy="1298448"/>
           </a:xfrm>
           <a:prstGeom prst="roundRect">
             <a:avLst>
@@ -9038,8 +11985,8 @@
         </p:blipFill>
         <p:spPr>
           <a:xfrm>
-            <a:off x="1014983" y="4864608"/>
-            <a:ext cx="384048" cy="384048"/>
+            <a:off x="978408" y="4846320"/>
+            <a:ext cx="365760" cy="365760"/>
           </a:xfrm>
           <a:prstGeom prst="rect">
             <a:avLst/>
@@ -9054,8 +12001,8 @@
         </p:nvSpPr>
         <p:spPr>
           <a:xfrm>
-            <a:off x="1527048" y="4846320"/>
-            <a:ext cx="2387498" cy="457200"/>
+            <a:off x="1453895" y="4828032"/>
+            <a:ext cx="1630603" cy="457200"/>
           </a:xfrm>
           <a:prstGeom prst="rect">
             <a:avLst/>
@@ -9080,13 +12027,13 @@
               </a:spcAft>
             </a:pPr>
             <a:r>
-              <a:rPr sz="1150" b="1" i="0">
+              <a:rPr sz="1100" b="1" i="0">
                 <a:solidFill>
                   <a:srgbClr val="000091"/>
                 </a:solidFill>
                 <a:latin typeface="Marianne"/>
               </a:rPr>
-              <a:t>Performance &amp; maturité</a:t>
+              <a:t>Performance</a:t>
             </a:r>
           </a:p>
         </p:txBody>
@@ -9099,8 +12046,8 @@
         </p:nvSpPr>
         <p:spPr>
           <a:xfrm>
-            <a:off x="1014983" y="5340096"/>
-            <a:ext cx="2844698" cy="566927"/>
+            <a:off x="978408" y="5321808"/>
+            <a:ext cx="2069515" cy="585215"/>
           </a:xfrm>
           <a:prstGeom prst="rect">
             <a:avLst/>
@@ -9125,19 +12072,19 @@
               </a:spcAft>
             </a:pPr>
             <a:r>
-              <a:rPr sz="1300" b="1" i="0">
+              <a:rPr sz="1200" b="1" i="0">
                 <a:solidFill>
                   <a:srgbClr val="161616"/>
                 </a:solidFill>
                 <a:latin typeface="Marianne"/>
               </a:rPr>
-              <a:t>Claude Code / Opus 4.8</a:t>
-            </a:r>
-          </a:p>
-          <a:p>
-            <a:pPr algn="l">
-              <a:lnSpc>
-                <a:spcPct val="108000"/>
+              <a:t>Claude Code · Fable 5</a:t>
+            </a:r>
+          </a:p>
+          <a:p>
+            <a:pPr algn="l">
+              <a:lnSpc>
+                <a:spcPct val="106000"/>
               </a:lnSpc>
               <a:spcBef>
                 <a:spcPts val="300"/>
@@ -9147,22 +12094,22 @@
               </a:spcAft>
             </a:pPr>
             <a:r>
-              <a:rPr sz="1000" b="0" i="0">
+              <a:rPr sz="950" b="0" i="0">
                 <a:solidFill>
                   <a:srgbClr val="3A3A3A"/>
                 </a:solidFill>
                 <a:latin typeface="Marianne"/>
               </a:rPr>
-              <a:t>88,6 % SWE-bench, outil mûr. </a:t>
-            </a:r>
-            <a:r>
-              <a:rPr sz="1000" b="0" i="1">
+              <a:t>95,0 % SWE-bench, via Bedrock. </a:t>
+            </a:r>
+            <a:r>
+              <a:rPr sz="950" b="0" i="1">
                 <a:solidFill>
                   <a:srgbClr val="6A6A6A"/>
                 </a:solidFill>
                 <a:latin typeface="Marianne"/>
               </a:rPr>
-              <a:t>Coûteux, éditeur US.</a:t>
+              <a:t>Le plus cher, CLOUD Act.</a:t>
             </a:r>
           </a:p>
         </p:txBody>
@@ -9175,8 +12122,8 @@
         </p:nvSpPr>
         <p:spPr>
           <a:xfrm>
-            <a:off x="4444898" y="4681728"/>
-            <a:ext cx="3301898" cy="1298448"/>
+            <a:off x="3505123" y="4681728"/>
+            <a:ext cx="2453563" cy="1298448"/>
           </a:xfrm>
           <a:prstGeom prst="roundRect">
             <a:avLst>
@@ -9231,8 +12178,8 @@
         </p:blipFill>
         <p:spPr>
           <a:xfrm>
-            <a:off x="4682642" y="4864608"/>
-            <a:ext cx="384048" cy="384048"/>
+            <a:off x="3706291" y="4846320"/>
+            <a:ext cx="365760" cy="365760"/>
           </a:xfrm>
           <a:prstGeom prst="rect">
             <a:avLst/>
@@ -9247,8 +12194,8 @@
         </p:nvSpPr>
         <p:spPr>
           <a:xfrm>
-            <a:off x="5194706" y="4846320"/>
-            <a:ext cx="2387498" cy="457200"/>
+            <a:off x="4181779" y="4828032"/>
+            <a:ext cx="1630603" cy="457200"/>
           </a:xfrm>
           <a:prstGeom prst="rect">
             <a:avLst/>
@@ -9273,7 +12220,7 @@
               </a:spcAft>
             </a:pPr>
             <a:r>
-              <a:rPr sz="1150" b="1" i="0">
+              <a:rPr sz="1100" b="1" i="0">
                 <a:solidFill>
                   <a:srgbClr val="18753C"/>
                 </a:solidFill>
@@ -9292,8 +12239,8 @@
         </p:nvSpPr>
         <p:spPr>
           <a:xfrm>
-            <a:off x="4682642" y="5340096"/>
-            <a:ext cx="2844698" cy="566927"/>
+            <a:off x="3706291" y="5321808"/>
+            <a:ext cx="2069515" cy="585215"/>
           </a:xfrm>
           <a:prstGeom prst="rect">
             <a:avLst/>
@@ -9318,19 +12265,19 @@
               </a:spcAft>
             </a:pPr>
             <a:r>
-              <a:rPr sz="1300" b="1" i="0">
+              <a:rPr sz="1200" b="1" i="0">
                 <a:solidFill>
                   <a:srgbClr val="161616"/>
                 </a:solidFill>
                 <a:latin typeface="Marianne"/>
               </a:rPr>
-              <a:t>Albert · DeepSeek V4 Flash</a:t>
-            </a:r>
-          </a:p>
-          <a:p>
-            <a:pPr algn="l">
-              <a:lnSpc>
-                <a:spcPct val="108000"/>
+              <a:t>Albert · DeepSeek Flash</a:t>
+            </a:r>
+          </a:p>
+          <a:p>
+            <a:pPr algn="l">
+              <a:lnSpc>
+                <a:spcPct val="106000"/>
               </a:lnSpc>
               <a:spcBef>
                 <a:spcPts val="300"/>
@@ -9340,7 +12287,7 @@
               </a:spcAft>
             </a:pPr>
             <a:r>
-              <a:rPr sz="1000" b="0" i="0">
+              <a:rPr sz="950" b="0" i="0">
                 <a:solidFill>
                   <a:srgbClr val="3A3A3A"/>
                 </a:solidFill>
@@ -9349,7 +12296,7 @@
               <a:t>Gratuit, SecNumCloud, ≈79 %. </a:t>
             </a:r>
             <a:r>
-              <a:rPr sz="1000" b="0" i="1">
+              <a:rPr sz="950" b="0" i="1">
                 <a:solidFill>
                   <a:srgbClr val="6A6A6A"/>
                 </a:solidFill>
@@ -9368,8 +12315,8 @@
         </p:nvSpPr>
         <p:spPr>
           <a:xfrm>
-            <a:off x="8112556" y="4681728"/>
-            <a:ext cx="3301898" cy="1298448"/>
+            <a:off x="6233007" y="4681728"/>
+            <a:ext cx="2453563" cy="1298448"/>
           </a:xfrm>
           <a:prstGeom prst="roundRect">
             <a:avLst>
@@ -9381,7 +12328,7 @@
           </a:solidFill>
           <a:ln w="17780">
             <a:solidFill>
-              <a:srgbClr val="B85C00"/>
+              <a:srgbClr val="6A6AF4"/>
             </a:solidFill>
           </a:ln>
           <a:effectLst/>
@@ -9410,7 +12357,7 @@
       </p:sp>
       <p:pic>
         <p:nvPicPr>
-          <p:cNvPr id="28" name="Picture 27" descr="focus-3.png"/>
+          <p:cNvPr id="28" name="Picture 27" descr="shield-check.png"/>
           <p:cNvPicPr>
             <a:picLocks noChangeAspect="1"/>
           </p:cNvPicPr>
@@ -9424,8 +12371,8 @@
         </p:blipFill>
         <p:spPr>
           <a:xfrm>
-            <a:off x="8350300" y="4864608"/>
-            <a:ext cx="384048" cy="384048"/>
+            <a:off x="6434175" y="4846320"/>
+            <a:ext cx="365760" cy="365760"/>
           </a:xfrm>
           <a:prstGeom prst="rect">
             <a:avLst/>
@@ -9440,8 +12387,8 @@
         </p:nvSpPr>
         <p:spPr>
           <a:xfrm>
-            <a:off x="8862364" y="4846320"/>
-            <a:ext cx="2387498" cy="457200"/>
+            <a:off x="6909663" y="4828032"/>
+            <a:ext cx="1630603" cy="457200"/>
           </a:xfrm>
           <a:prstGeom prst="rect">
             <a:avLst/>
@@ -9466,13 +12413,13 @@
               </a:spcAft>
             </a:pPr>
             <a:r>
-              <a:rPr sz="1150" b="1" i="0">
-                <a:solidFill>
-                  <a:srgbClr val="B85C00"/>
-                </a:solidFill>
-                <a:latin typeface="Marianne"/>
-              </a:rPr>
-              <a:t>Rapport perf / prix</a:t>
+              <a:rPr sz="1100" b="1" i="0">
+                <a:solidFill>
+                  <a:srgbClr val="6A6AF4"/>
+                </a:solidFill>
+                <a:latin typeface="Marianne"/>
+              </a:rPr>
+              <a:t>Conformité UE</a:t>
             </a:r>
           </a:p>
         </p:txBody>
@@ -9485,8 +12432,8 @@
         </p:nvSpPr>
         <p:spPr>
           <a:xfrm>
-            <a:off x="8350300" y="5340096"/>
-            <a:ext cx="2844698" cy="566927"/>
+            <a:off x="6434175" y="5321808"/>
+            <a:ext cx="2069515" cy="585215"/>
           </a:xfrm>
           <a:prstGeom prst="rect">
             <a:avLst/>
@@ -9511,19 +12458,19 @@
               </a:spcAft>
             </a:pPr>
             <a:r>
-              <a:rPr sz="1300" b="1" i="0">
+              <a:rPr sz="1200" b="1" i="0">
                 <a:solidFill>
                   <a:srgbClr val="161616"/>
                 </a:solidFill>
                 <a:latin typeface="Marianne"/>
               </a:rPr>
-              <a:t>DeepSeek V4 Pro / OR</a:t>
-            </a:r>
-          </a:p>
-          <a:p>
-            <a:pPr algn="l">
-              <a:lnSpc>
-                <a:spcPct val="108000"/>
+              <a:t>Vibe · Mistral Medium 3.5</a:t>
+            </a:r>
+          </a:p>
+          <a:p>
+            <a:pPr algn="l">
+              <a:lnSpc>
+                <a:spcPct val="106000"/>
               </a:lnSpc>
               <a:spcBef>
                 <a:spcPts val="300"/>
@@ -9533,36 +12480,153 @@
               </a:spcAft>
             </a:pPr>
             <a:r>
-              <a:rPr sz="1000" b="0" i="0">
+              <a:rPr sz="950" b="0" i="0">
                 <a:solidFill>
                   <a:srgbClr val="3A3A3A"/>
                 </a:solidFill>
                 <a:latin typeface="Marianne"/>
               </a:rPr>
-              <a:t>80,6 % pour ~0,9 $ / 1M. </a:t>
-            </a:r>
-            <a:r>
-              <a:rPr sz="1000" b="0" i="1">
+              <a:t>77,6 %, RGPD, éditeur FR. </a:t>
+            </a:r>
+            <a:r>
+              <a:rPr sz="950" b="0" i="1">
                 <a:solidFill>
                   <a:srgbClr val="6A6A6A"/>
                 </a:solidFill>
                 <a:latin typeface="Marianne"/>
               </a:rPr>
-              <a:t>Éditeur CN, routeur US, preview.</a:t>
-            </a:r>
-          </a:p>
-        </p:txBody>
-      </p:sp>
-      <p:sp>
-        <p:nvSpPr>
-          <p:cNvPr id="31" name="TextBox 30"/>
+              <a:t>Perf en retrait.</a:t>
+            </a:r>
+          </a:p>
+        </p:txBody>
+      </p:sp>
+      <p:sp>
+        <p:nvSpPr>
+          <p:cNvPr id="31" name="Rounded Rectangle 30"/>
+          <p:cNvSpPr/>
+          <p:nvPr/>
+        </p:nvSpPr>
+        <p:spPr>
+          <a:xfrm>
+            <a:off x="8960891" y="4681728"/>
+            <a:ext cx="2453563" cy="1298448"/>
+          </a:xfrm>
+          <a:prstGeom prst="roundRect">
+            <a:avLst>
+              <a:gd name="adj" fmla="val 6000"/>
+            </a:avLst>
+          </a:prstGeom>
+          <a:solidFill>
+            <a:srgbClr val="FFFFFF"/>
+          </a:solidFill>
+          <a:ln w="17780">
+            <a:solidFill>
+              <a:srgbClr val="B85C00"/>
+            </a:solidFill>
+          </a:ln>
+          <a:effectLst/>
+        </p:spPr>
+        <p:style>
+          <a:lnRef idx="1">
+            <a:schemeClr val="accent1"/>
+          </a:lnRef>
+          <a:fillRef idx="3">
+            <a:schemeClr val="accent1"/>
+          </a:fillRef>
+          <a:effectRef idx="2">
+            <a:schemeClr val="accent1"/>
+          </a:effectRef>
+          <a:fontRef idx="minor">
+            <a:schemeClr val="lt1"/>
+          </a:fontRef>
+        </p:style>
+        <p:txBody>
+          <a:bodyPr rtlCol="0" anchor="ctr"/>
+          <a:lstStyle/>
+          <a:p>
+            <a:pPr algn="ctr"/>
+          </a:p>
+        </p:txBody>
+      </p:sp>
+      <p:pic>
+        <p:nvPicPr>
+          <p:cNvPr id="32" name="Picture 31" descr="focus-3.png"/>
+          <p:cNvPicPr>
+            <a:picLocks noChangeAspect="1"/>
+          </p:cNvPicPr>
+          <p:nvPr/>
+        </p:nvPicPr>
+        <p:blipFill>
+          <a:blip r:embed="rId8"/>
+          <a:stretch>
+            <a:fillRect/>
+          </a:stretch>
+        </p:blipFill>
+        <p:spPr>
+          <a:xfrm>
+            <a:off x="9162059" y="4846320"/>
+            <a:ext cx="365760" cy="365760"/>
+          </a:xfrm>
+          <a:prstGeom prst="rect">
+            <a:avLst/>
+          </a:prstGeom>
+        </p:spPr>
+      </p:pic>
+      <p:sp>
+        <p:nvSpPr>
+          <p:cNvPr id="33" name="TextBox 32"/>
           <p:cNvSpPr txBox="1"/>
           <p:nvPr/>
         </p:nvSpPr>
         <p:spPr>
           <a:xfrm>
-            <a:off x="777240" y="6108192"/>
-            <a:ext cx="10637215" cy="457200"/>
+            <a:off x="9637547" y="4828032"/>
+            <a:ext cx="1630603" cy="457200"/>
+          </a:xfrm>
+          <a:prstGeom prst="rect">
+            <a:avLst/>
+          </a:prstGeom>
+          <a:noFill/>
+        </p:spPr>
+        <p:txBody>
+          <a:bodyPr wrap="square" lIns="0" rIns="0" tIns="0" bIns="0" anchor="ctr">
+            <a:spAutoFit/>
+          </a:bodyPr>
+          <a:lstStyle/>
+          <a:p>
+            <a:pPr algn="l">
+              <a:lnSpc>
+                <a:spcPct val="98000"/>
+              </a:lnSpc>
+              <a:spcBef>
+                <a:spcPts val="0"/>
+              </a:spcBef>
+              <a:spcAft>
+                <a:spcPts val="0"/>
+              </a:spcAft>
+            </a:pPr>
+            <a:r>
+              <a:rPr sz="1100" b="1" i="0">
+                <a:solidFill>
+                  <a:srgbClr val="B85C00"/>
+                </a:solidFill>
+                <a:latin typeface="Marianne"/>
+              </a:rPr>
+              <a:t>Rapport perf / prix</a:t>
+            </a:r>
+          </a:p>
+        </p:txBody>
+      </p:sp>
+      <p:sp>
+        <p:nvSpPr>
+          <p:cNvPr id="34" name="TextBox 33"/>
+          <p:cNvSpPr txBox="1"/>
+          <p:nvPr/>
+        </p:nvSpPr>
+        <p:spPr>
+          <a:xfrm>
+            <a:off x="9162059" y="5321808"/>
+            <a:ext cx="2069515" cy="585215"/>
           </a:xfrm>
           <a:prstGeom prst="rect">
             <a:avLst/>
@@ -9577,6 +12641,82 @@
           <a:p>
             <a:pPr algn="l">
               <a:lnSpc>
+                <a:spcPct val="100000"/>
+              </a:lnSpc>
+              <a:spcBef>
+                <a:spcPts val="0"/>
+              </a:spcBef>
+              <a:spcAft>
+                <a:spcPts val="0"/>
+              </a:spcAft>
+            </a:pPr>
+            <a:r>
+              <a:rPr sz="1200" b="1" i="0">
+                <a:solidFill>
+                  <a:srgbClr val="161616"/>
+                </a:solidFill>
+                <a:latin typeface="Marianne"/>
+              </a:rPr>
+              <a:t>DeepSeek V4 Pro · OR</a:t>
+            </a:r>
+          </a:p>
+          <a:p>
+            <a:pPr algn="l">
+              <a:lnSpc>
+                <a:spcPct val="106000"/>
+              </a:lnSpc>
+              <a:spcBef>
+                <a:spcPts val="300"/>
+              </a:spcBef>
+              <a:spcAft>
+                <a:spcPts val="0"/>
+              </a:spcAft>
+            </a:pPr>
+            <a:r>
+              <a:rPr sz="950" b="0" i="0">
+                <a:solidFill>
+                  <a:srgbClr val="3A3A3A"/>
+                </a:solidFill>
+                <a:latin typeface="Marianne"/>
+              </a:rPr>
+              <a:t>80,6 % pour ~0,9 $ / 1M. </a:t>
+            </a:r>
+            <a:r>
+              <a:rPr sz="950" b="0" i="1">
+                <a:solidFill>
+                  <a:srgbClr val="6A6A6A"/>
+                </a:solidFill>
+                <a:latin typeface="Marianne"/>
+              </a:rPr>
+              <a:t>Éditeur CN, routeur US.</a:t>
+            </a:r>
+          </a:p>
+        </p:txBody>
+      </p:sp>
+      <p:sp>
+        <p:nvSpPr>
+          <p:cNvPr id="35" name="TextBox 34"/>
+          <p:cNvSpPr txBox="1"/>
+          <p:nvPr/>
+        </p:nvSpPr>
+        <p:spPr>
+          <a:xfrm>
+            <a:off x="777240" y="6071616"/>
+            <a:ext cx="10637215" cy="457200"/>
+          </a:xfrm>
+          <a:prstGeom prst="rect">
+            <a:avLst/>
+          </a:prstGeom>
+          <a:noFill/>
+        </p:spPr>
+        <p:txBody>
+          <a:bodyPr wrap="square" lIns="0" rIns="0" tIns="0" bIns="0" anchor="t">
+            <a:spAutoFit/>
+          </a:bodyPr>
+          <a:lstStyle/>
+          <a:p>
+            <a:pPr algn="l">
+              <a:lnSpc>
                 <a:spcPct val="108000"/>
               </a:lnSpc>
               <a:spcBef>
@@ -9602,7 +12742,7 @@
                 </a:solidFill>
                 <a:latin typeface="Marianne"/>
               </a:rPr>
-              <a:t>OpenCode + Albert est documenté officiellement par la DINUM (guides.ia.numerique.gouv.fr) · catalogue Albert à confirmer via /v1/models · DeepSeek V4 = tarif preview · tarifs OpenRouter = catalogue (caching −60/80 %) · tokenizer Opus 4.8 ≈ +30 % de tokens.</a:t>
+              <a:t>OpenCode + Albert documenté par la DINUM (guides.ia.numerique.gouv.fr) · catalogue Albert à confirmer via /v1/models · DeepSeek V4 = tarif preview · Kimi K3 = score annoncé éditeur, capacité OpenRouter limitée · Fable 5 sur Bedrock = data sharing à activer + rétention 30 j · tarifs OpenRouter = catalogue (caching −60/80 %).</a:t>
             </a:r>
           </a:p>
         </p:txBody>

--- a/Livrables/benchHarness/Bench_Coding-Agentique.pptx
+++ b/Livrables/benchHarness/Bench_Coding-Agentique.pptx
@@ -504,7 +504,7 @@
           <a:lstStyle/>
           <a:p>
             <a:r>
-              <a:t>Matrice comparative des 7 stacks de coding agentique. Chiffres verifies (sources primaires, 10/07 et 23/07/2026). AJOUTS DU 23/07/2026 : (a) Claude Code / Fable 5 via Bedrock : 95,0% SWE-bench Verified (llm-stats.com), 10$/50$ par 1M (2x Opus 4.8), disponible sur Bedrock (profil global.anthropic.claude-fable-5, docs.aws.amazon.com) - contraintes : activation d'un parametre de data sharing + retention 30 jours obligatoire. (b) Vibe / Mistral Medium 3.5 : Vibe = agent de codage CLI + VS Code de Mistral (mai 2026) ; Medium 3.5 = 77,6% SWE-bench Verified, 1,50$/7,50$ par 1M, poids ouverts licence MIT modifiee (mistral.ai/news/vibe-remote-agents-mistral-medium-3-5) ; plans Le Chat Pro 14,99$/Team 24,99$/mois ; deploiement SecNumCloud possible via Outscale (offre enterprise). (c) OpenCode / Kimi K3 via OpenRouter : 3$/15$ par 1M (openrouter.ai/moonshotai/kimi-k3), 93,4% SWE-bench Verified ANNONCE par Moonshot - des evaluations independantes citent des scores bien plus bas selon le harness ; capacite amont limitee (erreurs 429 frequentes). CORRECTION SOUVERAINETE : Bedrock n'est PAS souverain au sens de la CNIL - AWS reste soumis au CLOUD Act quelle que soit la region ; pastille rouge (avant : orange 'partielle'). Seuls Albert (SecNumCloud, Etat FR) et Mistral (editeur FR, SecNumCloud en option via Outscale) tiennent la souverainete. NOUVEL AXE CONFORMITE (RGPD/donnees) - distinct de la souverainete : bons = Mistral (editeur FR, RGPD), Albert (cadre Etat) et modeles Anthropic via Bedrock (region UE ex. Paris, DPA AWS) ; Anthropic direct = partielle (transfert hors UE) ; OpenRouter = insuffisante (routage via intermediaire US, sans garanties UE). RAPPEL DONNEES INITIALES (10/07/2026) : PRIX/1M tokens : Opus 4.8 = 5$ input / 25$ output (platform.claude.com/docs/.../pricing), en sus des sieges Claude Code (Pro 17$, Team 20-25$, Premium 100-125$/mois - claude.com/pricing). DeepSeek V4 Pro = 0,435$/0,87$ (openrouter.ai/deepseek/deepseek-v4-pro + api-docs.deepseek.com) MAIS tarif preview, doublement 'peak' annonce mi-juillet 2026 (technode.com 30/06/2026). GLM 5.2 = tarif liste Z.ai 1,40$/4,40$ (docs.z.ai), OpenRouter varie 0,93-3,00$ input selon fournisseur route (le 0,77$ lu en tete etait un artefact d'extraction, non confirme). Albert = GRATUIT pour agents de l'Etat, pas de facturation token, acces regule par quotas RPM/RPD/TPM (ia.numerique.gouv.fr). PERF SWE-bench Verified : Opus 4.8 88,6% (vellum.ai) ; DeepSeek V4 Pro 80,6% (morphllm) ; DeepSeek V4 Flash 79% ; Mistral Medium 3.5 77,6% (mistral.ai) ; GLM 5.2 ~78% estime (SWE-bench Pro 62,1%, Terminal-Bench 81-83% - huggingface zai-org). SCENARIO ALBERT retenu pour le bench elargi : OpenCode branche sur Albert servant DeepSeek V4 Flash (~79%) - catalogue Albert a confirmer via /v1/models. SOUVERAINETE : Anthropic = editeur US (CLOUD Act) ; Z.ai (GLM) et DeepSeek = editeurs chinois, et via OpenRouter le routage passe par un intermediaire US ; Albert = Etat francais, heberge sur Outscale SecNumCloud. Nuance : les poids GLM et DeepSeek sont ouverts (licence MIT), donc auto-hebergeables sur infra souveraine - c'est ce que fait Albert. FAISABILITE : Claude Code et OpenCode tournent tous deux sur Mac/Linux/Windows (WSL conseille sous Windows) ; le frein sur postes Windows internes est surtout la politique (Copilot only) et le proxy, pas la technique.</a:t>
+              <a:t>Matrice comparative des 8 stacks de coding agentique. Chiffres verifies (sources primaires, 10/07, 23/07 et 02/09/2026). MAJ DU 02/09/2026 : (a) SORTIS du perimetre : Claude Code / Opus 4.8 via Anthropic direct, OpenCode / DeepSeek V4 Pro via OpenRouter, et Vibe / Mistral Medium 3.5 (retrait demande par Selim ; Mistral reste une voie souveraine dans la doctrine fournisseurs, mais la stack sort du bench). (b) AJOUTS Bedrock : Opus 5 (5$/25$ par 1M - moitie du prix de Fable 5 ; 97,0% SWE-bench Verified mesure par vals.ai le 01/09/2026, harness minimal bash-only - Anthropic ne publie pas de score SWE-bench pour Opus 5, qui ressort ainsi DEVANT Fable 5 et son 95,0% officiel : scaffolds differents, a lire avec prudence) et Sonnet 5 (2$/10$ par 1M ; 82,1% SWE-bench Verified rapporte au lancement, 30/06/2026 - presse specialisee, non publie en clair par Anthropic). (c) AJOUTS Scaleway (cloud FR, hebergement UE - souverain et conforme RGPD ; observabilite a valider) : DeepSeek V4 Flash 0731 a 0,40 EUR / 0,80 EUR par 1M (tarif communique par le client). ATTENTION PERF 0731 : DeepSeek ne publie PAS de SWE-bench Verified pour ce checkpoint (verifie le 02/09/2026 : model card HF et blogs n'en donnent aucun ; le 79,0% recopie par les agregateurs benchlm/zenmux est celui du checkpoint d'avril, a priori celui servi par Albert - checkpoint a confirmer aupres de la DINUM). REFONTE PERFORMANCE (02/09/2026, regle fixee par Selim) : trois mesures au lieu d'une. (1) DeepSWE v1.1 en PRINCIPAL - leaderboard officiel Datacurve, harness fixe mini-swe-agent, donc score du modele seul, independant du harness Claude Code / OpenCode / Vibe. Valeurs : Opus 5 74,0 (+/-4) ; Fable 5 70,0 ; Kimi K3 ~69 ; DeepSeek 0731 54,4 (auto-rapporte) ; GLM 5.2 44,0 ; DeepSeek preview 7,3 auto-rapporte (~8 mesure en independant) ; Sonnet 5 : non publie. (2) Terminal-Bench 2.1 en agentique : Opus 5 89,1 ; Kimi 88,3 (auto-rapporte) ; Sonnet 5 85,2 ; 0731 82,7 (auto-rapporte) ; GLM 81,0 (auto-rapporte) ; preview 61,8 (auto-rapporte) ; Fable 5 : non publie. (3) SWE-bench Verified conserve en simple BASELINE grisee : sature en haut de tableau, chiffres majoritairement editeurs aux harness heterogenes. REGLE ABSOLUE : aucun chiffre estime ou extrapole ; toute case sans donnee = 'non publie' (l'estimation ~85% du 0731 publiee plus tot le 02/09 est retiree). Marqueur v = auto-rapporte par l'editeur, sans reproduction independante. Contre-verification OpenRouter (02/09/2026, donnees embarquees de la page deepseek-v4-flash-0731) : OpenRouter n'evalue pas SWE-bench - ses propres runs donnent GPQA Diamond 87,1% (mediane, 36 runs) et tau-bench airline 74,7% (34 runs) ; son onglet Benchmarks vient d'Artificial Analysis, dont l'index v4.1.1 (9 evals : Terminal-Bench v2.1, SciCode, GPQA...) n'inclut pas non plus SWE-bench Verified. GLM 5.2 bascule d'OpenRouter vers Scaleway a 1,80 EUR / 5,50 EUR par 1M (tarif communique par le client), meme perf estimee ~78%. (d) Kimi K3 sur OpenRouter : tarif courant 2,55$/12,75$ par 1M (openrouter.ai/moonshotai/kimi-k3, 02/09/2026) ; le score 93,4% est desormais liste par vals.ai (mesure independante du 01/09/2026), il n'est plus seulement declaratif. (e) Prix affiches en entree ET en sortie sur tous les supports. HISTORIQUE 23/07/2026 : (a) Claude Code / Fable 5 via Bedrock : 95,0% SWE-bench Verified (llm-stats.com), 10$/50$ par 1M (2x Opus 4.8), disponible sur Bedrock (profil global.anthropic.claude-fable-5, docs.aws.amazon.com) - contraintes : activation d'un parametre de data sharing + retention 30 jours obligatoire. (b) Vibe / Mistral Medium 3.5 : Vibe = agent de codage CLI + VS Code de Mistral (mai 2026) ; Medium 3.5 = 77,6% SWE-bench Verified, 1,50$/7,50$ par 1M, poids ouverts licence MIT modifiee (mistral.ai/news/vibe-remote-agents-mistral-medium-3-5) ; plans Le Chat Pro 14,99$/Team 24,99$/mois ; deploiement SecNumCloud possible via Outscale (offre enterprise). (c) OpenCode / Kimi K3 via OpenRouter : 3$/15$ par 1M (openrouter.ai/moonshotai/kimi-k3), 93,4% SWE-bench Verified ANNONCE par Moonshot - des evaluations independantes citent des scores bien plus bas selon le harness ; capacite amont limitee (erreurs 429 frequentes). CORRECTION SOUVERAINETE : Bedrock n'est PAS souverain au sens de la CNIL - AWS reste soumis au CLOUD Act quelle que soit la region ; pastille rouge (avant : orange 'partielle'). Seuls Albert (SecNumCloud, Etat FR) et Mistral (editeur FR, SecNumCloud en option via Outscale) tiennent la souverainete. NOUVEL AXE CONFORMITE (RGPD/donnees) - distinct de la souverainete : bons = Mistral (editeur FR, RGPD), Albert (cadre Etat) et modeles Anthropic via Bedrock (region UE ex. Paris, DPA AWS) ; Anthropic direct = partielle (transfert hors UE) ; OpenRouter = insuffisante (routage via intermediaire US, sans garanties UE). RAPPEL DONNEES INITIALES (10/07/2026) : PRIX/1M tokens : Opus 4.8 = 5$ input / 25$ output (platform.claude.com/docs/.../pricing), en sus des sieges Claude Code (Pro 17$, Team 20-25$, Premium 100-125$/mois - claude.com/pricing). DeepSeek V4 Pro = 0,435$/0,87$ (openrouter.ai/deepseek/deepseek-v4-pro + api-docs.deepseek.com) MAIS tarif preview, doublement 'peak' annonce mi-juillet 2026 (technode.com 30/06/2026). GLM 5.2 = tarif liste Z.ai 1,40$/4,40$ (docs.z.ai), OpenRouter varie 0,93-3,00$ input selon fournisseur route (le 0,77$ lu en tete etait un artefact d'extraction, non confirme). Albert = GRATUIT pour agents de l'Etat, pas de facturation token, acces regule par quotas RPM/RPD/TPM (ia.numerique.gouv.fr). PERF SWE-bench Verified : Opus 4.8 88,6% (vellum.ai) ; DeepSeek V4 Pro 80,6% (morphllm) ; DeepSeek V4 Flash 79% ; Mistral Medium 3.5 77,6% (mistral.ai) ; GLM 5.2 ~78% estime (SWE-bench Pro 62,1%, Terminal-Bench 81-83% - huggingface zai-org). SCENARIO ALBERT retenu pour le bench elargi : OpenCode branche sur Albert servant DeepSeek V4 Flash (~79%) - catalogue Albert a confirmer via /v1/models. SOUVERAINETE : Anthropic = editeur US (CLOUD Act) ; Z.ai (GLM) et DeepSeek = editeurs chinois, et via OpenRouter le routage passe par un intermediaire US ; Albert = Etat francais, heberge sur Outscale SecNumCloud. Nuance : les poids GLM et DeepSeek sont ouverts (licence MIT), donc auto-hebergeables sur infra souveraine - c'est ce que fait Albert. FAISABILITE : Claude Code et OpenCode tournent tous deux sur Mac/Linux/Windows (WSL conseille sous Windows) ; le frein sur postes Windows internes est surtout la politique (Copilot only) et le proxy, pas la technique.</a:t>
             </a:r>
           </a:p>
         </p:txBody>
@@ -574,7 +574,7 @@
           <a:lstStyle/>
           <a:p>
             <a:r>
-              <a:t>Souverainete (corrigee le 23/07/2026) : au sens de la CNIL, seules Albert (Etat FR, SecNumCloud) et Mistral (editeur FR, SecNumCloud en option) sont souveraines. Bedrock N'EST PAS souverain : AWS est soumis au CLOUD Act quelle que soit la region d'hebergement. En revanche, sur l'axe CONFORMITE (RGPD), Bedrock en region UE (Paris) avec DPA AWS reste une voie conforme pour les modeles Anthropic ; Anthropic direct = transfert hors UE ; OpenRouter = sans garanties UE. Albert s'utilise avec OpenCode : guide officiel DINUM guides.ia.numerique.gouv.fr/albert-api/guides/ide#agentic-coding-opencode. La problematique de deploiement : les prestataires externes peuvent rester sur leur abonnement Claude (forfait mensuel, consommation incluse, cout previsible). Les agents internes, eux, demarreront a environ 20 euros par siege et par mois (sieges Claude Enterprise via Bedrock), auxquels s'ajoute chaque token consomme, facture au prix du modele. Le cout interne suit donc l'usage, et l'usage agentique est intensif en tokens. Consequence : optimiser le cout au token (choix du modele, du harness, caching) devient le parametre cle pour les internes et pour la CI/CD - c'est ce que le bench compare, et ce que le bench elargi en conditions reelles validera (scenario Albert/DeepSeek via OpenCode face a Claude avec et sans abonnement).</a:t>
+              <a:t>Souverainete (corrigee le 23/07/2026, elargie le 02/09/2026) : au sens de la CNIL, Albert (Etat FR, SecNumCloud), Scaleway (cloud FR, hebergement UE) et Mistral (editeur FR, SecNumCloud en option) sont souveraines. Bedrock N'EST PAS souverain : AWS est soumis au CLOUD Act quelle que soit la region d'hebergement. En revanche, sur l'axe CONFORMITE (RGPD), Bedrock en region UE (Paris) avec DPA AWS reste une voie conforme pour les modeles Anthropic ; Anthropic direct = transfert hors UE ; OpenRouter = sans garanties UE. Albert s'utilise avec OpenCode : guide officiel DINUM guides.ia.numerique.gouv.fr/albert-api/guides/ide#agentic-coding-opencode. La problematique de deploiement : les prestataires externes peuvent rester sur leur abonnement Claude (forfait mensuel, consommation incluse, cout previsible). Les agents internes, eux, demarreront a environ 20 euros par siege et par mois (sieges Claude Enterprise via Bedrock), auxquels s'ajoute chaque token consomme, facture au prix du modele. Le cout interne suit donc l'usage, et l'usage agentique est intensif en tokens. Consequence : optimiser le cout au token (choix du modele, du harness, caching) devient le parametre cle pour les internes et pour la CI/CD - c'est ce que le bench compare, et ce que le bench elargi en conditions reelles validera (scenario Albert/DeepSeek via OpenCode face a Claude avec et sans abonnement).</a:t>
             </a:r>
           </a:p>
         </p:txBody>
@@ -644,7 +644,7 @@
           <a:lstStyle/>
           <a:p>
             <a:r>
-              <a:t>Deux cas d'usage a distinguer. (1) CODE AGENTIQUE SUR POSTE : Claude Code se consomme via un SIEGE d'abonnement (Pro 17-20$, Team 20-25$, Premium 100-125$/dev/mois) ; les stacks OpenCode se consomment via une cle - OpenRouter (paiement au token) ou Albert (gratuit, cle reservee aux agents de l'Etat). (2) BOTS CI/CD : pas de siege, tout le monde paie au token via une cle API programmatique. Claude API Opus 4.8 = 5$/25$ par 1M (headless via ANTHROPIC_API_KEY ; un token OAuth d'abonnement CLAUDE_CODE_OAUTH_TOKEN est aussi possible mais Anthropic recommande la cle API pour l'automation partagee). DeepSeek V4 Pro 0,44$/0,87$, GLM 5.2 ~1,40$/4,40$ via OpenRouter. Albert est gratuit mais ses quotas (10-50 requetes/min en experimentation) peuvent brider un usage CI/CD intensif - a augmenter sur demande. RECOMMANDATION selon priorite (MAJ 23/07/2026) : performance -&gt; Claude Code/Fable 5 via Bedrock (95,0% SWE-bench, 10$/50$ par 1M, conforme RGPD en region UE mais non souverain - CLOUD Act) ; souverainete/cout -&gt; Albert ; conformite UE avec editeur prive -&gt; Vibe/Mistral Medium 3.5 (77,6%, 1,50$/7,50$, plans Le Chat des 14,99$/mois) ; rapport perf-prix brut -&gt; DeepSeek V4 Pro via OpenRouter. Kimi K3 via OpenRouter (3$/15$) annonce 93,4% SWE-bench Verified mais le score n'est pas verifie independamment et la capacite OpenRouter est limitee (429). RESERVES : 'Open Claw' n'a pas ete confirme comme outil de coding (le seul depot de ce nom est un assistant de messagerie) - candidats reels : OpenCode, Crush (Charmbracelet), Claude Code Router. Le catalogue Albert observe sur les docs publiques ne liste pas DeepSeek V4 Flash ni Mistral Medium 3.5 (mais Mistral-Small, Ministral-3-8B, gpt-oss-120b, Qwen3-Coder) - a confirmer via un appel authentifie /v1/models sur ta cle. Tarifs OpenRouter = prix catalogue variables selon le fournisseur route ; le prompt caching peut baisser le cout reel de 60 a 80%. Le nouveau tokenizer d'Opus 4.8 produit ~30% de tokens en plus pour un meme texte, ce qui renforce le cout effectif par requete.</a:t>
+              <a:t>Deux cas d'usage a distinguer. (1) CODE AGENTIQUE SUR POSTE : Claude Code se consomme via un SIEGE d'abonnement (Pro 17-20$, Team 20-25$, Premium 100-125$/dev/mois) ; les stacks OpenCode se consomment via une cle - OpenRouter (paiement au token) ou Albert (gratuit, cle reservee aux agents de l'Etat). (2) BOTS CI/CD : pas de siege, tout le monde paie au token via une cle API programmatique. Claude via Bedrock : Opus 5 = 5$/25$ par 1M, Sonnet 5 = 2$/10$, Fable 5 = 10$/50$ (headless via IAM). Scaleway : DeepSeek V4 Flash 0731 = 0,40/0,80 EUR par 1M, GLM 5.2 = 1,80/5,50 EUR (API OpenAI-compatible, cle Scaleway). Albert est gratuit mais ses quotas (10-50 requetes/min en experimentation) peuvent brider un usage CI/CD intensif - a augmenter sur demande. RECOMMANDATION selon priorite (MAJ 02/09/2026) : performance -&gt; Claude Code/Opus 5 via Bedrock (DeepSWE 74,0 +/-4, Terminal-Bench 89,1, conforme RGPD en region UE mais non souverain - CLOUD Act) ; souverainete/cout -&gt; Albert ; rapport perf-prix -&gt; DeepSeek V4 Flash 0731 via Scaleway (DeepSWE 54,4 auto-rapporte, TB 82,7 auto-rapporte, pour 0,40/0,80 EUR par 1M, souverain, observabilite a valider). Kimi K3 via OpenRouter (2,55$/12,75$) : DeepSWE ~69, TB 88,3 auto-rapporte, SWE-bench 93,4 auto-rapporte, mais la capacite OpenRouter est limitee (429). RESERVES : 'Open Claw' n'a pas ete confirme comme outil de coding (le seul depot de ce nom est un assistant de messagerie) - candidats reels : OpenCode, Crush (Charmbracelet), Claude Code Router. Le catalogue Albert observe sur les docs publiques ne liste pas DeepSeek V4 Flash ni Mistral Medium 3.5 (mais Mistral-Small, Ministral-3-8B, gpt-oss-120b, Qwen3-Coder) - a confirmer via un appel authentifie /v1/models sur ta cle. Tarifs OpenRouter = prix catalogue variables selon le fournisseur route ; le prompt caching peut baisser le cout reel de 60 a 80%. Le nouveau tokenizer d'Opus 4.8 produit ~30% de tokens en plus pour un meme texte, ce qui renforce le cout effectif par requete.</a:t>
             </a:r>
           </a:p>
         </p:txBody>
@@ -3860,7 +3860,7 @@
                 </a:solidFill>
                 <a:latin typeface="Marianne"/>
               </a:rPr>
-              <a:t>Ministères Sociaux – Benchmark coding agentique – 23/07/2026</a:t>
+              <a:t>Ministères Sociaux – Benchmark coding agentique – 02/09/2026</a:t>
             </a:r>
           </a:p>
         </p:txBody>
@@ -3995,7 +3995,7 @@
                 </a:solidFill>
                 <a:latin typeface="Marianne"/>
               </a:rPr>
-              <a:t>Prix, performance, souveraineté, conformité, faisabilité. Tarifs vérifiés sur sources primaires (23/07/2026).</a:t>
+              <a:t>Prix, performance, souveraineté, conformité, faisabilité. Tarifs vérifiés sur sources primaires (02/09/2026).</a:t>
             </a:r>
           </a:p>
         </p:txBody>
@@ -4108,7 +4108,7 @@
                 </a:solidFill>
                 <a:latin typeface="Marianne"/>
               </a:rPr>
-              <a:t>Opus 4.8</a:t>
+              <a:t>Opus 5</a:t>
             </a:r>
           </a:p>
           <a:p>
@@ -4130,7 +4130,7 @@
                 </a:solidFill>
                 <a:latin typeface="Marianne"/>
               </a:rPr>
-              <a:t>Anthropic</a:t>
+              <a:t>AWS Bedrock</a:t>
             </a:r>
           </a:p>
         </p:txBody>
@@ -4287,7 +4287,7 @@
             </a:avLst>
           </a:prstGeom>
           <a:solidFill>
-            <a:srgbClr val="6A6AF4"/>
+            <a:srgbClr val="000091"/>
           </a:solidFill>
           <a:ln>
             <a:noFill/>
@@ -4356,7 +4356,7 @@
                 </a:solidFill>
                 <a:latin typeface="Marianne"/>
               </a:rPr>
-              <a:t>Vibe</a:t>
+              <a:t>Claude Code</a:t>
             </a:r>
           </a:p>
           <a:p>
@@ -4378,7 +4378,7 @@
                 </a:solidFill>
                 <a:latin typeface="Marianne"/>
               </a:rPr>
-              <a:t>Medium 3.5</a:t>
+              <a:t>Sonnet 5</a:t>
             </a:r>
           </a:p>
           <a:p>
@@ -4400,7 +4400,7 @@
                 </a:solidFill>
                 <a:latin typeface="Marianne"/>
               </a:rPr>
-              <a:t>Mistral</a:t>
+              <a:t>AWS Bedrock</a:t>
             </a:r>
           </a:p>
         </p:txBody>
@@ -4513,7 +4513,7 @@
                 </a:solidFill>
                 <a:latin typeface="Marianne"/>
               </a:rPr>
-              <a:t>DeepSeek V4 Flash</a:t>
+              <a:t>DeepSeek V4 Flash preview</a:t>
             </a:r>
           </a:p>
           <a:p>
@@ -4648,7 +4648,7 @@
                 </a:solidFill>
                 <a:latin typeface="Marianne"/>
               </a:rPr>
-              <a:t>DeepSeek V4 Pro</a:t>
+              <a:t>DeepSeek V4 Flash 0731</a:t>
             </a:r>
           </a:p>
           <a:p>
@@ -4670,7 +4670,7 @@
                 </a:solidFill>
                 <a:latin typeface="Marianne"/>
               </a:rPr>
-              <a:t>OpenRouter</a:t>
+              <a:t>Scaleway</a:t>
             </a:r>
           </a:p>
         </p:txBody>
@@ -4805,7 +4805,7 @@
                 </a:solidFill>
                 <a:latin typeface="Marianne"/>
               </a:rPr>
-              <a:t>OpenRouter</a:t>
+              <a:t>Scaleway</a:t>
             </a:r>
           </a:p>
         </p:txBody>
@@ -5077,7 +5077,7 @@
                 </a:solidFill>
                 <a:latin typeface="Marianne"/>
               </a:rPr>
-              <a:t>/ 1M tokens</a:t>
+              <a:t>/ 1M tokens (in / out)</a:t>
             </a:r>
           </a:p>
         </p:txBody>
@@ -5198,7 +5198,7 @@
                 </a:solidFill>
                 <a:latin typeface="Marianne"/>
               </a:rPr>
-              <a:t>+ siège 20–125 $/m</a:t>
+              <a:t>+ siège ≈20 €/m</a:t>
             </a:r>
           </a:p>
         </p:txBody>
@@ -5360,11 +5360,11 @@
             <a:r>
               <a:rPr sz="1150" b="0" i="0">
                 <a:solidFill>
-                  <a:srgbClr val="18753C"/>
-                </a:solidFill>
-                <a:latin typeface="Marianne"/>
-              </a:rPr>
-              <a:t>● ● ● ● </a:t>
+                  <a:srgbClr val="B85C00"/>
+                </a:solidFill>
+                <a:latin typeface="Marianne"/>
+              </a:rPr>
+              <a:t>● ● ● </a:t>
             </a:r>
             <a:r>
               <a:rPr sz="1150" b="0" i="0">
@@ -5373,7 +5373,7 @@
                 </a:solidFill>
                 <a:latin typeface="Marianne"/>
               </a:rPr>
-              <a:t>● </a:t>
+              <a:t>● ● </a:t>
             </a:r>
           </a:p>
         </p:txBody>
@@ -5418,7 +5418,7 @@
                 </a:solidFill>
                 <a:latin typeface="Marianne"/>
               </a:rPr>
-              <a:t>1,50 $ / 7,50 $</a:t>
+              <a:t>2 $ / 10 $</a:t>
             </a:r>
           </a:p>
           <a:p>
@@ -5440,7 +5440,7 @@
                 </a:solidFill>
                 <a:latin typeface="Marianne"/>
               </a:rPr>
-              <a:t>plans dès 14,99 $/m</a:t>
+              <a:t>+ siège ≈20 €/m</a:t>
             </a:r>
           </a:p>
         </p:txBody>
@@ -5561,7 +5561,7 @@
                 </a:solidFill>
                 <a:latin typeface="Marianne"/>
               </a:rPr>
-              <a:t>quotas, agents État</a:t>
+              <a:t>quotas · État</a:t>
             </a:r>
           </a:p>
         </p:txBody>
@@ -5660,29 +5660,7 @@
                 </a:solidFill>
                 <a:latin typeface="Marianne"/>
               </a:rPr>
-              <a:t>0,44 $ / 0,87 $</a:t>
-            </a:r>
-          </a:p>
-          <a:p>
-            <a:pPr algn="l">
-              <a:lnSpc>
-                <a:spcPct val="100000"/>
-              </a:lnSpc>
-              <a:spcBef>
-                <a:spcPts val="100"/>
-              </a:spcBef>
-              <a:spcAft>
-                <a:spcPts val="0"/>
-              </a:spcAft>
-            </a:pPr>
-            <a:r>
-              <a:rPr sz="800" b="0" i="0">
-                <a:solidFill>
-                  <a:srgbClr val="6A6A6A"/>
-                </a:solidFill>
-                <a:latin typeface="Marianne"/>
-              </a:rPr>
-              <a:t>tarif preview *</a:t>
+              <a:t>0,40 € / 0,80 €</a:t>
             </a:r>
           </a:p>
         </p:txBody>
@@ -5781,7 +5759,7 @@
                 </a:solidFill>
                 <a:latin typeface="Marianne"/>
               </a:rPr>
-              <a:t>1,40 $ / 4,40 $</a:t>
+              <a:t>1,80 € / 5,50 €</a:t>
             </a:r>
           </a:p>
         </p:txBody>
@@ -5880,7 +5858,7 @@
                 </a:solidFill>
                 <a:latin typeface="Marianne"/>
               </a:rPr>
-              <a:t>3 $ / 15 $</a:t>
+              <a:t>2,55 $ / 12,75 $</a:t>
             </a:r>
           </a:p>
           <a:p>
@@ -6039,7 +6017,7 @@
                 </a:solidFill>
                 <a:latin typeface="Marianne"/>
               </a:rPr>
-              <a:t>SWE-bench Verified</a:t>
+              <a:t>DeepSWE v1.1 · modèle seul</a:t>
             </a:r>
           </a:p>
         </p:txBody>
@@ -6138,7 +6116,29 @@
                 </a:solidFill>
                 <a:latin typeface="Marianne"/>
               </a:rPr>
-              <a:t>88,6 %</a:t>
+              <a:t>74,0 % (±4)</a:t>
+            </a:r>
+          </a:p>
+          <a:p>
+            <a:pPr algn="l">
+              <a:lnSpc>
+                <a:spcPct val="100000"/>
+              </a:lnSpc>
+              <a:spcBef>
+                <a:spcPts val="100"/>
+              </a:spcBef>
+              <a:spcAft>
+                <a:spcPts val="0"/>
+              </a:spcAft>
+            </a:pPr>
+            <a:r>
+              <a:rPr sz="800" b="0" i="0">
+                <a:solidFill>
+                  <a:srgbClr val="6A6A6A"/>
+                </a:solidFill>
+                <a:latin typeface="Marianne"/>
+              </a:rPr>
+              <a:t>TB 89,1 · SV 97,0*</a:t>
             </a:r>
           </a:p>
         </p:txBody>
@@ -6237,7 +6237,7 @@
                 </a:solidFill>
                 <a:latin typeface="Marianne"/>
               </a:rPr>
-              <a:t>95,0 %</a:t>
+              <a:t>70,0 %</a:t>
             </a:r>
           </a:p>
           <a:p>
@@ -6259,7 +6259,7 @@
                 </a:solidFill>
                 <a:latin typeface="Marianne"/>
               </a:rPr>
-              <a:t>tête du bench</a:t>
+              <a:t>TB n.p. · SV 95,0</a:t>
             </a:r>
           </a:p>
         </p:txBody>
@@ -6358,7 +6358,29 @@
                 </a:solidFill>
                 <a:latin typeface="Marianne"/>
               </a:rPr>
-              <a:t>77,6 %</a:t>
+              <a:t>non publié</a:t>
+            </a:r>
+          </a:p>
+          <a:p>
+            <a:pPr algn="l">
+              <a:lnSpc>
+                <a:spcPct val="100000"/>
+              </a:lnSpc>
+              <a:spcBef>
+                <a:spcPts val="100"/>
+              </a:spcBef>
+              <a:spcAft>
+                <a:spcPts val="0"/>
+              </a:spcAft>
+            </a:pPr>
+            <a:r>
+              <a:rPr sz="800" b="0" i="0">
+                <a:solidFill>
+                  <a:srgbClr val="6A6A6A"/>
+                </a:solidFill>
+                <a:latin typeface="Marianne"/>
+              </a:rPr>
+              <a:t>TB 85,2 · SV 82,1</a:t>
             </a:r>
           </a:p>
         </p:txBody>
@@ -6399,20 +6421,20 @@
             <a:r>
               <a:rPr sz="1150" b="0" i="0">
                 <a:solidFill>
-                  <a:srgbClr val="18753C"/>
+                  <a:srgbClr val="E1000F"/>
+                </a:solidFill>
+                <a:latin typeface="Marianne"/>
+              </a:rPr>
+              <a:t>● </a:t>
+            </a:r>
+            <a:r>
+              <a:rPr sz="1150" b="0" i="0">
+                <a:solidFill>
+                  <a:srgbClr val="D2D2E8"/>
                 </a:solidFill>
                 <a:latin typeface="Marianne"/>
               </a:rPr>
               <a:t>● ● ● ● </a:t>
-            </a:r>
-            <a:r>
-              <a:rPr sz="1150" b="0" i="0">
-                <a:solidFill>
-                  <a:srgbClr val="D2D2E8"/>
-                </a:solidFill>
-                <a:latin typeface="Marianne"/>
-              </a:rPr>
-              <a:t>● </a:t>
             </a:r>
           </a:p>
         </p:txBody>
@@ -6457,7 +6479,7 @@
                 </a:solidFill>
                 <a:latin typeface="Marianne"/>
               </a:rPr>
-              <a:t>≈79 % *</a:t>
+              <a:t>7,3 %ᵛ</a:t>
             </a:r>
           </a:p>
           <a:p>
@@ -6479,7 +6501,7 @@
                 </a:solidFill>
                 <a:latin typeface="Marianne"/>
               </a:rPr>
-              <a:t>estimée</a:t>
+              <a:t>TB 61,8ᵛ · SV 79,0</a:t>
             </a:r>
           </a:p>
         </p:txBody>
@@ -6578,7 +6600,29 @@
                 </a:solidFill>
                 <a:latin typeface="Marianne"/>
               </a:rPr>
-              <a:t>80,6 %</a:t>
+              <a:t>54,4 %ᵛ</a:t>
+            </a:r>
+          </a:p>
+          <a:p>
+            <a:pPr algn="l">
+              <a:lnSpc>
+                <a:spcPct val="100000"/>
+              </a:lnSpc>
+              <a:spcBef>
+                <a:spcPts val="100"/>
+              </a:spcBef>
+              <a:spcAft>
+                <a:spcPts val="0"/>
+              </a:spcAft>
+            </a:pPr>
+            <a:r>
+              <a:rPr sz="800" b="0" i="0">
+                <a:solidFill>
+                  <a:srgbClr val="6A6A6A"/>
+                </a:solidFill>
+                <a:latin typeface="Marianne"/>
+              </a:rPr>
+              <a:t>TB 82,7ᵛ · SV n.p.</a:t>
             </a:r>
           </a:p>
         </p:txBody>
@@ -6619,11 +6663,11 @@
             <a:r>
               <a:rPr sz="1150" b="0" i="0">
                 <a:solidFill>
-                  <a:srgbClr val="18753C"/>
-                </a:solidFill>
-                <a:latin typeface="Marianne"/>
-              </a:rPr>
-              <a:t>● ● ● ● </a:t>
+                  <a:srgbClr val="B85C00"/>
+                </a:solidFill>
+                <a:latin typeface="Marianne"/>
+              </a:rPr>
+              <a:t>● ● ● </a:t>
             </a:r>
             <a:r>
               <a:rPr sz="1150" b="0" i="0">
@@ -6632,7 +6676,7 @@
                 </a:solidFill>
                 <a:latin typeface="Marianne"/>
               </a:rPr>
-              <a:t>● </a:t>
+              <a:t>● ● </a:t>
             </a:r>
           </a:p>
         </p:txBody>
@@ -6677,7 +6721,7 @@
                 </a:solidFill>
                 <a:latin typeface="Marianne"/>
               </a:rPr>
-              <a:t>≈78 % *</a:t>
+              <a:t>44,0 %</a:t>
             </a:r>
           </a:p>
           <a:p>
@@ -6699,7 +6743,7 @@
                 </a:solidFill>
                 <a:latin typeface="Marianne"/>
               </a:rPr>
-              <a:t>estimée</a:t>
+              <a:t>TB 81,0ᵛ · SV ≈78</a:t>
             </a:r>
           </a:p>
         </p:txBody>
@@ -6744,7 +6788,7 @@
                 </a:solidFill>
                 <a:latin typeface="Marianne"/>
               </a:rPr>
-              <a:t>● ● ● ● ● </a:t>
+              <a:t>● ● ● ● </a:t>
             </a:r>
             <a:r>
               <a:rPr sz="1150" b="0" i="0">
@@ -6753,7 +6797,7 @@
                 </a:solidFill>
                 <a:latin typeface="Marianne"/>
               </a:rPr>
-              <a:t/>
+              <a:t>● </a:t>
             </a:r>
           </a:p>
         </p:txBody>
@@ -6798,7 +6842,7 @@
                 </a:solidFill>
                 <a:latin typeface="Marianne"/>
               </a:rPr>
-              <a:t>93,4 % *</a:t>
+              <a:t>≈69 %</a:t>
             </a:r>
           </a:p>
           <a:p>
@@ -6820,7 +6864,7 @@
                 </a:solidFill>
                 <a:latin typeface="Marianne"/>
               </a:rPr>
-              <a:t>annoncé éditeur</a:t>
+              <a:t>TB 88,3ᵛ · SV 93,4ᵛ</a:t>
             </a:r>
           </a:p>
         </p:txBody>
@@ -7056,7 +7100,7 @@
                 </a:solidFill>
                 <a:latin typeface="Marianne"/>
               </a:rPr>
-              <a:t>Éditeur US</a:t>
+              <a:t>Cloud US</a:t>
             </a:r>
           </a:p>
           <a:p>
@@ -7078,7 +7122,7 @@
                 </a:solidFill>
                 <a:latin typeface="Marianne"/>
               </a:rPr>
-              <a:t>CLOUD Act</a:t>
+              <a:t>CLOUD Act (CNIL)</a:t>
             </a:r>
           </a:p>
         </p:txBody>
@@ -7240,20 +7284,20 @@
             <a:r>
               <a:rPr sz="1150" b="0" i="0">
                 <a:solidFill>
-                  <a:srgbClr val="18753C"/>
+                  <a:srgbClr val="E1000F"/>
+                </a:solidFill>
+                <a:latin typeface="Marianne"/>
+              </a:rPr>
+              <a:t>● </a:t>
+            </a:r>
+            <a:r>
+              <a:rPr sz="1150" b="0" i="0">
+                <a:solidFill>
+                  <a:srgbClr val="D2D2E8"/>
                 </a:solidFill>
                 <a:latin typeface="Marianne"/>
               </a:rPr>
               <a:t>● ● ● ● </a:t>
-            </a:r>
-            <a:r>
-              <a:rPr sz="1150" b="0" i="0">
-                <a:solidFill>
-                  <a:srgbClr val="D2D2E8"/>
-                </a:solidFill>
-                <a:latin typeface="Marianne"/>
-              </a:rPr>
-              <a:t>● </a:t>
             </a:r>
           </a:p>
         </p:txBody>
@@ -7298,7 +7342,7 @@
                 </a:solidFill>
                 <a:latin typeface="Marianne"/>
               </a:rPr>
-              <a:t>Éditeur FR</a:t>
+              <a:t>Cloud US</a:t>
             </a:r>
           </a:p>
           <a:p>
@@ -7320,7 +7364,7 @@
                 </a:solidFill>
                 <a:latin typeface="Marianne"/>
               </a:rPr>
-              <a:t>SecNumCloud en opt.</a:t>
+              <a:t>CLOUD Act (CNIL)</a:t>
             </a:r>
           </a:p>
         </p:txBody>
@@ -7482,20 +7526,20 @@
             <a:r>
               <a:rPr sz="1150" b="0" i="0">
                 <a:solidFill>
-                  <a:srgbClr val="E1000F"/>
+                  <a:srgbClr val="18753C"/>
+                </a:solidFill>
+                <a:latin typeface="Marianne"/>
+              </a:rPr>
+              <a:t>● ● ● ● </a:t>
+            </a:r>
+            <a:r>
+              <a:rPr sz="1150" b="0" i="0">
+                <a:solidFill>
+                  <a:srgbClr val="D2D2E8"/>
                 </a:solidFill>
                 <a:latin typeface="Marianne"/>
               </a:rPr>
               <a:t>● </a:t>
-            </a:r>
-            <a:r>
-              <a:rPr sz="1150" b="0" i="0">
-                <a:solidFill>
-                  <a:srgbClr val="D2D2E8"/>
-                </a:solidFill>
-                <a:latin typeface="Marianne"/>
-              </a:rPr>
-              <a:t>● ● ● ● </a:t>
             </a:r>
           </a:p>
         </p:txBody>
@@ -7540,7 +7584,7 @@
                 </a:solidFill>
                 <a:latin typeface="Marianne"/>
               </a:rPr>
-              <a:t>Éditeur CN</a:t>
+              <a:t>Cloud FR</a:t>
             </a:r>
           </a:p>
           <a:p>
@@ -7562,7 +7606,7 @@
                 </a:solidFill>
                 <a:latin typeface="Marianne"/>
               </a:rPr>
-              <a:t>+ routeur US</a:t>
+              <a:t>hébergé UE</a:t>
             </a:r>
           </a:p>
         </p:txBody>
@@ -7603,20 +7647,20 @@
             <a:r>
               <a:rPr sz="1150" b="0" i="0">
                 <a:solidFill>
-                  <a:srgbClr val="E1000F"/>
+                  <a:srgbClr val="18753C"/>
+                </a:solidFill>
+                <a:latin typeface="Marianne"/>
+              </a:rPr>
+              <a:t>● ● ● ● </a:t>
+            </a:r>
+            <a:r>
+              <a:rPr sz="1150" b="0" i="0">
+                <a:solidFill>
+                  <a:srgbClr val="D2D2E8"/>
                 </a:solidFill>
                 <a:latin typeface="Marianne"/>
               </a:rPr>
               <a:t>● </a:t>
-            </a:r>
-            <a:r>
-              <a:rPr sz="1150" b="0" i="0">
-                <a:solidFill>
-                  <a:srgbClr val="D2D2E8"/>
-                </a:solidFill>
-                <a:latin typeface="Marianne"/>
-              </a:rPr>
-              <a:t>● ● ● ● </a:t>
             </a:r>
           </a:p>
         </p:txBody>
@@ -7661,7 +7705,7 @@
                 </a:solidFill>
                 <a:latin typeface="Marianne"/>
               </a:rPr>
-              <a:t>Éditeur CN</a:t>
+              <a:t>Cloud FR</a:t>
             </a:r>
           </a:p>
           <a:p>
@@ -7683,7 +7727,7 @@
                 </a:solidFill>
                 <a:latin typeface="Marianne"/>
               </a:rPr>
-              <a:t>+ routeur US</a:t>
+              <a:t>hébergé UE</a:t>
             </a:r>
           </a:p>
         </p:txBody>
@@ -7982,11 +8026,11 @@
             <a:r>
               <a:rPr sz="1150" b="0" i="0">
                 <a:solidFill>
-                  <a:srgbClr val="B85C00"/>
-                </a:solidFill>
-                <a:latin typeface="Marianne"/>
-              </a:rPr>
-              <a:t>● ● ● </a:t>
+                  <a:srgbClr val="18753C"/>
+                </a:solidFill>
+                <a:latin typeface="Marianne"/>
+              </a:rPr>
+              <a:t>● ● ● ● </a:t>
             </a:r>
             <a:r>
               <a:rPr sz="1150" b="0" i="0">
@@ -7995,7 +8039,7 @@
                 </a:solidFill>
                 <a:latin typeface="Marianne"/>
               </a:rPr>
-              <a:t>● ● </a:t>
+              <a:t>● </a:t>
             </a:r>
           </a:p>
         </p:txBody>
@@ -8040,7 +8084,7 @@
                 </a:solidFill>
                 <a:latin typeface="Marianne"/>
               </a:rPr>
-              <a:t>Partielle</a:t>
+              <a:t>Bonne</a:t>
             </a:r>
           </a:p>
           <a:p>
@@ -8062,7 +8106,7 @@
                 </a:solidFill>
                 <a:latin typeface="Marianne"/>
               </a:rPr>
-              <a:t>transfert hors UE</a:t>
+              <a:t>UE · DPA AWS</a:t>
             </a:r>
           </a:p>
         </p:txBody>
@@ -8183,7 +8227,7 @@
                 </a:solidFill>
                 <a:latin typeface="Marianne"/>
               </a:rPr>
-              <a:t>région UE · DPA AWS</a:t>
+              <a:t>UE · DPA AWS</a:t>
             </a:r>
           </a:p>
         </p:txBody>
@@ -8228,7 +8272,7 @@
                 </a:solidFill>
                 <a:latin typeface="Marianne"/>
               </a:rPr>
-              <a:t>● ● ● ● ● </a:t>
+              <a:t>● ● ● ● </a:t>
             </a:r>
             <a:r>
               <a:rPr sz="1150" b="0" i="0">
@@ -8237,7 +8281,7 @@
                 </a:solidFill>
                 <a:latin typeface="Marianne"/>
               </a:rPr>
-              <a:t/>
+              <a:t>● </a:t>
             </a:r>
           </a:p>
         </p:txBody>
@@ -8304,7 +8348,7 @@
                 </a:solidFill>
                 <a:latin typeface="Marianne"/>
               </a:rPr>
-              <a:t>RGPD · éditeur FR</a:t>
+              <a:t>UE · DPA AWS</a:t>
             </a:r>
           </a:p>
         </p:txBody>
@@ -8425,7 +8469,7 @@
                 </a:solidFill>
                 <a:latin typeface="Marianne"/>
               </a:rPr>
-              <a:t>cadre État (DINUM)</a:t>
+              <a:t>cadre État</a:t>
             </a:r>
           </a:p>
         </p:txBody>
@@ -8466,20 +8510,20 @@
             <a:r>
               <a:rPr sz="1150" b="0" i="0">
                 <a:solidFill>
-                  <a:srgbClr val="E1000F"/>
+                  <a:srgbClr val="18753C"/>
+                </a:solidFill>
+                <a:latin typeface="Marianne"/>
+              </a:rPr>
+              <a:t>● ● ● ● </a:t>
+            </a:r>
+            <a:r>
+              <a:rPr sz="1150" b="0" i="0">
+                <a:solidFill>
+                  <a:srgbClr val="D2D2E8"/>
                 </a:solidFill>
                 <a:latin typeface="Marianne"/>
               </a:rPr>
               <a:t>● </a:t>
-            </a:r>
-            <a:r>
-              <a:rPr sz="1150" b="0" i="0">
-                <a:solidFill>
-                  <a:srgbClr val="D2D2E8"/>
-                </a:solidFill>
-                <a:latin typeface="Marianne"/>
-              </a:rPr>
-              <a:t>● ● ● ● </a:t>
             </a:r>
           </a:p>
         </p:txBody>
@@ -8524,7 +8568,7 @@
                 </a:solidFill>
                 <a:latin typeface="Marianne"/>
               </a:rPr>
-              <a:t>Insuffisante</a:t>
+              <a:t>Bonne</a:t>
             </a:r>
           </a:p>
           <a:p>
@@ -8546,7 +8590,7 @@
                 </a:solidFill>
                 <a:latin typeface="Marianne"/>
               </a:rPr>
-              <a:t>sans garanties UE</a:t>
+              <a:t>RGPD · cloud FR</a:t>
             </a:r>
           </a:p>
         </p:txBody>
@@ -8587,20 +8631,20 @@
             <a:r>
               <a:rPr sz="1150" b="0" i="0">
                 <a:solidFill>
-                  <a:srgbClr val="E1000F"/>
+                  <a:srgbClr val="18753C"/>
+                </a:solidFill>
+                <a:latin typeface="Marianne"/>
+              </a:rPr>
+              <a:t>● ● ● ● </a:t>
+            </a:r>
+            <a:r>
+              <a:rPr sz="1150" b="0" i="0">
+                <a:solidFill>
+                  <a:srgbClr val="D2D2E8"/>
                 </a:solidFill>
                 <a:latin typeface="Marianne"/>
               </a:rPr>
               <a:t>● </a:t>
-            </a:r>
-            <a:r>
-              <a:rPr sz="1150" b="0" i="0">
-                <a:solidFill>
-                  <a:srgbClr val="D2D2E8"/>
-                </a:solidFill>
-                <a:latin typeface="Marianne"/>
-              </a:rPr>
-              <a:t>● ● ● ● </a:t>
             </a:r>
           </a:p>
         </p:txBody>
@@ -8645,7 +8689,7 @@
                 </a:solidFill>
                 <a:latin typeface="Marianne"/>
               </a:rPr>
-              <a:t>Insuffisante</a:t>
+              <a:t>Bonne</a:t>
             </a:r>
           </a:p>
           <a:p>
@@ -8667,7 +8711,7 @@
                 </a:solidFill>
                 <a:latin typeface="Marianne"/>
               </a:rPr>
-              <a:t>sans garanties UE</a:t>
+              <a:t>RGPD · cloud FR</a:t>
             </a:r>
           </a:p>
         </p:txBody>
@@ -8966,11 +9010,11 @@
             <a:r>
               <a:rPr sz="1150" b="0" i="0">
                 <a:solidFill>
-                  <a:srgbClr val="18753C"/>
-                </a:solidFill>
-                <a:latin typeface="Marianne"/>
-              </a:rPr>
-              <a:t>● ● ● ● </a:t>
+                  <a:srgbClr val="B85C00"/>
+                </a:solidFill>
+                <a:latin typeface="Marianne"/>
+              </a:rPr>
+              <a:t>● ● ● </a:t>
             </a:r>
             <a:r>
               <a:rPr sz="1150" b="0" i="0">
@@ -8979,7 +9023,7 @@
                 </a:solidFill>
                 <a:latin typeface="Marianne"/>
               </a:rPr>
-              <a:t>● </a:t>
+              <a:t>● ● </a:t>
             </a:r>
           </a:p>
         </p:txBody>
@@ -9024,7 +9068,7 @@
                 </a:solidFill>
                 <a:latin typeface="Marianne"/>
               </a:rPr>
-              <a:t>Multi-OS natif</a:t>
+              <a:t>Bedrock (IAM)</a:t>
             </a:r>
           </a:p>
           <a:p>
@@ -9046,7 +9090,7 @@
                 </a:solidFill>
                 <a:latin typeface="Marianne"/>
               </a:rPr>
-              <a:t>outil mûr, admin ent.</a:t>
+              <a:t>data sharing</a:t>
             </a:r>
           </a:p>
         </p:txBody>
@@ -9167,7 +9211,7 @@
                 </a:solidFill>
                 <a:latin typeface="Marianne"/>
               </a:rPr>
-              <a:t>data sharing requis</a:t>
+              <a:t>data sharing</a:t>
             </a:r>
           </a:p>
         </p:txBody>
@@ -9266,7 +9310,7 @@
                 </a:solidFill>
                 <a:latin typeface="Marianne"/>
               </a:rPr>
-              <a:t>CLI + VS Code</a:t>
+              <a:t>Bedrock (IAM)</a:t>
             </a:r>
           </a:p>
           <a:p>
@@ -9288,7 +9332,7 @@
                 </a:solidFill>
                 <a:latin typeface="Marianne"/>
               </a:rPr>
-              <a:t>clé Mistral ou plan</a:t>
+              <a:t>data sharing</a:t>
             </a:r>
           </a:p>
         </p:txBody>
@@ -9409,7 +9453,7 @@
                 </a:solidFill>
                 <a:latin typeface="Marianne"/>
               </a:rPr>
-              <a:t>agents État · quotas</a:t>
+              <a:t>agents État</a:t>
             </a:r>
           </a:p>
         </p:txBody>
@@ -9508,7 +9552,7 @@
                 </a:solidFill>
                 <a:latin typeface="Marianne"/>
               </a:rPr>
-              <a:t>clé OpenRouter</a:t>
+              <a:t>clé Scaleway</a:t>
             </a:r>
           </a:p>
           <a:p>
@@ -9530,7 +9574,7 @@
                 </a:solidFill>
                 <a:latin typeface="Marianne"/>
               </a:rPr>
-              <a:t>Mac/Linux/Win (WSL)</a:t>
+              <a:t>OpenAI-compat.</a:t>
             </a:r>
           </a:p>
         </p:txBody>
@@ -9629,7 +9673,7 @@
                 </a:solidFill>
                 <a:latin typeface="Marianne"/>
               </a:rPr>
-              <a:t>clé OpenRouter</a:t>
+              <a:t>clé Scaleway</a:t>
             </a:r>
           </a:p>
           <a:p>
@@ -9651,7 +9695,7 @@
                 </a:solidFill>
                 <a:latin typeface="Marianne"/>
               </a:rPr>
-              <a:t>Mac/Linux/Win (WSL)</a:t>
+              <a:t>OpenAI-compat.</a:t>
             </a:r>
           </a:p>
         </p:txBody>
@@ -9871,7 +9915,7 @@
                 </a:solidFill>
                 <a:latin typeface="Marianne"/>
               </a:rPr>
-              <a:t>        * DeepSeek V4 : tarif preview ; GLM et Albert : perf estimée ; Kimi K3 : score annoncé par l'éditeur.</a:t>
+              <a:t>        DeepSWE v1.1 = modèle seul, mini-swe-agent · TB Terminal-Bench 2.1 · SV SWE-bench V. (baseline) · ᵛ auto-rapporté · * vals.ai.</a:t>
             </a:r>
           </a:p>
         </p:txBody>
@@ -10104,7 +10148,7 @@
                 </a:solidFill>
                 <a:latin typeface="Marianne"/>
               </a:rPr>
-              <a:t>Ministères Sociaux – Benchmark coding agentique – 23/07/2026</a:t>
+              <a:t>Ministères Sociaux – Benchmark coding agentique – 02/09/2026</a:t>
             </a:r>
           </a:p>
         </p:txBody>
@@ -10947,7 +10991,7 @@
                 </a:solidFill>
                 <a:latin typeface="Marianne"/>
               </a:rPr>
-              <a:t>Fable 5 : 10 $ / 50 $ · Opus 4.8 : 5 $ / 25 $ · Kimi K3 : 3 $ / 15 $ · Mistral Medium 3.5 : 1,50 $ / 7,50 $ · GLM 5.2 : 1,40 $ / 4,40 $ · DeepSeek V4 Pro : 0,44 $ / 0,87 $ · Albert : gratuit, quotas.</a:t>
+              <a:t>Fable 5 : 10 $ / 50 $ · Opus 5 : 5 $ / 25 $ · Kimi K3 : 2,55 $ / 12,75 $ · Sonnet 5 : 2 $ / 10 $ · GLM 5.2 (Scaleway) : 1,80 € / 5,50 € · DeepSeek V4 Flash 0731 (Scaleway) : 0,40 € / 0,80 € · Albert : gratuit, quotas.</a:t>
             </a:r>
           </a:p>
         </p:txBody>
@@ -11180,7 +11224,7 @@
                 </a:solidFill>
                 <a:latin typeface="Marianne"/>
               </a:rPr>
-              <a:t>Ministères Sociaux – Benchmark coding agentique – 23/07/2026</a:t>
+              <a:t>Ministères Sociaux – Benchmark coding agentique – 02/09/2026</a:t>
             </a:r>
           </a:p>
         </p:txBody>
@@ -11443,8 +11487,8 @@
         </p:nvSpPr>
         <p:spPr>
           <a:xfrm>
-            <a:off x="1106424" y="2980944"/>
-            <a:ext cx="4449927" cy="1097280"/>
+            <a:off x="1106424" y="2907791"/>
+            <a:ext cx="4449927" cy="1170432"/>
           </a:xfrm>
           <a:prstGeom prst="rect">
             <a:avLst/>
@@ -11459,17 +11503,17 @@
           <a:p>
             <a:pPr algn="l" marL="201168" indent="-201168">
               <a:lnSpc>
-                <a:spcPct val="105000"/>
-              </a:lnSpc>
-              <a:spcBef>
-                <a:spcPts val="0"/>
-              </a:spcBef>
-              <a:spcAft>
-                <a:spcPts val="400"/>
-              </a:spcAft>
-            </a:pPr>
-            <a:r>
-              <a:rPr sz="1200" b="0" i="0">
+                <a:spcPct val="102000"/>
+              </a:lnSpc>
+              <a:spcBef>
+                <a:spcPts val="0"/>
+              </a:spcBef>
+              <a:spcAft>
+                <a:spcPts val="300"/>
+              </a:spcAft>
+            </a:pPr>
+            <a:r>
+              <a:rPr sz="1100" b="0" i="0">
                 <a:solidFill>
                   <a:srgbClr val="6A6AF4"/>
                 </a:solidFill>
@@ -11478,7 +11522,7 @@
               <a:t>▪  </a:t>
             </a:r>
             <a:r>
-              <a:rPr sz="1300" b="1" i="0">
+              <a:rPr sz="1200" b="1" i="0">
                 <a:solidFill>
                   <a:srgbClr val="161616"/>
                 </a:solidFill>
@@ -11487,7 +11531,7 @@
               <a:t>Claude Code : </a:t>
             </a:r>
             <a:r>
-              <a:rPr sz="1250" b="0" i="0">
+              <a:rPr sz="1150" b="0" i="0">
                 <a:solidFill>
                   <a:srgbClr val="3A3A3A"/>
                 </a:solidFill>
@@ -11499,17 +11543,17 @@
           <a:p>
             <a:pPr algn="l" marL="201168" indent="-201168">
               <a:lnSpc>
-                <a:spcPct val="105000"/>
-              </a:lnSpc>
-              <a:spcBef>
-                <a:spcPts val="0"/>
-              </a:spcBef>
-              <a:spcAft>
-                <a:spcPts val="400"/>
-              </a:spcAft>
-            </a:pPr>
-            <a:r>
-              <a:rPr sz="1200" b="0" i="0">
+                <a:spcPct val="102000"/>
+              </a:lnSpc>
+              <a:spcBef>
+                <a:spcPts val="0"/>
+              </a:spcBef>
+              <a:spcAft>
+                <a:spcPts val="300"/>
+              </a:spcAft>
+            </a:pPr>
+            <a:r>
+              <a:rPr sz="1100" b="0" i="0">
                 <a:solidFill>
                   <a:srgbClr val="6A6AF4"/>
                 </a:solidFill>
@@ -11518,38 +11562,38 @@
               <a:t>▪  </a:t>
             </a:r>
             <a:r>
-              <a:rPr sz="1300" b="1" i="0">
+              <a:rPr sz="1200" b="1" i="0">
                 <a:solidFill>
                   <a:srgbClr val="161616"/>
                 </a:solidFill>
                 <a:latin typeface="Marianne"/>
               </a:rPr>
-              <a:t>Vibe (Mistral) : </a:t>
-            </a:r>
-            <a:r>
-              <a:rPr sz="1250" b="0" i="0">
+              <a:t>OpenCode + Scaleway : </a:t>
+            </a:r>
+            <a:r>
+              <a:rPr sz="1150" b="0" i="0">
                 <a:solidFill>
                   <a:srgbClr val="3A3A3A"/>
                 </a:solidFill>
                 <a:latin typeface="Marianne"/>
               </a:rPr>
-              <a:t>plan 14,99–24,99 $/m ou clé API</a:t>
+              <a:t>clé, paiement au token (€)</a:t>
             </a:r>
           </a:p>
           <a:p>
             <a:pPr algn="l" marL="201168" indent="-201168">
               <a:lnSpc>
-                <a:spcPct val="105000"/>
-              </a:lnSpc>
-              <a:spcBef>
-                <a:spcPts val="0"/>
-              </a:spcBef>
-              <a:spcAft>
-                <a:spcPts val="400"/>
-              </a:spcAft>
-            </a:pPr>
-            <a:r>
-              <a:rPr sz="1200" b="0" i="0">
+                <a:spcPct val="102000"/>
+              </a:lnSpc>
+              <a:spcBef>
+                <a:spcPts val="0"/>
+              </a:spcBef>
+              <a:spcAft>
+                <a:spcPts val="300"/>
+              </a:spcAft>
+            </a:pPr>
+            <a:r>
+              <a:rPr sz="1100" b="0" i="0">
                 <a:solidFill>
                   <a:srgbClr val="6A6AF4"/>
                 </a:solidFill>
@@ -11558,7 +11602,7 @@
               <a:t>▪  </a:t>
             </a:r>
             <a:r>
-              <a:rPr sz="1300" b="1" i="0">
+              <a:rPr sz="1200" b="1" i="0">
                 <a:solidFill>
                   <a:srgbClr val="161616"/>
                 </a:solidFill>
@@ -11567,7 +11611,7 @@
               <a:t>OpenCode + OpenRouter : </a:t>
             </a:r>
             <a:r>
-              <a:rPr sz="1250" b="0" i="0">
+              <a:rPr sz="1150" b="0" i="0">
                 <a:solidFill>
                   <a:srgbClr val="3A3A3A"/>
                 </a:solidFill>
@@ -11579,17 +11623,17 @@
           <a:p>
             <a:pPr algn="l" marL="201168" indent="-201168">
               <a:lnSpc>
-                <a:spcPct val="105000"/>
-              </a:lnSpc>
-              <a:spcBef>
-                <a:spcPts val="0"/>
-              </a:spcBef>
-              <a:spcAft>
-                <a:spcPts val="400"/>
-              </a:spcAft>
-            </a:pPr>
-            <a:r>
-              <a:rPr sz="1200" b="0" i="0">
+                <a:spcPct val="102000"/>
+              </a:lnSpc>
+              <a:spcBef>
+                <a:spcPts val="0"/>
+              </a:spcBef>
+              <a:spcAft>
+                <a:spcPts val="300"/>
+              </a:spcAft>
+            </a:pPr>
+            <a:r>
+              <a:rPr sz="1100" b="0" i="0">
                 <a:solidFill>
                   <a:srgbClr val="6A6AF4"/>
                 </a:solidFill>
@@ -11598,7 +11642,7 @@
               <a:t>▪  </a:t>
             </a:r>
             <a:r>
-              <a:rPr sz="1300" b="1" i="0">
+              <a:rPr sz="1200" b="1" i="0">
                 <a:solidFill>
                   <a:srgbClr val="161616"/>
                 </a:solidFill>
@@ -11607,7 +11651,7 @@
               <a:t>OpenCode + Albert : </a:t>
             </a:r>
             <a:r>
-              <a:rPr sz="1250" b="0" i="0">
+              <a:rPr sz="1150" b="0" i="0">
                 <a:solidFill>
                   <a:srgbClr val="3A3A3A"/>
                 </a:solidFill>
@@ -11831,7 +11875,7 @@
                 </a:solidFill>
                 <a:latin typeface="Marianne"/>
               </a:rPr>
-              <a:t>de 0,87 $ (DeepSeek) à 50 $ (Fable 5)</a:t>
+              <a:t>de 0,80 € (DS · Scaleway) à 50 $ (Fable 5)</a:t>
             </a:r>
           </a:p>
           <a:p>
@@ -11930,7 +11974,7 @@
         <p:spPr>
           <a:xfrm>
             <a:off x="777240" y="4681728"/>
-            <a:ext cx="2453563" cy="1298448"/>
+            <a:ext cx="3362858" cy="1298448"/>
           </a:xfrm>
           <a:prstGeom prst="roundRect">
             <a:avLst>
@@ -12002,7 +12046,7 @@
         <p:spPr>
           <a:xfrm>
             <a:off x="1453895" y="4828032"/>
-            <a:ext cx="1630603" cy="457200"/>
+            <a:ext cx="2539898" cy="457200"/>
           </a:xfrm>
           <a:prstGeom prst="rect">
             <a:avLst/>
@@ -12047,7 +12091,7 @@
         <p:spPr>
           <a:xfrm>
             <a:off x="978408" y="5321808"/>
-            <a:ext cx="2069515" cy="585215"/>
+            <a:ext cx="2978810" cy="585215"/>
           </a:xfrm>
           <a:prstGeom prst="rect">
             <a:avLst/>
@@ -12078,7 +12122,7 @@
                 </a:solidFill>
                 <a:latin typeface="Marianne"/>
               </a:rPr>
-              <a:t>Claude Code · Fable 5</a:t>
+              <a:t>Claude Code · Opus 5</a:t>
             </a:r>
           </a:p>
           <a:p>
@@ -12100,7 +12144,7 @@
                 </a:solidFill>
                 <a:latin typeface="Marianne"/>
               </a:rPr>
-              <a:t>95,0 % SWE-bench, via Bedrock. </a:t>
+              <a:t>DeepSWE 74 % · TB 89,1 %. </a:t>
             </a:r>
             <a:r>
               <a:rPr sz="950" b="0" i="1">
@@ -12109,7 +12153,7 @@
                 </a:solidFill>
                 <a:latin typeface="Marianne"/>
               </a:rPr>
-              <a:t>Le plus cher, CLOUD Act.</a:t>
+              <a:t>Non souverain (CLOUD Act).</a:t>
             </a:r>
           </a:p>
         </p:txBody>
@@ -12122,8 +12166,8 @@
         </p:nvSpPr>
         <p:spPr>
           <a:xfrm>
-            <a:off x="3505123" y="4681728"/>
-            <a:ext cx="2453563" cy="1298448"/>
+            <a:off x="4414418" y="4681728"/>
+            <a:ext cx="3362858" cy="1298448"/>
           </a:xfrm>
           <a:prstGeom prst="roundRect">
             <a:avLst>
@@ -12178,7 +12222,7 @@
         </p:blipFill>
         <p:spPr>
           <a:xfrm>
-            <a:off x="3706291" y="4846320"/>
+            <a:off x="4615586" y="4846320"/>
             <a:ext cx="365760" cy="365760"/>
           </a:xfrm>
           <a:prstGeom prst="rect">
@@ -12194,8 +12238,8 @@
         </p:nvSpPr>
         <p:spPr>
           <a:xfrm>
-            <a:off x="4181779" y="4828032"/>
-            <a:ext cx="1630603" cy="457200"/>
+            <a:off x="5091074" y="4828032"/>
+            <a:ext cx="2539898" cy="457200"/>
           </a:xfrm>
           <a:prstGeom prst="rect">
             <a:avLst/>
@@ -12239,8 +12283,8 @@
         </p:nvSpPr>
         <p:spPr>
           <a:xfrm>
-            <a:off x="3706291" y="5321808"/>
-            <a:ext cx="2069515" cy="585215"/>
+            <a:off x="4615586" y="5321808"/>
+            <a:ext cx="2978810" cy="585215"/>
           </a:xfrm>
           <a:prstGeom prst="rect">
             <a:avLst/>
@@ -12315,8 +12359,8 @@
         </p:nvSpPr>
         <p:spPr>
           <a:xfrm>
-            <a:off x="6233007" y="4681728"/>
-            <a:ext cx="2453563" cy="1298448"/>
+            <a:off x="8051596" y="4681728"/>
+            <a:ext cx="3362858" cy="1298448"/>
           </a:xfrm>
           <a:prstGeom prst="roundRect">
             <a:avLst>
@@ -12328,7 +12372,7 @@
           </a:solidFill>
           <a:ln w="17780">
             <a:solidFill>
-              <a:srgbClr val="6A6AF4"/>
+              <a:srgbClr val="B85C00"/>
             </a:solidFill>
           </a:ln>
           <a:effectLst/>
@@ -12357,7 +12401,7 @@
       </p:sp>
       <p:pic>
         <p:nvPicPr>
-          <p:cNvPr id="28" name="Picture 27" descr="shield-check.png"/>
+          <p:cNvPr id="28" name="Picture 27" descr="focus-3.png"/>
           <p:cNvPicPr>
             <a:picLocks noChangeAspect="1"/>
           </p:cNvPicPr>
@@ -12371,7 +12415,7 @@
         </p:blipFill>
         <p:spPr>
           <a:xfrm>
-            <a:off x="6434175" y="4846320"/>
+            <a:off x="8252764" y="4846320"/>
             <a:ext cx="365760" cy="365760"/>
           </a:xfrm>
           <a:prstGeom prst="rect">
@@ -12387,8 +12431,8 @@
         </p:nvSpPr>
         <p:spPr>
           <a:xfrm>
-            <a:off x="6909663" y="4828032"/>
-            <a:ext cx="1630603" cy="457200"/>
+            <a:off x="8728252" y="4828032"/>
+            <a:ext cx="2539898" cy="457200"/>
           </a:xfrm>
           <a:prstGeom prst="rect">
             <a:avLst/>
@@ -12415,11 +12459,11 @@
             <a:r>
               <a:rPr sz="1100" b="1" i="0">
                 <a:solidFill>
-                  <a:srgbClr val="6A6AF4"/>
-                </a:solidFill>
-                <a:latin typeface="Marianne"/>
-              </a:rPr>
-              <a:t>Conformité UE</a:t>
+                  <a:srgbClr val="B85C00"/>
+                </a:solidFill>
+                <a:latin typeface="Marianne"/>
+              </a:rPr>
+              <a:t>Rapport perf / prix</a:t>
             </a:r>
           </a:p>
         </p:txBody>
@@ -12432,8 +12476,8 @@
         </p:nvSpPr>
         <p:spPr>
           <a:xfrm>
-            <a:off x="6434175" y="5321808"/>
-            <a:ext cx="2069515" cy="585215"/>
+            <a:off x="8252764" y="5321808"/>
+            <a:ext cx="2978810" cy="585215"/>
           </a:xfrm>
           <a:prstGeom prst="rect">
             <a:avLst/>
@@ -12464,7 +12508,7 @@
                 </a:solidFill>
                 <a:latin typeface="Marianne"/>
               </a:rPr>
-              <a:t>Vibe · Mistral Medium 3.5</a:t>
+              <a:t>DS V4 Flash 0731 · Scaleway</a:t>
             </a:r>
           </a:p>
           <a:p>
@@ -12486,7 +12530,7 @@
                 </a:solidFill>
                 <a:latin typeface="Marianne"/>
               </a:rPr>
-              <a:t>77,6 %, RGPD, éditeur FR. </a:t>
+              <a:t>DeepSWE 54,4ᵛ pour 0,40 / 0,80 € · souverain. </a:t>
             </a:r>
             <a:r>
               <a:rPr sz="950" b="0" i="1">
@@ -12495,138 +12539,21 @@
                 </a:solidFill>
                 <a:latin typeface="Marianne"/>
               </a:rPr>
-              <a:t>Perf en retrait.</a:t>
-            </a:r>
-          </a:p>
-        </p:txBody>
-      </p:sp>
-      <p:sp>
-        <p:nvSpPr>
-          <p:cNvPr id="31" name="Rounded Rectangle 30"/>
-          <p:cNvSpPr/>
-          <p:nvPr/>
-        </p:nvSpPr>
-        <p:spPr>
-          <a:xfrm>
-            <a:off x="8960891" y="4681728"/>
-            <a:ext cx="2453563" cy="1298448"/>
-          </a:xfrm>
-          <a:prstGeom prst="roundRect">
-            <a:avLst>
-              <a:gd name="adj" fmla="val 6000"/>
-            </a:avLst>
-          </a:prstGeom>
-          <a:solidFill>
-            <a:srgbClr val="FFFFFF"/>
-          </a:solidFill>
-          <a:ln w="17780">
-            <a:solidFill>
-              <a:srgbClr val="B85C00"/>
-            </a:solidFill>
-          </a:ln>
-          <a:effectLst/>
-        </p:spPr>
-        <p:style>
-          <a:lnRef idx="1">
-            <a:schemeClr val="accent1"/>
-          </a:lnRef>
-          <a:fillRef idx="3">
-            <a:schemeClr val="accent1"/>
-          </a:fillRef>
-          <a:effectRef idx="2">
-            <a:schemeClr val="accent1"/>
-          </a:effectRef>
-          <a:fontRef idx="minor">
-            <a:schemeClr val="lt1"/>
-          </a:fontRef>
-        </p:style>
-        <p:txBody>
-          <a:bodyPr rtlCol="0" anchor="ctr"/>
-          <a:lstStyle/>
-          <a:p>
-            <a:pPr algn="ctr"/>
-          </a:p>
-        </p:txBody>
-      </p:sp>
-      <p:pic>
-        <p:nvPicPr>
-          <p:cNvPr id="32" name="Picture 31" descr="focus-3.png"/>
-          <p:cNvPicPr>
-            <a:picLocks noChangeAspect="1"/>
-          </p:cNvPicPr>
-          <p:nvPr/>
-        </p:nvPicPr>
-        <p:blipFill>
-          <a:blip r:embed="rId8"/>
-          <a:stretch>
-            <a:fillRect/>
-          </a:stretch>
-        </p:blipFill>
-        <p:spPr>
-          <a:xfrm>
-            <a:off x="9162059" y="4846320"/>
-            <a:ext cx="365760" cy="365760"/>
-          </a:xfrm>
-          <a:prstGeom prst="rect">
-            <a:avLst/>
-          </a:prstGeom>
-        </p:spPr>
-      </p:pic>
-      <p:sp>
-        <p:nvSpPr>
-          <p:cNvPr id="33" name="TextBox 32"/>
+              <a:t>Observabilité à valider.</a:t>
+            </a:r>
+          </a:p>
+        </p:txBody>
+      </p:sp>
+      <p:sp>
+        <p:nvSpPr>
+          <p:cNvPr id="31" name="TextBox 30"/>
           <p:cNvSpPr txBox="1"/>
           <p:nvPr/>
         </p:nvSpPr>
         <p:spPr>
           <a:xfrm>
-            <a:off x="9637547" y="4828032"/>
-            <a:ext cx="1630603" cy="457200"/>
-          </a:xfrm>
-          <a:prstGeom prst="rect">
-            <a:avLst/>
-          </a:prstGeom>
-          <a:noFill/>
-        </p:spPr>
-        <p:txBody>
-          <a:bodyPr wrap="square" lIns="0" rIns="0" tIns="0" bIns="0" anchor="ctr">
-            <a:spAutoFit/>
-          </a:bodyPr>
-          <a:lstStyle/>
-          <a:p>
-            <a:pPr algn="l">
-              <a:lnSpc>
-                <a:spcPct val="98000"/>
-              </a:lnSpc>
-              <a:spcBef>
-                <a:spcPts val="0"/>
-              </a:spcBef>
-              <a:spcAft>
-                <a:spcPts val="0"/>
-              </a:spcAft>
-            </a:pPr>
-            <a:r>
-              <a:rPr sz="1100" b="1" i="0">
-                <a:solidFill>
-                  <a:srgbClr val="B85C00"/>
-                </a:solidFill>
-                <a:latin typeface="Marianne"/>
-              </a:rPr>
-              <a:t>Rapport perf / prix</a:t>
-            </a:r>
-          </a:p>
-        </p:txBody>
-      </p:sp>
-      <p:sp>
-        <p:nvSpPr>
-          <p:cNvPr id="34" name="TextBox 33"/>
-          <p:cNvSpPr txBox="1"/>
-          <p:nvPr/>
-        </p:nvSpPr>
-        <p:spPr>
-          <a:xfrm>
-            <a:off x="9162059" y="5321808"/>
-            <a:ext cx="2069515" cy="585215"/>
+            <a:off x="777240" y="6071616"/>
+            <a:ext cx="10637215" cy="457200"/>
           </a:xfrm>
           <a:prstGeom prst="rect">
             <a:avLst/>
@@ -12641,108 +12568,32 @@
           <a:p>
             <a:pPr algn="l">
               <a:lnSpc>
-                <a:spcPct val="100000"/>
-              </a:lnSpc>
-              <a:spcBef>
-                <a:spcPts val="0"/>
-              </a:spcBef>
-              <a:spcAft>
-                <a:spcPts val="0"/>
-              </a:spcAft>
-            </a:pPr>
-            <a:r>
-              <a:rPr sz="1200" b="1" i="0">
-                <a:solidFill>
-                  <a:srgbClr val="161616"/>
-                </a:solidFill>
-                <a:latin typeface="Marianne"/>
-              </a:rPr>
-              <a:t>DeepSeek V4 Pro · OR</a:t>
-            </a:r>
-          </a:p>
-          <a:p>
-            <a:pPr algn="l">
-              <a:lnSpc>
-                <a:spcPct val="106000"/>
-              </a:lnSpc>
-              <a:spcBef>
-                <a:spcPts val="300"/>
-              </a:spcBef>
-              <a:spcAft>
-                <a:spcPts val="0"/>
-              </a:spcAft>
-            </a:pPr>
-            <a:r>
-              <a:rPr sz="950" b="0" i="0">
-                <a:solidFill>
-                  <a:srgbClr val="3A3A3A"/>
-                </a:solidFill>
-                <a:latin typeface="Marianne"/>
-              </a:rPr>
-              <a:t>80,6 % pour ~0,9 $ / 1M. </a:t>
-            </a:r>
-            <a:r>
-              <a:rPr sz="950" b="0" i="1">
+                <a:spcPct val="108000"/>
+              </a:lnSpc>
+              <a:spcBef>
+                <a:spcPts val="0"/>
+              </a:spcBef>
+              <a:spcAft>
+                <a:spcPts val="0"/>
+              </a:spcAft>
+            </a:pPr>
+            <a:r>
+              <a:rPr sz="1000" b="1" i="0">
                 <a:solidFill>
                   <a:srgbClr val="6A6A6A"/>
                 </a:solidFill>
                 <a:latin typeface="Marianne"/>
               </a:rPr>
-              <a:t>Éditeur CN, routeur US.</a:t>
-            </a:r>
-          </a:p>
-        </p:txBody>
-      </p:sp>
-      <p:sp>
-        <p:nvSpPr>
-          <p:cNvPr id="35" name="TextBox 34"/>
-          <p:cNvSpPr txBox="1"/>
-          <p:nvPr/>
-        </p:nvSpPr>
-        <p:spPr>
-          <a:xfrm>
-            <a:off x="777240" y="6071616"/>
-            <a:ext cx="10637215" cy="457200"/>
-          </a:xfrm>
-          <a:prstGeom prst="rect">
-            <a:avLst/>
-          </a:prstGeom>
-          <a:noFill/>
-        </p:spPr>
-        <p:txBody>
-          <a:bodyPr wrap="square" lIns="0" rIns="0" tIns="0" bIns="0" anchor="t">
-            <a:spAutoFit/>
-          </a:bodyPr>
-          <a:lstStyle/>
-          <a:p>
-            <a:pPr algn="l">
-              <a:lnSpc>
-                <a:spcPct val="108000"/>
-              </a:lnSpc>
-              <a:spcBef>
-                <a:spcPts val="0"/>
-              </a:spcBef>
-              <a:spcAft>
-                <a:spcPts val="0"/>
-              </a:spcAft>
-            </a:pPr>
-            <a:r>
-              <a:rPr sz="1000" b="1" i="0">
+              <a:t>À noter : </a:t>
+            </a:r>
+            <a:r>
+              <a:rPr sz="1000" b="0" i="1">
                 <a:solidFill>
                   <a:srgbClr val="6A6A6A"/>
                 </a:solidFill>
                 <a:latin typeface="Marianne"/>
               </a:rPr>
-              <a:t>À noter : </a:t>
-            </a:r>
-            <a:r>
-              <a:rPr sz="1000" b="0" i="1">
-                <a:solidFill>
-                  <a:srgbClr val="6A6A6A"/>
-                </a:solidFill>
-                <a:latin typeface="Marianne"/>
-              </a:rPr>
-              <a:t>OpenCode + Albert documenté par la DINUM (guides.ia.numerique.gouv.fr) · catalogue Albert à confirmer via /v1/models · DeepSeek V4 = tarif preview · Kimi K3 = score annoncé éditeur, capacité OpenRouter limitée · Fable 5 sur Bedrock = data sharing à activer + rétention 30 j · tarifs OpenRouter = catalogue (caching −60/80 %).</a:t>
+              <a:t>OpenCode + Albert documenté par la DINUM (guides.ia.numerique.gouv.fr) · catalogue Albert à confirmer via /v1/models · Scaleway = observabilité à valider · Kimi K3 = capacité OpenRouter limitée · modèles Anthropic sur Bedrock = data sharing à activer + rétention 30 j · tarifs OpenRouter = catalogue (caching −60/80 %).</a:t>
             </a:r>
           </a:p>
         </p:txBody>

--- a/Livrables/benchHarness/Bench_Coding-Agentique.pptx
+++ b/Livrables/benchHarness/Bench_Coding-Agentique.pptx
@@ -504,7 +504,7 @@
           <a:lstStyle/>
           <a:p>
             <a:r>
-              <a:t>Matrice comparative des 8 stacks de coding agentique. Chiffres verifies (sources primaires, 10/07, 23/07 et 02/09/2026). MAJ DU 02/09/2026 : (a) SORTIS du perimetre : Claude Code / Opus 4.8 via Anthropic direct, OpenCode / DeepSeek V4 Pro via OpenRouter, et Vibe / Mistral Medium 3.5 (retrait demande par Selim ; Mistral reste une voie souveraine dans la doctrine fournisseurs, mais la stack sort du bench). (b) AJOUTS Bedrock : Opus 5 (5$/25$ par 1M - moitie du prix de Fable 5 ; 97,0% SWE-bench Verified mesure par vals.ai le 01/09/2026, harness minimal bash-only - Anthropic ne publie pas de score SWE-bench pour Opus 5, qui ressort ainsi DEVANT Fable 5 et son 95,0% officiel : scaffolds differents, a lire avec prudence) et Sonnet 5 (2$/10$ par 1M ; 82,1% SWE-bench Verified rapporte au lancement, 30/06/2026 - presse specialisee, non publie en clair par Anthropic). (c) AJOUTS Scaleway (cloud FR, hebergement UE - souverain et conforme RGPD ; observabilite a valider) : DeepSeek V4 Flash 0731 a 0,40 EUR / 0,80 EUR par 1M (tarif communique par le client). ATTENTION PERF 0731 : DeepSeek ne publie PAS de SWE-bench Verified pour ce checkpoint (verifie le 02/09/2026 : model card HF et blogs n'en donnent aucun ; le 79,0% recopie par les agregateurs benchlm/zenmux est celui du checkpoint d'avril, a priori celui servi par Albert - checkpoint a confirmer aupres de la DINUM). REFONTE PERFORMANCE (02/09/2026, regle fixee par Selim) : trois mesures au lieu d'une. (1) DeepSWE v1.1 en PRINCIPAL - leaderboard officiel Datacurve, harness fixe mini-swe-agent, donc score du modele seul, independant du harness Claude Code / OpenCode / Vibe. Valeurs : Opus 5 74,0 (+/-4) ; Fable 5 70,0 ; Kimi K3 ~69 ; DeepSeek 0731 54,4 (auto-rapporte) ; GLM 5.2 44,0 ; DeepSeek preview 7,3 auto-rapporte (~8 mesure en independant) ; Sonnet 5 : non publie. (2) Terminal-Bench 2.1 en agentique : Opus 5 89,1 ; Kimi 88,3 (auto-rapporte) ; Sonnet 5 85,2 ; 0731 82,7 (auto-rapporte) ; GLM 81,0 (auto-rapporte) ; preview 61,8 (auto-rapporte) ; Fable 5 : non publie. (3) SWE-bench Verified conserve en simple BASELINE grisee : sature en haut de tableau, chiffres majoritairement editeurs aux harness heterogenes. REGLE ABSOLUE : aucun chiffre estime ou extrapole ; toute case sans donnee = 'non publie' (l'estimation ~85% du 0731 publiee plus tot le 02/09 est retiree). Marqueur v = auto-rapporte par l'editeur, sans reproduction independante. Contre-verification OpenRouter (02/09/2026, donnees embarquees de la page deepseek-v4-flash-0731) : OpenRouter n'evalue pas SWE-bench - ses propres runs donnent GPQA Diamond 87,1% (mediane, 36 runs) et tau-bench airline 74,7% (34 runs) ; son onglet Benchmarks vient d'Artificial Analysis, dont l'index v4.1.1 (9 evals : Terminal-Bench v2.1, SciCode, GPQA...) n'inclut pas non plus SWE-bench Verified. GLM 5.2 bascule d'OpenRouter vers Scaleway a 1,80 EUR / 5,50 EUR par 1M (tarif communique par le client), meme perf estimee ~78%. (d) Kimi K3 sur OpenRouter : tarif courant 2,55$/12,75$ par 1M (openrouter.ai/moonshotai/kimi-k3, 02/09/2026) ; le score 93,4% est desormais liste par vals.ai (mesure independante du 01/09/2026), il n'est plus seulement declaratif. (e) Prix affiches en entree ET en sortie sur tous les supports. HISTORIQUE 23/07/2026 : (a) Claude Code / Fable 5 via Bedrock : 95,0% SWE-bench Verified (llm-stats.com), 10$/50$ par 1M (2x Opus 4.8), disponible sur Bedrock (profil global.anthropic.claude-fable-5, docs.aws.amazon.com) - contraintes : activation d'un parametre de data sharing + retention 30 jours obligatoire. (b) Vibe / Mistral Medium 3.5 : Vibe = agent de codage CLI + VS Code de Mistral (mai 2026) ; Medium 3.5 = 77,6% SWE-bench Verified, 1,50$/7,50$ par 1M, poids ouverts licence MIT modifiee (mistral.ai/news/vibe-remote-agents-mistral-medium-3-5) ; plans Le Chat Pro 14,99$/Team 24,99$/mois ; deploiement SecNumCloud possible via Outscale (offre enterprise). (c) OpenCode / Kimi K3 via OpenRouter : 3$/15$ par 1M (openrouter.ai/moonshotai/kimi-k3), 93,4% SWE-bench Verified ANNONCE par Moonshot - des evaluations independantes citent des scores bien plus bas selon le harness ; capacite amont limitee (erreurs 429 frequentes). CORRECTION SOUVERAINETE : Bedrock n'est PAS souverain au sens de la CNIL - AWS reste soumis au CLOUD Act quelle que soit la region ; pastille rouge (avant : orange 'partielle'). Seuls Albert (SecNumCloud, Etat FR) et Mistral (editeur FR, SecNumCloud en option via Outscale) tiennent la souverainete. NOUVEL AXE CONFORMITE (RGPD/donnees) - distinct de la souverainete : bons = Mistral (editeur FR, RGPD), Albert (cadre Etat) et modeles Anthropic via Bedrock (region UE ex. Paris, DPA AWS) ; Anthropic direct = partielle (transfert hors UE) ; OpenRouter = insuffisante (routage via intermediaire US, sans garanties UE). RAPPEL DONNEES INITIALES (10/07/2026) : PRIX/1M tokens : Opus 4.8 = 5$ input / 25$ output (platform.claude.com/docs/.../pricing), en sus des sieges Claude Code (Pro 17$, Team 20-25$, Premium 100-125$/mois - claude.com/pricing). DeepSeek V4 Pro = 0,435$/0,87$ (openrouter.ai/deepseek/deepseek-v4-pro + api-docs.deepseek.com) MAIS tarif preview, doublement 'peak' annonce mi-juillet 2026 (technode.com 30/06/2026). GLM 5.2 = tarif liste Z.ai 1,40$/4,40$ (docs.z.ai), OpenRouter varie 0,93-3,00$ input selon fournisseur route (le 0,77$ lu en tete etait un artefact d'extraction, non confirme). Albert = GRATUIT pour agents de l'Etat, pas de facturation token, acces regule par quotas RPM/RPD/TPM (ia.numerique.gouv.fr). PERF SWE-bench Verified : Opus 4.8 88,6% (vellum.ai) ; DeepSeek V4 Pro 80,6% (morphllm) ; DeepSeek V4 Flash 79% ; Mistral Medium 3.5 77,6% (mistral.ai) ; GLM 5.2 ~78% estime (SWE-bench Pro 62,1%, Terminal-Bench 81-83% - huggingface zai-org). SCENARIO ALBERT retenu pour le bench elargi : OpenCode branche sur Albert servant DeepSeek V4 Flash (~79%) - catalogue Albert a confirmer via /v1/models. SOUVERAINETE : Anthropic = editeur US (CLOUD Act) ; Z.ai (GLM) et DeepSeek = editeurs chinois, et via OpenRouter le routage passe par un intermediaire US ; Albert = Etat francais, heberge sur Outscale SecNumCloud. Nuance : les poids GLM et DeepSeek sont ouverts (licence MIT), donc auto-hebergeables sur infra souveraine - c'est ce que fait Albert. FAISABILITE : Claude Code et OpenCode tournent tous deux sur Mac/Linux/Windows (WSL conseille sous Windows) ; le frein sur postes Windows internes est surtout la politique (Copilot only) et le proxy, pas la technique.</a:t>
+              <a:t>Matrice comparative des 7 stacks de coding agentique. Chiffres verifies (sources primaires, 10/07, 23/07 et 02/09/2026). MAJ DU 02/09/2026 : (a) SORTIS du perimetre : Claude Code / Opus 4.8 via Anthropic direct, OpenCode / DeepSeek V4 Pro via OpenRouter, et Vibe / Mistral Medium 3.5 (retrait demande par Selim ; Mistral reste une voie souveraine dans la doctrine fournisseurs, mais la stack sort du bench). (b) AJOUTS Bedrock : Opus 5 (5$/25$ par 1M - moitie du prix de Fable 5 ; SWE-bench Verified : 96,0% annonce Anthropic, 97,0% mesure vals.ai du 01/09/2026, harness minimal bash-only) et Sonnet 5 (2$/10$ par 1M). (c) AJOUTS Scaleway (cloud FR, hebergement UE - souverain et conforme RGPD ; observabilite a valider) : DeepSeek V4 Flash 0731 a 0,40 EUR / 0,80 EUR par 1M (tarif communique par le client). ATTENTION PERF 0731 : DeepSeek ne publie PAS de SWE-bench Verified pour ce checkpoint (verifie le 02/09/2026 : model card HF et blogs n'en donnent aucun ; le 79,0% recopie par les agregateurs benchlm/zenmux est celui du checkpoint d'avril, a priori celui servi par Albert - checkpoint a confirmer aupres de la DINUM). REFONTE PERFORMANCE (02/09/2026, regle fixee par Selim) : trois mesures au lieu d'une. (1) DeepSWE v1.1 en PRINCIPAL - leaderboard officiel Datacurve, harness fixe mini-swe-agent, donc score du modele seul, independant du harness. Valeurs Datacurve : Opus 5 74,0 (+/-4) ; Fable 5 70,0 (+/-4) ; Kimi K3 ~69 ; Sonnet 5 54 (+/-4, entree claude-sonnet-5 max) ; DeepSeek 0731 : 53 sur Datacurve, 54,4 auto-rapporte ; GLM 5.2 44,0 ; DeepSeek preview absent du leaderboard, 7,3 auto-rapporte (la mention ~8% independant, sans source retrouvee, est retiree). (2) Terminal-Bench 2.1 en agentique : Opus 5 89,1 = mesure Artificial Analysis (harnais Terminus 2, sandbox e2b, max effort), PAS un score officiel - Opus 5 est absent du leaderboard verifie (meilleure entree Anthropic : Opus 4.8 a 78,9) et Anthropic n'a pas publie de TB pour Opus 5. Kimi 88,3 auto-rapporte (vals.ai : 80,9). Fable 5 83,8 +/-1,2 : entree officielle Fable 5 + Claude Code (xhigh) du leaderboard des mainteneurs (80,4 avec Terminus 2). 0731 82,7 (auto-rapporte). GLM 81,0 (auto-rapporte). Sonnet 5 80,4 = annonce Anthropic (74,6 au leaderboard officiel, Claude Code high ; le 85,2 affiche precedemment etait son score SWE-bench Verified glisse dans la mauvaise colonne). Preview 61,8 (auto-rapporte). (3) SWE-bench Verified conserve en simple BASELINE grisee : sature en haut de tableau, chiffres majoritairement editeurs aux harness heterogenes. Corrections SWE-V du fact-check du 02/09/2026 (seconde session Claude, validee par Selim) : Sonnet 5 85,2 = agregat llm-stats (le 82,1 provenait d'articles speculatifs de fevrier 2026 annoncant un lancement qui a eu lieu le 30 juin : ecarte) ; Kimi 93,4 = mesure vals.ai, PAS un chiffre editeur (Moonshot n'a publie aucun SWE-bench Verified pour K3) ; GLM : retire (aucune source pour ~78 ; Z.ai publie SWE-bench Pro 62,1, pas Verified) ; preview 73,7 = rapport technique DeepSeek (le 79,0 est un agregat llm-stats, aucun des deux n'est re-mesure) ; Fable 5 95,0 et Opus 5 96,0 = annonces editeur. Marquage refondu : sans marque = officiel ; v = auto-rapporte editeur ; * = mesure independante (vals.ai, Artificial Analysis) ; llm-stats = agregat. REGLE ABSOLUE : aucun chiffre estime ou extrapole ; toute case sans donnee = 'non publie' (l'estimation ~85% du 0731 publiee plus tot le 02/09 est retiree). Marqueur v = auto-rapporte par l'editeur, sans reproduction independante. Contre-verification OpenRouter (02/09/2026, donnees embarquees de la page deepseek-v4-flash-0731) : OpenRouter n'evalue pas SWE-bench - ses propres runs donnent GPQA Diamond 87,1% (mediane, 36 runs) et tau-bench airline 74,7% (34 runs) ; son onglet Benchmarks vient d'Artificial Analysis, dont l'index v4.1.1 (9 evals : Terminal-Bench v2.1, SciCode, GPQA...) n'inclut pas non plus SWE-bench Verified. GLM 5.2 bascule d'OpenRouter vers Scaleway a 1,80 EUR / 5,50 EUR par 1M (tarif communique par le client), DeepSWE 44,0 (Datacurve). (d) Kimi K3 sur OpenRouter : tarif courant 2,55$/12,75$ par 1M (openrouter.ai/moonshotai/kimi-k3, 02/09/2026) ; le score 93,4% est desormais liste par vals.ai (mesure independante du 01/09/2026), il n'est plus seulement declaratif. (e) Prix affiches en entree ET en sortie sur tous les supports. HISTORIQUE 23/07/2026 : (a) Claude Code / Fable 5 via Bedrock : 95,0% SWE-bench Verified (llm-stats.com), 10$/50$ par 1M (2x Opus 4.8), disponible sur Bedrock (profil global.anthropic.claude-fable-5, docs.aws.amazon.com) - contraintes : activation d'un parametre de data sharing + retention 30 jours obligatoire. (b) Vibe / Mistral Medium 3.5 : Vibe = agent de codage CLI + VS Code de Mistral (mai 2026) ; Medium 3.5 = 77,6% SWE-bench Verified, 1,50$/7,50$ par 1M, poids ouverts licence MIT modifiee (mistral.ai/news/vibe-remote-agents-mistral-medium-3-5) ; plans Le Chat Pro 14,99$/Team 24,99$/mois ; deploiement SecNumCloud possible via Outscale (offre enterprise). (c) OpenCode / Kimi K3 via OpenRouter : 3$/15$ par 1M (openrouter.ai/moonshotai/kimi-k3), 93,4% SWE-bench Verified ANNONCE par Moonshot - des evaluations independantes citent des scores bien plus bas selon le harness ; capacite amont limitee (erreurs 429 frequentes). CORRECTION SOUVERAINETE : Bedrock n'est PAS souverain au sens de la CNIL - AWS reste soumis au CLOUD Act quelle que soit la region ; pastille rouge (avant : orange 'partielle'). Seuls Albert (SecNumCloud, Etat FR) et Mistral (editeur FR, SecNumCloud en option via Outscale) tiennent la souverainete. NOUVEL AXE CONFORMITE (RGPD/donnees) - distinct de la souverainete : bons = Mistral (editeur FR, RGPD), Albert (cadre Etat) et modeles Anthropic via Bedrock (region UE ex. Paris, DPA AWS) ; Anthropic direct = partielle (transfert hors UE) ; OpenRouter = insuffisante (routage via intermediaire US, sans garanties UE). RAPPEL DONNEES INITIALES (10/07/2026) : PRIX/1M tokens : Opus 4.8 = 5$ input / 25$ output (platform.claude.com/docs/.../pricing), en sus des sieges Claude Code (Pro 17$, Team 20-25$, Premium 100-125$/mois - claude.com/pricing). DeepSeek V4 Pro = 0,435$/0,87$ (openrouter.ai/deepseek/deepseek-v4-pro + api-docs.deepseek.com) MAIS tarif preview, doublement 'peak' annonce mi-juillet 2026 (technode.com 30/06/2026). GLM 5.2 = tarif liste Z.ai 1,40$/4,40$ (docs.z.ai), OpenRouter varie 0,93-3,00$ input selon fournisseur route (le 0,77$ lu en tete etait un artefact d'extraction, non confirme). Albert = GRATUIT pour agents de l'Etat, pas de facturation token, acces regule par quotas RPM/RPD/TPM (ia.numerique.gouv.fr). PERF SWE-bench Verified : Opus 4.8 88,6% (vellum.ai) ; DeepSeek V4 Pro 80,6% (morphllm) ; DeepSeek V4 Flash 79% ; Mistral Medium 3.5 77,6% (mistral.ai) ; GLM 5.2 ~78% estime (SWE-bench Pro 62,1%, Terminal-Bench 81-83% - huggingface zai-org). SCENARIO ALBERT retenu pour le bench elargi : OpenCode branche sur Albert servant DeepSeek V4 Flash (~79%) - catalogue Albert a confirmer via /v1/models. SOUVERAINETE : Anthropic = editeur US (CLOUD Act) ; Z.ai (GLM) et DeepSeek = editeurs chinois, et via OpenRouter le routage passe par un intermediaire US ; Albert = Etat francais, heberge sur Outscale SecNumCloud. Nuance : les poids GLM et DeepSeek sont ouverts (licence MIT), donc auto-hebergeables sur infra souveraine - c'est ce que fait Albert. FAISABILITE : Claude Code et OpenCode tournent tous deux sur Mac/Linux/Windows (WSL conseille sous Windows) ; le frein sur postes Windows internes est surtout la politique (Copilot only) et le proxy, pas la technique.</a:t>
             </a:r>
           </a:p>
         </p:txBody>
@@ -644,7 +644,7 @@
           <a:lstStyle/>
           <a:p>
             <a:r>
-              <a:t>Deux cas d'usage a distinguer. (1) CODE AGENTIQUE SUR POSTE : Claude Code se consomme via un SIEGE d'abonnement (Pro 17-20$, Team 20-25$, Premium 100-125$/dev/mois) ; les stacks OpenCode se consomment via une cle - OpenRouter (paiement au token) ou Albert (gratuit, cle reservee aux agents de l'Etat). (2) BOTS CI/CD : pas de siege, tout le monde paie au token via une cle API programmatique. Claude via Bedrock : Opus 5 = 5$/25$ par 1M, Sonnet 5 = 2$/10$, Fable 5 = 10$/50$ (headless via IAM). Scaleway : DeepSeek V4 Flash 0731 = 0,40/0,80 EUR par 1M, GLM 5.2 = 1,80/5,50 EUR (API OpenAI-compatible, cle Scaleway). Albert est gratuit mais ses quotas (10-50 requetes/min en experimentation) peuvent brider un usage CI/CD intensif - a augmenter sur demande. RECOMMANDATION selon priorite (MAJ 02/09/2026) : performance -&gt; Claude Code/Opus 5 via Bedrock (DeepSWE 74,0 +/-4, Terminal-Bench 89,1, conforme RGPD en region UE mais non souverain - CLOUD Act) ; souverainete/cout -&gt; Albert ; rapport perf-prix -&gt; DeepSeek V4 Flash 0731 via Scaleway (DeepSWE 54,4 auto-rapporte, TB 82,7 auto-rapporte, pour 0,40/0,80 EUR par 1M, souverain, observabilite a valider). Kimi K3 via OpenRouter (2,55$/12,75$) : DeepSWE ~69, TB 88,3 auto-rapporte, SWE-bench 93,4 auto-rapporte, mais la capacite OpenRouter est limitee (429). RESERVES : 'Open Claw' n'a pas ete confirme comme outil de coding (le seul depot de ce nom est un assistant de messagerie) - candidats reels : OpenCode, Crush (Charmbracelet), Claude Code Router. Le catalogue Albert observe sur les docs publiques ne liste pas DeepSeek V4 Flash ni Mistral Medium 3.5 (mais Mistral-Small, Ministral-3-8B, gpt-oss-120b, Qwen3-Coder) - a confirmer via un appel authentifie /v1/models sur ta cle. Tarifs OpenRouter = prix catalogue variables selon le fournisseur route ; le prompt caching peut baisser le cout reel de 60 a 80%. Le nouveau tokenizer d'Opus 4.8 produit ~30% de tokens en plus pour un meme texte, ce qui renforce le cout effectif par requete.</a:t>
+              <a:t>Deux cas d'usage a distinguer. (1) CODE AGENTIQUE SUR POSTE : Claude Code se consomme via un SIEGE d'abonnement (Pro 17-20$, Team 20-25$, Premium 100-125$/dev/mois) ; les stacks OpenCode se consomment via une cle - OpenRouter (paiement au token) ou Albert (gratuit, cle reservee aux agents de l'Etat). (2) BOTS CI/CD : pas de siege, tout le monde paie au token via une cle API programmatique. Claude via Bedrock : Opus 5 = 5$/25$ par 1M, Sonnet 5 = 2$/10$, Fable 5 = 10$/50$ (headless via IAM). Scaleway : DeepSeek V4 Flash 0731 = 0,40/0,80 EUR par 1M, GLM 5.2 = 1,80/5,50 EUR (API OpenAI-compatible, cle Scaleway). Albert est gratuit mais ses quotas (10-50 requetes/min en experimentation) peuvent brider un usage CI/CD intensif - a augmenter sur demande. RECOMMANDATION selon priorite (MAJ 02/09/2026) : performance -&gt; Claude Code/Opus 5 via Bedrock (DeepSWE 74,0 +/-4, Terminal-Bench 89,1 mesure Artificial Analysis, conforme RGPD en region UE mais non souverain - CLOUD Act) ; souverainete/cout -&gt; Albert ; rapport perf-prix -&gt; DeepSeek V4 Flash 0731 via Scaleway (DeepSWE 53 sur Datacurve / 54,4 auto-rapporte, TB 82,7 auto-rapporte, pour 0,40/0,80 EUR par 1M, souverain, observabilite a valider). Kimi K3 via OpenRouter (2,55$/12,75$) : DeepSWE ~69, TB 88,3 auto-rapporte (vals.ai 80,9), SWE-bench 93,4 mesure vals.ai, mais la capacite OpenRouter est limitee (429). RESERVES : 'Open Claw' n'a pas ete confirme comme outil de coding (le seul depot de ce nom est un assistant de messagerie) - candidats reels : OpenCode, Crush (Charmbracelet), Claude Code Router. Le catalogue Albert observe sur les docs publiques ne liste pas DeepSeek V4 Flash ni Mistral Medium 3.5 (mais Mistral-Small, Ministral-3-8B, gpt-oss-120b, Qwen3-Coder) - a confirmer via un appel authentifie /v1/models sur ta cle. Tarifs OpenRouter = prix catalogue variables selon le fournisseur route ; le prompt caching peut baisser le cout reel de 60 a 80%. Le nouveau tokenizer d'Opus 4.8 produit ~30% de tokens en plus pour un meme texte, ce qui renforce le cout effectif par requete.</a:t>
             </a:r>
           </a:p>
         </p:txBody>
@@ -6138,7 +6138,7 @@
                 </a:solidFill>
                 <a:latin typeface="Marianne"/>
               </a:rPr>
-              <a:t>TB 89,1 · SV 97,0*</a:t>
+              <a:t>TB 89,1* · SV 96ᵛ/97*</a:t>
             </a:r>
           </a:p>
         </p:txBody>
@@ -6237,7 +6237,7 @@
                 </a:solidFill>
                 <a:latin typeface="Marianne"/>
               </a:rPr>
-              <a:t>70,0 %</a:t>
+              <a:t>70,0 % (±4)</a:t>
             </a:r>
           </a:p>
           <a:p>
@@ -6259,7 +6259,7 @@
                 </a:solidFill>
                 <a:latin typeface="Marianne"/>
               </a:rPr>
-              <a:t>TB n.p. · SV 95,0</a:t>
+              <a:t>TB 83,8 · SV 95,0ᵛ</a:t>
             </a:r>
           </a:p>
         </p:txBody>
@@ -6358,7 +6358,7 @@
                 </a:solidFill>
                 <a:latin typeface="Marianne"/>
               </a:rPr>
-              <a:t>non publié</a:t>
+              <a:t>54 % (±4)</a:t>
             </a:r>
           </a:p>
           <a:p>
@@ -6380,7 +6380,7 @@
                 </a:solidFill>
                 <a:latin typeface="Marianne"/>
               </a:rPr>
-              <a:t>TB 85,2 · SV 82,1</a:t>
+              <a:t>TB 80,4ᵛ/74,6 · SV 85,2</a:t>
             </a:r>
           </a:p>
         </p:txBody>
@@ -6501,7 +6501,7 @@
                 </a:solidFill>
                 <a:latin typeface="Marianne"/>
               </a:rPr>
-              <a:t>TB 61,8ᵛ · SV 79,0</a:t>
+              <a:t>TB 61,8ᵛ · SV 73,7ᵛ</a:t>
             </a:r>
           </a:p>
         </p:txBody>
@@ -6600,7 +6600,7 @@
                 </a:solidFill>
                 <a:latin typeface="Marianne"/>
               </a:rPr>
-              <a:t>54,4 %ᵛ</a:t>
+              <a:t>53 % · 54,4ᵛ</a:t>
             </a:r>
           </a:p>
           <a:p>
@@ -6743,7 +6743,7 @@
                 </a:solidFill>
                 <a:latin typeface="Marianne"/>
               </a:rPr>
-              <a:t>TB 81,0ᵛ · SV ≈78</a:t>
+              <a:t>TB 81,0ᵛ · SV n.p.</a:t>
             </a:r>
           </a:p>
         </p:txBody>
@@ -6864,7 +6864,7 @@
                 </a:solidFill>
                 <a:latin typeface="Marianne"/>
               </a:rPr>
-              <a:t>TB 88,3ᵛ · SV 93,4ᵛ</a:t>
+              <a:t>TB 88,3ᵛ · SV 93,4*</a:t>
             </a:r>
           </a:p>
         </p:txBody>
@@ -9915,7 +9915,7 @@
                 </a:solidFill>
                 <a:latin typeface="Marianne"/>
               </a:rPr>
-              <a:t>        DeepSWE v1.1 = modèle seul, mini-swe-agent · TB Terminal-Bench 2.1 · SV SWE-bench V. (baseline) · ᵛ auto-rapporté · * vals.ai.</a:t>
+              <a:t>        DeepSWE v1.1 = modèle seul · TB Terminal-Bench 2.1 · SV SWE-bench V. · sans marque : officiel · ᵛ éditeur · * mesure indép.</a:t>
             </a:r>
           </a:p>
         </p:txBody>
@@ -12144,7 +12144,7 @@
                 </a:solidFill>
                 <a:latin typeface="Marianne"/>
               </a:rPr>
-              <a:t>DeepSWE 74 % · TB 89,1 %. </a:t>
+              <a:t>DeepSWE 74 % · TB 89,1 % *. </a:t>
             </a:r>
             <a:r>
               <a:rPr sz="950" b="0" i="1">
@@ -12530,7 +12530,7 @@
                 </a:solidFill>
                 <a:latin typeface="Marianne"/>
               </a:rPr>
-              <a:t>DeepSWE 54,4ᵛ pour 0,40 / 0,80 € · souverain. </a:t>
+              <a:t>DeepSWE 53 % pour 0,40 / 0,80 € · souverain. </a:t>
             </a:r>
             <a:r>
               <a:rPr sz="950" b="0" i="1">

--- a/Livrables/benchHarness/Bench_Coding-Agentique.pptx
+++ b/Livrables/benchHarness/Bench_Coding-Agentique.pptx
@@ -504,7 +504,7 @@
           <a:lstStyle/>
           <a:p>
             <a:r>
-              <a:t>Matrice comparative des 7 stacks de coding agentique. Chiffres verifies (sources primaires, 10/07 et 23/07/2026). AJOUTS DU 23/07/2026 : (a) Claude Code / Fable 5 via Bedrock : 95,0% SWE-bench Verified (llm-stats.com), 10$/50$ par 1M (2x Opus 4.8), disponible sur Bedrock (profil global.anthropic.claude-fable-5, docs.aws.amazon.com) - contraintes : activation d'un parametre de data sharing + retention 30 jours obligatoire. (b) Vibe / Mistral Medium 3.5 : Vibe = agent de codage CLI + VS Code de Mistral (mai 2026) ; Medium 3.5 = 77,6% SWE-bench Verified, 1,50$/7,50$ par 1M, poids ouverts licence MIT modifiee (mistral.ai/news/vibe-remote-agents-mistral-medium-3-5) ; plans Le Chat Pro 14,99$/Team 24,99$/mois ; deploiement SecNumCloud possible via Outscale (offre enterprise). (c) OpenCode / Kimi K3 via OpenRouter : 3$/15$ par 1M (openrouter.ai/moonshotai/kimi-k3), 93,4% SWE-bench Verified ANNONCE par Moonshot - des evaluations independantes citent des scores bien plus bas selon le harness ; capacite amont limitee (erreurs 429 frequentes). CORRECTION SOUVERAINETE : Bedrock n'est PAS souverain au sens de la CNIL - AWS reste soumis au CLOUD Act quelle que soit la region ; pastille rouge (avant : orange 'partielle'). Seuls Albert (SecNumCloud, Etat FR) et Mistral (editeur FR, SecNumCloud en option via Outscale) tiennent la souverainete. NOUVEL AXE CONFORMITE (RGPD/donnees) - distinct de la souverainete : bons = Mistral (editeur FR, RGPD), Albert (cadre Etat) et modeles Anthropic via Bedrock (region UE ex. Paris, DPA AWS) ; Anthropic direct = partielle (transfert hors UE) ; OpenRouter = insuffisante (routage via intermediaire US, sans garanties UE). RAPPEL DONNEES INITIALES (10/07/2026) : PRIX/1M tokens : Opus 4.8 = 5$ input / 25$ output (platform.claude.com/docs/.../pricing), en sus des sieges Claude Code (Pro 17$, Team 20-25$, Premium 100-125$/mois - claude.com/pricing). DeepSeek V4 Pro = 0,435$/0,87$ (openrouter.ai/deepseek/deepseek-v4-pro + api-docs.deepseek.com) MAIS tarif preview, doublement 'peak' annonce mi-juillet 2026 (technode.com 30/06/2026). GLM 5.2 = tarif liste Z.ai 1,40$/4,40$ (docs.z.ai), OpenRouter varie 0,93-3,00$ input selon fournisseur route (le 0,77$ lu en tete etait un artefact d'extraction, non confirme). Albert = GRATUIT pour agents de l'Etat, pas de facturation token, acces regule par quotas RPM/RPD/TPM (ia.numerique.gouv.fr). PERF SWE-bench Verified : Opus 4.8 88,6% (vellum.ai) ; DeepSeek V4 Pro 80,6% (morphllm) ; DeepSeek V4 Flash 79% ; Mistral Medium 3.5 77,6% (mistral.ai) ; GLM 5.2 ~78% estime (SWE-bench Pro 62,1%, Terminal-Bench 81-83% - huggingface zai-org). SCENARIO ALBERT retenu pour le bench elargi : OpenCode branche sur Albert servant DeepSeek V4 Flash (~79%) - catalogue Albert a confirmer via /v1/models. SOUVERAINETE : Anthropic = editeur US (CLOUD Act) ; Z.ai (GLM) et DeepSeek = editeurs chinois, et via OpenRouter le routage passe par un intermediaire US ; Albert = Etat francais, heberge sur Outscale SecNumCloud. Nuance : les poids GLM et DeepSeek sont ouverts (licence MIT), donc auto-hebergeables sur infra souveraine - c'est ce que fait Albert. FAISABILITE : Claude Code et OpenCode tournent tous deux sur Mac/Linux/Windows (WSL conseille sous Windows) ; le frein sur postes Windows internes est surtout la politique (Copilot only) et le proxy, pas la technique.</a:t>
+              <a:t>Matrice comparative des 7 stacks de coding agentique. Chiffres verifies (sources primaires, 10/07, 23/07 et 02/09/2026). MAJ DU 02/09/2026 : (a) SORTIS du perimetre : Claude Code / Opus 4.8 via Anthropic direct, OpenCode / DeepSeek V4 Pro via OpenRouter, et Vibe / Mistral Medium 3.5 (retrait demande par Selim ; Mistral reste une voie souveraine dans la doctrine fournisseurs, mais la stack sort du bench). (b) AJOUTS Bedrock : Opus 5 (5$/25$ par 1M - moitie du prix de Fable 5 ; SWE-bench Verified : 96,0% annonce Anthropic, 97,0% mesure vals.ai du 01/09/2026, harness minimal bash-only) et Sonnet 5 (2$/10$ par 1M). (c) AJOUTS Scaleway (cloud FR, hebergement UE - souverain et conforme RGPD ; observabilite a valider) : DeepSeek V4 Flash 0731 a 0,40 EUR / 0,80 EUR par 1M (tarif communique par le client). ATTENTION PERF 0731 : DeepSeek ne publie PAS de SWE-bench Verified pour ce checkpoint (verifie le 02/09/2026 : model card HF et blogs n'en donnent aucun ; le 79,0% recopie par les agregateurs benchlm/zenmux est celui du checkpoint d'avril, a priori celui servi par Albert - checkpoint a confirmer aupres de la DINUM). REFONTE PERFORMANCE (02/09/2026, regle fixee par Selim) : trois mesures au lieu d'une. (1) DeepSWE v1.1 en PRINCIPAL - leaderboard officiel Datacurve, harness fixe mini-swe-agent, donc score du modele seul, independant du harness. Valeurs Datacurve : Opus 5 74,0 (+/-4) ; Fable 5 70,0 (+/-4) ; Kimi K3 ~69 ; Sonnet 5 54 (+/-4, entree claude-sonnet-5 max) ; DeepSeek 0731 : 53 sur Datacurve, 54,4 auto-rapporte ; GLM 5.2 44,0 ; DeepSeek preview absent du leaderboard, 7,3 auto-rapporte (la mention ~8% independant, sans source retrouvee, est retiree). (2) Terminal-Bench 2.1 en agentique : Opus 5 89,1 = mesure Artificial Analysis (harnais Terminus 2, sandbox e2b, max effort), PAS un score officiel - Opus 5 est absent du leaderboard verifie (meilleure entree Anthropic : Opus 4.8 a 78,9) et Anthropic n'a pas publie de TB pour Opus 5. Kimi 88,3 auto-rapporte (vals.ai : 80,9). Fable 5 83,8 +/-1,2 : entree officielle Fable 5 + Claude Code (xhigh) du leaderboard des mainteneurs (80,4 avec Terminus 2). 0731 82,7 (auto-rapporte). GLM 81,0 (auto-rapporte). Sonnet 5 80,4 = annonce Anthropic (74,6 au leaderboard officiel, Claude Code high ; le 85,2 affiche precedemment etait son score SWE-bench Verified glisse dans la mauvaise colonne). Preview 61,8 (auto-rapporte). (3) SWE-bench Verified conserve en simple BASELINE grisee : sature en haut de tableau, chiffres majoritairement editeurs aux harness heterogenes. Corrections SWE-V du fact-check du 02/09/2026 (seconde session Claude, validee par Selim) : Sonnet 5 85,2 = agregat llm-stats (le 82,1 provenait d'articles speculatifs de fevrier 2026 annoncant un lancement qui a eu lieu le 30 juin : ecarte) ; Kimi 93,4 = mesure vals.ai, PAS un chiffre editeur (Moonshot n'a publie aucun SWE-bench Verified pour K3) ; GLM : retire (aucune source pour ~78 ; Z.ai publie SWE-bench Pro 62,1, pas Verified) ; preview 73,7 = rapport technique DeepSeek (le 79,0 est un agregat llm-stats, aucun des deux n'est re-mesure) ; Fable 5 95,0 et Opus 5 96,0 = annonces editeur. Marquage refondu : sans marque = officiel ; v = auto-rapporte editeur ; * = mesure independante (vals.ai, Artificial Analysis) ; llm-stats = agregat. REGLE ABSOLUE : aucun chiffre estime ou extrapole ; toute case sans donnee = 'non publie' (l'estimation ~85% du 0731 publiee plus tot le 02/09 est retiree). Marqueur v = auto-rapporte par l'editeur, sans reproduction independante. Contre-verification OpenRouter (02/09/2026, donnees embarquees de la page deepseek-v4-flash-0731) : OpenRouter n'evalue pas SWE-bench - ses propres runs donnent GPQA Diamond 87,1% (mediane, 36 runs) et tau-bench airline 74,7% (34 runs) ; son onglet Benchmarks vient d'Artificial Analysis, dont l'index v4.1.1 (9 evals : Terminal-Bench v2.1, SciCode, GPQA...) n'inclut pas non plus SWE-bench Verified. GLM 5.2 bascule d'OpenRouter vers Scaleway a 1,80 EUR / 5,50 EUR par 1M (tarif communique par le client), DeepSWE 44,0 (Datacurve). (d) Kimi K3 sur OpenRouter : tarif courant 2,55$/12,75$ par 1M (openrouter.ai/moonshotai/kimi-k3, 02/09/2026) ; le score 93,4% est desormais liste par vals.ai (mesure independante du 01/09/2026), il n'est plus seulement declaratif. (e) Prix affiches en entree ET en sortie sur tous les supports. HISTORIQUE 23/07/2026 : (a) Claude Code / Fable 5 via Bedrock : 95,0% SWE-bench Verified (llm-stats.com), 10$/50$ par 1M (2x Opus 4.8), disponible sur Bedrock (profil global.anthropic.claude-fable-5, docs.aws.amazon.com) - contraintes : activation d'un parametre de data sharing + retention 30 jours obligatoire. (b) Vibe / Mistral Medium 3.5 : Vibe = agent de codage CLI + VS Code de Mistral (mai 2026) ; Medium 3.5 = 77,6% SWE-bench Verified, 1,50$/7,50$ par 1M, poids ouverts licence MIT modifiee (mistral.ai/news/vibe-remote-agents-mistral-medium-3-5) ; plans Le Chat Pro 14,99$/Team 24,99$/mois ; deploiement SecNumCloud possible via Outscale (offre enterprise). (c) OpenCode / Kimi K3 via OpenRouter : 3$/15$ par 1M (openrouter.ai/moonshotai/kimi-k3), 93,4% SWE-bench Verified ANNONCE par Moonshot - des evaluations independantes citent des scores bien plus bas selon le harness ; capacite amont limitee (erreurs 429 frequentes). CORRECTION SOUVERAINETE : Bedrock n'est PAS souverain au sens de la CNIL - AWS reste soumis au CLOUD Act quelle que soit la region ; pastille rouge (avant : orange 'partielle'). Seuls Albert (SecNumCloud, Etat FR) et Mistral (editeur FR, SecNumCloud en option via Outscale) tiennent la souverainete. NOUVEL AXE CONFORMITE (RGPD/donnees) - distinct de la souverainete : bons = Mistral (editeur FR, RGPD), Albert (cadre Etat) et modeles Anthropic via Bedrock (region UE ex. Paris, DPA AWS) ; Anthropic direct = partielle (transfert hors UE) ; OpenRouter = insuffisante (routage via intermediaire US, sans garanties UE). RAPPEL DONNEES INITIALES (10/07/2026) : PRIX/1M tokens : Opus 4.8 = 5$ input / 25$ output (platform.claude.com/docs/.../pricing), en sus des sieges Claude Code (Pro 17$, Team 20-25$, Premium 100-125$/mois - claude.com/pricing). DeepSeek V4 Pro = 0,435$/0,87$ (openrouter.ai/deepseek/deepseek-v4-pro + api-docs.deepseek.com) MAIS tarif preview, doublement 'peak' annonce mi-juillet 2026 (technode.com 30/06/2026). GLM 5.2 = tarif liste Z.ai 1,40$/4,40$ (docs.z.ai), OpenRouter varie 0,93-3,00$ input selon fournisseur route (le 0,77$ lu en tete etait un artefact d'extraction, non confirme). Albert = GRATUIT pour agents de l'Etat, pas de facturation token, acces regule par quotas RPM/RPD/TPM (ia.numerique.gouv.fr). PERF SWE-bench Verified : Opus 4.8 88,6% (vellum.ai) ; DeepSeek V4 Pro 80,6% (morphllm) ; DeepSeek V4 Flash 79% ; Mistral Medium 3.5 77,6% (mistral.ai) ; GLM 5.2 ~78% estime (SWE-bench Pro 62,1%, Terminal-Bench 81-83% - huggingface zai-org). SCENARIO ALBERT retenu pour le bench elargi : OpenCode branche sur Albert servant DeepSeek V4 Flash (~79%) - catalogue Albert a confirmer via /v1/models. SOUVERAINETE : Anthropic = editeur US (CLOUD Act) ; Z.ai (GLM) et DeepSeek = editeurs chinois, et via OpenRouter le routage passe par un intermediaire US ; Albert = Etat francais, heberge sur Outscale SecNumCloud. Nuance : les poids GLM et DeepSeek sont ouverts (licence MIT), donc auto-hebergeables sur infra souveraine - c'est ce que fait Albert. FAISABILITE : Claude Code et OpenCode tournent tous deux sur Mac/Linux/Windows (WSL conseille sous Windows) ; le frein sur postes Windows internes est surtout la politique (Copilot only) et le proxy, pas la technique.</a:t>
             </a:r>
           </a:p>
         </p:txBody>
@@ -574,7 +574,7 @@
           <a:lstStyle/>
           <a:p>
             <a:r>
-              <a:t>Souverainete (corrigee le 23/07/2026) : au sens de la CNIL, seules Albert (Etat FR, SecNumCloud) et Mistral (editeur FR, SecNumCloud en option) sont souveraines. Bedrock N'EST PAS souverain : AWS est soumis au CLOUD Act quelle que soit la region d'hebergement. En revanche, sur l'axe CONFORMITE (RGPD), Bedrock en region UE (Paris) avec DPA AWS reste une voie conforme pour les modeles Anthropic ; Anthropic direct = transfert hors UE ; OpenRouter = sans garanties UE. Albert s'utilise avec OpenCode : guide officiel DINUM guides.ia.numerique.gouv.fr/albert-api/guides/ide#agentic-coding-opencode. La problematique de deploiement : les prestataires externes peuvent rester sur leur abonnement Claude (forfait mensuel, consommation incluse, cout previsible). Les agents internes, eux, demarreront a environ 20 euros par siege et par mois (sieges Claude Enterprise via Bedrock), auxquels s'ajoute chaque token consomme, facture au prix du modele. Le cout interne suit donc l'usage, et l'usage agentique est intensif en tokens. Consequence : optimiser le cout au token (choix du modele, du harness, caching) devient le parametre cle pour les internes et pour la CI/CD - c'est ce que le bench compare, et ce que le bench elargi en conditions reelles validera (scenario Albert/DeepSeek via OpenCode face a Claude avec et sans abonnement).</a:t>
+              <a:t>Souverainete (corrigee le 23/07/2026, elargie le 02/09/2026) : au sens de la CNIL, Albert (Etat FR, SecNumCloud), Scaleway (cloud FR, hebergement UE) et Mistral (editeur FR, SecNumCloud en option) sont souveraines. Bedrock N'EST PAS souverain : AWS est soumis au CLOUD Act quelle que soit la region d'hebergement. En revanche, sur l'axe CONFORMITE (RGPD), Bedrock en region UE (Paris) avec DPA AWS reste une voie conforme pour les modeles Anthropic ; Anthropic direct = transfert hors UE ; OpenRouter = sans garanties UE. Albert s'utilise avec OpenCode : guide officiel DINUM guides.ia.numerique.gouv.fr/albert-api/guides/ide#agentic-coding-opencode. La problematique de deploiement : les prestataires externes peuvent rester sur leur abonnement Claude (forfait mensuel, consommation incluse, cout previsible). Les agents internes, eux, demarreront a environ 20 euros par siege et par mois (sieges Claude Enterprise via Bedrock), auxquels s'ajoute chaque token consomme, facture au prix du modele. Le cout interne suit donc l'usage, et l'usage agentique est intensif en tokens. Consequence : optimiser le cout au token (choix du modele, du harness, caching) devient le parametre cle pour les internes et pour la CI/CD - c'est ce que le bench compare, et ce que le bench elargi en conditions reelles validera (scenario Albert/DeepSeek via OpenCode face a Claude avec et sans abonnement).</a:t>
             </a:r>
           </a:p>
         </p:txBody>
@@ -644,7 +644,7 @@
           <a:lstStyle/>
           <a:p>
             <a:r>
-              <a:t>Deux cas d'usage a distinguer. (1) CODE AGENTIQUE SUR POSTE : Claude Code se consomme via un SIEGE d'abonnement (Pro 17-20$, Team 20-25$, Premium 100-125$/dev/mois) ; les stacks OpenCode se consomment via une cle - OpenRouter (paiement au token) ou Albert (gratuit, cle reservee aux agents de l'Etat). (2) BOTS CI/CD : pas de siege, tout le monde paie au token via une cle API programmatique. Claude API Opus 4.8 = 5$/25$ par 1M (headless via ANTHROPIC_API_KEY ; un token OAuth d'abonnement CLAUDE_CODE_OAUTH_TOKEN est aussi possible mais Anthropic recommande la cle API pour l'automation partagee). DeepSeek V4 Pro 0,44$/0,87$, GLM 5.2 ~1,40$/4,40$ via OpenRouter. Albert est gratuit mais ses quotas (10-50 requetes/min en experimentation) peuvent brider un usage CI/CD intensif - a augmenter sur demande. RECOMMANDATION selon priorite (MAJ 23/07/2026) : performance -&gt; Claude Code/Fable 5 via Bedrock (95,0% SWE-bench, 10$/50$ par 1M, conforme RGPD en region UE mais non souverain - CLOUD Act) ; souverainete/cout -&gt; Albert ; conformite UE avec editeur prive -&gt; Vibe/Mistral Medium 3.5 (77,6%, 1,50$/7,50$, plans Le Chat des 14,99$/mois) ; rapport perf-prix brut -&gt; DeepSeek V4 Pro via OpenRouter. Kimi K3 via OpenRouter (3$/15$) annonce 93,4% SWE-bench Verified mais le score n'est pas verifie independamment et la capacite OpenRouter est limitee (429). RESERVES : 'Open Claw' n'a pas ete confirme comme outil de coding (le seul depot de ce nom est un assistant de messagerie) - candidats reels : OpenCode, Crush (Charmbracelet), Claude Code Router. Le catalogue Albert observe sur les docs publiques ne liste pas DeepSeek V4 Flash ni Mistral Medium 3.5 (mais Mistral-Small, Ministral-3-8B, gpt-oss-120b, Qwen3-Coder) - a confirmer via un appel authentifie /v1/models sur ta cle. Tarifs OpenRouter = prix catalogue variables selon le fournisseur route ; le prompt caching peut baisser le cout reel de 60 a 80%. Le nouveau tokenizer d'Opus 4.8 produit ~30% de tokens en plus pour un meme texte, ce qui renforce le cout effectif par requete.</a:t>
+              <a:t>Deux cas d'usage a distinguer. (1) CODE AGENTIQUE SUR POSTE : Claude Code se consomme via un SIEGE d'abonnement (Pro 17-20$, Team 20-25$, Premium 100-125$/dev/mois) ; les stacks OpenCode se consomment via une cle - OpenRouter (paiement au token) ou Albert (gratuit, cle reservee aux agents de l'Etat). (2) BOTS CI/CD : pas de siege, tout le monde paie au token via une cle API programmatique. Claude via Bedrock : Opus 5 = 5$/25$ par 1M, Sonnet 5 = 2$/10$, Fable 5 = 10$/50$ (headless via IAM). Scaleway : DeepSeek V4 Flash 0731 = 0,40/0,80 EUR par 1M, GLM 5.2 = 1,80/5,50 EUR (API OpenAI-compatible, cle Scaleway). Albert est gratuit mais ses quotas (10-50 requetes/min en experimentation) peuvent brider un usage CI/CD intensif - a augmenter sur demande. RECOMMANDATION selon priorite (MAJ 02/09/2026) : performance -&gt; Claude Code/Opus 5 via Bedrock (DeepSWE 74,0 +/-4, Terminal-Bench 89,1 mesure Artificial Analysis, conforme RGPD en region UE mais non souverain - CLOUD Act) ; souverainete/cout -&gt; Albert ; rapport perf-prix -&gt; DeepSeek V4 Flash 0731 via Scaleway (DeepSWE 53 sur Datacurve / 54,4 auto-rapporte, TB 82,7 auto-rapporte, pour 0,40/0,80 EUR par 1M, souverain, observabilite a valider). Kimi K3 via OpenRouter (2,55$/12,75$) : DeepSWE ~69, TB 88,3 auto-rapporte (vals.ai 80,9), SWE-bench 93,4 mesure vals.ai, mais la capacite OpenRouter est limitee (429). RESERVES : 'Open Claw' n'a pas ete confirme comme outil de coding (le seul depot de ce nom est un assistant de messagerie) - candidats reels : OpenCode, Crush (Charmbracelet), Claude Code Router. Le catalogue Albert observe sur les docs publiques ne liste pas DeepSeek V4 Flash ni Mistral Medium 3.5 (mais Mistral-Small, Ministral-3-8B, gpt-oss-120b, Qwen3-Coder) - a confirmer via un appel authentifie /v1/models sur ta cle. Tarifs OpenRouter = prix catalogue variables selon le fournisseur route ; le prompt caching peut baisser le cout reel de 60 a 80%. Le nouveau tokenizer d'Opus 4.8 produit ~30% de tokens en plus pour un meme texte, ce qui renforce le cout effectif par requete.</a:t>
             </a:r>
           </a:p>
         </p:txBody>
@@ -3860,7 +3860,7 @@
                 </a:solidFill>
                 <a:latin typeface="Marianne"/>
               </a:rPr>
-              <a:t>Ministères Sociaux – Benchmark coding agentique – 23/07/2026</a:t>
+              <a:t>Ministères Sociaux – Benchmark coding agentique – 02/09/2026</a:t>
             </a:r>
           </a:p>
         </p:txBody>
@@ -3995,7 +3995,7 @@
                 </a:solidFill>
                 <a:latin typeface="Marianne"/>
               </a:rPr>
-              <a:t>Prix, performance, souveraineté, conformité, faisabilité. Tarifs vérifiés sur sources primaires (23/07/2026).</a:t>
+              <a:t>Prix, performance, souveraineté, conformité, faisabilité. Tarifs vérifiés sur sources primaires (02/09/2026).</a:t>
             </a:r>
           </a:p>
         </p:txBody>
@@ -4108,7 +4108,7 @@
                 </a:solidFill>
                 <a:latin typeface="Marianne"/>
               </a:rPr>
-              <a:t>Opus 4.8</a:t>
+              <a:t>Opus 5</a:t>
             </a:r>
           </a:p>
           <a:p>
@@ -4130,7 +4130,7 @@
                 </a:solidFill>
                 <a:latin typeface="Marianne"/>
               </a:rPr>
-              <a:t>Anthropic</a:t>
+              <a:t>AWS Bedrock</a:t>
             </a:r>
           </a:p>
         </p:txBody>
@@ -4287,7 +4287,7 @@
             </a:avLst>
           </a:prstGeom>
           <a:solidFill>
-            <a:srgbClr val="6A6AF4"/>
+            <a:srgbClr val="000091"/>
           </a:solidFill>
           <a:ln>
             <a:noFill/>
@@ -4356,7 +4356,7 @@
                 </a:solidFill>
                 <a:latin typeface="Marianne"/>
               </a:rPr>
-              <a:t>Vibe</a:t>
+              <a:t>Claude Code</a:t>
             </a:r>
           </a:p>
           <a:p>
@@ -4378,7 +4378,7 @@
                 </a:solidFill>
                 <a:latin typeface="Marianne"/>
               </a:rPr>
-              <a:t>Medium 3.5</a:t>
+              <a:t>Sonnet 5</a:t>
             </a:r>
           </a:p>
           <a:p>
@@ -4400,7 +4400,7 @@
                 </a:solidFill>
                 <a:latin typeface="Marianne"/>
               </a:rPr>
-              <a:t>Mistral</a:t>
+              <a:t>AWS Bedrock</a:t>
             </a:r>
           </a:p>
         </p:txBody>
@@ -4513,7 +4513,7 @@
                 </a:solidFill>
                 <a:latin typeface="Marianne"/>
               </a:rPr>
-              <a:t>DeepSeek V4 Flash</a:t>
+              <a:t>DeepSeek V4 Flash preview</a:t>
             </a:r>
           </a:p>
           <a:p>
@@ -4648,7 +4648,7 @@
                 </a:solidFill>
                 <a:latin typeface="Marianne"/>
               </a:rPr>
-              <a:t>DeepSeek V4 Pro</a:t>
+              <a:t>DeepSeek V4 Flash 0731</a:t>
             </a:r>
           </a:p>
           <a:p>
@@ -4670,7 +4670,7 @@
                 </a:solidFill>
                 <a:latin typeface="Marianne"/>
               </a:rPr>
-              <a:t>OpenRouter</a:t>
+              <a:t>Scaleway</a:t>
             </a:r>
           </a:p>
         </p:txBody>
@@ -4805,7 +4805,7 @@
                 </a:solidFill>
                 <a:latin typeface="Marianne"/>
               </a:rPr>
-              <a:t>OpenRouter</a:t>
+              <a:t>Scaleway</a:t>
             </a:r>
           </a:p>
         </p:txBody>
@@ -5077,7 +5077,7 @@
                 </a:solidFill>
                 <a:latin typeface="Marianne"/>
               </a:rPr>
-              <a:t>/ 1M tokens</a:t>
+              <a:t>/ 1M tokens (in / out)</a:t>
             </a:r>
           </a:p>
         </p:txBody>
@@ -5198,7 +5198,7 @@
                 </a:solidFill>
                 <a:latin typeface="Marianne"/>
               </a:rPr>
-              <a:t>+ siège 20–125 $/m</a:t>
+              <a:t>+ siège ≈20 €/m</a:t>
             </a:r>
           </a:p>
         </p:txBody>
@@ -5360,11 +5360,11 @@
             <a:r>
               <a:rPr sz="1150" b="0" i="0">
                 <a:solidFill>
-                  <a:srgbClr val="18753C"/>
-                </a:solidFill>
-                <a:latin typeface="Marianne"/>
-              </a:rPr>
-              <a:t>● ● ● ● </a:t>
+                  <a:srgbClr val="B85C00"/>
+                </a:solidFill>
+                <a:latin typeface="Marianne"/>
+              </a:rPr>
+              <a:t>● ● ● </a:t>
             </a:r>
             <a:r>
               <a:rPr sz="1150" b="0" i="0">
@@ -5373,7 +5373,7 @@
                 </a:solidFill>
                 <a:latin typeface="Marianne"/>
               </a:rPr>
-              <a:t>● </a:t>
+              <a:t>● ● </a:t>
             </a:r>
           </a:p>
         </p:txBody>
@@ -5418,7 +5418,7 @@
                 </a:solidFill>
                 <a:latin typeface="Marianne"/>
               </a:rPr>
-              <a:t>1,50 $ / 7,50 $</a:t>
+              <a:t>2 $ / 10 $</a:t>
             </a:r>
           </a:p>
           <a:p>
@@ -5440,7 +5440,7 @@
                 </a:solidFill>
                 <a:latin typeface="Marianne"/>
               </a:rPr>
-              <a:t>plans dès 14,99 $/m</a:t>
+              <a:t>+ siège ≈20 €/m</a:t>
             </a:r>
           </a:p>
         </p:txBody>
@@ -5561,7 +5561,7 @@
                 </a:solidFill>
                 <a:latin typeface="Marianne"/>
               </a:rPr>
-              <a:t>quotas, agents État</a:t>
+              <a:t>quotas · État</a:t>
             </a:r>
           </a:p>
         </p:txBody>
@@ -5660,29 +5660,7 @@
                 </a:solidFill>
                 <a:latin typeface="Marianne"/>
               </a:rPr>
-              <a:t>0,44 $ / 0,87 $</a:t>
-            </a:r>
-          </a:p>
-          <a:p>
-            <a:pPr algn="l">
-              <a:lnSpc>
-                <a:spcPct val="100000"/>
-              </a:lnSpc>
-              <a:spcBef>
-                <a:spcPts val="100"/>
-              </a:spcBef>
-              <a:spcAft>
-                <a:spcPts val="0"/>
-              </a:spcAft>
-            </a:pPr>
-            <a:r>
-              <a:rPr sz="800" b="0" i="0">
-                <a:solidFill>
-                  <a:srgbClr val="6A6A6A"/>
-                </a:solidFill>
-                <a:latin typeface="Marianne"/>
-              </a:rPr>
-              <a:t>tarif preview *</a:t>
+              <a:t>0,40 € / 0,80 €</a:t>
             </a:r>
           </a:p>
         </p:txBody>
@@ -5781,7 +5759,7 @@
                 </a:solidFill>
                 <a:latin typeface="Marianne"/>
               </a:rPr>
-              <a:t>1,40 $ / 4,40 $</a:t>
+              <a:t>1,80 € / 5,50 €</a:t>
             </a:r>
           </a:p>
         </p:txBody>
@@ -5880,7 +5858,7 @@
                 </a:solidFill>
                 <a:latin typeface="Marianne"/>
               </a:rPr>
-              <a:t>3 $ / 15 $</a:t>
+              <a:t>2,55 $ / 12,75 $</a:t>
             </a:r>
           </a:p>
           <a:p>
@@ -6039,7 +6017,7 @@
                 </a:solidFill>
                 <a:latin typeface="Marianne"/>
               </a:rPr>
-              <a:t>SWE-bench Verified</a:t>
+              <a:t>DeepSWE v1.1 · modèle seul</a:t>
             </a:r>
           </a:p>
         </p:txBody>
@@ -6138,7 +6116,29 @@
                 </a:solidFill>
                 <a:latin typeface="Marianne"/>
               </a:rPr>
-              <a:t>88,6 %</a:t>
+              <a:t>74,0 % (±4)</a:t>
+            </a:r>
+          </a:p>
+          <a:p>
+            <a:pPr algn="l">
+              <a:lnSpc>
+                <a:spcPct val="100000"/>
+              </a:lnSpc>
+              <a:spcBef>
+                <a:spcPts val="100"/>
+              </a:spcBef>
+              <a:spcAft>
+                <a:spcPts val="0"/>
+              </a:spcAft>
+            </a:pPr>
+            <a:r>
+              <a:rPr sz="800" b="0" i="0">
+                <a:solidFill>
+                  <a:srgbClr val="6A6A6A"/>
+                </a:solidFill>
+                <a:latin typeface="Marianne"/>
+              </a:rPr>
+              <a:t>TB 89,1* · SV 96ᵛ/97*</a:t>
             </a:r>
           </a:p>
         </p:txBody>
@@ -6237,7 +6237,7 @@
                 </a:solidFill>
                 <a:latin typeface="Marianne"/>
               </a:rPr>
-              <a:t>95,0 %</a:t>
+              <a:t>70,0 % (±4)</a:t>
             </a:r>
           </a:p>
           <a:p>
@@ -6259,7 +6259,7 @@
                 </a:solidFill>
                 <a:latin typeface="Marianne"/>
               </a:rPr>
-              <a:t>tête du bench</a:t>
+              <a:t>TB 83,8 · SV 95,0ᵛ</a:t>
             </a:r>
           </a:p>
         </p:txBody>
@@ -6358,7 +6358,29 @@
                 </a:solidFill>
                 <a:latin typeface="Marianne"/>
               </a:rPr>
-              <a:t>77,6 %</a:t>
+              <a:t>54 % (±4)</a:t>
+            </a:r>
+          </a:p>
+          <a:p>
+            <a:pPr algn="l">
+              <a:lnSpc>
+                <a:spcPct val="100000"/>
+              </a:lnSpc>
+              <a:spcBef>
+                <a:spcPts val="100"/>
+              </a:spcBef>
+              <a:spcAft>
+                <a:spcPts val="0"/>
+              </a:spcAft>
+            </a:pPr>
+            <a:r>
+              <a:rPr sz="800" b="0" i="0">
+                <a:solidFill>
+                  <a:srgbClr val="6A6A6A"/>
+                </a:solidFill>
+                <a:latin typeface="Marianne"/>
+              </a:rPr>
+              <a:t>TB 80,4ᵛ/74,6 · SV 85,2</a:t>
             </a:r>
           </a:p>
         </p:txBody>
@@ -6399,20 +6421,20 @@
             <a:r>
               <a:rPr sz="1150" b="0" i="0">
                 <a:solidFill>
-                  <a:srgbClr val="18753C"/>
+                  <a:srgbClr val="E1000F"/>
+                </a:solidFill>
+                <a:latin typeface="Marianne"/>
+              </a:rPr>
+              <a:t>● </a:t>
+            </a:r>
+            <a:r>
+              <a:rPr sz="1150" b="0" i="0">
+                <a:solidFill>
+                  <a:srgbClr val="D2D2E8"/>
                 </a:solidFill>
                 <a:latin typeface="Marianne"/>
               </a:rPr>
               <a:t>● ● ● ● </a:t>
-            </a:r>
-            <a:r>
-              <a:rPr sz="1150" b="0" i="0">
-                <a:solidFill>
-                  <a:srgbClr val="D2D2E8"/>
-                </a:solidFill>
-                <a:latin typeface="Marianne"/>
-              </a:rPr>
-              <a:t>● </a:t>
             </a:r>
           </a:p>
         </p:txBody>
@@ -6457,7 +6479,7 @@
                 </a:solidFill>
                 <a:latin typeface="Marianne"/>
               </a:rPr>
-              <a:t>≈79 % *</a:t>
+              <a:t>7,3 %ᵛ</a:t>
             </a:r>
           </a:p>
           <a:p>
@@ -6479,7 +6501,7 @@
                 </a:solidFill>
                 <a:latin typeface="Marianne"/>
               </a:rPr>
-              <a:t>estimée</a:t>
+              <a:t>TB 61,8ᵛ · SV 73,7ᵛ</a:t>
             </a:r>
           </a:p>
         </p:txBody>
@@ -6578,7 +6600,29 @@
                 </a:solidFill>
                 <a:latin typeface="Marianne"/>
               </a:rPr>
-              <a:t>80,6 %</a:t>
+              <a:t>53 % · 54,4ᵛ</a:t>
+            </a:r>
+          </a:p>
+          <a:p>
+            <a:pPr algn="l">
+              <a:lnSpc>
+                <a:spcPct val="100000"/>
+              </a:lnSpc>
+              <a:spcBef>
+                <a:spcPts val="100"/>
+              </a:spcBef>
+              <a:spcAft>
+                <a:spcPts val="0"/>
+              </a:spcAft>
+            </a:pPr>
+            <a:r>
+              <a:rPr sz="800" b="0" i="0">
+                <a:solidFill>
+                  <a:srgbClr val="6A6A6A"/>
+                </a:solidFill>
+                <a:latin typeface="Marianne"/>
+              </a:rPr>
+              <a:t>TB 82,7ᵛ · SV n.p.</a:t>
             </a:r>
           </a:p>
         </p:txBody>
@@ -6619,11 +6663,11 @@
             <a:r>
               <a:rPr sz="1150" b="0" i="0">
                 <a:solidFill>
-                  <a:srgbClr val="18753C"/>
-                </a:solidFill>
-                <a:latin typeface="Marianne"/>
-              </a:rPr>
-              <a:t>● ● ● ● </a:t>
+                  <a:srgbClr val="B85C00"/>
+                </a:solidFill>
+                <a:latin typeface="Marianne"/>
+              </a:rPr>
+              <a:t>● ● ● </a:t>
             </a:r>
             <a:r>
               <a:rPr sz="1150" b="0" i="0">
@@ -6632,7 +6676,7 @@
                 </a:solidFill>
                 <a:latin typeface="Marianne"/>
               </a:rPr>
-              <a:t>● </a:t>
+              <a:t>● ● </a:t>
             </a:r>
           </a:p>
         </p:txBody>
@@ -6677,7 +6721,7 @@
                 </a:solidFill>
                 <a:latin typeface="Marianne"/>
               </a:rPr>
-              <a:t>≈78 % *</a:t>
+              <a:t>44,0 %</a:t>
             </a:r>
           </a:p>
           <a:p>
@@ -6699,7 +6743,7 @@
                 </a:solidFill>
                 <a:latin typeface="Marianne"/>
               </a:rPr>
-              <a:t>estimée</a:t>
+              <a:t>TB 81,0ᵛ · SV n.p.</a:t>
             </a:r>
           </a:p>
         </p:txBody>
@@ -6744,7 +6788,7 @@
                 </a:solidFill>
                 <a:latin typeface="Marianne"/>
               </a:rPr>
-              <a:t>● ● ● ● ● </a:t>
+              <a:t>● ● ● ● </a:t>
             </a:r>
             <a:r>
               <a:rPr sz="1150" b="0" i="0">
@@ -6753,7 +6797,7 @@
                 </a:solidFill>
                 <a:latin typeface="Marianne"/>
               </a:rPr>
-              <a:t/>
+              <a:t>● </a:t>
             </a:r>
           </a:p>
         </p:txBody>
@@ -6798,7 +6842,7 @@
                 </a:solidFill>
                 <a:latin typeface="Marianne"/>
               </a:rPr>
-              <a:t>93,4 % *</a:t>
+              <a:t>≈69 %</a:t>
             </a:r>
           </a:p>
           <a:p>
@@ -6820,7 +6864,7 @@
                 </a:solidFill>
                 <a:latin typeface="Marianne"/>
               </a:rPr>
-              <a:t>annoncé éditeur</a:t>
+              <a:t>TB 88,3ᵛ · SV 93,4*</a:t>
             </a:r>
           </a:p>
         </p:txBody>
@@ -7056,7 +7100,7 @@
                 </a:solidFill>
                 <a:latin typeface="Marianne"/>
               </a:rPr>
-              <a:t>Éditeur US</a:t>
+              <a:t>Cloud US</a:t>
             </a:r>
           </a:p>
           <a:p>
@@ -7078,7 +7122,7 @@
                 </a:solidFill>
                 <a:latin typeface="Marianne"/>
               </a:rPr>
-              <a:t>CLOUD Act</a:t>
+              <a:t>CLOUD Act (CNIL)</a:t>
             </a:r>
           </a:p>
         </p:txBody>
@@ -7240,20 +7284,20 @@
             <a:r>
               <a:rPr sz="1150" b="0" i="0">
                 <a:solidFill>
-                  <a:srgbClr val="18753C"/>
+                  <a:srgbClr val="E1000F"/>
+                </a:solidFill>
+                <a:latin typeface="Marianne"/>
+              </a:rPr>
+              <a:t>● </a:t>
+            </a:r>
+            <a:r>
+              <a:rPr sz="1150" b="0" i="0">
+                <a:solidFill>
+                  <a:srgbClr val="D2D2E8"/>
                 </a:solidFill>
                 <a:latin typeface="Marianne"/>
               </a:rPr>
               <a:t>● ● ● ● </a:t>
-            </a:r>
-            <a:r>
-              <a:rPr sz="1150" b="0" i="0">
-                <a:solidFill>
-                  <a:srgbClr val="D2D2E8"/>
-                </a:solidFill>
-                <a:latin typeface="Marianne"/>
-              </a:rPr>
-              <a:t>● </a:t>
             </a:r>
           </a:p>
         </p:txBody>
@@ -7298,7 +7342,7 @@
                 </a:solidFill>
                 <a:latin typeface="Marianne"/>
               </a:rPr>
-              <a:t>Éditeur FR</a:t>
+              <a:t>Cloud US</a:t>
             </a:r>
           </a:p>
           <a:p>
@@ -7320,7 +7364,7 @@
                 </a:solidFill>
                 <a:latin typeface="Marianne"/>
               </a:rPr>
-              <a:t>SecNumCloud en opt.</a:t>
+              <a:t>CLOUD Act (CNIL)</a:t>
             </a:r>
           </a:p>
         </p:txBody>
@@ -7482,20 +7526,20 @@
             <a:r>
               <a:rPr sz="1150" b="0" i="0">
                 <a:solidFill>
-                  <a:srgbClr val="E1000F"/>
+                  <a:srgbClr val="18753C"/>
+                </a:solidFill>
+                <a:latin typeface="Marianne"/>
+              </a:rPr>
+              <a:t>● ● ● ● </a:t>
+            </a:r>
+            <a:r>
+              <a:rPr sz="1150" b="0" i="0">
+                <a:solidFill>
+                  <a:srgbClr val="D2D2E8"/>
                 </a:solidFill>
                 <a:latin typeface="Marianne"/>
               </a:rPr>
               <a:t>● </a:t>
-            </a:r>
-            <a:r>
-              <a:rPr sz="1150" b="0" i="0">
-                <a:solidFill>
-                  <a:srgbClr val="D2D2E8"/>
-                </a:solidFill>
-                <a:latin typeface="Marianne"/>
-              </a:rPr>
-              <a:t>● ● ● ● </a:t>
             </a:r>
           </a:p>
         </p:txBody>
@@ -7540,7 +7584,7 @@
                 </a:solidFill>
                 <a:latin typeface="Marianne"/>
               </a:rPr>
-              <a:t>Éditeur CN</a:t>
+              <a:t>Cloud FR</a:t>
             </a:r>
           </a:p>
           <a:p>
@@ -7562,7 +7606,7 @@
                 </a:solidFill>
                 <a:latin typeface="Marianne"/>
               </a:rPr>
-              <a:t>+ routeur US</a:t>
+              <a:t>hébergé UE</a:t>
             </a:r>
           </a:p>
         </p:txBody>
@@ -7603,20 +7647,20 @@
             <a:r>
               <a:rPr sz="1150" b="0" i="0">
                 <a:solidFill>
-                  <a:srgbClr val="E1000F"/>
+                  <a:srgbClr val="18753C"/>
+                </a:solidFill>
+                <a:latin typeface="Marianne"/>
+              </a:rPr>
+              <a:t>● ● ● ● </a:t>
+            </a:r>
+            <a:r>
+              <a:rPr sz="1150" b="0" i="0">
+                <a:solidFill>
+                  <a:srgbClr val="D2D2E8"/>
                 </a:solidFill>
                 <a:latin typeface="Marianne"/>
               </a:rPr>
               <a:t>● </a:t>
-            </a:r>
-            <a:r>
-              <a:rPr sz="1150" b="0" i="0">
-                <a:solidFill>
-                  <a:srgbClr val="D2D2E8"/>
-                </a:solidFill>
-                <a:latin typeface="Marianne"/>
-              </a:rPr>
-              <a:t>● ● ● ● </a:t>
             </a:r>
           </a:p>
         </p:txBody>
@@ -7661,7 +7705,7 @@
                 </a:solidFill>
                 <a:latin typeface="Marianne"/>
               </a:rPr>
-              <a:t>Éditeur CN</a:t>
+              <a:t>Cloud FR</a:t>
             </a:r>
           </a:p>
           <a:p>
@@ -7683,7 +7727,7 @@
                 </a:solidFill>
                 <a:latin typeface="Marianne"/>
               </a:rPr>
-              <a:t>+ routeur US</a:t>
+              <a:t>hébergé UE</a:t>
             </a:r>
           </a:p>
         </p:txBody>
@@ -7982,11 +8026,11 @@
             <a:r>
               <a:rPr sz="1150" b="0" i="0">
                 <a:solidFill>
-                  <a:srgbClr val="B85C00"/>
-                </a:solidFill>
-                <a:latin typeface="Marianne"/>
-              </a:rPr>
-              <a:t>● ● ● </a:t>
+                  <a:srgbClr val="18753C"/>
+                </a:solidFill>
+                <a:latin typeface="Marianne"/>
+              </a:rPr>
+              <a:t>● ● ● ● </a:t>
             </a:r>
             <a:r>
               <a:rPr sz="1150" b="0" i="0">
@@ -7995,7 +8039,7 @@
                 </a:solidFill>
                 <a:latin typeface="Marianne"/>
               </a:rPr>
-              <a:t>● ● </a:t>
+              <a:t>● </a:t>
             </a:r>
           </a:p>
         </p:txBody>
@@ -8040,7 +8084,7 @@
                 </a:solidFill>
                 <a:latin typeface="Marianne"/>
               </a:rPr>
-              <a:t>Partielle</a:t>
+              <a:t>Bonne</a:t>
             </a:r>
           </a:p>
           <a:p>
@@ -8062,7 +8106,7 @@
                 </a:solidFill>
                 <a:latin typeface="Marianne"/>
               </a:rPr>
-              <a:t>transfert hors UE</a:t>
+              <a:t>UE · DPA AWS</a:t>
             </a:r>
           </a:p>
         </p:txBody>
@@ -8183,7 +8227,7 @@
                 </a:solidFill>
                 <a:latin typeface="Marianne"/>
               </a:rPr>
-              <a:t>région UE · DPA AWS</a:t>
+              <a:t>UE · DPA AWS</a:t>
             </a:r>
           </a:p>
         </p:txBody>
@@ -8228,7 +8272,7 @@
                 </a:solidFill>
                 <a:latin typeface="Marianne"/>
               </a:rPr>
-              <a:t>● ● ● ● ● </a:t>
+              <a:t>● ● ● ● </a:t>
             </a:r>
             <a:r>
               <a:rPr sz="1150" b="0" i="0">
@@ -8237,7 +8281,7 @@
                 </a:solidFill>
                 <a:latin typeface="Marianne"/>
               </a:rPr>
-              <a:t/>
+              <a:t>● </a:t>
             </a:r>
           </a:p>
         </p:txBody>
@@ -8304,7 +8348,7 @@
                 </a:solidFill>
                 <a:latin typeface="Marianne"/>
               </a:rPr>
-              <a:t>RGPD · éditeur FR</a:t>
+              <a:t>UE · DPA AWS</a:t>
             </a:r>
           </a:p>
         </p:txBody>
@@ -8425,7 +8469,7 @@
                 </a:solidFill>
                 <a:latin typeface="Marianne"/>
               </a:rPr>
-              <a:t>cadre État (DINUM)</a:t>
+              <a:t>cadre État</a:t>
             </a:r>
           </a:p>
         </p:txBody>
@@ -8466,20 +8510,20 @@
             <a:r>
               <a:rPr sz="1150" b="0" i="0">
                 <a:solidFill>
-                  <a:srgbClr val="E1000F"/>
+                  <a:srgbClr val="18753C"/>
+                </a:solidFill>
+                <a:latin typeface="Marianne"/>
+              </a:rPr>
+              <a:t>● ● ● ● </a:t>
+            </a:r>
+            <a:r>
+              <a:rPr sz="1150" b="0" i="0">
+                <a:solidFill>
+                  <a:srgbClr val="D2D2E8"/>
                 </a:solidFill>
                 <a:latin typeface="Marianne"/>
               </a:rPr>
               <a:t>● </a:t>
-            </a:r>
-            <a:r>
-              <a:rPr sz="1150" b="0" i="0">
-                <a:solidFill>
-                  <a:srgbClr val="D2D2E8"/>
-                </a:solidFill>
-                <a:latin typeface="Marianne"/>
-              </a:rPr>
-              <a:t>● ● ● ● </a:t>
             </a:r>
           </a:p>
         </p:txBody>
@@ -8524,7 +8568,7 @@
                 </a:solidFill>
                 <a:latin typeface="Marianne"/>
               </a:rPr>
-              <a:t>Insuffisante</a:t>
+              <a:t>Bonne</a:t>
             </a:r>
           </a:p>
           <a:p>
@@ -8546,7 +8590,7 @@
                 </a:solidFill>
                 <a:latin typeface="Marianne"/>
               </a:rPr>
-              <a:t>sans garanties UE</a:t>
+              <a:t>RGPD · cloud FR</a:t>
             </a:r>
           </a:p>
         </p:txBody>
@@ -8587,20 +8631,20 @@
             <a:r>
               <a:rPr sz="1150" b="0" i="0">
                 <a:solidFill>
-                  <a:srgbClr val="E1000F"/>
+                  <a:srgbClr val="18753C"/>
+                </a:solidFill>
+                <a:latin typeface="Marianne"/>
+              </a:rPr>
+              <a:t>● ● ● ● </a:t>
+            </a:r>
+            <a:r>
+              <a:rPr sz="1150" b="0" i="0">
+                <a:solidFill>
+                  <a:srgbClr val="D2D2E8"/>
                 </a:solidFill>
                 <a:latin typeface="Marianne"/>
               </a:rPr>
               <a:t>● </a:t>
-            </a:r>
-            <a:r>
-              <a:rPr sz="1150" b="0" i="0">
-                <a:solidFill>
-                  <a:srgbClr val="D2D2E8"/>
-                </a:solidFill>
-                <a:latin typeface="Marianne"/>
-              </a:rPr>
-              <a:t>● ● ● ● </a:t>
             </a:r>
           </a:p>
         </p:txBody>
@@ -8645,7 +8689,7 @@
                 </a:solidFill>
                 <a:latin typeface="Marianne"/>
               </a:rPr>
-              <a:t>Insuffisante</a:t>
+              <a:t>Bonne</a:t>
             </a:r>
           </a:p>
           <a:p>
@@ -8667,7 +8711,7 @@
                 </a:solidFill>
                 <a:latin typeface="Marianne"/>
               </a:rPr>
-              <a:t>sans garanties UE</a:t>
+              <a:t>RGPD · cloud FR</a:t>
             </a:r>
           </a:p>
         </p:txBody>
@@ -8966,11 +9010,11 @@
             <a:r>
               <a:rPr sz="1150" b="0" i="0">
                 <a:solidFill>
-                  <a:srgbClr val="18753C"/>
-                </a:solidFill>
-                <a:latin typeface="Marianne"/>
-              </a:rPr>
-              <a:t>● ● ● ● </a:t>
+                  <a:srgbClr val="B85C00"/>
+                </a:solidFill>
+                <a:latin typeface="Marianne"/>
+              </a:rPr>
+              <a:t>● ● ● </a:t>
             </a:r>
             <a:r>
               <a:rPr sz="1150" b="0" i="0">
@@ -8979,7 +9023,7 @@
                 </a:solidFill>
                 <a:latin typeface="Marianne"/>
               </a:rPr>
-              <a:t>● </a:t>
+              <a:t>● ● </a:t>
             </a:r>
           </a:p>
         </p:txBody>
@@ -9024,7 +9068,7 @@
                 </a:solidFill>
                 <a:latin typeface="Marianne"/>
               </a:rPr>
-              <a:t>Multi-OS natif</a:t>
+              <a:t>Bedrock (IAM)</a:t>
             </a:r>
           </a:p>
           <a:p>
@@ -9046,7 +9090,7 @@
                 </a:solidFill>
                 <a:latin typeface="Marianne"/>
               </a:rPr>
-              <a:t>outil mûr, admin ent.</a:t>
+              <a:t>data sharing</a:t>
             </a:r>
           </a:p>
         </p:txBody>
@@ -9167,7 +9211,7 @@
                 </a:solidFill>
                 <a:latin typeface="Marianne"/>
               </a:rPr>
-              <a:t>data sharing requis</a:t>
+              <a:t>data sharing</a:t>
             </a:r>
           </a:p>
         </p:txBody>
@@ -9266,7 +9310,7 @@
                 </a:solidFill>
                 <a:latin typeface="Marianne"/>
               </a:rPr>
-              <a:t>CLI + VS Code</a:t>
+              <a:t>Bedrock (IAM)</a:t>
             </a:r>
           </a:p>
           <a:p>
@@ -9288,7 +9332,7 @@
                 </a:solidFill>
                 <a:latin typeface="Marianne"/>
               </a:rPr>
-              <a:t>clé Mistral ou plan</a:t>
+              <a:t>data sharing</a:t>
             </a:r>
           </a:p>
         </p:txBody>
@@ -9409,7 +9453,7 @@
                 </a:solidFill>
                 <a:latin typeface="Marianne"/>
               </a:rPr>
-              <a:t>agents État · quotas</a:t>
+              <a:t>agents État</a:t>
             </a:r>
           </a:p>
         </p:txBody>
@@ -9508,7 +9552,7 @@
                 </a:solidFill>
                 <a:latin typeface="Marianne"/>
               </a:rPr>
-              <a:t>clé OpenRouter</a:t>
+              <a:t>clé Scaleway</a:t>
             </a:r>
           </a:p>
           <a:p>
@@ -9530,7 +9574,7 @@
                 </a:solidFill>
                 <a:latin typeface="Marianne"/>
               </a:rPr>
-              <a:t>Mac/Linux/Win (WSL)</a:t>
+              <a:t>OpenAI-compat.</a:t>
             </a:r>
           </a:p>
         </p:txBody>
@@ -9629,7 +9673,7 @@
                 </a:solidFill>
                 <a:latin typeface="Marianne"/>
               </a:rPr>
-              <a:t>clé OpenRouter</a:t>
+              <a:t>clé Scaleway</a:t>
             </a:r>
           </a:p>
           <a:p>
@@ -9651,7 +9695,7 @@
                 </a:solidFill>
                 <a:latin typeface="Marianne"/>
               </a:rPr>
-              <a:t>Mac/Linux/Win (WSL)</a:t>
+              <a:t>OpenAI-compat.</a:t>
             </a:r>
           </a:p>
         </p:txBody>
@@ -9871,7 +9915,7 @@
                 </a:solidFill>
                 <a:latin typeface="Marianne"/>
               </a:rPr>
-              <a:t>        * DeepSeek V4 : tarif preview ; GLM et Albert : perf estimée ; Kimi K3 : score annoncé par l'éditeur.</a:t>
+              <a:t>        DeepSWE v1.1 = modèle seul · TB Terminal-Bench 2.1 · SV SWE-bench V. · sans marque : officiel · ᵛ éditeur · * mesure indép.</a:t>
             </a:r>
           </a:p>
         </p:txBody>
@@ -10104,7 +10148,7 @@
                 </a:solidFill>
                 <a:latin typeface="Marianne"/>
               </a:rPr>
-              <a:t>Ministères Sociaux – Benchmark coding agentique – 23/07/2026</a:t>
+              <a:t>Ministères Sociaux – Benchmark coding agentique – 02/09/2026</a:t>
             </a:r>
           </a:p>
         </p:txBody>
@@ -10947,7 +10991,7 @@
                 </a:solidFill>
                 <a:latin typeface="Marianne"/>
               </a:rPr>
-              <a:t>Fable 5 : 10 $ / 50 $ · Opus 4.8 : 5 $ / 25 $ · Kimi K3 : 3 $ / 15 $ · Mistral Medium 3.5 : 1,50 $ / 7,50 $ · GLM 5.2 : 1,40 $ / 4,40 $ · DeepSeek V4 Pro : 0,44 $ / 0,87 $ · Albert : gratuit, quotas.</a:t>
+              <a:t>Fable 5 : 10 $ / 50 $ · Opus 5 : 5 $ / 25 $ · Kimi K3 : 2,55 $ / 12,75 $ · Sonnet 5 : 2 $ / 10 $ · GLM 5.2 (Scaleway) : 1,80 € / 5,50 € · DeepSeek V4 Flash 0731 (Scaleway) : 0,40 € / 0,80 € · Albert : gratuit, quotas.</a:t>
             </a:r>
           </a:p>
         </p:txBody>
@@ -11180,7 +11224,7 @@
                 </a:solidFill>
                 <a:latin typeface="Marianne"/>
               </a:rPr>
-              <a:t>Ministères Sociaux – Benchmark coding agentique – 23/07/2026</a:t>
+              <a:t>Ministères Sociaux – Benchmark coding agentique – 02/09/2026</a:t>
             </a:r>
           </a:p>
         </p:txBody>
@@ -11443,8 +11487,8 @@
         </p:nvSpPr>
         <p:spPr>
           <a:xfrm>
-            <a:off x="1106424" y="2980944"/>
-            <a:ext cx="4449927" cy="1097280"/>
+            <a:off x="1106424" y="2907791"/>
+            <a:ext cx="4449927" cy="1170432"/>
           </a:xfrm>
           <a:prstGeom prst="rect">
             <a:avLst/>
@@ -11459,17 +11503,17 @@
           <a:p>
             <a:pPr algn="l" marL="201168" indent="-201168">
               <a:lnSpc>
-                <a:spcPct val="105000"/>
-              </a:lnSpc>
-              <a:spcBef>
-                <a:spcPts val="0"/>
-              </a:spcBef>
-              <a:spcAft>
-                <a:spcPts val="400"/>
-              </a:spcAft>
-            </a:pPr>
-            <a:r>
-              <a:rPr sz="1200" b="0" i="0">
+                <a:spcPct val="102000"/>
+              </a:lnSpc>
+              <a:spcBef>
+                <a:spcPts val="0"/>
+              </a:spcBef>
+              <a:spcAft>
+                <a:spcPts val="300"/>
+              </a:spcAft>
+            </a:pPr>
+            <a:r>
+              <a:rPr sz="1100" b="0" i="0">
                 <a:solidFill>
                   <a:srgbClr val="6A6AF4"/>
                 </a:solidFill>
@@ -11478,7 +11522,7 @@
               <a:t>▪  </a:t>
             </a:r>
             <a:r>
-              <a:rPr sz="1300" b="1" i="0">
+              <a:rPr sz="1200" b="1" i="0">
                 <a:solidFill>
                   <a:srgbClr val="161616"/>
                 </a:solidFill>
@@ -11487,7 +11531,7 @@
               <a:t>Claude Code : </a:t>
             </a:r>
             <a:r>
-              <a:rPr sz="1250" b="0" i="0">
+              <a:rPr sz="1150" b="0" i="0">
                 <a:solidFill>
                   <a:srgbClr val="3A3A3A"/>
                 </a:solidFill>
@@ -11499,17 +11543,17 @@
           <a:p>
             <a:pPr algn="l" marL="201168" indent="-201168">
               <a:lnSpc>
-                <a:spcPct val="105000"/>
-              </a:lnSpc>
-              <a:spcBef>
-                <a:spcPts val="0"/>
-              </a:spcBef>
-              <a:spcAft>
-                <a:spcPts val="400"/>
-              </a:spcAft>
-            </a:pPr>
-            <a:r>
-              <a:rPr sz="1200" b="0" i="0">
+                <a:spcPct val="102000"/>
+              </a:lnSpc>
+              <a:spcBef>
+                <a:spcPts val="0"/>
+              </a:spcBef>
+              <a:spcAft>
+                <a:spcPts val="300"/>
+              </a:spcAft>
+            </a:pPr>
+            <a:r>
+              <a:rPr sz="1100" b="0" i="0">
                 <a:solidFill>
                   <a:srgbClr val="6A6AF4"/>
                 </a:solidFill>
@@ -11518,38 +11562,38 @@
               <a:t>▪  </a:t>
             </a:r>
             <a:r>
-              <a:rPr sz="1300" b="1" i="0">
+              <a:rPr sz="1200" b="1" i="0">
                 <a:solidFill>
                   <a:srgbClr val="161616"/>
                 </a:solidFill>
                 <a:latin typeface="Marianne"/>
               </a:rPr>
-              <a:t>Vibe (Mistral) : </a:t>
-            </a:r>
-            <a:r>
-              <a:rPr sz="1250" b="0" i="0">
+              <a:t>OpenCode + Scaleway : </a:t>
+            </a:r>
+            <a:r>
+              <a:rPr sz="1150" b="0" i="0">
                 <a:solidFill>
                   <a:srgbClr val="3A3A3A"/>
                 </a:solidFill>
                 <a:latin typeface="Marianne"/>
               </a:rPr>
-              <a:t>plan 14,99–24,99 $/m ou clé API</a:t>
+              <a:t>clé, paiement au token (€)</a:t>
             </a:r>
           </a:p>
           <a:p>
             <a:pPr algn="l" marL="201168" indent="-201168">
               <a:lnSpc>
-                <a:spcPct val="105000"/>
-              </a:lnSpc>
-              <a:spcBef>
-                <a:spcPts val="0"/>
-              </a:spcBef>
-              <a:spcAft>
-                <a:spcPts val="400"/>
-              </a:spcAft>
-            </a:pPr>
-            <a:r>
-              <a:rPr sz="1200" b="0" i="0">
+                <a:spcPct val="102000"/>
+              </a:lnSpc>
+              <a:spcBef>
+                <a:spcPts val="0"/>
+              </a:spcBef>
+              <a:spcAft>
+                <a:spcPts val="300"/>
+              </a:spcAft>
+            </a:pPr>
+            <a:r>
+              <a:rPr sz="1100" b="0" i="0">
                 <a:solidFill>
                   <a:srgbClr val="6A6AF4"/>
                 </a:solidFill>
@@ -11558,7 +11602,7 @@
               <a:t>▪  </a:t>
             </a:r>
             <a:r>
-              <a:rPr sz="1300" b="1" i="0">
+              <a:rPr sz="1200" b="1" i="0">
                 <a:solidFill>
                   <a:srgbClr val="161616"/>
                 </a:solidFill>
@@ -11567,7 +11611,7 @@
               <a:t>OpenCode + OpenRouter : </a:t>
             </a:r>
             <a:r>
-              <a:rPr sz="1250" b="0" i="0">
+              <a:rPr sz="1150" b="0" i="0">
                 <a:solidFill>
                   <a:srgbClr val="3A3A3A"/>
                 </a:solidFill>
@@ -11579,17 +11623,17 @@
           <a:p>
             <a:pPr algn="l" marL="201168" indent="-201168">
               <a:lnSpc>
-                <a:spcPct val="105000"/>
-              </a:lnSpc>
-              <a:spcBef>
-                <a:spcPts val="0"/>
-              </a:spcBef>
-              <a:spcAft>
-                <a:spcPts val="400"/>
-              </a:spcAft>
-            </a:pPr>
-            <a:r>
-              <a:rPr sz="1200" b="0" i="0">
+                <a:spcPct val="102000"/>
+              </a:lnSpc>
+              <a:spcBef>
+                <a:spcPts val="0"/>
+              </a:spcBef>
+              <a:spcAft>
+                <a:spcPts val="300"/>
+              </a:spcAft>
+            </a:pPr>
+            <a:r>
+              <a:rPr sz="1100" b="0" i="0">
                 <a:solidFill>
                   <a:srgbClr val="6A6AF4"/>
                 </a:solidFill>
@@ -11598,7 +11642,7 @@
               <a:t>▪  </a:t>
             </a:r>
             <a:r>
-              <a:rPr sz="1300" b="1" i="0">
+              <a:rPr sz="1200" b="1" i="0">
                 <a:solidFill>
                   <a:srgbClr val="161616"/>
                 </a:solidFill>
@@ -11607,7 +11651,7 @@
               <a:t>OpenCode + Albert : </a:t>
             </a:r>
             <a:r>
-              <a:rPr sz="1250" b="0" i="0">
+              <a:rPr sz="1150" b="0" i="0">
                 <a:solidFill>
                   <a:srgbClr val="3A3A3A"/>
                 </a:solidFill>
@@ -11831,7 +11875,7 @@
                 </a:solidFill>
                 <a:latin typeface="Marianne"/>
               </a:rPr>
-              <a:t>de 0,87 $ (DeepSeek) à 50 $ (Fable 5)</a:t>
+              <a:t>de 0,80 € (DS · Scaleway) à 50 $ (Fable 5)</a:t>
             </a:r>
           </a:p>
           <a:p>
@@ -11930,7 +11974,7 @@
         <p:spPr>
           <a:xfrm>
             <a:off x="777240" y="4681728"/>
-            <a:ext cx="2453563" cy="1298448"/>
+            <a:ext cx="3362858" cy="1298448"/>
           </a:xfrm>
           <a:prstGeom prst="roundRect">
             <a:avLst>
@@ -12002,7 +12046,7 @@
         <p:spPr>
           <a:xfrm>
             <a:off x="1453895" y="4828032"/>
-            <a:ext cx="1630603" cy="457200"/>
+            <a:ext cx="2539898" cy="457200"/>
           </a:xfrm>
           <a:prstGeom prst="rect">
             <a:avLst/>
@@ -12047,7 +12091,7 @@
         <p:spPr>
           <a:xfrm>
             <a:off x="978408" y="5321808"/>
-            <a:ext cx="2069515" cy="585215"/>
+            <a:ext cx="2978810" cy="585215"/>
           </a:xfrm>
           <a:prstGeom prst="rect">
             <a:avLst/>
@@ -12078,7 +12122,7 @@
                 </a:solidFill>
                 <a:latin typeface="Marianne"/>
               </a:rPr>
-              <a:t>Claude Code · Fable 5</a:t>
+              <a:t>Claude Code · Opus 5</a:t>
             </a:r>
           </a:p>
           <a:p>
@@ -12100,7 +12144,7 @@
                 </a:solidFill>
                 <a:latin typeface="Marianne"/>
               </a:rPr>
-              <a:t>95,0 % SWE-bench, via Bedrock. </a:t>
+              <a:t>DeepSWE 74 % · TB 89,1 % *. </a:t>
             </a:r>
             <a:r>
               <a:rPr sz="950" b="0" i="1">
@@ -12109,7 +12153,7 @@
                 </a:solidFill>
                 <a:latin typeface="Marianne"/>
               </a:rPr>
-              <a:t>Le plus cher, CLOUD Act.</a:t>
+              <a:t>Non souverain (CLOUD Act).</a:t>
             </a:r>
           </a:p>
         </p:txBody>
@@ -12122,8 +12166,8 @@
         </p:nvSpPr>
         <p:spPr>
           <a:xfrm>
-            <a:off x="3505123" y="4681728"/>
-            <a:ext cx="2453563" cy="1298448"/>
+            <a:off x="4414418" y="4681728"/>
+            <a:ext cx="3362858" cy="1298448"/>
           </a:xfrm>
           <a:prstGeom prst="roundRect">
             <a:avLst>
@@ -12178,7 +12222,7 @@
         </p:blipFill>
         <p:spPr>
           <a:xfrm>
-            <a:off x="3706291" y="4846320"/>
+            <a:off x="4615586" y="4846320"/>
             <a:ext cx="365760" cy="365760"/>
           </a:xfrm>
           <a:prstGeom prst="rect">
@@ -12194,8 +12238,8 @@
         </p:nvSpPr>
         <p:spPr>
           <a:xfrm>
-            <a:off x="4181779" y="4828032"/>
-            <a:ext cx="1630603" cy="457200"/>
+            <a:off x="5091074" y="4828032"/>
+            <a:ext cx="2539898" cy="457200"/>
           </a:xfrm>
           <a:prstGeom prst="rect">
             <a:avLst/>
@@ -12239,8 +12283,8 @@
         </p:nvSpPr>
         <p:spPr>
           <a:xfrm>
-            <a:off x="3706291" y="5321808"/>
-            <a:ext cx="2069515" cy="585215"/>
+            <a:off x="4615586" y="5321808"/>
+            <a:ext cx="2978810" cy="585215"/>
           </a:xfrm>
           <a:prstGeom prst="rect">
             <a:avLst/>
@@ -12315,8 +12359,8 @@
         </p:nvSpPr>
         <p:spPr>
           <a:xfrm>
-            <a:off x="6233007" y="4681728"/>
-            <a:ext cx="2453563" cy="1298448"/>
+            <a:off x="8051596" y="4681728"/>
+            <a:ext cx="3362858" cy="1298448"/>
           </a:xfrm>
           <a:prstGeom prst="roundRect">
             <a:avLst>
@@ -12328,7 +12372,7 @@
           </a:solidFill>
           <a:ln w="17780">
             <a:solidFill>
-              <a:srgbClr val="6A6AF4"/>
+              <a:srgbClr val="B85C00"/>
             </a:solidFill>
           </a:ln>
           <a:effectLst/>
@@ -12357,7 +12401,7 @@
       </p:sp>
       <p:pic>
         <p:nvPicPr>
-          <p:cNvPr id="28" name="Picture 27" descr="shield-check.png"/>
+          <p:cNvPr id="28" name="Picture 27" descr="focus-3.png"/>
           <p:cNvPicPr>
             <a:picLocks noChangeAspect="1"/>
           </p:cNvPicPr>
@@ -12371,7 +12415,7 @@
         </p:blipFill>
         <p:spPr>
           <a:xfrm>
-            <a:off x="6434175" y="4846320"/>
+            <a:off x="8252764" y="4846320"/>
             <a:ext cx="365760" cy="365760"/>
           </a:xfrm>
           <a:prstGeom prst="rect">
@@ -12387,8 +12431,8 @@
         </p:nvSpPr>
         <p:spPr>
           <a:xfrm>
-            <a:off x="6909663" y="4828032"/>
-            <a:ext cx="1630603" cy="457200"/>
+            <a:off x="8728252" y="4828032"/>
+            <a:ext cx="2539898" cy="457200"/>
           </a:xfrm>
           <a:prstGeom prst="rect">
             <a:avLst/>
@@ -12415,11 +12459,11 @@
             <a:r>
               <a:rPr sz="1100" b="1" i="0">
                 <a:solidFill>
-                  <a:srgbClr val="6A6AF4"/>
-                </a:solidFill>
-                <a:latin typeface="Marianne"/>
-              </a:rPr>
-              <a:t>Conformité UE</a:t>
+                  <a:srgbClr val="B85C00"/>
+                </a:solidFill>
+                <a:latin typeface="Marianne"/>
+              </a:rPr>
+              <a:t>Rapport perf / prix</a:t>
             </a:r>
           </a:p>
         </p:txBody>
@@ -12432,8 +12476,8 @@
         </p:nvSpPr>
         <p:spPr>
           <a:xfrm>
-            <a:off x="6434175" y="5321808"/>
-            <a:ext cx="2069515" cy="585215"/>
+            <a:off x="8252764" y="5321808"/>
+            <a:ext cx="2978810" cy="585215"/>
           </a:xfrm>
           <a:prstGeom prst="rect">
             <a:avLst/>
@@ -12464,7 +12508,7 @@
                 </a:solidFill>
                 <a:latin typeface="Marianne"/>
               </a:rPr>
-              <a:t>Vibe · Mistral Medium 3.5</a:t>
+              <a:t>DS V4 Flash 0731 · Scaleway</a:t>
             </a:r>
           </a:p>
           <a:p>
@@ -12486,7 +12530,7 @@
                 </a:solidFill>
                 <a:latin typeface="Marianne"/>
               </a:rPr>
-              <a:t>77,6 %, RGPD, éditeur FR. </a:t>
+              <a:t>DeepSWE 53 % pour 0,40 / 0,80 € · souverain. </a:t>
             </a:r>
             <a:r>
               <a:rPr sz="950" b="0" i="1">
@@ -12495,138 +12539,21 @@
                 </a:solidFill>
                 <a:latin typeface="Marianne"/>
               </a:rPr>
-              <a:t>Perf en retrait.</a:t>
-            </a:r>
-          </a:p>
-        </p:txBody>
-      </p:sp>
-      <p:sp>
-        <p:nvSpPr>
-          <p:cNvPr id="31" name="Rounded Rectangle 30"/>
-          <p:cNvSpPr/>
-          <p:nvPr/>
-        </p:nvSpPr>
-        <p:spPr>
-          <a:xfrm>
-            <a:off x="8960891" y="4681728"/>
-            <a:ext cx="2453563" cy="1298448"/>
-          </a:xfrm>
-          <a:prstGeom prst="roundRect">
-            <a:avLst>
-              <a:gd name="adj" fmla="val 6000"/>
-            </a:avLst>
-          </a:prstGeom>
-          <a:solidFill>
-            <a:srgbClr val="FFFFFF"/>
-          </a:solidFill>
-          <a:ln w="17780">
-            <a:solidFill>
-              <a:srgbClr val="B85C00"/>
-            </a:solidFill>
-          </a:ln>
-          <a:effectLst/>
-        </p:spPr>
-        <p:style>
-          <a:lnRef idx="1">
-            <a:schemeClr val="accent1"/>
-          </a:lnRef>
-          <a:fillRef idx="3">
-            <a:schemeClr val="accent1"/>
-          </a:fillRef>
-          <a:effectRef idx="2">
-            <a:schemeClr val="accent1"/>
-          </a:effectRef>
-          <a:fontRef idx="minor">
-            <a:schemeClr val="lt1"/>
-          </a:fontRef>
-        </p:style>
-        <p:txBody>
-          <a:bodyPr rtlCol="0" anchor="ctr"/>
-          <a:lstStyle/>
-          <a:p>
-            <a:pPr algn="ctr"/>
-          </a:p>
-        </p:txBody>
-      </p:sp>
-      <p:pic>
-        <p:nvPicPr>
-          <p:cNvPr id="32" name="Picture 31" descr="focus-3.png"/>
-          <p:cNvPicPr>
-            <a:picLocks noChangeAspect="1"/>
-          </p:cNvPicPr>
-          <p:nvPr/>
-        </p:nvPicPr>
-        <p:blipFill>
-          <a:blip r:embed="rId8"/>
-          <a:stretch>
-            <a:fillRect/>
-          </a:stretch>
-        </p:blipFill>
-        <p:spPr>
-          <a:xfrm>
-            <a:off x="9162059" y="4846320"/>
-            <a:ext cx="365760" cy="365760"/>
-          </a:xfrm>
-          <a:prstGeom prst="rect">
-            <a:avLst/>
-          </a:prstGeom>
-        </p:spPr>
-      </p:pic>
-      <p:sp>
-        <p:nvSpPr>
-          <p:cNvPr id="33" name="TextBox 32"/>
+              <a:t>Observabilité à valider.</a:t>
+            </a:r>
+          </a:p>
+        </p:txBody>
+      </p:sp>
+      <p:sp>
+        <p:nvSpPr>
+          <p:cNvPr id="31" name="TextBox 30"/>
           <p:cNvSpPr txBox="1"/>
           <p:nvPr/>
         </p:nvSpPr>
         <p:spPr>
           <a:xfrm>
-            <a:off x="9637547" y="4828032"/>
-            <a:ext cx="1630603" cy="457200"/>
-          </a:xfrm>
-          <a:prstGeom prst="rect">
-            <a:avLst/>
-          </a:prstGeom>
-          <a:noFill/>
-        </p:spPr>
-        <p:txBody>
-          <a:bodyPr wrap="square" lIns="0" rIns="0" tIns="0" bIns="0" anchor="ctr">
-            <a:spAutoFit/>
-          </a:bodyPr>
-          <a:lstStyle/>
-          <a:p>
-            <a:pPr algn="l">
-              <a:lnSpc>
-                <a:spcPct val="98000"/>
-              </a:lnSpc>
-              <a:spcBef>
-                <a:spcPts val="0"/>
-              </a:spcBef>
-              <a:spcAft>
-                <a:spcPts val="0"/>
-              </a:spcAft>
-            </a:pPr>
-            <a:r>
-              <a:rPr sz="1100" b="1" i="0">
-                <a:solidFill>
-                  <a:srgbClr val="B85C00"/>
-                </a:solidFill>
-                <a:latin typeface="Marianne"/>
-              </a:rPr>
-              <a:t>Rapport perf / prix</a:t>
-            </a:r>
-          </a:p>
-        </p:txBody>
-      </p:sp>
-      <p:sp>
-        <p:nvSpPr>
-          <p:cNvPr id="34" name="TextBox 33"/>
-          <p:cNvSpPr txBox="1"/>
-          <p:nvPr/>
-        </p:nvSpPr>
-        <p:spPr>
-          <a:xfrm>
-            <a:off x="9162059" y="5321808"/>
-            <a:ext cx="2069515" cy="585215"/>
+            <a:off x="777240" y="6071616"/>
+            <a:ext cx="10637215" cy="457200"/>
           </a:xfrm>
           <a:prstGeom prst="rect">
             <a:avLst/>
@@ -12641,108 +12568,32 @@
           <a:p>
             <a:pPr algn="l">
               <a:lnSpc>
-                <a:spcPct val="100000"/>
-              </a:lnSpc>
-              <a:spcBef>
-                <a:spcPts val="0"/>
-              </a:spcBef>
-              <a:spcAft>
-                <a:spcPts val="0"/>
-              </a:spcAft>
-            </a:pPr>
-            <a:r>
-              <a:rPr sz="1200" b="1" i="0">
-                <a:solidFill>
-                  <a:srgbClr val="161616"/>
-                </a:solidFill>
-                <a:latin typeface="Marianne"/>
-              </a:rPr>
-              <a:t>DeepSeek V4 Pro · OR</a:t>
-            </a:r>
-          </a:p>
-          <a:p>
-            <a:pPr algn="l">
-              <a:lnSpc>
-                <a:spcPct val="106000"/>
-              </a:lnSpc>
-              <a:spcBef>
-                <a:spcPts val="300"/>
-              </a:spcBef>
-              <a:spcAft>
-                <a:spcPts val="0"/>
-              </a:spcAft>
-            </a:pPr>
-            <a:r>
-              <a:rPr sz="950" b="0" i="0">
-                <a:solidFill>
-                  <a:srgbClr val="3A3A3A"/>
-                </a:solidFill>
-                <a:latin typeface="Marianne"/>
-              </a:rPr>
-              <a:t>80,6 % pour ~0,9 $ / 1M. </a:t>
-            </a:r>
-            <a:r>
-              <a:rPr sz="950" b="0" i="1">
+                <a:spcPct val="108000"/>
+              </a:lnSpc>
+              <a:spcBef>
+                <a:spcPts val="0"/>
+              </a:spcBef>
+              <a:spcAft>
+                <a:spcPts val="0"/>
+              </a:spcAft>
+            </a:pPr>
+            <a:r>
+              <a:rPr sz="1000" b="1" i="0">
                 <a:solidFill>
                   <a:srgbClr val="6A6A6A"/>
                 </a:solidFill>
                 <a:latin typeface="Marianne"/>
               </a:rPr>
-              <a:t>Éditeur CN, routeur US.</a:t>
-            </a:r>
-          </a:p>
-        </p:txBody>
-      </p:sp>
-      <p:sp>
-        <p:nvSpPr>
-          <p:cNvPr id="35" name="TextBox 34"/>
-          <p:cNvSpPr txBox="1"/>
-          <p:nvPr/>
-        </p:nvSpPr>
-        <p:spPr>
-          <a:xfrm>
-            <a:off x="777240" y="6071616"/>
-            <a:ext cx="10637215" cy="457200"/>
-          </a:xfrm>
-          <a:prstGeom prst="rect">
-            <a:avLst/>
-          </a:prstGeom>
-          <a:noFill/>
-        </p:spPr>
-        <p:txBody>
-          <a:bodyPr wrap="square" lIns="0" rIns="0" tIns="0" bIns="0" anchor="t">
-            <a:spAutoFit/>
-          </a:bodyPr>
-          <a:lstStyle/>
-          <a:p>
-            <a:pPr algn="l">
-              <a:lnSpc>
-                <a:spcPct val="108000"/>
-              </a:lnSpc>
-              <a:spcBef>
-                <a:spcPts val="0"/>
-              </a:spcBef>
-              <a:spcAft>
-                <a:spcPts val="0"/>
-              </a:spcAft>
-            </a:pPr>
-            <a:r>
-              <a:rPr sz="1000" b="1" i="0">
+              <a:t>À noter : </a:t>
+            </a:r>
+            <a:r>
+              <a:rPr sz="1000" b="0" i="1">
                 <a:solidFill>
                   <a:srgbClr val="6A6A6A"/>
                 </a:solidFill>
                 <a:latin typeface="Marianne"/>
               </a:rPr>
-              <a:t>À noter : </a:t>
-            </a:r>
-            <a:r>
-              <a:rPr sz="1000" b="0" i="1">
-                <a:solidFill>
-                  <a:srgbClr val="6A6A6A"/>
-                </a:solidFill>
-                <a:latin typeface="Marianne"/>
-              </a:rPr>
-              <a:t>OpenCode + Albert documenté par la DINUM (guides.ia.numerique.gouv.fr) · catalogue Albert à confirmer via /v1/models · DeepSeek V4 = tarif preview · Kimi K3 = score annoncé éditeur, capacité OpenRouter limitée · Fable 5 sur Bedrock = data sharing à activer + rétention 30 j · tarifs OpenRouter = catalogue (caching −60/80 %).</a:t>
+              <a:t>OpenCode + Albert documenté par la DINUM (guides.ia.numerique.gouv.fr) · catalogue Albert à confirmer via /v1/models · Scaleway = observabilité à valider · Kimi K3 = capacité OpenRouter limitée · modèles Anthropic sur Bedrock = data sharing à activer + rétention 30 j · tarifs OpenRouter = catalogue (caching −60/80 %).</a:t>
             </a:r>
           </a:p>
         </p:txBody>
